--- a/lectures/behavioral-science-invisible-enemy/行動科学は感染対策の見えない敵を可視化する.pptx
+++ b/lectures/behavioral-science-invisible-enemy/行動科学は感染対策の見えない敵を可視化する.pptx
@@ -7349,7 +7349,7 @@
                 <a:ea typeface="BIZ UDゴシック" pitchFamily="49" charset="-128"/>
                 <a:cs typeface="BIZ UDゴシック" pitchFamily="34" charset="-120"/>
               </a:rPr>
-              <a:t>感染対策講習会</a:t>
+              <a:t>感染対策講習会　2026年10月15日</a:t>
             </a:r>
             <a:endParaRPr lang="en-US" sz="2000" dirty="0"/>
           </a:p>

--- a/lectures/behavioral-science-invisible-enemy/行動科学は感染対策の見えない敵を可視化する.pptx
+++ b/lectures/behavioral-science-invisible-enemy/行動科学は感染対策の見えない敵を可視化する.pptx
@@ -18,6 +18,8 @@
     <p:sldId id="263" r:id="rId9"/>
     <p:sldId id="264" r:id="rId10"/>
     <p:sldId id="265" r:id="rId11"/>
+    <p:sldId id="304" r:id="rId55"/>
+    <p:sldId id="305" r:id="rId56"/>
     <p:sldId id="266" r:id="rId12"/>
     <p:sldId id="267" r:id="rId13"/>
     <p:sldId id="268" r:id="rId14"/>
@@ -36,19 +38,18 @@
     <p:sldId id="282" r:id="rId28"/>
     <p:sldId id="283" r:id="rId29"/>
     <p:sldId id="284" r:id="rId30"/>
-    <p:sldId id="300" r:id="rId51"/>
+    <p:sldId id="306" r:id="rId57"/>
     <p:sldId id="301" r:id="rId52"/>
     <p:sldId id="302" r:id="rId53"/>
     <p:sldId id="303" r:id="rId54"/>
-    <p:sldId id="287" r:id="rId33"/>
+    <p:sldId id="307" r:id="rId58"/>
     <p:sldId id="288" r:id="rId34"/>
     <p:sldId id="289" r:id="rId35"/>
     <p:sldId id="290" r:id="rId36"/>
     <p:sldId id="291" r:id="rId37"/>
     <p:sldId id="299" r:id="rId38"/>
-    <p:sldId id="298" r:id="rId39"/>
     <p:sldId id="292" r:id="rId40"/>
-    <p:sldId id="293" r:id="rId41"/>
+    <p:sldId id="308" r:id="rId59"/>
     <p:sldId id="294" r:id="rId42"/>
     <p:sldId id="295" r:id="rId43"/>
     <p:sldId id="296" r:id="rId44"/>
@@ -639,6 +640,259 @@
 </c:chartSpace>
 </file>
 
+<file path=ppt/charts/chart11.xml><?xml version="1.0" encoding="utf-8"?>
+<c:chartSpace xmlns:c="http://schemas.openxmlformats.org/drawingml/2006/chart" xmlns:a="http://schemas.openxmlformats.org/drawingml/2006/main" xmlns:r="http://schemas.openxmlformats.org/officeDocument/2006/relationships">
+  <c:date1904 val="0"/>
+  <c:roundedCorners val="1"/>
+  <c:chart>
+    <c:autoTitleDeleted val="1"/>
+    <c:plotArea>
+      <c:layout/>
+      <c:barChart>
+        <c:barDir val="col"/>
+        <c:grouping val="clustered"/>
+        <c:varyColors val="0"/>
+        <c:ser>
+          <c:idx val="0"/>
+          <c:order val="0"/>
+          <c:tx>
+            <c:strRef>
+              <c:f>Sheet1!$B$1</c:f>
+              <c:strCache>
+                <c:ptCount val="1"/>
+                <c:pt idx="0">
+                  <c:v>値</c:v>
+                </c:pt>
+              </c:strCache>
+            </c:strRef>
+          </c:tx>
+          <c:spPr>
+            <a:solidFill>
+              <a:srgbClr val="D1480E"/>
+            </a:solidFill>
+            <a:effectLst/>
+          </c:spPr>
+          <c:invertIfNegative val="0"/>
+          <c:dLbls>
+            <c:numFmt formatCode="0&quot;%&quot;" sourceLinked="0"/>
+            <c:txPr>
+              <a:bodyPr/>
+              <a:lstStyle/>
+              <a:p>
+                <a:pPr>
+                  <a:defRPr b="1" i="0" strike="noStrike" sz="2800" u="none">
+                    <a:solidFill>
+                      <a:srgbClr val="1B2333"/>
+                    </a:solidFill>
+                    <a:latin typeface="BIZ UDゴシック"/>
+                    <a:ea typeface="BIZ UDゴシック"/>
+                  </a:defRPr>
+                </a:pPr>
+              </a:p>
+            </c:txPr>
+            <c:showLegendKey val="0"/>
+            <c:showVal val="1"/>
+            <c:showCatName val="0"/>
+            <c:showSerName val="0"/>
+            <c:showPercent val="0"/>
+            <c:showBubbleSize val="0"/>
+            <c:showLeaderLines val="0"/>
+          </c:dLbls>
+          <c:dPt>
+            <c:idx val="0"/>
+            <c:invertIfNegative val="0"/>
+            <c:bubble3D val="0"/>
+            <c:spPr>
+              <a:solidFill>
+                <a:srgbClr val="D1480E"/>
+              </a:solidFill>
+              <a:effectLst/>
+            </c:spPr>
+          </c:dPt>
+          <c:dPt>
+            <c:idx val="1"/>
+            <c:invertIfNegative val="0"/>
+            <c:bubble3D val="0"/>
+            <c:spPr>
+              <a:solidFill>
+                <a:srgbClr val="0B7A70"/>
+              </a:solidFill>
+              <a:effectLst/>
+            </c:spPr>
+          </c:dPt>
+          <c:cat>
+            <c:multiLvlStrRef>
+              <c:f>Sheet1!$A$2:$A$3</c:f>
+              <c:multiLvlStrCache>
+                <c:ptCount val="2"/>
+                <c:lvl>
+                  <c:pt idx="0">
+                    <c:v>患者に触れた後
+（思わず洗う）</c:v>
+                  </c:pt>
+                  <c:pt idx="1">
+                    <c:v>患者に触れる前
+（意識して行う）</c:v>
+                  </c:pt>
+                </c:lvl>
+              </c:multiLvlStrCache>
+            </c:multiLvlStrRef>
+          </c:cat>
+          <c:val>
+            <c:numRef>
+              <c:f>Sheet1!$B$2:$B$3</c:f>
+              <c:numCache>
+                <c:formatCode>General</c:formatCode>
+                <c:ptCount val="2"/>
+                <c:pt idx="0">
+                  <c:v>47</c:v>
+                </c:pt>
+                <c:pt idx="1">
+                  <c:v>21</c:v>
+                </c:pt>
+              </c:numCache>
+            </c:numRef>
+          </c:val>
+        </c:ser>
+        <c:dLbls>
+          <c:numFmt formatCode="0&quot;%&quot;" sourceLinked="0"/>
+          <c:txPr>
+            <a:bodyPr/>
+            <a:lstStyle/>
+            <a:p>
+              <a:pPr>
+                <a:defRPr b="1" i="0" strike="noStrike" sz="2800" u="none">
+                  <a:solidFill>
+                    <a:srgbClr val="1B2333"/>
+                  </a:solidFill>
+                  <a:latin typeface="BIZ UDゴシック"/>
+                  <a:ea typeface="BIZ UDゴシック"/>
+                </a:defRPr>
+              </a:pPr>
+            </a:p>
+          </c:txPr>
+          <c:showLegendKey val="0"/>
+          <c:showVal val="1"/>
+          <c:showCatName val="0"/>
+          <c:showSerName val="0"/>
+          <c:showPercent val="0"/>
+          <c:showBubbleSize val="0"/>
+          <c:showLeaderLines val="0"/>
+        </c:dLbls>
+        <c:gapWidth val="55"/>
+        <c:overlap val="0"/>
+        <c:axId val="2094734554"/>
+        <c:axId val="2094734552"/>
+        <c:axId val="2094734556"/>
+      </c:barChart>
+      <c:catAx>
+        <c:axId val="2094734554"/>
+        <c:scaling>
+          <c:orientation val="minMax"/>
+        </c:scaling>
+        <c:delete val="0"/>
+        <c:axPos val="b"/>
+        <c:numFmt formatCode="General" sourceLinked="1"/>
+        <c:majorTickMark val="out"/>
+        <c:minorTickMark val="none"/>
+        <c:tickLblPos val="low"/>
+        <c:spPr>
+          <a:ln w="12700" cap="flat">
+            <a:solidFill>
+              <a:srgbClr val="888888"/>
+            </a:solidFill>
+            <a:prstDash val="solid"/>
+            <a:round/>
+          </a:ln>
+        </c:spPr>
+        <c:txPr>
+          <a:bodyPr/>
+          <a:lstStyle/>
+          <a:p>
+            <a:pPr>
+              <a:defRPr sz="2000" b="0" i="0" u="none" strike="noStrike">
+                <a:solidFill>
+                  <a:srgbClr val="1B2333"/>
+                </a:solidFill>
+                <a:latin typeface="BIZ UDゴシック"/>
+                <a:ea typeface="BIZ UDゴシック"/>
+              </a:defRPr>
+            </a:pPr>
+            <a:endParaRPr lang="en-US"/>
+          </a:p>
+        </c:txPr>
+        <c:crossAx val="2094734552"/>
+        <c:crosses val="autoZero"/>
+        <c:auto val="1"/>
+        <c:lblAlgn val="ctr"/>
+        <c:noMultiLvlLbl val="1"/>
+      </c:catAx>
+      <c:valAx>
+        <c:axId val="2094734552"/>
+        <c:scaling>
+          <c:orientation val="minMax"/>
+          <c:max val="58"/>
+          <c:min val="0"/>
+        </c:scaling>
+        <c:delete val="1"/>
+        <c:axPos val="l"/>
+        <c:numFmt formatCode="General" sourceLinked="0"/>
+        <c:majorTickMark val="out"/>
+        <c:minorTickMark val="none"/>
+        <c:tickLblPos val="nextTo"/>
+        <c:spPr>
+          <a:ln w="12700" cap="flat">
+            <a:solidFill>
+              <a:srgbClr val="888888"/>
+            </a:solidFill>
+            <a:prstDash val="solid"/>
+            <a:round/>
+          </a:ln>
+        </c:spPr>
+        <c:txPr>
+          <a:bodyPr/>
+          <a:lstStyle/>
+          <a:p>
+            <a:pPr>
+              <a:defRPr sz="2000" b="0" i="0" u="none" strike="noStrike">
+                <a:solidFill>
+                  <a:srgbClr val="000000"/>
+                </a:solidFill>
+                <a:latin typeface="BIZ UDゴシック"/>
+                <a:ea typeface="BIZ UDゴシック"/>
+              </a:defRPr>
+            </a:pPr>
+            <a:endParaRPr lang="en-US"/>
+          </a:p>
+        </c:txPr>
+        <c:crossAx val="2094734554"/>
+        <c:crosses val="autoZero"/>
+        <c:crossBetween val="between"/>
+      </c:valAx>
+      <c:spPr>
+        <a:noFill/>
+        <a:ln>
+          <a:noFill/>
+        </a:ln>
+        <a:effectLst/>
+      </c:spPr>
+    </c:plotArea>
+    <c:plotVisOnly val="1"/>
+    <c:dispBlanksAs val="span"/>
+  </c:chart>
+  <c:spPr>
+    <a:noFill/>
+    <a:ln>
+      <a:noFill/>
+    </a:ln>
+    <a:effectLst/>
+  </c:spPr>
+  <c:externalData r:id="rId1">
+    <c:autoUpdate val="0"/>
+  </c:externalData>
+</c:chartSpace>
+</file>
+
 <file path=ppt/charts/chart2.xml><?xml version="1.0" encoding="utf-8"?>
 <c:chartSpace xmlns:c="http://schemas.openxmlformats.org/drawingml/2006/chart" xmlns:a="http://schemas.openxmlformats.org/drawingml/2006/main" xmlns:r="http://schemas.openxmlformats.org/officeDocument/2006/relationships" xmlns:c16r2="http://schemas.microsoft.com/office/drawing/2015/06/chart">
   <c:date1904 val="0"/>
@@ -2464,7 +2718,7 @@
           <a:p>
             <a:r>
               <a:rPr lang="en-US" dirty="0"/>
-              <a:t>【目安1分／12:20–13:20】
+              <a:t>【目安1分／14:35–15:35】
 ここで見方を変えてみましょう。これまで私たちは、守られない理由を「意識が低い」「やる気がない」と、人の問題として捉えがちでした。
 行動科学では、人の周りに働いている「見えない力」に目を向けます。思い込み、疲れ、周囲の空気、動線。これらは本人の努力だけでは変えにくいものです。
 人を責める前に、仕組みを疑う。これが行動科学の基本姿勢です。</a:t>
@@ -2554,7 +2808,7 @@
           <a:p>
             <a:r>
               <a:rPr lang="en-US" dirty="0"/>
-              <a:t>【目安40秒／13:20–14:00】
+              <a:t>【目安40秒／15:35–16:15】
 第2部では、5つの「見えない敵」を順番に可視化していきます。①思い込み、②見られている効果、③疲れ、④周囲の空気、⑤環境と動線です。</a:t>
             </a:r>
           </a:p>
@@ -2642,7 +2896,7 @@
           <a:p>
             <a:r>
               <a:rPr lang="en-US" dirty="0"/>
-              <a:t>【目安1分30秒／14:00–15:30】
+              <a:t>【目安1分30秒／16:15–17:45】
 一つ目の敵は「思い込み」です。
 71名の医療者を合計132時間観察し、1,284回の手指衛生の機会を調べた研究では、観察された遵守率は非常に低く、しかも実際の行動は、本人の「やるつもり」や「やっている」という自己申告とは関連しませんでした。MRSA保菌者のケアでさえ、リスクに応じた行動がとれていなかったと報告されています。
 つまり、アンケートや自己評価では、行動の実態は見えないのです。意識調査で「できている」と答えた部署ほど、実際の観察データを返すことが大切になります。
@@ -2733,7 +2987,7 @@
           <a:p>
             <a:r>
               <a:rPr lang="en-US" dirty="0"/>
-              <a:t>【目安2分／15:30–17:30】
+              <a:t>【目安2分／17:45–19:45】
 思い込みのもう一つの形が、「自分は大丈夫」という過信です。
 病院で行われた2つのフィールド実験で、手指消毒剤の近くに2種類の掲示をしました。「手指衛生で、あなたが病気になるのを防げます」と、「手指衛生で、患者さんが病気になるのを防げます」。違いは主語の1語だけです。
 結果、「あなた」の掲示では変化がなく、「患者さん」の掲示では、消毒剤の使用量も、覆面での観察による手指衛生も有意に増えました。医療者は日頃から病原体に触れているため「自分は感染しない」と過信しやすく、自分を守るメッセージは響きにくいのです。
@@ -2825,7 +3079,7 @@
           <a:p>
             <a:r>
               <a:rPr lang="en-US" dirty="0"/>
-              <a:t>【目安1分30秒／17:30–19:00】
+              <a:t>【目安1分30秒／19:45–21:15】
 二つ目の敵は「見られている効果」、いわゆるホーソン効果です。
 カナダの大学病院で、電子システムを使って8か月間、全ての手指衛生を記録しました。すると、監査者が見える廊下の消毒剤では1時間あたり3.75回、同じ時間の監査者が見えない場所では1.48回、同じ場所の前の週は1.07回でした。監査者が見えると約3倍になり、しかも病室内では変化がありませんでした。
 私たちが監査で測っている遵守率は、実際より高く見えている可能性があるということです。
@@ -2916,7 +3170,7 @@
           <a:p>
             <a:r>
               <a:rPr lang="en-US" dirty="0"/>
-              <a:t>【目安1分30秒／19:00–20:30】
+              <a:t>【目安1分30秒／21:15–22:45】
 では、どう測ればよいのでしょうか。答えは、物差しを組み合わせることです。
 直接観察はタイミングや手技がわかりますが、見られている効果が出ます。手指消毒剤の使用量は、全体の傾向を客観的に追えますが、どのタイミングで使ったかはわかりません。電子モニタリングは24時間の実態に迫れますが、導入にコストがかかります。
 医師の手指衛生を調べた研究でも、「観察されている」という意識が遵守と関連していました。一つの数字を信じ込まず、複数の物差しで行動の「素顔」に近づきましょう。
@@ -3007,7 +3261,7 @@
           <a:p>
             <a:r>
               <a:rPr lang="en-US" dirty="0"/>
-              <a:t>【目安1分30秒／20:30–22:00】
+              <a:t>【目安1分30秒／22:45–24:15】
 三つ目の敵は「疲れ」です。
 米国35病院、4,157人の医療者、約1,370万回の手指衛生機会を分析した研究では、12時間勤務の始めから終わりまでに、遵守率が平均8.7ポイント低下しました。業務が立て込むほど低下は大きく、逆に勤務と勤務の間の休息が長いと、次の勤務で遵守率が回復していました。
 ルールを守る力は、時間とともにすり減る「資源」なのです。
@@ -3098,7 +3352,7 @@
           <a:p>
             <a:r>
               <a:rPr lang="en-US" dirty="0"/>
-              <a:t>【目安1分30秒／22:00–23:30】
+              <a:t>【目安1分30秒／24:15–25:45】
 ジュネーブの研究でも、ケアが立て込み、1時間あたりの手指衛生の機会が41回を超えるような場面では、20回以下の場面に比べて、手指衛生をしないオッズが約2倍になっていました。
 忙しさを「気合い」で乗り切ることはできません。手の届く場所に消毒剤を置いて探す手間をなくす、忙しい時間帯や勤務の後半に合図を出す、休憩を確保する、判断を助けるオーダーセットを用意する。意志ではなく、仕組みで守りましょう。
 （出典：Pittet D, et al. Ann Intern Med 1999;130:126-30）</a:t>
@@ -3279,7 +3533,7 @@
           <a:p>
             <a:r>
               <a:rPr lang="en-US" dirty="0"/>
-              <a:t>【目安1分30秒／23:30–25:00】
+              <a:t>【目安1分30秒／25:45–27:15】
 四つ目の敵は「周囲の空気」です。
 ある研究では、同じ部屋にいる上級の医療者や同僚が手指衛生をしないと、自分も手指衛生をしにくくなっていました。オッズ比は0.2、つまり手指衛生をする見込みが大きく下がるということです。
 逆に、ICUでセンサーを使って約4万8千回の機会を調べた研究では、一人のときの遵守率は20.9%、周りに他の職員がいるときは27.9%に上がっていました。
@@ -3371,7 +3625,7 @@
           <a:p>
             <a:r>
               <a:rPr lang="en-US" dirty="0"/>
-              <a:t>【目安1分30秒／25:00–26:30】
+              <a:t>【目安1分30秒／27:15–28:45】
 この「空気」をつくるのはリーダーです。医師163名を観察した研究では、遵守率は平均57%で、「自分は同僚の手本になっている」という意識が遵守と関連していました。観察されているという意識や、手指消毒剤へのアクセスのしやすさも関連していました。
 明日からの一手はシンプルです。回診やラウンドの先頭に立つ人が、最初に、みんなに見えるように手指衛生をする。新人や研修医は、上の人の背中を見て学んでいます。
 （出典：Pittet D, et al. Ann Intern Med 2004;141:1-8）</a:t>
@@ -3461,7 +3715,7 @@
           <a:p>
             <a:r>
               <a:rPr lang="en-US" dirty="0"/>
-              <a:t>【目安1分30秒／26:30–28:00】
+              <a:t>【目安1分30秒／28:45–30:15】
 五つ目の敵は「環境と動線」です。
 先ほどの研究では、手洗いシンクを増やした新しい病院に移ったところ、遵守率は53%から23%に下がっていました。設備を増やすだけでは行動は変わらなかったのです。
 一方、ジュネーブの研究では、ベッドサイドにアルコール手指消毒剤を置いたことが遵守率向上に大きく寄与しました。コクランレビューでも、使用する場所の近くに置くことで遵守率が改善する可能性が、中等度の確実性で示されています。
@@ -3553,7 +3807,7 @@
           <a:p>
             <a:r>
               <a:rPr lang="en-US" dirty="0"/>
-              <a:t>【目安20秒／28:00–28:20】
+              <a:t>【目安20秒／30:15–30:35】
 第3部では、これらの見えない敵を「見える化」する方法を、診断する・見せる・返す、の3つの視点でご紹介します。</a:t>
             </a:r>
           </a:p>
@@ -3641,7 +3895,7 @@
           <a:p>
             <a:r>
               <a:rPr lang="en-US" dirty="0"/>
-              <a:t>【目安1分40秒／28:20–30:00】
+              <a:t>【目安1分40秒／30:35–32:15】
 まず「診断する」ための道具が、COM-B（コム・ビー）モデルです。英国のMichieらが、既存の19の行動変容の枠組みを整理して提唱しました。
 行動が起こるには、能力（Capability）、機会（Opportunity）、動機（Motivation）の3つがそろう必要があります。能力には身体的・心理的、機会には物理的・社会的、動機には内省的・自動的という、それぞれ2つの側面があります。
 「なぜできないのか」を、この3つの箱に分けて考えるだけで、原因が見えやすくなります。
@@ -3732,7 +3986,7 @@
           <a:p>
             <a:r>
               <a:rPr lang="en-US" dirty="0"/>
-              <a:t>【目安1分30秒／30:00–31:30】
+              <a:t>【目安1分30秒／32:15–33:45】
 今日の5つの敵をCOM-Bに当てはめてみます。
 思い込みは内省的な動機、疲れは心理的な能力、周囲の空気は社会的な機会、環境と動線は物理的な機会の問題です。見られている効果は、行動そのものではなく、私たちの「測定」をゆがめる敵です。
 箱が決まれば、打ち手も決まります。動機の問題に消毒剤の置き場所を変えても効きにくく、機会の問題に研修を重ねても効きにくい。原因の箱と打ち手の方向を合わせることが大切です。</a:t>
@@ -3822,7 +4076,7 @@
           <a:p>
             <a:r>
               <a:rPr lang="en-US" dirty="0"/>
-              <a:t>【目安1分30秒／31:30–33:00】
+              <a:t>【目安1分30秒／33:45–35:15】
 ここから「見せる」です。そもそも汚染は目に見えません。
 MRSA保菌者40名の病室で調べた研究では、患者さんの皮膚に触れた後に手にMRSAが付着した割合は40%、ベッド柵やテーブルなど環境表面に触れた後は45%で、ほぼ同じでした。
 患者さんに直接触れない職種、たとえばリハビリ、放射線、検査、清掃のスタッフも、環境に触れたら手指衛生が必要です。WHOの「手指衛生の5つのタイミング」の5番目、患者周囲の環境に触れた後ですね。
@@ -3913,7 +4167,7 @@
           <a:p>
             <a:r>
               <a:rPr lang="en-US" dirty="0"/>
-              <a:t>【目安1分30秒／33:00–34:30】
+              <a:t>【目安1分30秒／35:15–36:45】
 見えない汚染を「その場で見せる」と、行動は変わります。
 4病院で435回の防護具の脱衣シミュレーションを行ったところ、蛍光ローションによる皮膚や衣服の汚染が46%で起きていました。手袋を外すときの方が、ガウンより多く汚染していました。
 そこで、蛍光ローションで汚染をその場で見せながら練習する教育を行うと、汚染は60%から18.9%に減り、1か月後、3か月後も12%に保たれていました。
@@ -4005,7 +4259,7 @@
           <a:p>
             <a:r>
               <a:rPr lang="en-US" dirty="0"/>
-              <a:t>【目安1分30秒／34:30–36:00】
+              <a:t>【目安1分30秒／36:45–38:15】
 清掃も同じです。米国36病院で、約2万か所の高頻度接触面を蛍光マーカーで評価したところ、退院後の清掃で拭かれていた表面は48%にとどまりました。
 蛍光マーカーの結果を清掃スタッフに繰り返しフィードバックし、手順を見直した結果、77%まで改善しました。
 清掃スタッフが悪いのではなく、「拭き残しが見えない」ことが敵だったのです。
@@ -4096,7 +4350,7 @@
           <a:p>
             <a:r>
               <a:rPr lang="en-US" dirty="0"/>
-              <a:t>【目安1分30秒／36:00–37:30】
+              <a:t>【目安1分30秒／38:15–39:45】
 次は「数字で返す」です。英国で1,581の診療所を対象に行われたランダム化比較試験です。
 抗菌薬処方が地域の上位20%に入る診療所の医師に、イングランドの主席医務官から「あなたの診療所の処方は、地域の80%の診療所より多い」という手紙を1通送りました。
 その結果、6か月間の処方は3.3%減り、推計で約7万3千件の処方が減りました。低コストで全国規模の効果です。
@@ -4231,97 +4485,6 @@
 </p:notes>
 </file>
 
-<file path=ppt/notesSlides/notesSlide32.xml><?xml version="1.0" encoding="utf-8"?>
-<p:notes xmlns:a="http://schemas.openxmlformats.org/drawingml/2006/main" xmlns:r="http://schemas.openxmlformats.org/officeDocument/2006/relationships" xmlns:p="http://schemas.openxmlformats.org/presentationml/2006/main">
-  <p:cSld>
-    <p:spTree>
-      <p:nvGrpSpPr>
-        <p:cNvPr id="1" name=""/>
-        <p:cNvGrpSpPr/>
-        <p:nvPr/>
-      </p:nvGrpSpPr>
-      <p:grpSpPr>
-        <a:xfrm>
-          <a:off x="0" y="0"/>
-          <a:ext cx="0" cy="0"/>
-          <a:chOff x="0" y="0"/>
-          <a:chExt cx="0" cy="0"/>
-        </a:xfrm>
-      </p:grpSpPr>
-      <p:sp>
-        <p:nvSpPr>
-          <p:cNvPr id="2" name="Slide Image Placeholder 1"/>
-          <p:cNvSpPr>
-            <a:spLocks noGrp="1" noRot="1" noChangeAspect="1"/>
-          </p:cNvSpPr>
-          <p:nvPr>
-            <p:ph type="sldImg"/>
-          </p:nvPr>
-        </p:nvSpPr>
-        <p:spPr/>
-      </p:sp>
-      <p:sp>
-        <p:nvSpPr>
-          <p:cNvPr id="3" name="Notes Placeholder 2"/>
-          <p:cNvSpPr>
-            <a:spLocks noGrp="1"/>
-          </p:cNvSpPr>
-          <p:nvPr>
-            <p:ph type="body" idx="1"/>
-          </p:nvPr>
-        </p:nvSpPr>
-        <p:spPr/>
-        <p:txBody>
-          <a:bodyPr/>
-          <a:lstStyle/>
-          <a:p>
-            <a:r>
-              <a:rPr lang="en-US" dirty="0"/>
-              <a:t>【目安1分30秒／41:30–43:00】
-ここで当院の実践をご紹介します。3つのナッジに取り組みました。
-一つ目は、病室の入口で名札を見たら、矢印で手指消毒に誘導する表示。二つ目は、救急外来で防護具の着用手順を番号で示し、最初の番号を手指消毒にしたこと。三つ目は、手指消毒剤を1本使い切るごとにシールを貼り、使用本数の多い順に並べて、個人の使用量を見える化したことです。
-そして、うまくいった方法やツールは、実施部署から全部署に共有しました。
-（※実際の掲示物の写真をこのスライドに追加すると、より伝わりやすくなります）</a:t>
-            </a:r>
-          </a:p>
-        </p:txBody>
-      </p:sp>
-      <p:sp>
-        <p:nvSpPr>
-          <p:cNvPr id="4" name="Slide Number Placeholder 3"/>
-          <p:cNvSpPr>
-            <a:spLocks noGrp="1"/>
-          </p:cNvSpPr>
-          <p:nvPr>
-            <p:ph type="sldNum" sz="quarter" idx="10"/>
-          </p:nvPr>
-        </p:nvSpPr>
-        <p:spPr/>
-        <p:txBody>
-          <a:bodyPr/>
-          <a:lstStyle/>
-          <a:p>
-            <a:fld id="{F7021451-1387-4CA6-816F-3879F97B5CBC}" type="slidenum">
-              <a:rPr lang="en-US"/>
-              <a:t>32</a:t>
-            </a:fld>
-            <a:endParaRPr lang="en-US"/>
-          </a:p>
-        </p:txBody>
-      </p:sp>
-    </p:spTree>
-    <p:extLst>
-      <p:ext uri="{BB962C8B-B14F-4D97-AF65-F5344CB8AC3E}">
-        <p14:creationId xmlns:p14="http://schemas.microsoft.com/office/powerpoint/2010/main" val="1024086991"/>
-      </p:ext>
-    </p:extLst>
-  </p:cSld>
-  <p:clrMapOvr>
-    <a:masterClrMapping/>
-  </p:clrMapOvr>
-</p:notes>
-</file>
-
 <file path=ppt/notesSlides/notesSlide33.xml><?xml version="1.0" encoding="utf-8"?>
 <p:notes xmlns:a="http://schemas.openxmlformats.org/drawingml/2006/main" xmlns:r="http://schemas.openxmlformats.org/officeDocument/2006/relationships" xmlns:p="http://schemas.openxmlformats.org/presentationml/2006/main">
   <p:cSld>
@@ -4368,7 +4531,7 @@
           <a:p>
             <a:r>
               <a:rPr lang="en-US" dirty="0"/>
-              <a:t>【目安1分30秒／43:00–44:30】
+              <a:t>【目安1分30秒／45:15–46:45】
 結果です。病院全体の手指消毒剤の使用量は、2018年度の1000患者日あたり12.6Lから、2024年度は26.3Lへ、約2.1倍に増えました。全13部署で統計学的に有意な増加でした。なお、コロナ禍の影響が大きい2020〜2023年度は比較から除いています。
 一方で、直接観察による遵守率には大きな伸びは見られていません。ただ、コロナ禍を経ても低下せずに維持できています。
 単年度の前後比較であり、使用量イコール遵守率ではない、という限界もあります。だからこそ、先ほどお話しした「複数の物差し」で見ていくことが大切だと考えています。看護師以外の職種へのアプローチが今後の課題です。</a:t>
@@ -4458,7 +4621,7 @@
           <a:p>
             <a:r>
               <a:rPr lang="en-US" dirty="0"/>
-              <a:t>【目安20秒／44:30–44:50】
+              <a:t>【目安20秒／46:45–47:05】
 第4部では、明日から「仕掛ける」ための具体的な手順をお伝えします。</a:t>
             </a:r>
           </a:p>
@@ -4546,7 +4709,7 @@
           <a:p>
             <a:r>
               <a:rPr lang="en-US" dirty="0"/>
-              <a:t>【目安1分20秒／44:50–46:10】
+              <a:t>【目安1分20秒／47:05–48:25】
 見える化は4つのステップで進めます。
 ①絞る：「手指衛生を頑張る」ではなく、「誰が、いつ、どこで、何をするか」を1つに絞ります。②診断する：COM-Bで、能力・機会・動機のどこに原因があるかを探します。③仕掛ける：次にご紹介するEASTの視点で、環境や伝え方を変えます。④返す：測った結果を、現場に見える形で返します。
 大きな計画より、小さく始めて回すことが成功のコツです。</a:t>
@@ -4636,7 +4799,7 @@
           <a:p>
             <a:r>
               <a:rPr lang="en-US" dirty="0"/>
-              <a:t>【目安1分30秒／46:10–47:40】
+              <a:t>【目安1分30秒／48:25–49:55】
 仕掛けを考えるときのチェックリストが、英国の行動インサイトチームが提唱するEASTです。
 Easy、簡単に：消毒剤を動線上や手の届くところに置く、手順を番号にする。Attractive、魅力的に：「患者さんを守る」を主語にする、目を引く表示にする。Social、社会的に：部署の実施状況を共有する、リーダーが率先する。Timely、タイミングよく：入室の直前や、手袋を外した直後に合図を出す。
 今日ご紹介した研究の多くは、この4つのどれかに当てはまります。
@@ -4768,93 +4931,6 @@
 </p:notes>
 </file>
 
-<file path=ppt/notesSlides/notesSlide38.xml><?xml version="1.0" encoding="utf-8"?>
-<p:notes xmlns:a="http://schemas.openxmlformats.org/drawingml/2006/main" xmlns:r="http://schemas.openxmlformats.org/officeDocument/2006/relationships" xmlns:p="http://schemas.openxmlformats.org/presentationml/2006/main">
-  <p:cSld>
-    <p:spTree>
-      <p:nvGrpSpPr>
-        <p:cNvPr id="1" name=""/>
-        <p:cNvGrpSpPr/>
-        <p:nvPr/>
-      </p:nvGrpSpPr>
-      <p:grpSpPr>
-        <a:xfrm>
-          <a:off x="0" y="0"/>
-          <a:ext cx="0" cy="0"/>
-          <a:chOff x="0" y="0"/>
-          <a:chExt cx="0" cy="0"/>
-        </a:xfrm>
-      </p:grpSpPr>
-      <p:sp>
-        <p:nvSpPr>
-          <p:cNvPr id="2" name="Slide Image Placeholder 1"/>
-          <p:cNvSpPr>
-            <a:spLocks noGrp="1" noRot="1" noChangeAspect="1"/>
-          </p:cNvSpPr>
-          <p:nvPr>
-            <p:ph type="sldImg"/>
-          </p:nvPr>
-        </p:nvSpPr>
-        <p:spPr/>
-      </p:sp>
-      <p:sp>
-        <p:nvSpPr>
-          <p:cNvPr id="3" name="Notes Placeholder 2"/>
-          <p:cNvSpPr>
-            <a:spLocks noGrp="1"/>
-          </p:cNvSpPr>
-          <p:nvPr>
-            <p:ph type="body" idx="1"/>
-          </p:nvPr>
-        </p:nvSpPr>
-        <p:spPr/>
-        <p:txBody>
-          <a:bodyPr/>
-          <a:lstStyle/>
-          <a:p>
-            <a:r>
-              <a:rPr lang="en-US" dirty="0"/>
-              <a:t>【0:55】当院の実践例をEASTで分類。 ・足あと：消毒剤の存在を目立たせ（顕著性）、動線上に誘導。救急外来を訪れる患者家族の入室時の手指消毒実施頻度が上昇しました。 ・氏名表示＋2プッシュ：患者確認という「毎回必ずする動作」をIfにしたIf-Then型の表示。 ・宣言：スタッフが患者さんに向けて公言することで、一貫性を保とうとする心理（コミットメント）と「患者さんのため」という目的を同時に働かせます。 効果は各部署の使用量・遵守率で確認していきましょう。</a:t>
-            </a:r>
-          </a:p>
-        </p:txBody>
-      </p:sp>
-      <p:sp>
-        <p:nvSpPr>
-          <p:cNvPr id="4" name="Slide Number Placeholder 3"/>
-          <p:cNvSpPr>
-            <a:spLocks noGrp="1"/>
-          </p:cNvSpPr>
-          <p:nvPr>
-            <p:ph type="sldNum" sz="quarter" idx="10"/>
-          </p:nvPr>
-        </p:nvSpPr>
-        <p:spPr/>
-        <p:txBody>
-          <a:bodyPr/>
-          <a:lstStyle/>
-          <a:p>
-            <a:fld id="{F7021451-1387-4CA6-816F-3879F97B5CBC}" type="slidenum">
-              <a:rPr lang="en-US"/>
-              <a:t>38</a:t>
-            </a:fld>
-            <a:endParaRPr lang="en-US"/>
-          </a:p>
-        </p:txBody>
-      </p:sp>
-    </p:spTree>
-    <p:extLst>
-      <p:ext uri="{BB962C8B-B14F-4D97-AF65-F5344CB8AC3E}">
-        <p14:creationId xmlns:p14="http://schemas.microsoft.com/office/powerpoint/2010/main" val="1024086991"/>
-      </p:ext>
-    </p:extLst>
-  </p:cSld>
-  <p:clrMapOvr>
-    <a:masterClrMapping/>
-  </p:clrMapOvr>
-</p:notes>
-</file>
-
 <file path=ppt/notesSlides/notesSlide39.xml><?xml version="1.0" encoding="utf-8"?>
 <p:notes xmlns:a="http://schemas.openxmlformats.org/drawingml/2006/main" xmlns:r="http://schemas.openxmlformats.org/officeDocument/2006/relationships" xmlns:p="http://schemas.openxmlformats.org/presentationml/2006/main">
   <p:cSld>
@@ -4901,7 +4977,7 @@
           <a:p>
             <a:r>
               <a:rPr lang="en-US" dirty="0"/>
-              <a:t>【目安1分50秒／49:40–51:30】
+              <a:t>【目安1分50秒／50:55–52:45】
 「見えない敵」は職種によって姿を変えます。
 医師は自分の処方の多さが見えにくいため、先ほどの手紙のような同僚比較のフィードバックが有効です。看護師は繁忙時の「触れる前」のスキップに、動線上の消毒剤と合図を。薬剤師は処方の偏りを、抗菌薬の使用データとして部署に返すことができます。臨床検査技師は、耐性菌の検出状況を部署別に見える化できます。リハビリや放射線は、機器や環境に触れた後の手指衛生。清掃や看護補助は、蛍光マーカーによるフィードバック。事務・管理者は、物品の配置や使用量を定期的に共有する。
 どの職種にも、見える化の担い手としての役割があります。
@@ -5037,97 +5113,6 @@
 </p:notes>
 </file>
 
-<file path=ppt/notesSlides/notesSlide40.xml><?xml version="1.0" encoding="utf-8"?>
-<p:notes xmlns:a="http://schemas.openxmlformats.org/drawingml/2006/main" xmlns:r="http://schemas.openxmlformats.org/officeDocument/2006/relationships" xmlns:p="http://schemas.openxmlformats.org/presentationml/2006/main">
-  <p:cSld>
-    <p:spTree>
-      <p:nvGrpSpPr>
-        <p:cNvPr id="1" name=""/>
-        <p:cNvGrpSpPr/>
-        <p:nvPr/>
-      </p:nvGrpSpPr>
-      <p:grpSpPr>
-        <a:xfrm>
-          <a:off x="0" y="0"/>
-          <a:ext cx="0" cy="0"/>
-          <a:chOff x="0" y="0"/>
-          <a:chExt cx="0" cy="0"/>
-        </a:xfrm>
-      </p:grpSpPr>
-      <p:sp>
-        <p:nvSpPr>
-          <p:cNvPr id="2" name="Slide Image Placeholder 1"/>
-          <p:cNvSpPr>
-            <a:spLocks noGrp="1" noRot="1" noChangeAspect="1"/>
-          </p:cNvSpPr>
-          <p:nvPr>
-            <p:ph type="sldImg"/>
-          </p:nvPr>
-        </p:nvSpPr>
-        <p:spPr/>
-      </p:sp>
-      <p:sp>
-        <p:nvSpPr>
-          <p:cNvPr id="3" name="Notes Placeholder 2"/>
-          <p:cNvSpPr>
-            <a:spLocks noGrp="1"/>
-          </p:cNvSpPr>
-          <p:nvPr>
-            <p:ph type="body" idx="1"/>
-          </p:nvPr>
-        </p:nvSpPr>
-        <p:spPr/>
-        <p:txBody>
-          <a:bodyPr/>
-          <a:lstStyle/>
-          <a:p>
-            <a:r>
-              <a:rPr lang="en-US" dirty="0"/>
-              <a:t>【目安1分30秒／51:30–53:00】
-組織として仕掛けた有名な例が、米国ミシガン州のICUプロジェクトです。103のICUで、カテーテル関連血流感染が最大66%減り、平均で1000カテーテル日あたり7.7件から1.4件に減少しました。
-この成功は「チェックリストの効果」と語られがちですが、後の社会学的な分析では、ICU同士の仲間のネットワークが規範をつくったこと、感染を「防げる問題」と捉え直したこと、感染率のデータを共有して行動の力にしたこと、現場を巻き込んで文化をつくったことが鍵だったとされています。
-道具の裏にある「見えない社会の力」こそが、行動を変えるのです。
-（出典：Pronovost P, et al. N Engl J Med 2006;355:2725-32／Dixon-Woods M, et al. Milbank Q 2011;89:167-205）</a:t>
-            </a:r>
-          </a:p>
-        </p:txBody>
-      </p:sp>
-      <p:sp>
-        <p:nvSpPr>
-          <p:cNvPr id="4" name="Slide Number Placeholder 3"/>
-          <p:cNvSpPr>
-            <a:spLocks noGrp="1"/>
-          </p:cNvSpPr>
-          <p:nvPr>
-            <p:ph type="sldNum" sz="quarter" idx="10"/>
-          </p:nvPr>
-        </p:nvSpPr>
-        <p:spPr/>
-        <p:txBody>
-          <a:bodyPr/>
-          <a:lstStyle/>
-          <a:p>
-            <a:fld id="{F7021451-1387-4CA6-816F-3879F97B5CBC}" type="slidenum">
-              <a:rPr lang="en-US"/>
-              <a:t>40</a:t>
-            </a:fld>
-            <a:endParaRPr lang="en-US"/>
-          </a:p>
-        </p:txBody>
-      </p:sp>
-    </p:spTree>
-    <p:extLst>
-      <p:ext uri="{BB962C8B-B14F-4D97-AF65-F5344CB8AC3E}">
-        <p14:creationId xmlns:p14="http://schemas.microsoft.com/office/powerpoint/2010/main" val="1024086991"/>
-      </p:ext>
-    </p:extLst>
-  </p:cSld>
-  <p:clrMapOvr>
-    <a:masterClrMapping/>
-  </p:clrMapOvr>
-</p:notes>
-</file>
-
 <file path=ppt/notesSlides/notesSlide41.xml><?xml version="1.0" encoding="utf-8"?>
 <p:notes xmlns:a="http://schemas.openxmlformats.org/drawingml/2006/main" xmlns:r="http://schemas.openxmlformats.org/officeDocument/2006/relationships" xmlns:p="http://schemas.openxmlformats.org/presentationml/2006/main">
   <p:cSld>
@@ -5174,7 +5159,7 @@
           <a:p>
             <a:r>
               <a:rPr lang="en-US" dirty="0"/>
-              <a:t>【目安1分／53:00–54:00】
+              <a:t>【目安1分／54:15–55:15】
 最後に、科学的に誠実であるために。手指衛生の介入を検証したコクランレビューでは、消毒剤を使用場所の近くに置くことは中等度の確実性で改善が期待できる一方、フィードバック、教育、掲示や香りなどのきっかけ、多角的な介入の多くは、効果が示唆されるものの確実性は低い、とされています。
 WHOの多角的戦略も、システムの変更、教育、モニタリングとフィードバック、職場でのリマインダー、安全文化を組み合わせることを求めています。
 ナッジは万能薬ではありません。組み合わせて、測って、直す。この繰り返しが大切です。
@@ -5265,7 +5250,7 @@
           <a:p>
             <a:r>
               <a:rPr lang="en-US" dirty="0"/>
-              <a:t>【目安2分／54:00–56:00】
+              <a:t>【目安2分／55:15–57:15】
 では1分間、考えてみてください。お手元の紙にメモしていただいても構いません。
 ①あなたの職場で変えたい行動を1つ、誰が・いつ・どこで・何をするかまで絞ってください。②その行動を邪魔している見えない敵は、5つのうちどれでしょうか。③明日できる一手は何でしょうか。見せる、返す、仕掛ける、のどれでも構いません。
 （1分後）
@@ -5356,7 +5341,7 @@
           <a:p>
             <a:r>
               <a:rPr lang="en-US" dirty="0"/>
-              <a:t>【目安1分／56:00–57:00】
+              <a:t>【目安1分／57:15–58:15】
 まとめです。
 一つ、行動の原因は目に見えません。人を責める前に、仕組みを疑いましょう。
 二つ、行動科学、特にCOM-Bを使えば、見えない敵を診断できます。
@@ -5447,7 +5432,7 @@
           <a:p>
             <a:r>
               <a:rPr lang="en-US" dirty="0"/>
-              <a:t>【目安30秒／57:00–57:30】
+              <a:t>【目安30秒／58:15–58:45】
 見えない敵は、「人の中」ではなく「仕組みの中」にいます。
 明日、ひとつだけ、仕掛けてみませんか。</a:t>
             </a:r>
@@ -5472,99 +5457,6 @@
             <a:fld id="{F7021451-1387-4CA6-816F-3879F97B5CBC}" type="slidenum">
               <a:rPr lang="en-US"/>
               <a:t>44</a:t>
-            </a:fld>
-            <a:endParaRPr lang="en-US"/>
-          </a:p>
-        </p:txBody>
-      </p:sp>
-    </p:spTree>
-    <p:extLst>
-      <p:ext uri="{BB962C8B-B14F-4D97-AF65-F5344CB8AC3E}">
-        <p14:creationId xmlns:p14="http://schemas.microsoft.com/office/powerpoint/2010/main" val="1024086991"/>
-      </p:ext>
-    </p:extLst>
-  </p:cSld>
-  <p:clrMapOvr>
-    <a:masterClrMapping/>
-  </p:clrMapOvr>
-</p:notes>
-</file>
-
-<file path=ppt/notesSlides/notesSlide45.xml><?xml version="1.0" encoding="utf-8"?>
-<p:notes xmlns:a="http://schemas.openxmlformats.org/drawingml/2006/main" xmlns:r="http://schemas.openxmlformats.org/officeDocument/2006/relationships" xmlns:p="http://schemas.openxmlformats.org/presentationml/2006/main">
-  <p:cSld>
-    <p:spTree>
-      <p:nvGrpSpPr>
-        <p:cNvPr id="1" name=""/>
-        <p:cNvGrpSpPr/>
-        <p:nvPr/>
-      </p:nvGrpSpPr>
-      <p:grpSpPr>
-        <a:xfrm>
-          <a:off x="0" y="0"/>
-          <a:ext cx="0" cy="0"/>
-          <a:chOff x="0" y="0"/>
-          <a:chExt cx="0" cy="0"/>
-        </a:xfrm>
-      </p:grpSpPr>
-      <p:sp>
-        <p:nvSpPr>
-          <p:cNvPr id="2" name="Slide Image Placeholder 1"/>
-          <p:cNvSpPr>
-            <a:spLocks noGrp="1" noRot="1" noChangeAspect="1"/>
-          </p:cNvSpPr>
-          <p:nvPr>
-            <p:ph type="sldImg"/>
-          </p:nvPr>
-        </p:nvSpPr>
-        <p:spPr/>
-      </p:sp>
-      <p:sp>
-        <p:nvSpPr>
-          <p:cNvPr id="3" name="Notes Placeholder 2"/>
-          <p:cNvSpPr>
-            <a:spLocks noGrp="1"/>
-          </p:cNvSpPr>
-          <p:nvPr>
-            <p:ph type="body" idx="1"/>
-          </p:nvPr>
-        </p:nvSpPr>
-        <p:spPr/>
-        <p:txBody>
-          <a:bodyPr/>
-          <a:lstStyle/>
-          <a:p>
-            <a:r>
-              <a:rPr lang="en-US" dirty="0"/>
-              <a:t>【目安1分／37:30–38:30】
-ここで、今日のキーワード「ナッジ」を確認しておきます。
-ナッジは英語で「ひじで軽くつつく」という意味です。行動経済学者のセイラーとサンスティーンが広めた考え方で、禁止や強制をしたり、お金で釣ったりせずに、選ぶ自由は残したまま、望ましい行動を「選びやすく」する工夫のことです。
-実は皆さんの身の回りにもあります。レジ前の足あとマークがあると、言われなくても間隔をあけて並びます。「一番人気」と書いてあると、ついそれを選びます。最初からチェックが入っている欄は、そのままにしがちです。
-先ほどの「1通の手紙」も、周りと比べた自分の位置を見せるナッジでした。
-（出典：Thaler RH, Sunstein CR. Nudge: Improving Decisions about Health, Wealth, and Happiness. Yale University Press; 2008）</a:t>
-            </a:r>
-            <a:endParaRPr lang="en-US" dirty="0"/>
-          </a:p>
-        </p:txBody>
-      </p:sp>
-      <p:sp>
-        <p:nvSpPr>
-          <p:cNvPr id="4" name="Slide Number Placeholder 3"/>
-          <p:cNvSpPr>
-            <a:spLocks noGrp="1"/>
-          </p:cNvSpPr>
-          <p:nvPr>
-            <p:ph type="sldNum" sz="quarter" idx="10"/>
-          </p:nvPr>
-        </p:nvSpPr>
-        <p:spPr/>
-        <p:txBody>
-          <a:bodyPr/>
-          <a:lstStyle/>
-          <a:p>
-            <a:fld id="{F7021451-1387-4CA6-816F-3879F97B5CBC}" type="slidenum">
-              <a:rPr lang="en-US"/>
-              <a:t>1</a:t>
             </a:fld>
             <a:endParaRPr lang="en-US"/>
           </a:p>
@@ -5629,7 +5521,7 @@
           <a:p>
             <a:r>
               <a:rPr lang="en-US" dirty="0"/>
-              <a:t>【目安1分／38:30–39:30】
+              <a:t>【目安1分／40:45–41:45】
 人の行動を変える道具を、大きく4つに分けてみます。
 1つ目はルール。「必ずこうする」という義務や禁止です。2つ目はお金。ごほうびや罰金です。3つ目は教育。知識を伝える研修やマニュアルです。そして4つ目がナッジ。選択肢や環境の「見せ方・置き方」を設計して、自然に選びやすくします。
 例えば手指衛生なら、手順を決めるのがルール、研修をするのが教育、入口の動線上に消毒剤を置いたり、足あとで誘導したりするのがナッジです。
@@ -5722,7 +5614,7 @@
           <a:p>
             <a:r>
               <a:rPr lang="en-US" dirty="0"/>
-              <a:t>【目安1分／39:30–40:30】
+              <a:t>【目安1分／41:45–42:45】
 ナッジの中でも特に強力なのが「初期設定（デフォルト）」です。
 臓器提供の意思をたずねるオンライン実験で、「提供したい人がチェックを入れる」聞き方では、同意した人は約42%でした。ところが「提供したくない人がチェックを外す」、つまり最初から同意が選ばれている聞き方では、約82%に上がりました。選ぶ自由はどちらも同じです。変えたのは「最初の設定」だけです。
 国別に見ても、同意が初期設定になっている国では、実際の同意率が90%を超える国が多く見られました。
@@ -5815,7 +5707,7 @@
           <a:p>
             <a:r>
               <a:rPr lang="en-US" dirty="0"/>
-              <a:t>【目安1分／40:30–41:30】
+              <a:t>【目安1分／42:45–43:45】
 このデフォルトは、感染対策でも使えます。
 米国の大学職員478名を対象にしたランダム化比較試験で、インフルエンザワクチンの案内を2通り送りました。「接種したい人は自分で予約してください」という案内では接種率33%。一方、「あなたの接種日時はすでに予約されています。都合が悪ければ変更・取消できます」という案内では45%でした。予約を取り消したのは8%だけでした。
 新型コロナワクチンでも、9万人以上を対象にした試験で、「あなたのためのワクチンが用意されています」と伝えるショートメッセージが、接種率を3.57ポイント押し上げました。
@@ -5844,6 +5736,99 @@
             <a:fld id="{F7021451-1387-4CA6-816F-3879F97B5CBC}" type="slidenum">
               <a:rPr lang="en-US"/>
               <a:t>4</a:t>
+            </a:fld>
+            <a:endParaRPr lang="en-US"/>
+          </a:p>
+        </p:txBody>
+      </p:sp>
+    </p:spTree>
+    <p:extLst>
+      <p:ext uri="{BB962C8B-B14F-4D97-AF65-F5344CB8AC3E}">
+        <p14:creationId xmlns:p14="http://schemas.microsoft.com/office/powerpoint/2010/main" val="1024086991"/>
+      </p:ext>
+    </p:extLst>
+  </p:cSld>
+  <p:clrMapOvr>
+    <a:masterClrMapping/>
+  </p:clrMapOvr>
+</p:notes>
+</file>
+
+<file path=ppt/notesSlides/notesSlide49.xml><?xml version="1.0" encoding="utf-8"?>
+<p:notes xmlns:a="http://schemas.openxmlformats.org/drawingml/2006/main" xmlns:r="http://schemas.openxmlformats.org/officeDocument/2006/relationships" xmlns:p="http://schemas.openxmlformats.org/presentationml/2006/main">
+  <p:cSld>
+    <p:spTree>
+      <p:nvGrpSpPr>
+        <p:cNvPr id="1" name=""/>
+        <p:cNvGrpSpPr/>
+        <p:nvPr/>
+      </p:nvGrpSpPr>
+      <p:grpSpPr>
+        <a:xfrm>
+          <a:off x="0" y="0"/>
+          <a:ext cx="0" cy="0"/>
+          <a:chOff x="0" y="0"/>
+          <a:chExt cx="0" cy="0"/>
+        </a:xfrm>
+      </p:grpSpPr>
+      <p:sp>
+        <p:nvSpPr>
+          <p:cNvPr id="2" name="Slide Image Placeholder 1"/>
+          <p:cNvSpPr>
+            <a:spLocks noGrp="1" noRot="1" noChangeAspect="1"/>
+          </p:cNvSpPr>
+          <p:nvPr>
+            <p:ph type="sldImg"/>
+          </p:nvPr>
+        </p:nvSpPr>
+        <p:spPr/>
+      </p:sp>
+      <p:sp>
+        <p:nvSpPr>
+          <p:cNvPr id="3" name="Notes Placeholder 2"/>
+          <p:cNvSpPr>
+            <a:spLocks noGrp="1"/>
+          </p:cNvSpPr>
+          <p:nvPr>
+            <p:ph type="body" idx="1"/>
+          </p:nvPr>
+        </p:nvSpPr>
+        <p:spPr/>
+        <p:txBody>
+          <a:bodyPr/>
+          <a:lstStyle/>
+          <a:p>
+            <a:r>
+              <a:rPr lang="en-US" dirty="0"/>
+              <a:t>【目安1分15秒／12:20–13:35】
+ここで、なぜ「わかっているのに、できない」のかを、頭の働きから考えてみます。
+まずクイズです。バットとボールで合わせて1,100円。バットはボールより1,000円高い。ボールはいくらでしょう？……とっさに「100円」と浮かんだ方が多いと思います。でも、それだとバットは1,100円で、合計は1,200円になってしまいます。正解は50円です。
+ノーベル経済学賞を受賞した心理学者カーネマンは、人の思考を2つに分けて説明しました。システム1は「速い思考」。自動的・直感的で、努力がいらず、慣れた手順や忙しいときの判断を担います。システム2は「遅い思考」。意識的・論理的ですが、エネルギーを使い、疲れると働きにくくなります。
+私たちの毎日の行動の多くは、速い思考で動いています。
+（出典：Kahneman D. Am Psychol 2003;58:697-720／Frederick S. J Econ Perspect 2005;19:25-42。クイズは原典の米ドルを円に置き換えています）</a:t>
+            </a:r>
+            <a:endParaRPr lang="en-US" dirty="0"/>
+          </a:p>
+        </p:txBody>
+      </p:sp>
+      <p:sp>
+        <p:nvSpPr>
+          <p:cNvPr id="4" name="Slide Number Placeholder 3"/>
+          <p:cNvSpPr>
+            <a:spLocks noGrp="1"/>
+          </p:cNvSpPr>
+          <p:nvPr>
+            <p:ph type="sldNum" sz="quarter" idx="10"/>
+          </p:nvPr>
+        </p:nvSpPr>
+        <p:spPr/>
+        <p:txBody>
+          <a:bodyPr/>
+          <a:lstStyle/>
+          <a:p>
+            <a:fld id="{F7021451-1387-4CA6-816F-3879F97B5CBC}" type="slidenum">
+              <a:rPr lang="en-US"/>
+              <a:t>1</a:t>
             </a:fld>
             <a:endParaRPr lang="en-US"/>
           </a:p>
@@ -5913,6 +5898,381 @@
 行動科学も同じです。理論とデータで行動の原因を見えるようにし、仕組みや環境を設計して対処します。
 つまり行動科学は、行動を見るための「顕微鏡」だと考えていただくとわかりやすいと思います。</a:t>
             </a:r>
+          </a:p>
+        </p:txBody>
+      </p:sp>
+      <p:sp>
+        <p:nvSpPr>
+          <p:cNvPr id="4" name="Slide Number Placeholder 3"/>
+          <p:cNvSpPr>
+            <a:spLocks noGrp="1"/>
+          </p:cNvSpPr>
+          <p:nvPr>
+            <p:ph type="sldNum" sz="quarter" idx="10"/>
+          </p:nvPr>
+        </p:nvSpPr>
+        <p:spPr/>
+        <p:txBody>
+          <a:bodyPr/>
+          <a:lstStyle/>
+          <a:p>
+            <a:fld id="{F7021451-1387-4CA6-816F-3879F97B5CBC}" type="slidenum">
+              <a:rPr lang="en-US"/>
+              <a:t>5</a:t>
+            </a:fld>
+            <a:endParaRPr lang="en-US"/>
+          </a:p>
+        </p:txBody>
+      </p:sp>
+    </p:spTree>
+    <p:extLst>
+      <p:ext uri="{BB962C8B-B14F-4D97-AF65-F5344CB8AC3E}">
+        <p14:creationId xmlns:p14="http://schemas.microsoft.com/office/powerpoint/2010/main" val="1024086991"/>
+      </p:ext>
+    </p:extLst>
+  </p:cSld>
+  <p:clrMapOvr>
+    <a:masterClrMapping/>
+  </p:clrMapOvr>
+</p:notes>
+</file>
+
+<file path=ppt/notesSlides/notesSlide50.xml><?xml version="1.0" encoding="utf-8"?>
+<p:notes xmlns:a="http://schemas.openxmlformats.org/drawingml/2006/main" xmlns:r="http://schemas.openxmlformats.org/officeDocument/2006/relationships" xmlns:p="http://schemas.openxmlformats.org/presentationml/2006/main">
+  <p:cSld>
+    <p:spTree>
+      <p:nvGrpSpPr>
+        <p:cNvPr id="1" name=""/>
+        <p:cNvGrpSpPr/>
+        <p:nvPr/>
+      </p:nvGrpSpPr>
+      <p:grpSpPr>
+        <a:xfrm>
+          <a:off x="0" y="0"/>
+          <a:ext cx="0" cy="0"/>
+          <a:chOff x="0" y="0"/>
+          <a:chExt cx="0" cy="0"/>
+        </a:xfrm>
+      </p:grpSpPr>
+      <p:sp>
+        <p:nvSpPr>
+          <p:cNvPr id="2" name="Slide Image Placeholder 1"/>
+          <p:cNvSpPr>
+            <a:spLocks noGrp="1" noRot="1" noChangeAspect="1"/>
+          </p:cNvSpPr>
+          <p:nvPr>
+            <p:ph type="sldImg"/>
+          </p:nvPr>
+        </p:nvSpPr>
+        <p:spPr/>
+      </p:sp>
+      <p:sp>
+        <p:nvSpPr>
+          <p:cNvPr id="3" name="Notes Placeholder 2"/>
+          <p:cNvSpPr>
+            <a:spLocks noGrp="1"/>
+          </p:cNvSpPr>
+          <p:nvPr>
+            <p:ph type="body" idx="1"/>
+          </p:nvPr>
+        </p:nvSpPr>
+        <p:spPr/>
+        <p:txBody>
+          <a:bodyPr/>
+          <a:lstStyle/>
+          <a:p>
+            <a:r>
+              <a:rPr lang="en-US" dirty="0"/>
+              <a:t>【目安1分／13:35–14:35】
+感染対策に当てはめてみます。
+看護師754名を対象にした研究では、手洗いには2種類あると整理されました。汚れを感じたときや体液に触れた後に「思わず洗う」手洗いと、患者さんの健康な皮膚に触れる前のように、意識して「選んで行う」手洗いです。そして、どちらの手洗いも、子どもの頃から身についた家庭や地域での手洗いの習慣に最も強く影響されていました。
+先ほどの遵守率のデータでも、患者さんに触れた後の遵守率は47%、触れる前は21%でした。「汚れた」と感じる場面では速い思考で手が動きますが、「触れる前」は遅い思考で意識しないとできないと考えると、この差が理解しやすくなります。
+研修で知識を伝えることは、遅い思考に届きます。でも、忙しい現場で行動を動かしているのは速い思考です。だから、環境の側から速い思考に働きかける工夫が必要になります。それが、後半でご紹介する「ナッジ」です。
+（出典：Whitby M, et al. Infect Control Hosp Epidemiol 2006;27:484-92／Erasmus V, et al. Infect Control Hosp Epidemiol 2010;31:283-94。2つの手洗いを速い思考・遅い思考に対応させる説明は講演者による解釈です）</a:t>
+            </a:r>
+            <a:endParaRPr lang="en-US" dirty="0"/>
+          </a:p>
+        </p:txBody>
+      </p:sp>
+      <p:sp>
+        <p:nvSpPr>
+          <p:cNvPr id="4" name="Slide Number Placeholder 3"/>
+          <p:cNvSpPr>
+            <a:spLocks noGrp="1"/>
+          </p:cNvSpPr>
+          <p:nvPr>
+            <p:ph type="sldNum" sz="quarter" idx="10"/>
+          </p:nvPr>
+        </p:nvSpPr>
+        <p:spPr/>
+        <p:txBody>
+          <a:bodyPr/>
+          <a:lstStyle/>
+          <a:p>
+            <a:fld id="{F7021451-1387-4CA6-816F-3879F97B5CBC}" type="slidenum">
+              <a:rPr lang="en-US"/>
+              <a:t>2</a:t>
+            </a:fld>
+            <a:endParaRPr lang="en-US"/>
+          </a:p>
+        </p:txBody>
+      </p:sp>
+    </p:spTree>
+    <p:extLst>
+      <p:ext uri="{BB962C8B-B14F-4D97-AF65-F5344CB8AC3E}">
+        <p14:creationId xmlns:p14="http://schemas.microsoft.com/office/powerpoint/2010/main" val="1024086991"/>
+      </p:ext>
+    </p:extLst>
+  </p:cSld>
+  <p:clrMapOvr>
+    <a:masterClrMapping/>
+  </p:clrMapOvr>
+</p:notes>
+</file>
+
+<file path=ppt/notesSlides/notesSlide51.xml><?xml version="1.0" encoding="utf-8"?>
+<p:notes xmlns:a="http://schemas.openxmlformats.org/drawingml/2006/main" xmlns:r="http://schemas.openxmlformats.org/officeDocument/2006/relationships" xmlns:p="http://schemas.openxmlformats.org/presentationml/2006/main">
+  <p:cSld>
+    <p:spTree>
+      <p:nvGrpSpPr>
+        <p:cNvPr id="1" name=""/>
+        <p:cNvGrpSpPr/>
+        <p:nvPr/>
+      </p:nvGrpSpPr>
+      <p:grpSpPr>
+        <a:xfrm>
+          <a:off x="0" y="0"/>
+          <a:ext cx="0" cy="0"/>
+          <a:chOff x="0" y="0"/>
+          <a:chExt cx="0" cy="0"/>
+        </a:xfrm>
+      </p:grpSpPr>
+      <p:sp>
+        <p:nvSpPr>
+          <p:cNvPr id="2" name="Slide Image Placeholder 1"/>
+          <p:cNvSpPr>
+            <a:spLocks noGrp="1" noRot="1" noChangeAspect="1"/>
+          </p:cNvSpPr>
+          <p:nvPr>
+            <p:ph type="sldImg"/>
+          </p:nvPr>
+        </p:nvSpPr>
+        <p:spPr/>
+      </p:sp>
+      <p:sp>
+        <p:nvSpPr>
+          <p:cNvPr id="3" name="Notes Placeholder 2"/>
+          <p:cNvSpPr>
+            <a:spLocks noGrp="1"/>
+          </p:cNvSpPr>
+          <p:nvPr>
+            <p:ph type="body" idx="1"/>
+          </p:nvPr>
+        </p:nvSpPr>
+        <p:spPr/>
+        <p:txBody>
+          <a:bodyPr/>
+          <a:lstStyle/>
+          <a:p>
+            <a:r>
+              <a:rPr lang="en-US" dirty="0"/>
+              <a:t>【目安1分／39:45–40:45】
+ここで、今日のキーワード「ナッジ」を確認しておきます。
+ナッジは英語で「ひじで軽くつつく」という意味です。行動経済学者のセイラーとサンスティーンが広めた考え方で、禁止や強制をしたり、お金で釣ったりせずに、選ぶ自由は残したまま、望ましい行動を「選びやすく」する工夫のことです。
+実は皆さんの身の回りにもあります。レジ前の足あとマークがあると、言われなくても間隔をあけて並びます。「一番人気」と書いてあると、ついそれを選びます。最初からチェックが入っている欄は、そのままにしがちです。
+先ほどの「1通の手紙」も、周りと比べた自分の位置を見せるナッジでした。
+第1部でお話しした「速い思考（システム1）」は、理屈より目の前の環境に反応します。ナッジは、その速い思考に働きかけて、考えなくても望ましい行動を選べるようにする方法です。
+（出典：Thaler RH, Sunstein CR. Nudge: Improving Decisions about Health, Wealth, and Happiness. Yale University Press; 2008）</a:t>
+            </a:r>
+            <a:endParaRPr lang="en-US" dirty="0"/>
+          </a:p>
+        </p:txBody>
+      </p:sp>
+      <p:sp>
+        <p:nvSpPr>
+          <p:cNvPr id="4" name="Slide Number Placeholder 3"/>
+          <p:cNvSpPr>
+            <a:spLocks noGrp="1"/>
+          </p:cNvSpPr>
+          <p:nvPr>
+            <p:ph type="sldNum" sz="quarter" idx="10"/>
+          </p:nvPr>
+        </p:nvSpPr>
+        <p:spPr/>
+        <p:txBody>
+          <a:bodyPr/>
+          <a:lstStyle/>
+          <a:p>
+            <a:fld id="{F7021451-1387-4CA6-816F-3879F97B5CBC}" type="slidenum">
+              <a:rPr lang="en-US"/>
+              <a:t>3</a:t>
+            </a:fld>
+            <a:endParaRPr lang="en-US"/>
+          </a:p>
+        </p:txBody>
+      </p:sp>
+    </p:spTree>
+    <p:extLst>
+      <p:ext uri="{BB962C8B-B14F-4D97-AF65-F5344CB8AC3E}">
+        <p14:creationId xmlns:p14="http://schemas.microsoft.com/office/powerpoint/2010/main" val="1024086991"/>
+      </p:ext>
+    </p:extLst>
+  </p:cSld>
+  <p:clrMapOvr>
+    <a:masterClrMapping/>
+  </p:clrMapOvr>
+</p:notes>
+</file>
+
+<file path=ppt/notesSlides/notesSlide52.xml><?xml version="1.0" encoding="utf-8"?>
+<p:notes xmlns:a="http://schemas.openxmlformats.org/drawingml/2006/main" xmlns:r="http://schemas.openxmlformats.org/officeDocument/2006/relationships" xmlns:p="http://schemas.openxmlformats.org/presentationml/2006/main">
+  <p:cSld>
+    <p:spTree>
+      <p:nvGrpSpPr>
+        <p:cNvPr id="1" name=""/>
+        <p:cNvGrpSpPr/>
+        <p:nvPr/>
+      </p:nvGrpSpPr>
+      <p:grpSpPr>
+        <a:xfrm>
+          <a:off x="0" y="0"/>
+          <a:ext cx="0" cy="0"/>
+          <a:chOff x="0" y="0"/>
+          <a:chExt cx="0" cy="0"/>
+        </a:xfrm>
+      </p:grpSpPr>
+      <p:sp>
+        <p:nvSpPr>
+          <p:cNvPr id="2" name="Slide Image Placeholder 1"/>
+          <p:cNvSpPr>
+            <a:spLocks noGrp="1" noRot="1" noChangeAspect="1"/>
+          </p:cNvSpPr>
+          <p:nvPr>
+            <p:ph type="sldImg"/>
+          </p:nvPr>
+        </p:nvSpPr>
+        <p:spPr/>
+      </p:sp>
+      <p:sp>
+        <p:nvSpPr>
+          <p:cNvPr id="3" name="Notes Placeholder 2"/>
+          <p:cNvSpPr>
+            <a:spLocks noGrp="1"/>
+          </p:cNvSpPr>
+          <p:nvPr>
+            <p:ph type="body" idx="1"/>
+          </p:nvPr>
+        </p:nvSpPr>
+        <p:spPr/>
+        <p:txBody>
+          <a:bodyPr/>
+          <a:lstStyle/>
+          <a:p>
+            <a:r>
+              <a:rPr lang="en-US" dirty="0"/>
+              <a:t>【目安1分30秒／43:45–45:15】
+ここで当院の実践をご紹介します。写真の3つは、いずれも「考えなくても手が動く」ことをねらったナッジです。
+一つ目は救急外来の入口です。床の足あとで手指消毒剤のスタンドへ誘導し、目立たせました。患者さんのご家族が入室時に手指消毒をする頻度が増えました。
+二つ目は病室の名札の下の表示です。「①氏名を確認したら、②手指消毒を2プッシュ」と、毎回必ず行う氏名確認を合図にして、次の行動を具体的に示しています。
+三つ目は病室前の宣言です。「患者さんを感染から守るため手指消毒をします」とスタッフが公言することで、言ったことを守ろうとする心理と、「患者さんのため」という目的を同時に働かせます。
+このほか、救急外来で防護具の着用手順を番号で示したことや、手指消毒剤を1本使い切るごとにシールを貼って個人の使用量を見える化したことにも取り組みました。うまくいった方法やツールは、実施部署から全部署に共有しています。
+（出典：鈴木徳洋, 他. 日本外科感染症学会（ポスター発表））</a:t>
+            </a:r>
+            <a:endParaRPr lang="en-US" dirty="0"/>
+          </a:p>
+        </p:txBody>
+      </p:sp>
+      <p:sp>
+        <p:nvSpPr>
+          <p:cNvPr id="4" name="Slide Number Placeholder 3"/>
+          <p:cNvSpPr>
+            <a:spLocks noGrp="1"/>
+          </p:cNvSpPr>
+          <p:nvPr>
+            <p:ph type="sldNum" sz="quarter" idx="10"/>
+          </p:nvPr>
+        </p:nvSpPr>
+        <p:spPr/>
+        <p:txBody>
+          <a:bodyPr/>
+          <a:lstStyle/>
+          <a:p>
+            <a:fld id="{F7021451-1387-4CA6-816F-3879F97B5CBC}" type="slidenum">
+              <a:rPr lang="en-US"/>
+              <a:t>4</a:t>
+            </a:fld>
+            <a:endParaRPr lang="en-US"/>
+          </a:p>
+        </p:txBody>
+      </p:sp>
+    </p:spTree>
+    <p:extLst>
+      <p:ext uri="{BB962C8B-B14F-4D97-AF65-F5344CB8AC3E}">
+        <p14:creationId xmlns:p14="http://schemas.microsoft.com/office/powerpoint/2010/main" val="1024086991"/>
+      </p:ext>
+    </p:extLst>
+  </p:cSld>
+  <p:clrMapOvr>
+    <a:masterClrMapping/>
+  </p:clrMapOvr>
+</p:notes>
+</file>
+
+<file path=ppt/notesSlides/notesSlide53.xml><?xml version="1.0" encoding="utf-8"?>
+<p:notes xmlns:a="http://schemas.openxmlformats.org/drawingml/2006/main" xmlns:r="http://schemas.openxmlformats.org/officeDocument/2006/relationships" xmlns:p="http://schemas.openxmlformats.org/presentationml/2006/main">
+  <p:cSld>
+    <p:spTree>
+      <p:nvGrpSpPr>
+        <p:cNvPr id="1" name=""/>
+        <p:cNvGrpSpPr/>
+        <p:nvPr/>
+      </p:nvGrpSpPr>
+      <p:grpSpPr>
+        <a:xfrm>
+          <a:off x="0" y="0"/>
+          <a:ext cx="0" cy="0"/>
+          <a:chOff x="0" y="0"/>
+          <a:chExt cx="0" cy="0"/>
+        </a:xfrm>
+      </p:grpSpPr>
+      <p:sp>
+        <p:nvSpPr>
+          <p:cNvPr id="2" name="Slide Image Placeholder 1"/>
+          <p:cNvSpPr>
+            <a:spLocks noGrp="1" noRot="1" noChangeAspect="1"/>
+          </p:cNvSpPr>
+          <p:nvPr>
+            <p:ph type="sldImg"/>
+          </p:nvPr>
+        </p:nvSpPr>
+        <p:spPr/>
+      </p:sp>
+      <p:sp>
+        <p:nvSpPr>
+          <p:cNvPr id="3" name="Notes Placeholder 2"/>
+          <p:cNvSpPr>
+            <a:spLocks noGrp="1"/>
+          </p:cNvSpPr>
+          <p:nvPr>
+            <p:ph type="body" idx="1"/>
+          </p:nvPr>
+        </p:nvSpPr>
+        <p:spPr/>
+        <p:txBody>
+          <a:bodyPr/>
+          <a:lstStyle/>
+          <a:p>
+            <a:r>
+              <a:rPr lang="en-US" dirty="0"/>
+              <a:t>【目安1分30秒／52:45–54:15】
+組織として仕掛けた有名な例が、米国ミシガン州のICUプロジェクトです。
+やったことは、中心静脈カテーテルの感染を防ぐ、エビデンスのある5つの対策です。手指衛生、挿入時のマキシマル・バリアプリコーション、クロルヘキシジンによる皮膚消毒、できるだけ大腿部を避けること、不要なカテーテルを抜くこと。これを物品カートとチェックリストで支え、守られていなければ緊急時を除いて手技を止めることにしました。
+その結果、103のICUで、カテーテル関連血流感染は1000カテーテル日あたり平均7.7件から1.4件へ、最大66%減りました。
+5つの対策自体は、以前から知られていたものです。では、なぜここまで成功したのか。後の社会学的な分析では、ICU同士が横につながり、「みんなやっている」ことが規範になったこと、感染を「仕方ないもの」から「防げるもの」と捉え直したこと、感染率を測って共有し、互いに比べられるようにしたこと、そして手順を守らなければ止めるという、ゆずれない仕組みを持ったことが鍵だったとされています。
+道具の裏にある「見えない社会の力」こそが、行動を変えるのです。
+（出典：Pronovost P, et al. N Engl J Med 2006;355:2725-32／Dixon-Woods M, et al. Milbank Q 2011;89:167-205）</a:t>
+            </a:r>
+            <a:endParaRPr lang="en-US" dirty="0"/>
           </a:p>
         </p:txBody>
       </p:sp>
@@ -20971,817 +21331,6 @@
 </p:sld>
 </file>
 
-<file path=ppt/slides/slide32.xml><?xml version="1.0" encoding="utf-8"?>
-<p:sld xmlns:a="http://schemas.openxmlformats.org/drawingml/2006/main" xmlns:r="http://schemas.openxmlformats.org/officeDocument/2006/relationships" xmlns:p="http://schemas.openxmlformats.org/presentationml/2006/main">
-  <p:cSld name="Slide 32">
-    <p:bg>
-      <p:bgPr>
-        <a:solidFill>
-          <a:schemeClr val="bg1"/>
-        </a:solidFill>
-        <a:effectLst/>
-      </p:bgPr>
-    </p:bg>
-    <p:spTree>
-      <p:nvGrpSpPr>
-        <p:cNvPr id="1" name=""/>
-        <p:cNvGrpSpPr/>
-        <p:nvPr/>
-      </p:nvGrpSpPr>
-      <p:grpSpPr>
-        <a:xfrm>
-          <a:off x="0" y="0"/>
-          <a:ext cx="0" cy="0"/>
-          <a:chOff x="0" y="0"/>
-          <a:chExt cx="0" cy="0"/>
-        </a:xfrm>
-      </p:grpSpPr>
-      <p:sp>
-        <p:nvSpPr>
-          <p:cNvPr id="2" name="Shape 0"/>
-          <p:cNvSpPr/>
-          <p:nvPr/>
-        </p:nvSpPr>
-        <p:spPr>
-          <a:xfrm>
-            <a:off x="548640" y="347472"/>
-            <a:ext cx="3124200" cy="420624"/>
-          </a:xfrm>
-          <a:prstGeom prst="roundRect">
-            <a:avLst>
-              <a:gd name="adj" fmla="val 50000"/>
-            </a:avLst>
-          </a:prstGeom>
-          <a:solidFill>
-            <a:srgbClr val="0B7A70"/>
-          </a:solidFill>
-          <a:ln w="12700">
-            <a:solidFill>
-              <a:srgbClr val="0B7A70"/>
-            </a:solidFill>
-            <a:prstDash val="solid"/>
-          </a:ln>
-        </p:spPr>
-      </p:sp>
-      <p:sp>
-        <p:nvSpPr>
-          <p:cNvPr id="3" name="Text 1"/>
-          <p:cNvSpPr txBox="1"/>
-          <p:nvPr/>
-        </p:nvSpPr>
-        <p:spPr>
-          <a:xfrm>
-            <a:off x="548640" y="347472"/>
-            <a:ext cx="3124200" cy="420624"/>
-          </a:xfrm>
-          <a:prstGeom prst="rect">
-            <a:avLst/>
-          </a:prstGeom>
-          <a:noFill/>
-          <a:ln/>
-        </p:spPr>
-        <p:txBody>
-          <a:bodyPr wrap="square" lIns="0" tIns="0" rIns="0" bIns="0" rtlCol="0" anchor="ctr"/>
-          <a:lstStyle/>
-          <a:p>
-            <a:pPr marL="0" indent="0" algn="ctr">
-              <a:buNone/>
-            </a:pPr>
-            <a:r>
-              <a:rPr lang="en-US" sz="2000" b="1" dirty="0">
-                <a:solidFill>
-                  <a:srgbClr val="FFFFFF"/>
-                </a:solidFill>
-                <a:latin typeface="BIZ UDゴシック" pitchFamily="34" charset="0"/>
-                <a:ea typeface="BIZ UDゴシック" pitchFamily="49" charset="-128"/>
-                <a:cs typeface="BIZ UDゴシック" pitchFamily="34" charset="-120"/>
-              </a:rPr>
-              <a:t>見える化③ 当院の実践</a:t>
-            </a:r>
-            <a:endParaRPr lang="en-US" sz="2000" dirty="0"/>
-          </a:p>
-        </p:txBody>
-      </p:sp>
-      <p:sp>
-        <p:nvSpPr>
-          <p:cNvPr id="4" name="Text 2"/>
-          <p:cNvSpPr txBox="1"/>
-          <p:nvPr/>
-        </p:nvSpPr>
-        <p:spPr>
-          <a:xfrm>
-            <a:off x="548640" y="868680"/>
-            <a:ext cx="11094415" cy="777240"/>
-          </a:xfrm>
-          <a:prstGeom prst="rect">
-            <a:avLst/>
-          </a:prstGeom>
-          <a:noFill/>
-          <a:ln/>
-        </p:spPr>
-        <p:txBody>
-          <a:bodyPr wrap="square" lIns="0" tIns="0" rIns="0" bIns="0" rtlCol="0" anchor="ctr"/>
-          <a:lstStyle/>
-          <a:p>
-            <a:pPr marL="0" indent="0">
-              <a:buNone/>
-            </a:pPr>
-            <a:r>
-              <a:rPr lang="en-US" sz="3200" b="1" dirty="0">
-                <a:solidFill>
-                  <a:srgbClr val="131B35"/>
-                </a:solidFill>
-                <a:latin typeface="BIZ UDゴシック" pitchFamily="34" charset="0"/>
-                <a:ea typeface="BIZ UDゴシック" pitchFamily="49" charset="-128"/>
-                <a:cs typeface="BIZ UDゴシック" pitchFamily="34" charset="-120"/>
-              </a:rPr>
-              <a:t>当院の実践：行動を「見える化」する3つのナッジ</a:t>
-            </a:r>
-            <a:endParaRPr lang="en-US" sz="3200" dirty="0"/>
-          </a:p>
-        </p:txBody>
-      </p:sp>
-      <p:sp>
-        <p:nvSpPr>
-          <p:cNvPr id="5" name="Text 3"/>
-          <p:cNvSpPr txBox="1"/>
-          <p:nvPr/>
-        </p:nvSpPr>
-        <p:spPr>
-          <a:xfrm>
-            <a:off x="548640" y="6217920"/>
-            <a:ext cx="10058400" cy="384048"/>
-          </a:xfrm>
-          <a:prstGeom prst="rect">
-            <a:avLst/>
-          </a:prstGeom>
-          <a:noFill/>
-          <a:ln/>
-        </p:spPr>
-        <p:txBody>
-          <a:bodyPr wrap="square" lIns="0" tIns="0" rIns="0" bIns="0" rtlCol="0" anchor="ctr"/>
-          <a:lstStyle/>
-          <a:p>
-            <a:pPr marL="0" indent="0">
-              <a:buNone/>
-            </a:pPr>
-            <a:r>
-              <a:rPr lang="en-US" sz="2000" dirty="0">
-                <a:solidFill>
-                  <a:srgbClr val="4F5B6B"/>
-                </a:solidFill>
-                <a:latin typeface="BIZ UDゴシック" pitchFamily="34" charset="0"/>
-                <a:ea typeface="BIZ UDゴシック" pitchFamily="49" charset="-128"/>
-                <a:cs typeface="BIZ UDゴシック" pitchFamily="34" charset="-120"/>
-              </a:rPr>
-              <a:t>出典：鈴木徳洋, 他. 日本外科感染症学会（ポスター発表）</a:t>
-            </a:r>
-            <a:endParaRPr lang="en-US" sz="2000" dirty="0"/>
-          </a:p>
-        </p:txBody>
-      </p:sp>
-      <p:sp>
-        <p:nvSpPr>
-          <p:cNvPr id="7" name="Shape 4"/>
-          <p:cNvSpPr/>
-          <p:nvPr/>
-        </p:nvSpPr>
-        <p:spPr>
-          <a:xfrm>
-            <a:off x="548640" y="1965960"/>
-            <a:ext cx="3474720" cy="3383280"/>
-          </a:xfrm>
-          <a:prstGeom prst="roundRect">
-            <a:avLst>
-              <a:gd name="adj" fmla="val 3243"/>
-            </a:avLst>
-          </a:prstGeom>
-          <a:solidFill>
-            <a:srgbClr val="EEF2F7"/>
-          </a:solidFill>
-          <a:ln w="12700">
-            <a:solidFill>
-              <a:srgbClr val="EEF2F7"/>
-            </a:solidFill>
-            <a:prstDash val="solid"/>
-          </a:ln>
-        </p:spPr>
-      </p:sp>
-      <p:sp>
-        <p:nvSpPr>
-          <p:cNvPr id="8" name="Shape 5"/>
-          <p:cNvSpPr/>
-          <p:nvPr/>
-        </p:nvSpPr>
-        <p:spPr>
-          <a:xfrm>
-            <a:off x="1828800" y="2194560"/>
-            <a:ext cx="914400" cy="914400"/>
-          </a:xfrm>
-          <a:prstGeom prst="ellipse">
-            <a:avLst/>
-          </a:prstGeom>
-          <a:solidFill>
-            <a:srgbClr val="0B7A70"/>
-          </a:solidFill>
-          <a:ln w="12700">
-            <a:solidFill>
-              <a:srgbClr val="0B7A70"/>
-            </a:solidFill>
-            <a:prstDash val="solid"/>
-          </a:ln>
-        </p:spPr>
-      </p:sp>
-      <p:pic>
-        <p:nvPicPr>
-          <p:cNvPr id="9" name="Image 0" descr="preencoded.png"/>
-          <p:cNvPicPr>
-            <a:picLocks noChangeAspect="1"/>
-          </p:cNvPicPr>
-          <p:nvPr/>
-        </p:nvPicPr>
-        <p:blipFill>
-          <a:blip r:embed="rId3"/>
-          <a:stretch>
-            <a:fillRect/>
-          </a:stretch>
-        </p:blipFill>
-        <p:spPr>
-          <a:xfrm>
-            <a:off x="2048256" y="2414016"/>
-            <a:ext cx="475488" cy="475488"/>
-          </a:xfrm>
-          <a:prstGeom prst="rect">
-            <a:avLst/>
-          </a:prstGeom>
-        </p:spPr>
-      </p:pic>
-      <p:sp>
-        <p:nvSpPr>
-          <p:cNvPr id="10" name="Text 6"/>
-          <p:cNvSpPr txBox="1"/>
-          <p:nvPr/>
-        </p:nvSpPr>
-        <p:spPr>
-          <a:xfrm>
-            <a:off x="548640" y="3246120"/>
-            <a:ext cx="3474720" cy="502920"/>
-          </a:xfrm>
-          <a:prstGeom prst="rect">
-            <a:avLst/>
-          </a:prstGeom>
-          <a:noFill/>
-          <a:ln/>
-        </p:spPr>
-        <p:txBody>
-          <a:bodyPr wrap="square" lIns="0" tIns="0" rIns="0" bIns="0" rtlCol="0" anchor="t"/>
-          <a:lstStyle/>
-          <a:p>
-            <a:pPr marL="0" indent="0" algn="ctr">
-              <a:buNone/>
-            </a:pPr>
-            <a:r>
-              <a:rPr lang="en-US" sz="2400" b="1" dirty="0">
-                <a:solidFill>
-                  <a:srgbClr val="131B35"/>
-                </a:solidFill>
-                <a:latin typeface="BIZ UDゴシック" pitchFamily="34" charset="0"/>
-                <a:ea typeface="BIZ UDゴシック" pitchFamily="49" charset="-128"/>
-                <a:cs typeface="BIZ UDゴシック" pitchFamily="34" charset="-120"/>
-              </a:rPr>
-              <a:t>入室前の誘導</a:t>
-            </a:r>
-            <a:endParaRPr lang="en-US" sz="2400" dirty="0"/>
-          </a:p>
-        </p:txBody>
-      </p:sp>
-      <p:sp>
-        <p:nvSpPr>
-          <p:cNvPr id="11" name="Text 7"/>
-          <p:cNvSpPr txBox="1"/>
-          <p:nvPr/>
-        </p:nvSpPr>
-        <p:spPr>
-          <a:xfrm>
-            <a:off x="822960" y="3840480"/>
-            <a:ext cx="2926080" cy="1371600"/>
-          </a:xfrm>
-          <a:prstGeom prst="rect">
-            <a:avLst/>
-          </a:prstGeom>
-          <a:noFill/>
-          <a:ln/>
-        </p:spPr>
-        <p:txBody>
-          <a:bodyPr wrap="square" lIns="0" tIns="0" rIns="0" bIns="0" rtlCol="0" anchor="t"/>
-          <a:lstStyle/>
-          <a:p>
-            <a:pPr marL="0" indent="0" algn="ctr">
-              <a:buNone/>
-            </a:pPr>
-            <a:r>
-              <a:rPr lang="en-US" sz="2000" dirty="0">
-                <a:solidFill>
-                  <a:srgbClr val="1B2333"/>
-                </a:solidFill>
-                <a:latin typeface="BIZ UDゴシック" pitchFamily="34" charset="0"/>
-                <a:ea typeface="BIZ UDゴシック" pitchFamily="49" charset="-128"/>
-                <a:cs typeface="BIZ UDゴシック" pitchFamily="34" charset="-120"/>
-              </a:rPr>
-              <a:t>病室の名札を見たら、</a:t>
-            </a:r>
-            <a:endParaRPr lang="en-US" sz="2000" dirty="0"/>
-          </a:p>
-          <a:p>
-            <a:pPr marL="0" indent="0" algn="ctr">
-              <a:buNone/>
-            </a:pPr>
-            <a:r>
-              <a:rPr lang="en-US" sz="2000" dirty="0">
-                <a:solidFill>
-                  <a:srgbClr val="1B2333"/>
-                </a:solidFill>
-                <a:latin typeface="BIZ UDゴシック" pitchFamily="34" charset="0"/>
-                <a:ea typeface="BIZ UDゴシック" pitchFamily="49" charset="-128"/>
-                <a:cs typeface="BIZ UDゴシック" pitchFamily="34" charset="-120"/>
-              </a:rPr>
-              <a:t>矢印で手指消毒へ</a:t>
-            </a:r>
-            <a:endParaRPr lang="en-US" sz="2000" dirty="0"/>
-          </a:p>
-        </p:txBody>
-      </p:sp>
-      <p:sp>
-        <p:nvSpPr>
-          <p:cNvPr id="12" name="Shape 8"/>
-          <p:cNvSpPr/>
-          <p:nvPr/>
-        </p:nvSpPr>
-        <p:spPr>
-          <a:xfrm>
-            <a:off x="4358488" y="1965960"/>
-            <a:ext cx="3474720" cy="3383280"/>
-          </a:xfrm>
-          <a:prstGeom prst="roundRect">
-            <a:avLst>
-              <a:gd name="adj" fmla="val 3243"/>
-            </a:avLst>
-          </a:prstGeom>
-          <a:solidFill>
-            <a:srgbClr val="EEF2F7"/>
-          </a:solidFill>
-          <a:ln w="12700">
-            <a:solidFill>
-              <a:srgbClr val="EEF2F7"/>
-            </a:solidFill>
-            <a:prstDash val="solid"/>
-          </a:ln>
-        </p:spPr>
-      </p:sp>
-      <p:sp>
-        <p:nvSpPr>
-          <p:cNvPr id="13" name="Shape 9"/>
-          <p:cNvSpPr/>
-          <p:nvPr/>
-        </p:nvSpPr>
-        <p:spPr>
-          <a:xfrm>
-            <a:off x="5638648" y="2194560"/>
-            <a:ext cx="914400" cy="914400"/>
-          </a:xfrm>
-          <a:prstGeom prst="ellipse">
-            <a:avLst/>
-          </a:prstGeom>
-          <a:solidFill>
-            <a:srgbClr val="0B7A70"/>
-          </a:solidFill>
-          <a:ln w="12700">
-            <a:solidFill>
-              <a:srgbClr val="0B7A70"/>
-            </a:solidFill>
-            <a:prstDash val="solid"/>
-          </a:ln>
-        </p:spPr>
-      </p:sp>
-      <p:pic>
-        <p:nvPicPr>
-          <p:cNvPr id="14" name="Image 1" descr="preencoded.png"/>
-          <p:cNvPicPr>
-            <a:picLocks noChangeAspect="1"/>
-          </p:cNvPicPr>
-          <p:nvPr/>
-        </p:nvPicPr>
-        <p:blipFill>
-          <a:blip r:embed="rId4"/>
-          <a:stretch>
-            <a:fillRect/>
-          </a:stretch>
-        </p:blipFill>
-        <p:spPr>
-          <a:xfrm>
-            <a:off x="5858104" y="2414016"/>
-            <a:ext cx="475488" cy="475488"/>
-          </a:xfrm>
-          <a:prstGeom prst="rect">
-            <a:avLst/>
-          </a:prstGeom>
-        </p:spPr>
-      </p:pic>
-      <p:sp>
-        <p:nvSpPr>
-          <p:cNvPr id="15" name="Text 10"/>
-          <p:cNvSpPr txBox="1"/>
-          <p:nvPr/>
-        </p:nvSpPr>
-        <p:spPr>
-          <a:xfrm>
-            <a:off x="4358488" y="3246120"/>
-            <a:ext cx="3474720" cy="502920"/>
-          </a:xfrm>
-          <a:prstGeom prst="rect">
-            <a:avLst/>
-          </a:prstGeom>
-          <a:noFill/>
-          <a:ln/>
-        </p:spPr>
-        <p:txBody>
-          <a:bodyPr wrap="square" lIns="0" tIns="0" rIns="0" bIns="0" rtlCol="0" anchor="t"/>
-          <a:lstStyle/>
-          <a:p>
-            <a:pPr marL="0" indent="0" algn="ctr">
-              <a:buNone/>
-            </a:pPr>
-            <a:r>
-              <a:rPr lang="en-US" sz="2400" b="1" dirty="0">
-                <a:solidFill>
-                  <a:srgbClr val="131B35"/>
-                </a:solidFill>
-                <a:latin typeface="BIZ UDゴシック" pitchFamily="34" charset="0"/>
-                <a:ea typeface="BIZ UDゴシック" pitchFamily="49" charset="-128"/>
-                <a:cs typeface="BIZ UDゴシック" pitchFamily="34" charset="-120"/>
-              </a:rPr>
-              <a:t>手順の番号化</a:t>
-            </a:r>
-            <a:endParaRPr lang="en-US" sz="2400" dirty="0"/>
-          </a:p>
-        </p:txBody>
-      </p:sp>
-      <p:sp>
-        <p:nvSpPr>
-          <p:cNvPr id="16" name="Text 11"/>
-          <p:cNvSpPr txBox="1"/>
-          <p:nvPr/>
-        </p:nvSpPr>
-        <p:spPr>
-          <a:xfrm>
-            <a:off x="4632808" y="3840480"/>
-            <a:ext cx="2926080" cy="1371600"/>
-          </a:xfrm>
-          <a:prstGeom prst="rect">
-            <a:avLst/>
-          </a:prstGeom>
-          <a:noFill/>
-          <a:ln/>
-        </p:spPr>
-        <p:txBody>
-          <a:bodyPr wrap="square" lIns="0" tIns="0" rIns="0" bIns="0" rtlCol="0" anchor="t"/>
-          <a:lstStyle/>
-          <a:p>
-            <a:pPr marL="0" indent="0" algn="ctr">
-              <a:buNone/>
-            </a:pPr>
-            <a:r>
-              <a:rPr lang="en-US" sz="2000" dirty="0">
-                <a:solidFill>
-                  <a:srgbClr val="1B2333"/>
-                </a:solidFill>
-                <a:latin typeface="BIZ UDゴシック" pitchFamily="34" charset="0"/>
-                <a:ea typeface="BIZ UDゴシック" pitchFamily="49" charset="-128"/>
-                <a:cs typeface="BIZ UDゴシック" pitchFamily="34" charset="-120"/>
-              </a:rPr>
-              <a:t>救急外来の</a:t>
-            </a:r>
-            <a:endParaRPr lang="en-US" sz="2000" dirty="0"/>
-          </a:p>
-          <a:p>
-            <a:pPr marL="0" indent="0" algn="ctr">
-              <a:buNone/>
-            </a:pPr>
-            <a:r>
-              <a:rPr lang="en-US" sz="2000" dirty="0">
-                <a:solidFill>
-                  <a:srgbClr val="1B2333"/>
-                </a:solidFill>
-                <a:latin typeface="BIZ UDゴシック" pitchFamily="34" charset="0"/>
-                <a:ea typeface="BIZ UDゴシック" pitchFamily="49" charset="-128"/>
-                <a:cs typeface="BIZ UDゴシック" pitchFamily="34" charset="-120"/>
-              </a:rPr>
-              <a:t>PPE着用手順を番号化</a:t>
-            </a:r>
-            <a:endParaRPr lang="en-US" sz="2000" dirty="0"/>
-          </a:p>
-          <a:p>
-            <a:pPr marL="0" indent="0" algn="ctr">
-              <a:buNone/>
-            </a:pPr>
-            <a:r>
-              <a:rPr lang="en-US" sz="2000" dirty="0">
-                <a:solidFill>
-                  <a:srgbClr val="1B2333"/>
-                </a:solidFill>
-                <a:latin typeface="BIZ UDゴシック" pitchFamily="34" charset="0"/>
-                <a:ea typeface="BIZ UDゴシック" pitchFamily="49" charset="-128"/>
-                <a:cs typeface="BIZ UDゴシック" pitchFamily="34" charset="-120"/>
-              </a:rPr>
-              <a:t>（最初は手指消毒）</a:t>
-            </a:r>
-            <a:endParaRPr lang="en-US" sz="2000" dirty="0"/>
-          </a:p>
-        </p:txBody>
-      </p:sp>
-      <p:sp>
-        <p:nvSpPr>
-          <p:cNvPr id="17" name="Shape 12"/>
-          <p:cNvSpPr/>
-          <p:nvPr/>
-        </p:nvSpPr>
-        <p:spPr>
-          <a:xfrm>
-            <a:off x="8168335" y="1965960"/>
-            <a:ext cx="3474720" cy="3383280"/>
-          </a:xfrm>
-          <a:prstGeom prst="roundRect">
-            <a:avLst>
-              <a:gd name="adj" fmla="val 3243"/>
-            </a:avLst>
-          </a:prstGeom>
-          <a:solidFill>
-            <a:srgbClr val="EEF2F7"/>
-          </a:solidFill>
-          <a:ln w="12700">
-            <a:solidFill>
-              <a:srgbClr val="EEF2F7"/>
-            </a:solidFill>
-            <a:prstDash val="solid"/>
-          </a:ln>
-        </p:spPr>
-      </p:sp>
-      <p:sp>
-        <p:nvSpPr>
-          <p:cNvPr id="18" name="Shape 13"/>
-          <p:cNvSpPr/>
-          <p:nvPr/>
-        </p:nvSpPr>
-        <p:spPr>
-          <a:xfrm>
-            <a:off x="9448495" y="2194560"/>
-            <a:ext cx="914400" cy="914400"/>
-          </a:xfrm>
-          <a:prstGeom prst="ellipse">
-            <a:avLst/>
-          </a:prstGeom>
-          <a:solidFill>
-            <a:srgbClr val="0B7A70"/>
-          </a:solidFill>
-          <a:ln w="12700">
-            <a:solidFill>
-              <a:srgbClr val="0B7A70"/>
-            </a:solidFill>
-            <a:prstDash val="solid"/>
-          </a:ln>
-        </p:spPr>
-      </p:sp>
-      <p:pic>
-        <p:nvPicPr>
-          <p:cNvPr id="19" name="Image 2" descr="preencoded.png"/>
-          <p:cNvPicPr>
-            <a:picLocks noChangeAspect="1"/>
-          </p:cNvPicPr>
-          <p:nvPr/>
-        </p:nvPicPr>
-        <p:blipFill>
-          <a:blip r:embed="rId5"/>
-          <a:stretch>
-            <a:fillRect/>
-          </a:stretch>
-        </p:blipFill>
-        <p:spPr>
-          <a:xfrm>
-            <a:off x="9667951" y="2414016"/>
-            <a:ext cx="475488" cy="475488"/>
-          </a:xfrm>
-          <a:prstGeom prst="rect">
-            <a:avLst/>
-          </a:prstGeom>
-        </p:spPr>
-      </p:pic>
-      <p:sp>
-        <p:nvSpPr>
-          <p:cNvPr id="20" name="Text 14"/>
-          <p:cNvSpPr txBox="1"/>
-          <p:nvPr/>
-        </p:nvSpPr>
-        <p:spPr>
-          <a:xfrm>
-            <a:off x="8168335" y="3246120"/>
-            <a:ext cx="3474720" cy="502920"/>
-          </a:xfrm>
-          <a:prstGeom prst="rect">
-            <a:avLst/>
-          </a:prstGeom>
-          <a:noFill/>
-          <a:ln/>
-        </p:spPr>
-        <p:txBody>
-          <a:bodyPr wrap="square" lIns="0" tIns="0" rIns="0" bIns="0" rtlCol="0" anchor="t"/>
-          <a:lstStyle/>
-          <a:p>
-            <a:pPr marL="0" indent="0" algn="ctr">
-              <a:buNone/>
-            </a:pPr>
-            <a:r>
-              <a:rPr lang="en-US" sz="2400" b="1" dirty="0">
-                <a:solidFill>
-                  <a:srgbClr val="131B35"/>
-                </a:solidFill>
-                <a:latin typeface="BIZ UDゴシック" pitchFamily="34" charset="0"/>
-                <a:ea typeface="BIZ UDゴシック" pitchFamily="49" charset="-128"/>
-                <a:cs typeface="BIZ UDゴシック" pitchFamily="34" charset="-120"/>
-              </a:rPr>
-              <a:t>使用量の見える化</a:t>
-            </a:r>
-            <a:endParaRPr lang="en-US" sz="2400" dirty="0"/>
-          </a:p>
-        </p:txBody>
-      </p:sp>
-      <p:sp>
-        <p:nvSpPr>
-          <p:cNvPr id="21" name="Text 15"/>
-          <p:cNvSpPr txBox="1"/>
-          <p:nvPr/>
-        </p:nvSpPr>
-        <p:spPr>
-          <a:xfrm>
-            <a:off x="8442655" y="3840480"/>
-            <a:ext cx="2926080" cy="1371600"/>
-          </a:xfrm>
-          <a:prstGeom prst="rect">
-            <a:avLst/>
-          </a:prstGeom>
-          <a:noFill/>
-          <a:ln/>
-        </p:spPr>
-        <p:txBody>
-          <a:bodyPr wrap="square" lIns="0" tIns="0" rIns="0" bIns="0" rtlCol="0" anchor="t"/>
-          <a:lstStyle/>
-          <a:p>
-            <a:pPr marL="0" indent="0" algn="ctr">
-              <a:buNone/>
-            </a:pPr>
-            <a:r>
-              <a:rPr lang="en-US" sz="2000" dirty="0">
-                <a:solidFill>
-                  <a:srgbClr val="1B2333"/>
-                </a:solidFill>
-                <a:latin typeface="BIZ UDゴシック" pitchFamily="34" charset="0"/>
-                <a:ea typeface="BIZ UDゴシック" pitchFamily="49" charset="-128"/>
-                <a:cs typeface="BIZ UDゴシック" pitchFamily="34" charset="-120"/>
-              </a:rPr>
-              <a:t>1本使い切るごとに</a:t>
-            </a:r>
-            <a:endParaRPr lang="en-US" sz="2000" dirty="0"/>
-          </a:p>
-          <a:p>
-            <a:pPr marL="0" indent="0" algn="ctr">
-              <a:buNone/>
-            </a:pPr>
-            <a:r>
-              <a:rPr lang="en-US" sz="2000" dirty="0">
-                <a:solidFill>
-                  <a:srgbClr val="1B2333"/>
-                </a:solidFill>
-                <a:latin typeface="BIZ UDゴシック" pitchFamily="34" charset="0"/>
-                <a:ea typeface="BIZ UDゴシック" pitchFamily="49" charset="-128"/>
-                <a:cs typeface="BIZ UDゴシック" pitchFamily="34" charset="-120"/>
-              </a:rPr>
-              <a:t>シールを貼り、</a:t>
-            </a:r>
-            <a:endParaRPr lang="en-US" sz="2000" dirty="0"/>
-          </a:p>
-          <a:p>
-            <a:pPr marL="0" indent="0" algn="ctr">
-              <a:buNone/>
-            </a:pPr>
-            <a:r>
-              <a:rPr lang="en-US" sz="2000" dirty="0">
-                <a:solidFill>
-                  <a:srgbClr val="1B2333"/>
-                </a:solidFill>
-                <a:latin typeface="BIZ UDゴシック" pitchFamily="34" charset="0"/>
-                <a:ea typeface="BIZ UDゴシック" pitchFamily="49" charset="-128"/>
-                <a:cs typeface="BIZ UDゴシック" pitchFamily="34" charset="-120"/>
-              </a:rPr>
-              <a:t>多い順に並べる</a:t>
-            </a:r>
-            <a:endParaRPr lang="en-US" sz="2000" dirty="0"/>
-          </a:p>
-        </p:txBody>
-      </p:sp>
-      <p:sp>
-        <p:nvSpPr>
-          <p:cNvPr id="22" name="Text 16"/>
-          <p:cNvSpPr txBox="1"/>
-          <p:nvPr/>
-        </p:nvSpPr>
-        <p:spPr>
-          <a:xfrm>
-            <a:off x="548640" y="5486400"/>
-            <a:ext cx="11094415" cy="548640"/>
-          </a:xfrm>
-          <a:prstGeom prst="rect">
-            <a:avLst/>
-          </a:prstGeom>
-          <a:noFill/>
-          <a:ln/>
-        </p:spPr>
-        <p:txBody>
-          <a:bodyPr wrap="square" lIns="0" tIns="0" rIns="0" bIns="0" rtlCol="0" anchor="ctr"/>
-          <a:lstStyle/>
-          <a:p>
-            <a:pPr marL="0" indent="0" algn="ctr">
-              <a:buNone/>
-            </a:pPr>
-            <a:r>
-              <a:rPr lang="en-US" sz="2200" b="1" dirty="0">
-                <a:solidFill>
-                  <a:srgbClr val="0B7A70"/>
-                </a:solidFill>
-                <a:latin typeface="BIZ UDゴシック" pitchFamily="34" charset="0"/>
-                <a:ea typeface="BIZ UDゴシック" pitchFamily="49" charset="-128"/>
-                <a:cs typeface="BIZ UDゴシック" pitchFamily="34" charset="-120"/>
-              </a:rPr>
-              <a:t>うまくいった方法やツールは、実施部署から全部署へ共有</a:t>
-            </a:r>
-            <a:endParaRPr lang="en-US" sz="2200" dirty="0"/>
-          </a:p>
-        </p:txBody>
-      </p:sp>
-      <p:sp>
-        <p:nvSpPr>
-          <p:cNvPr id="25" name="Slide Number Placeholder 0"/>
-          <p:cNvSpPr>
-            <a:spLocks noGrp="1"/>
-          </p:cNvSpPr>
-          <p:nvPr>
-            <p:ph type="sldNum" sz="quarter" idx="4294967295"/>
-          </p:nvPr>
-        </p:nvSpPr>
-        <p:spPr>
-          <a:xfrm>
-            <a:off x="11000232" y="6217920"/>
-            <a:ext cx="640080" cy="384048"/>
-          </a:xfrm>
-          <a:prstGeom prst="rect">
-            <a:avLst/>
-          </a:prstGeom>
-          <a:extLst>
-            <a:ext uri="{C572A759-6A51-4108-AA02-DFA0A04FC94B}">
-              <ma14:wrappingTextBoxFlag xmlns="" xmlns:ma14="http://schemas.microsoft.com/office/mac/drawingml/2011/main" val="0"/>
-            </a:ext>
-          </a:extLst>
-        </p:spPr>
-        <p:txBody>
-          <a:bodyPr/>
-          <a:lstStyle>
-            <a:lvl1pPr>
-              <a:defRPr sz="2000">
-                <a:solidFill>
-                  <a:srgbClr val="8A96A8"/>
-                </a:solidFill>
-                <a:latin typeface="BIZ UDゴシック"/>
-                <a:ea typeface="BIZ UDゴシック"/>
-                <a:cs typeface="BIZ UDゴシック"/>
-              </a:defRPr>
-            </a:lvl1pPr>
-          </a:lstStyle>
-          <a:p>
-            <a:pPr algn="r"/>
-            <a:fld id="{F7021451-1387-4CA6-816F-3879F97B5CBC}" type="slidenum">
-              <a:rPr lang="en-US" b="0"/>
-              <a:t>32</a:t>
-            </a:fld>
-            <a:endParaRPr lang="en-US"/>
-          </a:p>
-        </p:txBody>
-      </p:sp>
-    </p:spTree>
-  </p:cSld>
-  <p:clrMapOvr>
-    <a:masterClrMapping/>
-  </p:clrMapOvr>
-</p:sld>
-</file>
-
 <file path=ppt/slides/slide33.xml><?xml version="1.0" encoding="utf-8"?>
 <p:sld xmlns:a="http://schemas.openxmlformats.org/drawingml/2006/main" xmlns:r="http://schemas.openxmlformats.org/officeDocument/2006/relationships" xmlns:p="http://schemas.openxmlformats.org/presentationml/2006/main">
   <p:cSld name="Slide 33">
@@ -24947,782 +24496,6 @@
               <a:t>Pittet D, et al. Lancet 2000;356:1307-12 ／ Cure L, Van Enk R. Am J Infect Control 2015;43:917-21 ／ Lankford MG, et al. Emerg Infect Dis 2003;9:217-23</a:t>
             </a:r>
             <a:endParaRPr lang="en-US" sz="1200" dirty="0"/>
-          </a:p>
-        </p:txBody>
-      </p:sp>
-    </p:spTree>
-  </p:cSld>
-  <p:clrMapOvr>
-    <a:masterClrMapping/>
-  </p:clrMapOvr>
-</p:sld>
-</file>
-
-<file path=ppt/slides/slide38.xml><?xml version="1.0" encoding="utf-8"?>
-<p:sld xmlns:a="http://schemas.openxmlformats.org/drawingml/2006/main" xmlns:r="http://schemas.openxmlformats.org/officeDocument/2006/relationships" xmlns:p="http://schemas.openxmlformats.org/presentationml/2006/main">
-  <p:cSld>
-    <p:spTree>
-      <p:nvGrpSpPr>
-        <p:cNvPr id="1" name=""/>
-        <p:cNvGrpSpPr/>
-        <p:nvPr/>
-      </p:nvGrpSpPr>
-      <p:grpSpPr>
-        <a:xfrm>
-          <a:off x="0" y="0"/>
-          <a:ext cx="0" cy="0"/>
-          <a:chOff x="0" y="0"/>
-          <a:chExt cx="0" cy="0"/>
-        </a:xfrm>
-      </p:grpSpPr>
-      <p:sp>
-        <p:nvSpPr>
-          <p:cNvPr id="2" name="Text 0"/>
-          <p:cNvSpPr/>
-          <p:nvPr/>
-        </p:nvSpPr>
-        <p:spPr>
-          <a:xfrm>
-            <a:off x="609600" y="406400"/>
-            <a:ext cx="11301984" cy="256480"/>
-          </a:xfrm>
-          <a:prstGeom prst="rect">
-            <a:avLst/>
-          </a:prstGeom>
-          <a:noFill/>
-          <a:ln/>
-        </p:spPr>
-        <p:txBody>
-          <a:bodyPr wrap="square" lIns="0" tIns="0" rIns="0" bIns="0" rtlCol="0" anchor="t">
-            <a:normAutofit/>
-          </a:bodyPr>
-          <a:lstStyle/>
-          <a:p>
-            <a:pPr marL="0" indent="0" algn="l">
-              <a:lnSpc>
-                <a:spcPts val="1820"/>
-              </a:lnSpc>
-              <a:buNone/>
-            </a:pPr>
-            <a:r>
-              <a:rPr lang="en-US" sz="1300" b="1" kern="0" spc="50" dirty="0">
-                <a:solidFill>
-                  <a:srgbClr val="1C7293"/>
-                </a:solidFill>
-                <a:latin typeface="Noto Sans JP" pitchFamily="34" charset="0"/>
-                <a:ea typeface="Noto Sans JP" pitchFamily="34" charset="-122"/>
-                <a:cs typeface="Noto Sans JP" pitchFamily="34" charset="-120"/>
-              </a:rPr>
-              <a:t>4-5｜EASTを現場に</a:t>
-            </a:r>
-            <a:endParaRPr lang="en-US" sz="1300" dirty="0"/>
-          </a:p>
-        </p:txBody>
-      </p:sp>
-      <p:sp>
-        <p:nvSpPr>
-          <p:cNvPr id="3" name="Text 1"/>
-          <p:cNvSpPr/>
-          <p:nvPr/>
-        </p:nvSpPr>
-        <p:spPr>
-          <a:xfrm>
-            <a:off x="609600" y="700980"/>
-            <a:ext cx="11301984" cy="487660"/>
-          </a:xfrm>
-          <a:prstGeom prst="rect">
-            <a:avLst/>
-          </a:prstGeom>
-          <a:noFill/>
-          <a:ln/>
-        </p:spPr>
-        <p:txBody>
-          <a:bodyPr wrap="square" lIns="0" tIns="0" rIns="0" bIns="0" rtlCol="0" anchor="t">
-            <a:normAutofit/>
-          </a:bodyPr>
-          <a:lstStyle/>
-          <a:p>
-            <a:pPr marL="0" indent="0" algn="l">
-              <a:lnSpc>
-                <a:spcPts val="3640"/>
-              </a:lnSpc>
-              <a:buNone/>
-            </a:pPr>
-            <a:r>
-              <a:rPr lang="en-US" sz="2800" b="1" dirty="0">
-                <a:solidFill>
-                  <a:srgbClr val="0B2545"/>
-                </a:solidFill>
-                <a:latin typeface="Noto Sans JP" pitchFamily="34" charset="0"/>
-                <a:ea typeface="Noto Sans JP" pitchFamily="34" charset="-122"/>
-                <a:cs typeface="Noto Sans JP" pitchFamily="34" charset="-120"/>
-              </a:rPr>
-              <a:t>当院のナッジ実践例</a:t>
-            </a:r>
-            <a:endParaRPr lang="en-US" sz="2800" dirty="0"/>
-          </a:p>
-        </p:txBody>
-      </p:sp>
-      <p:pic>
-        <p:nvPicPr>
-          <p:cNvPr id="4" name="Image 0" descr="救急外来の入口。床の足あとマークが手指消毒剤のスタンドへ続いている"/>
-          <p:cNvPicPr>
-            <a:picLocks noChangeAspect="1"/>
-          </p:cNvPicPr>
-          <p:nvPr/>
-        </p:nvPicPr>
-        <p:blipFill>
-          <a:blip r:embed="rId3"/>
-          <a:srcRect t="15533" b="15533"/>
-          <a:stretch/>
-        </p:blipFill>
-        <p:spPr>
-          <a:xfrm>
-            <a:off x="609600" y="1353741"/>
-            <a:ext cx="3454400" cy="3175000"/>
-          </a:xfrm>
-          <a:prstGeom prst="rect">
-            <a:avLst/>
-          </a:prstGeom>
-        </p:spPr>
-      </p:pic>
-      <p:sp>
-        <p:nvSpPr>
-          <p:cNvPr id="5" name="Shape 2"/>
-          <p:cNvSpPr/>
-          <p:nvPr/>
-        </p:nvSpPr>
-        <p:spPr>
-          <a:xfrm>
-            <a:off x="609600" y="4617641"/>
-            <a:ext cx="524470" cy="264120"/>
-          </a:xfrm>
-          <a:prstGeom prst="roundRect">
-            <a:avLst>
-              <a:gd name="adj" fmla="val 14425"/>
-            </a:avLst>
-          </a:prstGeom>
-          <a:solidFill>
-            <a:srgbClr val="1C7293"/>
-          </a:solidFill>
-          <a:ln/>
-        </p:spPr>
-      </p:sp>
-      <p:sp>
-        <p:nvSpPr>
-          <p:cNvPr id="6" name="Text 3"/>
-          <p:cNvSpPr/>
-          <p:nvPr/>
-        </p:nvSpPr>
-        <p:spPr>
-          <a:xfrm>
-            <a:off x="698500" y="4643041"/>
-            <a:ext cx="397470" cy="238720"/>
-          </a:xfrm>
-          <a:prstGeom prst="rect">
-            <a:avLst/>
-          </a:prstGeom>
-          <a:noFill/>
-          <a:ln/>
-        </p:spPr>
-        <p:txBody>
-          <a:bodyPr wrap="square" lIns="0" tIns="0" rIns="0" bIns="0" rtlCol="0" anchor="t">
-            <a:normAutofit/>
-          </a:bodyPr>
-          <a:lstStyle/>
-          <a:p>
-            <a:pPr marL="0" indent="0" algn="l">
-              <a:lnSpc>
-                <a:spcPts val="1680"/>
-              </a:lnSpc>
-              <a:buNone/>
-            </a:pPr>
-            <a:r>
-              <a:rPr lang="en-US" sz="1200" b="1" dirty="0">
-                <a:solidFill>
-                  <a:srgbClr val="FFFFFF"/>
-                </a:solidFill>
-                <a:latin typeface="Noto Sans JP" pitchFamily="34" charset="0"/>
-                <a:ea typeface="Noto Sans JP" pitchFamily="34" charset="-122"/>
-                <a:cs typeface="Noto Sans JP" pitchFamily="34" charset="-120"/>
-              </a:rPr>
-              <a:t>Easy</a:t>
-            </a:r>
-            <a:endParaRPr lang="en-US" sz="1200" dirty="0"/>
-          </a:p>
-        </p:txBody>
-      </p:sp>
-      <p:sp>
-        <p:nvSpPr>
-          <p:cNvPr id="7" name="Shape 4"/>
-          <p:cNvSpPr/>
-          <p:nvPr/>
-        </p:nvSpPr>
-        <p:spPr>
-          <a:xfrm>
-            <a:off x="1197570" y="4617641"/>
-            <a:ext cx="690364" cy="264120"/>
-          </a:xfrm>
-          <a:prstGeom prst="roundRect">
-            <a:avLst>
-              <a:gd name="adj" fmla="val 14425"/>
-            </a:avLst>
-          </a:prstGeom>
-          <a:solidFill>
-            <a:srgbClr val="1C7293"/>
-          </a:solidFill>
-          <a:ln/>
-        </p:spPr>
-      </p:sp>
-      <p:sp>
-        <p:nvSpPr>
-          <p:cNvPr id="8" name="Text 5"/>
-          <p:cNvSpPr/>
-          <p:nvPr/>
-        </p:nvSpPr>
-        <p:spPr>
-          <a:xfrm>
-            <a:off x="1286470" y="4643041"/>
-            <a:ext cx="563364" cy="238720"/>
-          </a:xfrm>
-          <a:prstGeom prst="rect">
-            <a:avLst/>
-          </a:prstGeom>
-          <a:noFill/>
-          <a:ln/>
-        </p:spPr>
-        <p:txBody>
-          <a:bodyPr wrap="square" lIns="0" tIns="0" rIns="0" bIns="0" rtlCol="0" anchor="t">
-            <a:normAutofit/>
-          </a:bodyPr>
-          <a:lstStyle/>
-          <a:p>
-            <a:pPr marL="0" indent="0" algn="l">
-              <a:lnSpc>
-                <a:spcPts val="1680"/>
-              </a:lnSpc>
-              <a:buNone/>
-            </a:pPr>
-            <a:r>
-              <a:rPr lang="en-US" sz="1200" b="1" dirty="0">
-                <a:solidFill>
-                  <a:srgbClr val="FFFFFF"/>
-                </a:solidFill>
-                <a:latin typeface="Noto Sans JP" pitchFamily="34" charset="0"/>
-                <a:ea typeface="Noto Sans JP" pitchFamily="34" charset="-122"/>
-                <a:cs typeface="Noto Sans JP" pitchFamily="34" charset="-120"/>
-              </a:rPr>
-              <a:t>Timely</a:t>
-            </a:r>
-            <a:endParaRPr lang="en-US" sz="1200" dirty="0"/>
-          </a:p>
-        </p:txBody>
-      </p:sp>
-      <p:sp>
-        <p:nvSpPr>
-          <p:cNvPr id="9" name="Text 6"/>
-          <p:cNvSpPr/>
-          <p:nvPr/>
-        </p:nvSpPr>
-        <p:spPr>
-          <a:xfrm>
-            <a:off x="609600" y="4970661"/>
-            <a:ext cx="3558032" cy="520700"/>
-          </a:xfrm>
-          <a:prstGeom prst="rect">
-            <a:avLst/>
-          </a:prstGeom>
-          <a:noFill/>
-          <a:ln/>
-        </p:spPr>
-        <p:txBody>
-          <a:bodyPr wrap="square" lIns="0" tIns="0" rIns="0" bIns="0" rtlCol="0" anchor="t">
-            <a:normAutofit/>
-          </a:bodyPr>
-          <a:lstStyle/>
-          <a:p>
-            <a:pPr marL="0" indent="0" algn="l">
-              <a:lnSpc>
-                <a:spcPts val="1950"/>
-              </a:lnSpc>
-              <a:buNone/>
-            </a:pPr>
-            <a:r>
-              <a:rPr lang="en-US" sz="1300" dirty="0">
-                <a:solidFill>
-                  <a:srgbClr val="1B2A33"/>
-                </a:solidFill>
-                <a:latin typeface="Noto Sans JP" pitchFamily="34" charset="0"/>
-                <a:ea typeface="Noto Sans JP" pitchFamily="34" charset="-122"/>
-                <a:cs typeface="Noto Sans JP" pitchFamily="34" charset="-120"/>
-              </a:rPr>
-              <a:t>救急外来の入口：足あとで消毒剤へ誘導。患者家族の入室時の手指消毒が増えた</a:t>
-            </a:r>
-            <a:endParaRPr lang="en-US" sz="1300" dirty="0"/>
-          </a:p>
-        </p:txBody>
-      </p:sp>
-      <p:pic>
-        <p:nvPicPr>
-          <p:cNvPr id="10" name="Image 1" descr="病室の氏名表示の下に、氏名を確認したら手指消毒を2プッシュ、という指示表示と消毒剤"/>
-          <p:cNvPicPr>
-            <a:picLocks noChangeAspect="1"/>
-          </p:cNvPicPr>
-          <p:nvPr/>
-        </p:nvPicPr>
-        <p:blipFill>
-          <a:blip r:embed="rId4"/>
-          <a:srcRect t="15533" b="15533"/>
-          <a:stretch/>
-        </p:blipFill>
-        <p:spPr>
-          <a:xfrm>
-            <a:off x="4368800" y="1353741"/>
-            <a:ext cx="3454400" cy="3175000"/>
-          </a:xfrm>
-          <a:prstGeom prst="rect">
-            <a:avLst/>
-          </a:prstGeom>
-        </p:spPr>
-      </p:pic>
-      <p:sp>
-        <p:nvSpPr>
-          <p:cNvPr id="11" name="Shape 7"/>
-          <p:cNvSpPr/>
-          <p:nvPr/>
-        </p:nvSpPr>
-        <p:spPr>
-          <a:xfrm>
-            <a:off x="4368800" y="4617641"/>
-            <a:ext cx="524470" cy="264120"/>
-          </a:xfrm>
-          <a:prstGeom prst="roundRect">
-            <a:avLst>
-              <a:gd name="adj" fmla="val 14425"/>
-            </a:avLst>
-          </a:prstGeom>
-          <a:solidFill>
-            <a:srgbClr val="1C7293"/>
-          </a:solidFill>
-          <a:ln/>
-        </p:spPr>
-      </p:sp>
-      <p:sp>
-        <p:nvSpPr>
-          <p:cNvPr id="12" name="Text 8"/>
-          <p:cNvSpPr/>
-          <p:nvPr/>
-        </p:nvSpPr>
-        <p:spPr>
-          <a:xfrm>
-            <a:off x="4457700" y="4643041"/>
-            <a:ext cx="397470" cy="238720"/>
-          </a:xfrm>
-          <a:prstGeom prst="rect">
-            <a:avLst/>
-          </a:prstGeom>
-          <a:noFill/>
-          <a:ln/>
-        </p:spPr>
-        <p:txBody>
-          <a:bodyPr wrap="square" lIns="0" tIns="0" rIns="0" bIns="0" rtlCol="0" anchor="t">
-            <a:normAutofit/>
-          </a:bodyPr>
-          <a:lstStyle/>
-          <a:p>
-            <a:pPr marL="0" indent="0" algn="l">
-              <a:lnSpc>
-                <a:spcPts val="1680"/>
-              </a:lnSpc>
-              <a:buNone/>
-            </a:pPr>
-            <a:r>
-              <a:rPr lang="en-US" sz="1200" b="1" dirty="0">
-                <a:solidFill>
-                  <a:srgbClr val="FFFFFF"/>
-                </a:solidFill>
-                <a:latin typeface="Noto Sans JP" pitchFamily="34" charset="0"/>
-                <a:ea typeface="Noto Sans JP" pitchFamily="34" charset="-122"/>
-                <a:cs typeface="Noto Sans JP" pitchFamily="34" charset="-120"/>
-              </a:rPr>
-              <a:t>Easy</a:t>
-            </a:r>
-            <a:endParaRPr lang="en-US" sz="1200" dirty="0"/>
-          </a:p>
-        </p:txBody>
-      </p:sp>
-      <p:sp>
-        <p:nvSpPr>
-          <p:cNvPr id="13" name="Shape 9"/>
-          <p:cNvSpPr/>
-          <p:nvPr/>
-        </p:nvSpPr>
-        <p:spPr>
-          <a:xfrm>
-            <a:off x="4956770" y="4617641"/>
-            <a:ext cx="632916" cy="264120"/>
-          </a:xfrm>
-          <a:prstGeom prst="roundRect">
-            <a:avLst>
-              <a:gd name="adj" fmla="val 14425"/>
-            </a:avLst>
-          </a:prstGeom>
-          <a:solidFill>
-            <a:srgbClr val="1C7293"/>
-          </a:solidFill>
-          <a:ln/>
-        </p:spPr>
-      </p:sp>
-      <p:sp>
-        <p:nvSpPr>
-          <p:cNvPr id="14" name="Text 10"/>
-          <p:cNvSpPr/>
-          <p:nvPr/>
-        </p:nvSpPr>
-        <p:spPr>
-          <a:xfrm>
-            <a:off x="5045670" y="4643041"/>
-            <a:ext cx="505916" cy="238720"/>
-          </a:xfrm>
-          <a:prstGeom prst="rect">
-            <a:avLst/>
-          </a:prstGeom>
-          <a:noFill/>
-          <a:ln/>
-        </p:spPr>
-        <p:txBody>
-          <a:bodyPr wrap="square" lIns="0" tIns="0" rIns="0" bIns="0" rtlCol="0" anchor="t">
-            <a:normAutofit/>
-          </a:bodyPr>
-          <a:lstStyle/>
-          <a:p>
-            <a:pPr marL="0" indent="0" algn="l">
-              <a:lnSpc>
-                <a:spcPts val="1680"/>
-              </a:lnSpc>
-              <a:buNone/>
-            </a:pPr>
-            <a:r>
-              <a:rPr lang="en-US" sz="1200" b="1" dirty="0">
-                <a:solidFill>
-                  <a:srgbClr val="FFFFFF"/>
-                </a:solidFill>
-                <a:latin typeface="Noto Sans JP" pitchFamily="34" charset="0"/>
-                <a:ea typeface="Noto Sans JP" pitchFamily="34" charset="-122"/>
-                <a:cs typeface="Noto Sans JP" pitchFamily="34" charset="-120"/>
-              </a:rPr>
-              <a:t>Social</a:t>
-            </a:r>
-            <a:endParaRPr lang="en-US" sz="1200" dirty="0"/>
-          </a:p>
-        </p:txBody>
-      </p:sp>
-      <p:sp>
-        <p:nvSpPr>
-          <p:cNvPr id="15" name="Shape 11"/>
-          <p:cNvSpPr/>
-          <p:nvPr/>
-        </p:nvSpPr>
-        <p:spPr>
-          <a:xfrm>
-            <a:off x="5653187" y="4617641"/>
-            <a:ext cx="690364" cy="264120"/>
-          </a:xfrm>
-          <a:prstGeom prst="roundRect">
-            <a:avLst>
-              <a:gd name="adj" fmla="val 14425"/>
-            </a:avLst>
-          </a:prstGeom>
-          <a:solidFill>
-            <a:srgbClr val="1C7293"/>
-          </a:solidFill>
-          <a:ln/>
-        </p:spPr>
-      </p:sp>
-      <p:sp>
-        <p:nvSpPr>
-          <p:cNvPr id="16" name="Text 12"/>
-          <p:cNvSpPr/>
-          <p:nvPr/>
-        </p:nvSpPr>
-        <p:spPr>
-          <a:xfrm>
-            <a:off x="5742087" y="4643041"/>
-            <a:ext cx="563364" cy="238720"/>
-          </a:xfrm>
-          <a:prstGeom prst="rect">
-            <a:avLst/>
-          </a:prstGeom>
-          <a:noFill/>
-          <a:ln/>
-        </p:spPr>
-        <p:txBody>
-          <a:bodyPr wrap="square" lIns="0" tIns="0" rIns="0" bIns="0" rtlCol="0" anchor="t">
-            <a:normAutofit/>
-          </a:bodyPr>
-          <a:lstStyle/>
-          <a:p>
-            <a:pPr marL="0" indent="0" algn="l">
-              <a:lnSpc>
-                <a:spcPts val="1680"/>
-              </a:lnSpc>
-              <a:buNone/>
-            </a:pPr>
-            <a:r>
-              <a:rPr lang="en-US" sz="1200" b="1" dirty="0">
-                <a:solidFill>
-                  <a:srgbClr val="FFFFFF"/>
-                </a:solidFill>
-                <a:latin typeface="Noto Sans JP" pitchFamily="34" charset="0"/>
-                <a:ea typeface="Noto Sans JP" pitchFamily="34" charset="-122"/>
-                <a:cs typeface="Noto Sans JP" pitchFamily="34" charset="-120"/>
-              </a:rPr>
-              <a:t>Timely</a:t>
-            </a:r>
-            <a:endParaRPr lang="en-US" sz="1200" dirty="0"/>
-          </a:p>
-        </p:txBody>
-      </p:sp>
-      <p:sp>
-        <p:nvSpPr>
-          <p:cNvPr id="17" name="Text 13"/>
-          <p:cNvSpPr/>
-          <p:nvPr/>
-        </p:nvSpPr>
-        <p:spPr>
-          <a:xfrm>
-            <a:off x="4368800" y="4970661"/>
-            <a:ext cx="3558032" cy="520700"/>
-          </a:xfrm>
-          <a:prstGeom prst="rect">
-            <a:avLst/>
-          </a:prstGeom>
-          <a:noFill/>
-          <a:ln/>
-        </p:spPr>
-        <p:txBody>
-          <a:bodyPr wrap="square" lIns="0" tIns="0" rIns="0" bIns="0" rtlCol="0" anchor="t">
-            <a:normAutofit/>
-          </a:bodyPr>
-          <a:lstStyle/>
-          <a:p>
-            <a:pPr marL="0" indent="0" algn="l">
-              <a:lnSpc>
-                <a:spcPts val="1950"/>
-              </a:lnSpc>
-              <a:buNone/>
-            </a:pPr>
-            <a:r>
-              <a:rPr lang="en-US" sz="1300" dirty="0">
-                <a:solidFill>
-                  <a:srgbClr val="1B2A33"/>
-                </a:solidFill>
-                <a:latin typeface="Noto Sans JP" pitchFamily="34" charset="0"/>
-                <a:ea typeface="Noto Sans JP" pitchFamily="34" charset="-122"/>
-                <a:cs typeface="Noto Sans JP" pitchFamily="34" charset="-120"/>
-              </a:rPr>
-              <a:t>病室の氏名表示の下：「①氏名を確認したら ②手指消毒を2プッシュ」と行動を指示</a:t>
-            </a:r>
-            <a:endParaRPr lang="en-US" sz="1300" dirty="0"/>
-          </a:p>
-        </p:txBody>
-      </p:sp>
-      <p:pic>
-        <p:nvPicPr>
-          <p:cNvPr id="18" name="Image 2" descr="病室入口の手指消毒剤と、スタッフの手指消毒宣言の表示"/>
-          <p:cNvPicPr>
-            <a:picLocks noChangeAspect="1"/>
-          </p:cNvPicPr>
-          <p:nvPr/>
-        </p:nvPicPr>
-        <p:blipFill>
-          <a:blip r:embed="rId5"/>
-          <a:srcRect l="9200" r="9200"/>
-          <a:stretch/>
-        </p:blipFill>
-        <p:spPr>
-          <a:xfrm>
-            <a:off x="8128000" y="1353741"/>
-            <a:ext cx="3454400" cy="3175000"/>
-          </a:xfrm>
-          <a:prstGeom prst="rect">
-            <a:avLst/>
-          </a:prstGeom>
-        </p:spPr>
-      </p:pic>
-      <p:sp>
-        <p:nvSpPr>
-          <p:cNvPr id="19" name="Shape 14"/>
-          <p:cNvSpPr/>
-          <p:nvPr/>
-        </p:nvSpPr>
-        <p:spPr>
-          <a:xfrm>
-            <a:off x="8128000" y="4617641"/>
-            <a:ext cx="632916" cy="264120"/>
-          </a:xfrm>
-          <a:prstGeom prst="roundRect">
-            <a:avLst>
-              <a:gd name="adj" fmla="val 14425"/>
-            </a:avLst>
-          </a:prstGeom>
-          <a:solidFill>
-            <a:srgbClr val="1C7293"/>
-          </a:solidFill>
-          <a:ln/>
-        </p:spPr>
-      </p:sp>
-      <p:sp>
-        <p:nvSpPr>
-          <p:cNvPr id="20" name="Text 15"/>
-          <p:cNvSpPr/>
-          <p:nvPr/>
-        </p:nvSpPr>
-        <p:spPr>
-          <a:xfrm>
-            <a:off x="8216900" y="4643041"/>
-            <a:ext cx="505916" cy="238720"/>
-          </a:xfrm>
-          <a:prstGeom prst="rect">
-            <a:avLst/>
-          </a:prstGeom>
-          <a:noFill/>
-          <a:ln/>
-        </p:spPr>
-        <p:txBody>
-          <a:bodyPr wrap="square" lIns="0" tIns="0" rIns="0" bIns="0" rtlCol="0" anchor="t">
-            <a:normAutofit/>
-          </a:bodyPr>
-          <a:lstStyle/>
-          <a:p>
-            <a:pPr marL="0" indent="0" algn="l">
-              <a:lnSpc>
-                <a:spcPts val="1680"/>
-              </a:lnSpc>
-              <a:buNone/>
-            </a:pPr>
-            <a:r>
-              <a:rPr lang="en-US" sz="1200" b="1" dirty="0">
-                <a:solidFill>
-                  <a:srgbClr val="FFFFFF"/>
-                </a:solidFill>
-                <a:latin typeface="Noto Sans JP" pitchFamily="34" charset="0"/>
-                <a:ea typeface="Noto Sans JP" pitchFamily="34" charset="-122"/>
-                <a:cs typeface="Noto Sans JP" pitchFamily="34" charset="-120"/>
-              </a:rPr>
-              <a:t>Social</a:t>
-            </a:r>
-            <a:endParaRPr lang="en-US" sz="1200" dirty="0"/>
-          </a:p>
-        </p:txBody>
-      </p:sp>
-      <p:sp>
-        <p:nvSpPr>
-          <p:cNvPr id="21" name="Shape 16"/>
-          <p:cNvSpPr/>
-          <p:nvPr/>
-        </p:nvSpPr>
-        <p:spPr>
-          <a:xfrm>
-            <a:off x="8824416" y="4617641"/>
-            <a:ext cx="690364" cy="264120"/>
-          </a:xfrm>
-          <a:prstGeom prst="roundRect">
-            <a:avLst>
-              <a:gd name="adj" fmla="val 14425"/>
-            </a:avLst>
-          </a:prstGeom>
-          <a:solidFill>
-            <a:srgbClr val="1C7293"/>
-          </a:solidFill>
-          <a:ln/>
-        </p:spPr>
-      </p:sp>
-      <p:sp>
-        <p:nvSpPr>
-          <p:cNvPr id="22" name="Text 17"/>
-          <p:cNvSpPr/>
-          <p:nvPr/>
-        </p:nvSpPr>
-        <p:spPr>
-          <a:xfrm>
-            <a:off x="8913316" y="4643041"/>
-            <a:ext cx="563364" cy="238720"/>
-          </a:xfrm>
-          <a:prstGeom prst="rect">
-            <a:avLst/>
-          </a:prstGeom>
-          <a:noFill/>
-          <a:ln/>
-        </p:spPr>
-        <p:txBody>
-          <a:bodyPr wrap="square" lIns="0" tIns="0" rIns="0" bIns="0" rtlCol="0" anchor="t">
-            <a:normAutofit/>
-          </a:bodyPr>
-          <a:lstStyle/>
-          <a:p>
-            <a:pPr marL="0" indent="0" algn="l">
-              <a:lnSpc>
-                <a:spcPts val="1680"/>
-              </a:lnSpc>
-              <a:buNone/>
-            </a:pPr>
-            <a:r>
-              <a:rPr lang="en-US" sz="1200" b="1" dirty="0">
-                <a:solidFill>
-                  <a:srgbClr val="FFFFFF"/>
-                </a:solidFill>
-                <a:latin typeface="Noto Sans JP" pitchFamily="34" charset="0"/>
-                <a:ea typeface="Noto Sans JP" pitchFamily="34" charset="-122"/>
-                <a:cs typeface="Noto Sans JP" pitchFamily="34" charset="-120"/>
-              </a:rPr>
-              <a:t>Timely</a:t>
-            </a:r>
-            <a:endParaRPr lang="en-US" sz="1200" dirty="0"/>
-          </a:p>
-        </p:txBody>
-      </p:sp>
-      <p:sp>
-        <p:nvSpPr>
-          <p:cNvPr id="23" name="Text 18"/>
-          <p:cNvSpPr/>
-          <p:nvPr/>
-        </p:nvSpPr>
-        <p:spPr>
-          <a:xfrm>
-            <a:off x="8128000" y="4970661"/>
-            <a:ext cx="3558032" cy="520700"/>
-          </a:xfrm>
-          <a:prstGeom prst="rect">
-            <a:avLst/>
-          </a:prstGeom>
-          <a:noFill/>
-          <a:ln/>
-        </p:spPr>
-        <p:txBody>
-          <a:bodyPr wrap="square" lIns="0" tIns="0" rIns="0" bIns="0" rtlCol="0" anchor="t">
-            <a:normAutofit/>
-          </a:bodyPr>
-          <a:lstStyle/>
-          <a:p>
-            <a:pPr marL="0" indent="0" algn="l">
-              <a:lnSpc>
-                <a:spcPts val="1950"/>
-              </a:lnSpc>
-              <a:buNone/>
-            </a:pPr>
-            <a:r>
-              <a:rPr lang="en-US" sz="1300" dirty="0">
-                <a:solidFill>
-                  <a:srgbClr val="1B2A33"/>
-                </a:solidFill>
-                <a:latin typeface="Noto Sans JP" pitchFamily="34" charset="0"/>
-                <a:ea typeface="Noto Sans JP" pitchFamily="34" charset="-122"/>
-                <a:cs typeface="Noto Sans JP" pitchFamily="34" charset="-120"/>
-              </a:rPr>
-              <a:t>病室前：「私は、患者さんを感染から守るため手指消毒をします」とスタッフが宣言</a:t>
-            </a:r>
-            <a:endParaRPr lang="en-US" sz="1300" dirty="0"/>
           </a:p>
         </p:txBody>
       </p:sp>
@@ -28477,844 +27250,6 @@
 </p:sld>
 </file>
 
-<file path=ppt/slides/slide40.xml><?xml version="1.0" encoding="utf-8"?>
-<p:sld xmlns:a="http://schemas.openxmlformats.org/drawingml/2006/main" xmlns:r="http://schemas.openxmlformats.org/officeDocument/2006/relationships" xmlns:p="http://schemas.openxmlformats.org/presentationml/2006/main">
-  <p:cSld name="Slide 38">
-    <p:bg>
-      <p:bgPr>
-        <a:solidFill>
-          <a:schemeClr val="bg1"/>
-        </a:solidFill>
-        <a:effectLst/>
-      </p:bgPr>
-    </p:bg>
-    <p:spTree>
-      <p:nvGrpSpPr>
-        <p:cNvPr id="1" name=""/>
-        <p:cNvGrpSpPr/>
-        <p:nvPr/>
-      </p:nvGrpSpPr>
-      <p:grpSpPr>
-        <a:xfrm>
-          <a:off x="0" y="0"/>
-          <a:ext cx="0" cy="0"/>
-          <a:chOff x="0" y="0"/>
-          <a:chExt cx="0" cy="0"/>
-        </a:xfrm>
-      </p:grpSpPr>
-      <p:sp>
-        <p:nvSpPr>
-          <p:cNvPr id="2" name="Shape 0"/>
-          <p:cNvSpPr/>
-          <p:nvPr/>
-        </p:nvSpPr>
-        <p:spPr>
-          <a:xfrm>
-            <a:off x="548640" y="347472"/>
-            <a:ext cx="2235200" cy="420624"/>
-          </a:xfrm>
-          <a:prstGeom prst="roundRect">
-            <a:avLst>
-              <a:gd name="adj" fmla="val 50000"/>
-            </a:avLst>
-          </a:prstGeom>
-          <a:solidFill>
-            <a:srgbClr val="131B35"/>
-          </a:solidFill>
-          <a:ln w="12700">
-            <a:solidFill>
-              <a:srgbClr val="131B35"/>
-            </a:solidFill>
-            <a:prstDash val="solid"/>
-          </a:ln>
-        </p:spPr>
-      </p:sp>
-      <p:sp>
-        <p:nvSpPr>
-          <p:cNvPr id="3" name="Text 1"/>
-          <p:cNvSpPr txBox="1"/>
-          <p:nvPr/>
-        </p:nvSpPr>
-        <p:spPr>
-          <a:xfrm>
-            <a:off x="548640" y="347472"/>
-            <a:ext cx="2235200" cy="420624"/>
-          </a:xfrm>
-          <a:prstGeom prst="rect">
-            <a:avLst/>
-          </a:prstGeom>
-          <a:noFill/>
-          <a:ln/>
-        </p:spPr>
-        <p:txBody>
-          <a:bodyPr wrap="square" lIns="0" tIns="0" rIns="0" bIns="0" rtlCol="0" anchor="ctr"/>
-          <a:lstStyle/>
-          <a:p>
-            <a:pPr marL="0" indent="0" algn="ctr">
-              <a:buNone/>
-            </a:pPr>
-            <a:r>
-              <a:rPr lang="en-US" sz="2000" b="1" dirty="0">
-                <a:solidFill>
-                  <a:srgbClr val="FFFFFF"/>
-                </a:solidFill>
-                <a:latin typeface="BIZ UDゴシック" pitchFamily="34" charset="0"/>
-                <a:ea typeface="BIZ UDゴシック" pitchFamily="49" charset="-128"/>
-                <a:cs typeface="BIZ UDゴシック" pitchFamily="34" charset="-120"/>
-              </a:rPr>
-              <a:t>第4部 仕掛ける</a:t>
-            </a:r>
-            <a:endParaRPr lang="en-US" sz="2000" dirty="0"/>
-          </a:p>
-        </p:txBody>
-      </p:sp>
-      <p:sp>
-        <p:nvSpPr>
-          <p:cNvPr id="4" name="Text 2"/>
-          <p:cNvSpPr txBox="1"/>
-          <p:nvPr/>
-        </p:nvSpPr>
-        <p:spPr>
-          <a:xfrm>
-            <a:off x="548640" y="868680"/>
-            <a:ext cx="11094415" cy="777240"/>
-          </a:xfrm>
-          <a:prstGeom prst="rect">
-            <a:avLst/>
-          </a:prstGeom>
-          <a:noFill/>
-          <a:ln/>
-        </p:spPr>
-        <p:txBody>
-          <a:bodyPr wrap="square" lIns="0" tIns="0" rIns="0" bIns="0" rtlCol="0" anchor="ctr"/>
-          <a:lstStyle/>
-          <a:p>
-            <a:pPr marL="0" indent="0">
-              <a:buNone/>
-            </a:pPr>
-            <a:r>
-              <a:rPr lang="en-US" sz="3200" b="1" dirty="0">
-                <a:solidFill>
-                  <a:srgbClr val="131B35"/>
-                </a:solidFill>
-                <a:latin typeface="BIZ UDゴシック" pitchFamily="34" charset="0"/>
-                <a:ea typeface="BIZ UDゴシック" pitchFamily="49" charset="-128"/>
-                <a:cs typeface="BIZ UDゴシック" pitchFamily="34" charset="-120"/>
-              </a:rPr>
-              <a:t>成功の鍵は、チェックリストの裏の「見えない社会の力」</a:t>
-            </a:r>
-            <a:endParaRPr lang="en-US" sz="3200" dirty="0"/>
-          </a:p>
-        </p:txBody>
-      </p:sp>
-      <p:sp>
-        <p:nvSpPr>
-          <p:cNvPr id="5" name="Text 3"/>
-          <p:cNvSpPr txBox="1"/>
-          <p:nvPr/>
-        </p:nvSpPr>
-        <p:spPr>
-          <a:xfrm>
-            <a:off x="548640" y="6217920"/>
-            <a:ext cx="10058400" cy="384048"/>
-          </a:xfrm>
-          <a:prstGeom prst="rect">
-            <a:avLst/>
-          </a:prstGeom>
-          <a:noFill/>
-          <a:ln/>
-        </p:spPr>
-        <p:txBody>
-          <a:bodyPr wrap="square" lIns="0" tIns="0" rIns="0" bIns="0" rtlCol="0" anchor="ctr"/>
-          <a:lstStyle/>
-          <a:p>
-            <a:pPr marL="0" indent="0">
-              <a:buNone/>
-            </a:pPr>
-            <a:r>
-              <a:rPr lang="en-US" sz="2000" dirty="0">
-                <a:solidFill>
-                  <a:srgbClr val="4F5B6B"/>
-                </a:solidFill>
-                <a:latin typeface="BIZ UDゴシック" pitchFamily="34" charset="0"/>
-                <a:ea typeface="BIZ UDゴシック" pitchFamily="49" charset="-128"/>
-                <a:cs typeface="BIZ UDゴシック" pitchFamily="34" charset="-120"/>
-              </a:rPr>
-              <a:t>出典：Pronovost P, et al. NEJM 2006; Dixon-Woods M, et al. Milbank Q 2011</a:t>
-            </a:r>
-            <a:endParaRPr lang="en-US" sz="2000" dirty="0"/>
-          </a:p>
-        </p:txBody>
-      </p:sp>
-      <p:sp>
-        <p:nvSpPr>
-          <p:cNvPr id="7" name="Shape 4"/>
-          <p:cNvSpPr/>
-          <p:nvPr/>
-        </p:nvSpPr>
-        <p:spPr>
-          <a:xfrm>
-            <a:off x="548640" y="1965960"/>
-            <a:ext cx="4480560" cy="3977640"/>
-          </a:xfrm>
-          <a:prstGeom prst="roundRect">
-            <a:avLst>
-              <a:gd name="adj" fmla="val 2759"/>
-            </a:avLst>
-          </a:prstGeom>
-          <a:solidFill>
-            <a:srgbClr val="131B35"/>
-          </a:solidFill>
-          <a:ln w="12700">
-            <a:solidFill>
-              <a:srgbClr val="131B35"/>
-            </a:solidFill>
-            <a:prstDash val="solid"/>
-          </a:ln>
-        </p:spPr>
-      </p:sp>
-      <p:sp>
-        <p:nvSpPr>
-          <p:cNvPr id="8" name="Text 5"/>
-          <p:cNvSpPr txBox="1"/>
-          <p:nvPr/>
-        </p:nvSpPr>
-        <p:spPr>
-          <a:xfrm>
-            <a:off x="822960" y="2194560"/>
-            <a:ext cx="3931920" cy="457200"/>
-          </a:xfrm>
-          <a:prstGeom prst="rect">
-            <a:avLst/>
-          </a:prstGeom>
-          <a:noFill/>
-          <a:ln/>
-        </p:spPr>
-        <p:txBody>
-          <a:bodyPr wrap="square" lIns="0" tIns="0" rIns="0" bIns="0" rtlCol="0" anchor="t"/>
-          <a:lstStyle/>
-          <a:p>
-            <a:pPr marL="0" indent="0" algn="ctr">
-              <a:buNone/>
-            </a:pPr>
-            <a:r>
-              <a:rPr lang="en-US" sz="2200" b="1" dirty="0">
-                <a:solidFill>
-                  <a:srgbClr val="3FE8C2"/>
-                </a:solidFill>
-                <a:latin typeface="BIZ UDゴシック" pitchFamily="34" charset="0"/>
-                <a:ea typeface="BIZ UDゴシック" pitchFamily="49" charset="-128"/>
-                <a:cs typeface="BIZ UDゴシック" pitchFamily="34" charset="-120"/>
-              </a:rPr>
-              <a:t>ミシガン州 103のICU</a:t>
-            </a:r>
-            <a:endParaRPr lang="en-US" sz="2200" dirty="0"/>
-          </a:p>
-        </p:txBody>
-      </p:sp>
-      <p:sp>
-        <p:nvSpPr>
-          <p:cNvPr id="9" name="Text 6"/>
-          <p:cNvSpPr txBox="1"/>
-          <p:nvPr/>
-        </p:nvSpPr>
-        <p:spPr>
-          <a:xfrm>
-            <a:off x="822960" y="2743200"/>
-            <a:ext cx="3931920" cy="457200"/>
-          </a:xfrm>
-          <a:prstGeom prst="rect">
-            <a:avLst/>
-          </a:prstGeom>
-          <a:noFill/>
-          <a:ln/>
-        </p:spPr>
-        <p:txBody>
-          <a:bodyPr wrap="square" lIns="0" tIns="0" rIns="0" bIns="0" rtlCol="0" anchor="t"/>
-          <a:lstStyle/>
-          <a:p>
-            <a:pPr marL="0" indent="0" algn="ctr">
-              <a:buNone/>
-            </a:pPr>
-            <a:r>
-              <a:rPr lang="en-US" sz="2200" dirty="0">
-                <a:solidFill>
-                  <a:srgbClr val="FFFFFF"/>
-                </a:solidFill>
-                <a:latin typeface="BIZ UDゴシック" pitchFamily="34" charset="0"/>
-                <a:ea typeface="BIZ UDゴシック" pitchFamily="49" charset="-128"/>
-                <a:cs typeface="BIZ UDゴシック" pitchFamily="34" charset="-120"/>
-              </a:rPr>
-              <a:t>カテーテル関連血流感染</a:t>
-            </a:r>
-            <a:endParaRPr lang="en-US" sz="2200" dirty="0"/>
-          </a:p>
-        </p:txBody>
-      </p:sp>
-      <p:sp>
-        <p:nvSpPr>
-          <p:cNvPr id="10" name="Text 7"/>
-          <p:cNvSpPr txBox="1"/>
-          <p:nvPr/>
-        </p:nvSpPr>
-        <p:spPr>
-          <a:xfrm>
-            <a:off x="731520" y="3291840"/>
-            <a:ext cx="4114800" cy="914400"/>
-          </a:xfrm>
-          <a:prstGeom prst="rect">
-            <a:avLst/>
-          </a:prstGeom>
-          <a:noFill/>
-          <a:ln/>
-        </p:spPr>
-        <p:txBody>
-          <a:bodyPr wrap="square" lIns="0" tIns="0" rIns="0" bIns="0" rtlCol="0" anchor="ctr"/>
-          <a:lstStyle/>
-          <a:p>
-            <a:pPr marL="0" indent="0" algn="ctr">
-              <a:buNone/>
-            </a:pPr>
-            <a:r>
-              <a:rPr lang="en-US" sz="4800" b="1" dirty="0">
-                <a:solidFill>
-                  <a:srgbClr val="3FE8C2"/>
-                </a:solidFill>
-                <a:latin typeface="BIZ UDゴシック" pitchFamily="34" charset="0"/>
-                <a:ea typeface="BIZ UDゴシック" pitchFamily="49" charset="-128"/>
-                <a:cs typeface="BIZ UDゴシック" pitchFamily="34" charset="-120"/>
-              </a:rPr>
-              <a:t>最大66%減</a:t>
-            </a:r>
-            <a:endParaRPr lang="en-US" sz="4800" dirty="0"/>
-          </a:p>
-        </p:txBody>
-      </p:sp>
-      <p:sp>
-        <p:nvSpPr>
-          <p:cNvPr id="11" name="Text 8"/>
-          <p:cNvSpPr txBox="1"/>
-          <p:nvPr/>
-        </p:nvSpPr>
-        <p:spPr>
-          <a:xfrm>
-            <a:off x="822960" y="4343400"/>
-            <a:ext cx="3931920" cy="548640"/>
-          </a:xfrm>
-          <a:prstGeom prst="rect">
-            <a:avLst/>
-          </a:prstGeom>
-          <a:noFill/>
-          <a:ln/>
-        </p:spPr>
-        <p:txBody>
-          <a:bodyPr wrap="square" lIns="0" tIns="0" rIns="0" bIns="0" rtlCol="0" anchor="t"/>
-          <a:lstStyle/>
-          <a:p>
-            <a:pPr marL="0" indent="0" algn="ctr">
-              <a:buNone/>
-            </a:pPr>
-            <a:r>
-              <a:rPr lang="en-US" sz="2800" b="1" dirty="0">
-                <a:solidFill>
-                  <a:srgbClr val="FFFFFF"/>
-                </a:solidFill>
-                <a:latin typeface="BIZ UDゴシック" pitchFamily="34" charset="0"/>
-                <a:ea typeface="BIZ UDゴシック" pitchFamily="49" charset="-128"/>
-                <a:cs typeface="BIZ UDゴシック" pitchFamily="34" charset="-120"/>
-              </a:rPr>
-              <a:t>平均 7.7→1.4</a:t>
-            </a:r>
-            <a:endParaRPr lang="en-US" sz="2800" dirty="0"/>
-          </a:p>
-        </p:txBody>
-      </p:sp>
-      <p:sp>
-        <p:nvSpPr>
-          <p:cNvPr id="12" name="Text 9"/>
-          <p:cNvSpPr txBox="1"/>
-          <p:nvPr/>
-        </p:nvSpPr>
-        <p:spPr>
-          <a:xfrm>
-            <a:off x="822960" y="4937760"/>
-            <a:ext cx="3931920" cy="457200"/>
-          </a:xfrm>
-          <a:prstGeom prst="rect">
-            <a:avLst/>
-          </a:prstGeom>
-          <a:noFill/>
-          <a:ln/>
-        </p:spPr>
-        <p:txBody>
-          <a:bodyPr wrap="square" lIns="0" tIns="0" rIns="0" bIns="0" rtlCol="0" anchor="t"/>
-          <a:lstStyle/>
-          <a:p>
-            <a:pPr marL="0" indent="0" algn="ctr">
-              <a:buNone/>
-            </a:pPr>
-            <a:r>
-              <a:rPr lang="en-US" sz="2000" dirty="0">
-                <a:solidFill>
-                  <a:srgbClr val="C9D4E8"/>
-                </a:solidFill>
-                <a:latin typeface="BIZ UDゴシック" pitchFamily="34" charset="0"/>
-                <a:ea typeface="BIZ UDゴシック" pitchFamily="49" charset="-128"/>
-                <a:cs typeface="BIZ UDゴシック" pitchFamily="34" charset="-120"/>
-              </a:rPr>
-              <a:t>（件／1000カテーテル日）</a:t>
-            </a:r>
-            <a:endParaRPr lang="en-US" sz="2000" dirty="0"/>
-          </a:p>
-        </p:txBody>
-      </p:sp>
-      <p:sp>
-        <p:nvSpPr>
-          <p:cNvPr id="13" name="Text 10"/>
-          <p:cNvSpPr txBox="1"/>
-          <p:nvPr/>
-        </p:nvSpPr>
-        <p:spPr>
-          <a:xfrm>
-            <a:off x="5349240" y="1965960"/>
-            <a:ext cx="6293815" cy="502920"/>
-          </a:xfrm>
-          <a:prstGeom prst="rect">
-            <a:avLst/>
-          </a:prstGeom>
-          <a:noFill/>
-          <a:ln/>
-        </p:spPr>
-        <p:txBody>
-          <a:bodyPr wrap="square" lIns="0" tIns="0" rIns="0" bIns="0" rtlCol="0" anchor="t"/>
-          <a:lstStyle/>
-          <a:p>
-            <a:pPr marL="0" indent="0">
-              <a:buNone/>
-            </a:pPr>
-            <a:r>
-              <a:rPr lang="en-US" sz="2200" b="1" dirty="0">
-                <a:solidFill>
-                  <a:srgbClr val="131B35"/>
-                </a:solidFill>
-                <a:latin typeface="BIZ UDゴシック" pitchFamily="34" charset="0"/>
-                <a:ea typeface="BIZ UDゴシック" pitchFamily="49" charset="-128"/>
-                <a:cs typeface="BIZ UDゴシック" pitchFamily="34" charset="-120"/>
-              </a:rPr>
-              <a:t>なぜ成功したのか（事後の社会学的分析）</a:t>
-            </a:r>
-            <a:endParaRPr lang="en-US" sz="2200" dirty="0"/>
-          </a:p>
-        </p:txBody>
-      </p:sp>
-      <p:sp>
-        <p:nvSpPr>
-          <p:cNvPr id="14" name="Shape 11"/>
-          <p:cNvSpPr/>
-          <p:nvPr/>
-        </p:nvSpPr>
-        <p:spPr>
-          <a:xfrm>
-            <a:off x="5349240" y="2606040"/>
-            <a:ext cx="658368" cy="658368"/>
-          </a:xfrm>
-          <a:prstGeom prst="ellipse">
-            <a:avLst/>
-          </a:prstGeom>
-          <a:solidFill>
-            <a:srgbClr val="0B7A70"/>
-          </a:solidFill>
-          <a:ln w="12700">
-            <a:solidFill>
-              <a:srgbClr val="0B7A70"/>
-            </a:solidFill>
-            <a:prstDash val="solid"/>
-          </a:ln>
-        </p:spPr>
-      </p:sp>
-      <p:pic>
-        <p:nvPicPr>
-          <p:cNvPr id="15" name="Image 0" descr="preencoded.png"/>
-          <p:cNvPicPr>
-            <a:picLocks noChangeAspect="1"/>
-          </p:cNvPicPr>
-          <p:nvPr/>
-        </p:nvPicPr>
-        <p:blipFill>
-          <a:blip r:embed="rId3"/>
-          <a:stretch>
-            <a:fillRect/>
-          </a:stretch>
-        </p:blipFill>
-        <p:spPr>
-          <a:xfrm>
-            <a:off x="5507248" y="2764048"/>
-            <a:ext cx="342351" cy="342351"/>
-          </a:xfrm>
-          <a:prstGeom prst="rect">
-            <a:avLst/>
-          </a:prstGeom>
-        </p:spPr>
-      </p:pic>
-      <p:sp>
-        <p:nvSpPr>
-          <p:cNvPr id="16" name="Text 12"/>
-          <p:cNvSpPr txBox="1"/>
-          <p:nvPr/>
-        </p:nvSpPr>
-        <p:spPr>
-          <a:xfrm>
-            <a:off x="6217920" y="2606040"/>
-            <a:ext cx="5425135" cy="658368"/>
-          </a:xfrm>
-          <a:prstGeom prst="rect">
-            <a:avLst/>
-          </a:prstGeom>
-          <a:noFill/>
-          <a:ln/>
-        </p:spPr>
-        <p:txBody>
-          <a:bodyPr wrap="square" lIns="0" tIns="0" rIns="0" bIns="0" rtlCol="0" anchor="ctr"/>
-          <a:lstStyle/>
-          <a:p>
-            <a:pPr marL="0" indent="0">
-              <a:buNone/>
-            </a:pPr>
-            <a:r>
-              <a:rPr lang="en-US" sz="2200" dirty="0">
-                <a:solidFill>
-                  <a:srgbClr val="1B2333"/>
-                </a:solidFill>
-                <a:latin typeface="BIZ UDゴシック" pitchFamily="34" charset="0"/>
-                <a:ea typeface="BIZ UDゴシック" pitchFamily="49" charset="-128"/>
-                <a:cs typeface="BIZ UDゴシック" pitchFamily="34" charset="-120"/>
-              </a:rPr>
-              <a:t>仲間のネットワークが「規範」をつくった</a:t>
-            </a:r>
-            <a:endParaRPr lang="en-US" sz="2200" dirty="0"/>
-          </a:p>
-        </p:txBody>
-      </p:sp>
-      <p:sp>
-        <p:nvSpPr>
-          <p:cNvPr id="17" name="Shape 13"/>
-          <p:cNvSpPr/>
-          <p:nvPr/>
-        </p:nvSpPr>
-        <p:spPr>
-          <a:xfrm>
-            <a:off x="5349240" y="3447288"/>
-            <a:ext cx="658368" cy="658368"/>
-          </a:xfrm>
-          <a:prstGeom prst="ellipse">
-            <a:avLst/>
-          </a:prstGeom>
-          <a:solidFill>
-            <a:srgbClr val="0B7A70"/>
-          </a:solidFill>
-          <a:ln w="12700">
-            <a:solidFill>
-              <a:srgbClr val="0B7A70"/>
-            </a:solidFill>
-            <a:prstDash val="solid"/>
-          </a:ln>
-        </p:spPr>
-      </p:sp>
-      <p:pic>
-        <p:nvPicPr>
-          <p:cNvPr id="18" name="Image 1" descr="preencoded.png"/>
-          <p:cNvPicPr>
-            <a:picLocks noChangeAspect="1"/>
-          </p:cNvPicPr>
-          <p:nvPr/>
-        </p:nvPicPr>
-        <p:blipFill>
-          <a:blip r:embed="rId4"/>
-          <a:stretch>
-            <a:fillRect/>
-          </a:stretch>
-        </p:blipFill>
-        <p:spPr>
-          <a:xfrm>
-            <a:off x="5507248" y="3605296"/>
-            <a:ext cx="342351" cy="342351"/>
-          </a:xfrm>
-          <a:prstGeom prst="rect">
-            <a:avLst/>
-          </a:prstGeom>
-        </p:spPr>
-      </p:pic>
-      <p:sp>
-        <p:nvSpPr>
-          <p:cNvPr id="19" name="Text 14"/>
-          <p:cNvSpPr txBox="1"/>
-          <p:nvPr/>
-        </p:nvSpPr>
-        <p:spPr>
-          <a:xfrm>
-            <a:off x="6217920" y="3447288"/>
-            <a:ext cx="5425135" cy="658368"/>
-          </a:xfrm>
-          <a:prstGeom prst="rect">
-            <a:avLst/>
-          </a:prstGeom>
-          <a:noFill/>
-          <a:ln/>
-        </p:spPr>
-        <p:txBody>
-          <a:bodyPr wrap="square" lIns="0" tIns="0" rIns="0" bIns="0" rtlCol="0" anchor="ctr"/>
-          <a:lstStyle/>
-          <a:p>
-            <a:pPr marL="0" indent="0">
-              <a:buNone/>
-            </a:pPr>
-            <a:r>
-              <a:rPr lang="en-US" sz="2200" dirty="0">
-                <a:solidFill>
-                  <a:srgbClr val="1B2333"/>
-                </a:solidFill>
-                <a:latin typeface="BIZ UDゴシック" pitchFamily="34" charset="0"/>
-                <a:ea typeface="BIZ UDゴシック" pitchFamily="49" charset="-128"/>
-                <a:cs typeface="BIZ UDゴシック" pitchFamily="34" charset="-120"/>
-              </a:rPr>
-              <a:t>感染を「防げる問題」と捉え直した</a:t>
-            </a:r>
-            <a:endParaRPr lang="en-US" sz="2200" dirty="0"/>
-          </a:p>
-        </p:txBody>
-      </p:sp>
-      <p:sp>
-        <p:nvSpPr>
-          <p:cNvPr id="20" name="Shape 15"/>
-          <p:cNvSpPr/>
-          <p:nvPr/>
-        </p:nvSpPr>
-        <p:spPr>
-          <a:xfrm>
-            <a:off x="5349240" y="4288536"/>
-            <a:ext cx="658368" cy="658368"/>
-          </a:xfrm>
-          <a:prstGeom prst="ellipse">
-            <a:avLst/>
-          </a:prstGeom>
-          <a:solidFill>
-            <a:srgbClr val="0B7A70"/>
-          </a:solidFill>
-          <a:ln w="12700">
-            <a:solidFill>
-              <a:srgbClr val="0B7A70"/>
-            </a:solidFill>
-            <a:prstDash val="solid"/>
-          </a:ln>
-        </p:spPr>
-      </p:sp>
-      <p:pic>
-        <p:nvPicPr>
-          <p:cNvPr id="21" name="Image 2" descr="preencoded.png"/>
-          <p:cNvPicPr>
-            <a:picLocks noChangeAspect="1"/>
-          </p:cNvPicPr>
-          <p:nvPr/>
-        </p:nvPicPr>
-        <p:blipFill>
-          <a:blip r:embed="rId5"/>
-          <a:stretch>
-            <a:fillRect/>
-          </a:stretch>
-        </p:blipFill>
-        <p:spPr>
-          <a:xfrm>
-            <a:off x="5507248" y="4446544"/>
-            <a:ext cx="342351" cy="342351"/>
-          </a:xfrm>
-          <a:prstGeom prst="rect">
-            <a:avLst/>
-          </a:prstGeom>
-        </p:spPr>
-      </p:pic>
-      <p:sp>
-        <p:nvSpPr>
-          <p:cNvPr id="22" name="Text 16"/>
-          <p:cNvSpPr txBox="1"/>
-          <p:nvPr/>
-        </p:nvSpPr>
-        <p:spPr>
-          <a:xfrm>
-            <a:off x="6217920" y="4288536"/>
-            <a:ext cx="5425135" cy="658368"/>
-          </a:xfrm>
-          <a:prstGeom prst="rect">
-            <a:avLst/>
-          </a:prstGeom>
-          <a:noFill/>
-          <a:ln/>
-        </p:spPr>
-        <p:txBody>
-          <a:bodyPr wrap="square" lIns="0" tIns="0" rIns="0" bIns="0" rtlCol="0" anchor="ctr"/>
-          <a:lstStyle/>
-          <a:p>
-            <a:pPr marL="0" indent="0">
-              <a:buNone/>
-            </a:pPr>
-            <a:r>
-              <a:rPr lang="en-US" sz="2200" dirty="0">
-                <a:solidFill>
-                  <a:srgbClr val="1B2333"/>
-                </a:solidFill>
-                <a:latin typeface="BIZ UDゴシック" pitchFamily="34" charset="0"/>
-                <a:ea typeface="BIZ UDゴシック" pitchFamily="49" charset="-128"/>
-                <a:cs typeface="BIZ UDゴシック" pitchFamily="34" charset="-120"/>
-              </a:rPr>
-              <a:t>データを共有し、行動の力にした</a:t>
-            </a:r>
-            <a:endParaRPr lang="en-US" sz="2200" dirty="0"/>
-          </a:p>
-        </p:txBody>
-      </p:sp>
-      <p:sp>
-        <p:nvSpPr>
-          <p:cNvPr id="23" name="Shape 17"/>
-          <p:cNvSpPr/>
-          <p:nvPr/>
-        </p:nvSpPr>
-        <p:spPr>
-          <a:xfrm>
-            <a:off x="5349240" y="5129784"/>
-            <a:ext cx="658368" cy="658368"/>
-          </a:xfrm>
-          <a:prstGeom prst="ellipse">
-            <a:avLst/>
-          </a:prstGeom>
-          <a:solidFill>
-            <a:srgbClr val="0B7A70"/>
-          </a:solidFill>
-          <a:ln w="12700">
-            <a:solidFill>
-              <a:srgbClr val="0B7A70"/>
-            </a:solidFill>
-            <a:prstDash val="solid"/>
-          </a:ln>
-        </p:spPr>
-      </p:sp>
-      <p:pic>
-        <p:nvPicPr>
-          <p:cNvPr id="24" name="Image 3" descr="preencoded.png"/>
-          <p:cNvPicPr>
-            <a:picLocks noChangeAspect="1"/>
-          </p:cNvPicPr>
-          <p:nvPr/>
-        </p:nvPicPr>
-        <p:blipFill>
-          <a:blip r:embed="rId6"/>
-          <a:stretch>
-            <a:fillRect/>
-          </a:stretch>
-        </p:blipFill>
-        <p:spPr>
-          <a:xfrm>
-            <a:off x="5507248" y="5287792"/>
-            <a:ext cx="342351" cy="342351"/>
-          </a:xfrm>
-          <a:prstGeom prst="rect">
-            <a:avLst/>
-          </a:prstGeom>
-        </p:spPr>
-      </p:pic>
-      <p:sp>
-        <p:nvSpPr>
-          <p:cNvPr id="25" name="Text 18"/>
-          <p:cNvSpPr txBox="1"/>
-          <p:nvPr/>
-        </p:nvSpPr>
-        <p:spPr>
-          <a:xfrm>
-            <a:off x="6217920" y="5129784"/>
-            <a:ext cx="5425135" cy="658368"/>
-          </a:xfrm>
-          <a:prstGeom prst="rect">
-            <a:avLst/>
-          </a:prstGeom>
-          <a:noFill/>
-          <a:ln/>
-        </p:spPr>
-        <p:txBody>
-          <a:bodyPr wrap="square" lIns="0" tIns="0" rIns="0" bIns="0" rtlCol="0" anchor="ctr"/>
-          <a:lstStyle/>
-          <a:p>
-            <a:pPr marL="0" indent="0">
-              <a:buNone/>
-            </a:pPr>
-            <a:r>
-              <a:rPr lang="en-US" sz="2200" dirty="0">
-                <a:solidFill>
-                  <a:srgbClr val="1B2333"/>
-                </a:solidFill>
-                <a:latin typeface="BIZ UDゴシック" pitchFamily="34" charset="0"/>
-                <a:ea typeface="BIZ UDゴシック" pitchFamily="49" charset="-128"/>
-                <a:cs typeface="BIZ UDゴシック" pitchFamily="34" charset="-120"/>
-              </a:rPr>
-              <a:t>現場を巻き込み、文化をつくった</a:t>
-            </a:r>
-            <a:endParaRPr lang="en-US" sz="2200" dirty="0"/>
-          </a:p>
-        </p:txBody>
-      </p:sp>
-      <p:sp>
-        <p:nvSpPr>
-          <p:cNvPr id="6" name="Slide Number Placeholder 0"/>
-          <p:cNvSpPr>
-            <a:spLocks noGrp="1"/>
-          </p:cNvSpPr>
-          <p:nvPr>
-            <p:ph type="sldNum" sz="quarter" idx="4294967295"/>
-          </p:nvPr>
-        </p:nvSpPr>
-        <p:spPr>
-          <a:xfrm>
-            <a:off x="11000232" y="6217920"/>
-            <a:ext cx="640080" cy="384048"/>
-          </a:xfrm>
-          <a:prstGeom prst="rect">
-            <a:avLst/>
-          </a:prstGeom>
-          <a:extLst>
-            <a:ext uri="{C572A759-6A51-4108-AA02-DFA0A04FC94B}">
-              <ma14:wrappingTextBoxFlag xmlns="" xmlns:ma14="http://schemas.microsoft.com/office/mac/drawingml/2011/main" val="0"/>
-            </a:ext>
-          </a:extLst>
-        </p:spPr>
-        <p:txBody>
-          <a:bodyPr/>
-          <a:lstStyle>
-            <a:lvl1pPr>
-              <a:defRPr sz="2000">
-                <a:solidFill>
-                  <a:srgbClr val="8A96A8"/>
-                </a:solidFill>
-                <a:latin typeface="BIZ UDゴシック"/>
-                <a:ea typeface="BIZ UDゴシック"/>
-                <a:cs typeface="BIZ UDゴシック"/>
-              </a:defRPr>
-            </a:lvl1pPr>
-          </a:lstStyle>
-          <a:p>
-            <a:pPr algn="r"/>
-            <a:fld id="{F7021451-1387-4CA6-816F-3879F97B5CBC}" type="slidenum">
-              <a:rPr lang="en-US" b="0"/>
-              <a:t>40</a:t>
-            </a:fld>
-            <a:endParaRPr lang="en-US"/>
-          </a:p>
-        </p:txBody>
-      </p:sp>
-    </p:spTree>
-  </p:cSld>
-  <p:clrMapOvr>
-    <a:masterClrMapping/>
-  </p:clrMapOvr>
-</p:sld>
-</file>
-
 <file path=ppt/slides/slide41.xml><?xml version="1.0" encoding="utf-8"?>
 <p:sld xmlns:a="http://schemas.openxmlformats.org/drawingml/2006/main" xmlns:r="http://schemas.openxmlformats.org/officeDocument/2006/relationships" xmlns:p="http://schemas.openxmlformats.org/presentationml/2006/main">
   <p:cSld name="Slide 39">
@@ -32503,918 +30438,6 @@
 </p:sld>
 </file>
 
-<file path=ppt/slides/slide45.xml><?xml version="1.0" encoding="utf-8"?>
-<p:sld xmlns:a="http://schemas.openxmlformats.org/drawingml/2006/main" xmlns:r="http://schemas.openxmlformats.org/officeDocument/2006/relationships" xmlns:p="http://schemas.openxmlformats.org/presentationml/2006/main">
-  <p:cSld name="Slide 1">
-    <p:bg>
-      <p:bgPr>
-        <a:solidFill>
-          <a:srgbClr val="FFFFFF"/>
-        </a:solidFill>
-      </p:bgPr>
-    </p:bg>
-    <p:spTree>
-      <p:nvGrpSpPr>
-        <p:cNvPr id="1" name=""/>
-        <p:cNvGrpSpPr/>
-        <p:nvPr/>
-      </p:nvGrpSpPr>
-      <p:grpSpPr>
-        <a:xfrm>
-          <a:off x="0" y="0"/>
-          <a:ext cx="0" cy="0"/>
-          <a:chOff x="0" y="0"/>
-          <a:chExt cx="0" cy="0"/>
-        </a:xfrm>
-      </p:grpSpPr>
-      <p:sp>
-        <p:nvSpPr>
-          <p:cNvPr id="2" name="Shape 0"/>
-          <p:cNvSpPr/>
-          <p:nvPr/>
-        </p:nvSpPr>
-        <p:spPr>
-          <a:xfrm>
-            <a:off x="548640" y="347472"/>
-            <a:ext cx="2235200" cy="420624"/>
-          </a:xfrm>
-          <a:prstGeom prst="roundRect">
-            <a:avLst>
-              <a:gd name="adj" fmla="val 50000"/>
-            </a:avLst>
-          </a:prstGeom>
-          <a:solidFill>
-            <a:srgbClr val="2F6FA8"/>
-          </a:solidFill>
-          <a:ln w="12700">
-            <a:solidFill>
-              <a:srgbClr val="2F6FA8"/>
-            </a:solidFill>
-            <a:prstDash val="solid"/>
-          </a:ln>
-        </p:spPr>
-      </p:sp>
-      <p:sp>
-        <p:nvSpPr>
-          <p:cNvPr id="3" name="Text 1"/>
-          <p:cNvSpPr txBox="1"/>
-          <p:nvPr/>
-        </p:nvSpPr>
-        <p:spPr>
-          <a:xfrm>
-            <a:off x="548640" y="347472"/>
-            <a:ext cx="2235200" cy="420624"/>
-          </a:xfrm>
-          <a:prstGeom prst="rect">
-            <a:avLst/>
-          </a:prstGeom>
-          <a:noFill/>
-          <a:ln/>
-        </p:spPr>
-        <p:txBody>
-          <a:bodyPr wrap="square" lIns="0" tIns="0" rIns="0" bIns="0" rtlCol="0" anchor="ctr"/>
-          <a:lstStyle/>
-          <a:p>
-            <a:pPr algn="ctr" indent="0" marL="0">
-              <a:buNone/>
-            </a:pPr>
-            <a:r>
-              <a:rPr lang="en-US" sz="2000" b="1" dirty="0">
-                <a:solidFill>
-                  <a:srgbClr val="FFFFFF"/>
-                </a:solidFill>
-                <a:latin typeface="BIZ UDゴシック" pitchFamily="34" charset="0"/>
-                <a:ea typeface="BIZ UDゴシック" pitchFamily="49" charset="-128"/>
-                <a:cs typeface="BIZ UDゴシック" pitchFamily="34" charset="-120"/>
-              </a:rPr>
-              <a:t>ナッジって何？</a:t>
-            </a:r>
-            <a:endParaRPr lang="en-US" sz="2000" dirty="0"/>
-          </a:p>
-        </p:txBody>
-      </p:sp>
-      <p:sp>
-        <p:nvSpPr>
-          <p:cNvPr id="4" name="Text 2"/>
-          <p:cNvSpPr txBox="1"/>
-          <p:nvPr/>
-        </p:nvSpPr>
-        <p:spPr>
-          <a:xfrm>
-            <a:off x="548640" y="868680"/>
-            <a:ext cx="11094415" cy="777240"/>
-          </a:xfrm>
-          <a:prstGeom prst="rect">
-            <a:avLst/>
-          </a:prstGeom>
-          <a:noFill/>
-          <a:ln/>
-        </p:spPr>
-        <p:txBody>
-          <a:bodyPr wrap="square" lIns="0" tIns="0" rIns="0" bIns="0" rtlCol="0" anchor="ctr"/>
-          <a:lstStyle/>
-          <a:p>
-            <a:pPr indent="0" marL="0">
-              <a:buNone/>
-            </a:pPr>
-            <a:r>
-              <a:rPr lang="en-US" sz="3200" b="1" dirty="0">
-                <a:solidFill>
-                  <a:srgbClr val="131B35"/>
-                </a:solidFill>
-                <a:latin typeface="BIZ UDゴシック" pitchFamily="34" charset="0"/>
-                <a:ea typeface="BIZ UDゴシック" pitchFamily="49" charset="-128"/>
-                <a:cs typeface="BIZ UDゴシック" pitchFamily="34" charset="-120"/>
-              </a:rPr>
-              <a:t>ナッジ＝ひじで「そっと押す」。禁止も強制もしない</a:t>
-            </a:r>
-            <a:endParaRPr lang="en-US" sz="3200" dirty="0"/>
-          </a:p>
-        </p:txBody>
-      </p:sp>
-      <p:sp>
-        <p:nvSpPr>
-          <p:cNvPr id="5" name="Text 3"/>
-          <p:cNvSpPr txBox="1"/>
-          <p:nvPr/>
-        </p:nvSpPr>
-        <p:spPr>
-          <a:xfrm>
-            <a:off x="548640" y="6217920"/>
-            <a:ext cx="10058400" cy="384048"/>
-          </a:xfrm>
-          <a:prstGeom prst="rect">
-            <a:avLst/>
-          </a:prstGeom>
-          <a:noFill/>
-          <a:ln/>
-        </p:spPr>
-        <p:txBody>
-          <a:bodyPr wrap="square" lIns="0" tIns="0" rIns="0" bIns="0" rtlCol="0" anchor="ctr"/>
-          <a:lstStyle/>
-          <a:p>
-            <a:pPr indent="0" marL="0">
-              <a:buNone/>
-            </a:pPr>
-            <a:r>
-              <a:rPr lang="en-US" sz="2000" dirty="0">
-                <a:solidFill>
-                  <a:srgbClr val="4F5B6B"/>
-                </a:solidFill>
-                <a:latin typeface="BIZ UDゴシック" pitchFamily="34" charset="0"/>
-                <a:ea typeface="BIZ UDゴシック" pitchFamily="49" charset="-128"/>
-                <a:cs typeface="BIZ UDゴシック" pitchFamily="34" charset="-120"/>
-              </a:rPr>
-              <a:t>出典：Thaler RH, Sunstein CR. Nudge. Yale Univ Press 2008</a:t>
-            </a:r>
-            <a:endParaRPr lang="en-US" sz="2000" dirty="0"/>
-          </a:p>
-        </p:txBody>
-      </p:sp>
-      <p:sp>
-        <p:nvSpPr>
-          <p:cNvPr id="7" name="Shape 4"/>
-          <p:cNvSpPr/>
-          <p:nvPr/>
-        </p:nvSpPr>
-        <p:spPr>
-          <a:xfrm>
-            <a:off x="548640" y="1965960"/>
-            <a:ext cx="5120640" cy="3977640"/>
-          </a:xfrm>
-          <a:prstGeom prst="roundRect">
-            <a:avLst>
-              <a:gd name="adj" fmla="val 2759"/>
-            </a:avLst>
-          </a:prstGeom>
-          <a:solidFill>
-            <a:srgbClr val="131B35"/>
-          </a:solidFill>
-          <a:ln w="12700">
-            <a:solidFill>
-              <a:srgbClr val="131B35"/>
-            </a:solidFill>
-            <a:prstDash val="solid"/>
-          </a:ln>
-        </p:spPr>
-      </p:sp>
-      <p:sp>
-        <p:nvSpPr>
-          <p:cNvPr id="8" name="Shape 5"/>
-          <p:cNvSpPr/>
-          <p:nvPr/>
-        </p:nvSpPr>
-        <p:spPr>
-          <a:xfrm>
-            <a:off x="868680" y="2240280"/>
-            <a:ext cx="914400" cy="914400"/>
-          </a:xfrm>
-          <a:prstGeom prst="ellipse">
-            <a:avLst/>
-          </a:prstGeom>
-          <a:solidFill>
-            <a:srgbClr val="1E2A4F"/>
-          </a:solidFill>
-          <a:ln w="12700">
-            <a:solidFill>
-              <a:srgbClr val="1E2A4F"/>
-            </a:solidFill>
-            <a:prstDash val="solid"/>
-          </a:ln>
-        </p:spPr>
-      </p:sp>
-      <p:pic>
-        <p:nvPicPr>
-          <p:cNvPr id="9" name="Image 0" descr="preencoded.png">    </p:cNvPr>
-          <p:cNvPicPr>
-            <a:picLocks noChangeAspect="1"/>
-          </p:cNvPicPr>
-          <p:nvPr/>
-        </p:nvPicPr>
-        <p:blipFill>
-          <a:blip r:embed="rId1"/>
-          <a:stretch>
-            <a:fillRect/>
-          </a:stretch>
-        </p:blipFill>
-        <p:spPr>
-          <a:xfrm>
-            <a:off x="1088136" y="2459736"/>
-            <a:ext cx="475488" cy="475488"/>
-          </a:xfrm>
-          <a:prstGeom prst="rect">
-            <a:avLst/>
-          </a:prstGeom>
-        </p:spPr>
-      </p:pic>
-      <p:sp>
-        <p:nvSpPr>
-          <p:cNvPr id="10" name="Text 6"/>
-          <p:cNvSpPr txBox="1"/>
-          <p:nvPr/>
-        </p:nvSpPr>
-        <p:spPr>
-          <a:xfrm>
-            <a:off x="2011680" y="2240280"/>
-            <a:ext cx="3566160" cy="914400"/>
-          </a:xfrm>
-          <a:prstGeom prst="rect">
-            <a:avLst/>
-          </a:prstGeom>
-          <a:noFill/>
-          <a:ln/>
-        </p:spPr>
-        <p:txBody>
-          <a:bodyPr wrap="square" lIns="0" tIns="0" rIns="0" bIns="0" rtlCol="0" anchor="ctr"/>
-          <a:lstStyle/>
-          <a:p>
-            <a:pPr indent="0" marL="0">
-              <a:buNone/>
-            </a:pPr>
-            <a:r>
-              <a:rPr lang="en-US" sz="2200" b="1" dirty="0">
-                <a:solidFill>
-                  <a:srgbClr val="3FE8C2"/>
-                </a:solidFill>
-                <a:latin typeface="BIZ UDゴシック" pitchFamily="34" charset="0"/>
-                <a:ea typeface="BIZ UDゴシック" pitchFamily="49" charset="-128"/>
-                <a:cs typeface="BIZ UDゴシック" pitchFamily="34" charset="-120"/>
-              </a:rPr>
-              <a:t>nudge（ナッジ）</a:t>
-            </a:r>
-            <a:endParaRPr lang="en-US" sz="2200" dirty="0"/>
-          </a:p>
-          <a:p>
-            <a:pPr indent="0" marL="0">
-              <a:buNone/>
-            </a:pPr>
-            <a:r>
-              <a:rPr lang="en-US" sz="2200" b="1" dirty="0">
-                <a:solidFill>
-                  <a:srgbClr val="3FE8C2"/>
-                </a:solidFill>
-                <a:latin typeface="BIZ UDゴシック" pitchFamily="34" charset="0"/>
-                <a:ea typeface="BIZ UDゴシック" pitchFamily="49" charset="-128"/>
-                <a:cs typeface="BIZ UDゴシック" pitchFamily="34" charset="-120"/>
-              </a:rPr>
-              <a:t>＝ひじで軽くつつく</a:t>
-            </a:r>
-            <a:endParaRPr lang="en-US" sz="2200" dirty="0"/>
-          </a:p>
-        </p:txBody>
-      </p:sp>
-      <p:sp>
-        <p:nvSpPr>
-          <p:cNvPr id="11" name="Text 7"/>
-          <p:cNvSpPr txBox="1"/>
-          <p:nvPr/>
-        </p:nvSpPr>
-        <p:spPr>
-          <a:xfrm>
-            <a:off x="868680" y="3429000"/>
-            <a:ext cx="4572000" cy="1463040"/>
-          </a:xfrm>
-          <a:prstGeom prst="rect">
-            <a:avLst/>
-          </a:prstGeom>
-          <a:noFill/>
-          <a:ln/>
-        </p:spPr>
-        <p:txBody>
-          <a:bodyPr wrap="square" lIns="0" tIns="0" rIns="0" bIns="0" rtlCol="0" anchor="t"/>
-          <a:lstStyle/>
-          <a:p>
-            <a:pPr indent="0" marL="0">
-              <a:spcAft>
-                <a:spcPts val="400"/>
-              </a:spcAft>
-              <a:buNone/>
-            </a:pPr>
-            <a:r>
-              <a:rPr lang="en-US" sz="2600" dirty="0">
-                <a:solidFill>
-                  <a:srgbClr val="FFFFFF"/>
-                </a:solidFill>
-                <a:latin typeface="BIZ UDゴシック" pitchFamily="34" charset="0"/>
-                <a:ea typeface="BIZ UDゴシック" pitchFamily="49" charset="-128"/>
-                <a:cs typeface="BIZ UDゴシック" pitchFamily="34" charset="-120"/>
-              </a:rPr>
-              <a:t>選ぶ自由は残したまま、</a:t>
-            </a:r>
-            <a:endParaRPr lang="en-US" sz="2600" dirty="0"/>
-          </a:p>
-          <a:p>
-            <a:pPr indent="0" marL="0">
-              <a:spcAft>
-                <a:spcPts val="400"/>
-              </a:spcAft>
-              <a:buNone/>
-            </a:pPr>
-            <a:r>
-              <a:rPr lang="en-US" sz="2600" dirty="0">
-                <a:solidFill>
-                  <a:srgbClr val="FFFFFF"/>
-                </a:solidFill>
-                <a:latin typeface="BIZ UDゴシック" pitchFamily="34" charset="0"/>
-                <a:ea typeface="BIZ UDゴシック" pitchFamily="49" charset="-128"/>
-                <a:cs typeface="BIZ UDゴシック" pitchFamily="34" charset="-120"/>
-              </a:rPr>
-              <a:t>望ましい行動を</a:t>
-            </a:r>
-            <a:endParaRPr lang="en-US" sz="2600" dirty="0"/>
-          </a:p>
-          <a:p>
-            <a:pPr indent="0" marL="0">
-              <a:spcAft>
-                <a:spcPts val="400"/>
-              </a:spcAft>
-              <a:buNone/>
-            </a:pPr>
-            <a:r>
-              <a:rPr lang="en-US" sz="2600" b="1" dirty="0">
-                <a:solidFill>
-                  <a:srgbClr val="3FE8C2"/>
-                </a:solidFill>
-                <a:latin typeface="BIZ UDゴシック" pitchFamily="34" charset="0"/>
-                <a:ea typeface="BIZ UDゴシック" pitchFamily="49" charset="-128"/>
-                <a:cs typeface="BIZ UDゴシック" pitchFamily="34" charset="-120"/>
-              </a:rPr>
-              <a:t>「選びやすく」する工夫</a:t>
-            </a:r>
-            <a:endParaRPr lang="en-US" sz="2600" dirty="0"/>
-          </a:p>
-        </p:txBody>
-      </p:sp>
-      <p:sp>
-        <p:nvSpPr>
-          <p:cNvPr id="12" name="Text 8"/>
-          <p:cNvSpPr txBox="1"/>
-          <p:nvPr/>
-        </p:nvSpPr>
-        <p:spPr>
-          <a:xfrm>
-            <a:off x="868680" y="5120640"/>
-            <a:ext cx="4572000" cy="548640"/>
-          </a:xfrm>
-          <a:prstGeom prst="rect">
-            <a:avLst/>
-          </a:prstGeom>
-          <a:noFill/>
-          <a:ln/>
-        </p:spPr>
-        <p:txBody>
-          <a:bodyPr wrap="square" lIns="0" tIns="0" rIns="0" bIns="0" rtlCol="0" anchor="ctr"/>
-          <a:lstStyle/>
-          <a:p>
-            <a:pPr indent="0" marL="0">
-              <a:buNone/>
-            </a:pPr>
-            <a:r>
-              <a:rPr lang="en-US" sz="2000" dirty="0">
-                <a:solidFill>
-                  <a:srgbClr val="C9D4E8"/>
-                </a:solidFill>
-                <a:latin typeface="BIZ UDゴシック" pitchFamily="34" charset="0"/>
-                <a:ea typeface="BIZ UDゴシック" pitchFamily="49" charset="-128"/>
-                <a:cs typeface="BIZ UDゴシック" pitchFamily="34" charset="-120"/>
-              </a:rPr>
-              <a:t>× 禁止・強制　× ごほうび・罰金</a:t>
-            </a:r>
-            <a:endParaRPr lang="en-US" sz="2000" dirty="0"/>
-          </a:p>
-        </p:txBody>
-      </p:sp>
-      <p:sp>
-        <p:nvSpPr>
-          <p:cNvPr id="13" name="Text 9"/>
-          <p:cNvSpPr txBox="1"/>
-          <p:nvPr/>
-        </p:nvSpPr>
-        <p:spPr>
-          <a:xfrm>
-            <a:off x="6035040" y="1965960"/>
-            <a:ext cx="5608015" cy="457200"/>
-          </a:xfrm>
-          <a:prstGeom prst="rect">
-            <a:avLst/>
-          </a:prstGeom>
-          <a:noFill/>
-          <a:ln/>
-        </p:spPr>
-        <p:txBody>
-          <a:bodyPr wrap="square" lIns="0" tIns="0" rIns="0" bIns="0" rtlCol="0" anchor="t"/>
-          <a:lstStyle/>
-          <a:p>
-            <a:pPr indent="0" marL="0">
-              <a:buNone/>
-            </a:pPr>
-            <a:r>
-              <a:rPr lang="en-US" sz="2400" b="1" dirty="0">
-                <a:solidFill>
-                  <a:srgbClr val="131B35"/>
-                </a:solidFill>
-                <a:latin typeface="BIZ UDゴシック" pitchFamily="34" charset="0"/>
-                <a:ea typeface="BIZ UDゴシック" pitchFamily="49" charset="-128"/>
-                <a:cs typeface="BIZ UDゴシック" pitchFamily="34" charset="-120"/>
-              </a:rPr>
-              <a:t>身近なナッジ</a:t>
-            </a:r>
-            <a:endParaRPr lang="en-US" sz="2400" dirty="0"/>
-          </a:p>
-        </p:txBody>
-      </p:sp>
-      <p:sp>
-        <p:nvSpPr>
-          <p:cNvPr id="14" name="Shape 10"/>
-          <p:cNvSpPr/>
-          <p:nvPr/>
-        </p:nvSpPr>
-        <p:spPr>
-          <a:xfrm>
-            <a:off x="6035040" y="2560320"/>
-            <a:ext cx="5608015" cy="1005840"/>
-          </a:xfrm>
-          <a:prstGeom prst="roundRect">
-            <a:avLst>
-              <a:gd name="adj" fmla="val 10909"/>
-            </a:avLst>
-          </a:prstGeom>
-          <a:solidFill>
-            <a:srgbClr val="EEF2F7"/>
-          </a:solidFill>
-          <a:ln w="12700">
-            <a:solidFill>
-              <a:srgbClr val="EEF2F7"/>
-            </a:solidFill>
-            <a:prstDash val="solid"/>
-          </a:ln>
-        </p:spPr>
-      </p:sp>
-      <p:sp>
-        <p:nvSpPr>
-          <p:cNvPr id="15" name="Shape 11"/>
-          <p:cNvSpPr/>
-          <p:nvPr/>
-        </p:nvSpPr>
-        <p:spPr>
-          <a:xfrm>
-            <a:off x="6217920" y="2715768"/>
-            <a:ext cx="694944" cy="694944"/>
-          </a:xfrm>
-          <a:prstGeom prst="ellipse">
-            <a:avLst/>
-          </a:prstGeom>
-          <a:solidFill>
-            <a:srgbClr val="2F6FA8"/>
-          </a:solidFill>
-          <a:ln w="12700">
-            <a:solidFill>
-              <a:srgbClr val="2F6FA8"/>
-            </a:solidFill>
-            <a:prstDash val="solid"/>
-          </a:ln>
-        </p:spPr>
-      </p:sp>
-      <p:pic>
-        <p:nvPicPr>
-          <p:cNvPr id="16" name="Image 1" descr="preencoded.png">    </p:cNvPr>
-          <p:cNvPicPr>
-            <a:picLocks noChangeAspect="1"/>
-          </p:cNvPicPr>
-          <p:nvPr/>
-        </p:nvPicPr>
-        <p:blipFill>
-          <a:blip r:embed="rId2"/>
-          <a:stretch>
-            <a:fillRect/>
-          </a:stretch>
-        </p:blipFill>
-        <p:spPr>
-          <a:xfrm>
-            <a:off x="6384707" y="2882555"/>
-            <a:ext cx="361371" cy="361371"/>
-          </a:xfrm>
-          <a:prstGeom prst="rect">
-            <a:avLst/>
-          </a:prstGeom>
-        </p:spPr>
-      </p:pic>
-      <p:sp>
-        <p:nvSpPr>
-          <p:cNvPr id="17" name="Text 12"/>
-          <p:cNvSpPr txBox="1"/>
-          <p:nvPr/>
-        </p:nvSpPr>
-        <p:spPr>
-          <a:xfrm>
-            <a:off x="7086600" y="2633472"/>
-            <a:ext cx="4465015" cy="859536"/>
-          </a:xfrm>
-          <a:prstGeom prst="rect">
-            <a:avLst/>
-          </a:prstGeom>
-          <a:noFill/>
-          <a:ln/>
-        </p:spPr>
-        <p:txBody>
-          <a:bodyPr wrap="square" lIns="0" tIns="0" rIns="0" bIns="0" rtlCol="0" anchor="ctr"/>
-          <a:lstStyle/>
-          <a:p>
-            <a:pPr indent="0" marL="0">
-              <a:buNone/>
-            </a:pPr>
-            <a:r>
-              <a:rPr lang="en-US" sz="2000" b="1" dirty="0">
-                <a:solidFill>
-                  <a:srgbClr val="131B35"/>
-                </a:solidFill>
-                <a:latin typeface="BIZ UDゴシック" pitchFamily="34" charset="0"/>
-                <a:ea typeface="BIZ UDゴシック" pitchFamily="49" charset="-128"/>
-                <a:cs typeface="BIZ UDゴシック" pitchFamily="34" charset="-120"/>
-              </a:rPr>
-              <a:t>レジ前の足あとマーク</a:t>
-            </a:r>
-            <a:endParaRPr lang="en-US" sz="2000" dirty="0"/>
-          </a:p>
-          <a:p>
-            <a:pPr indent="0" marL="0">
-              <a:buNone/>
-            </a:pPr>
-            <a:r>
-              <a:rPr lang="en-US" sz="2000" dirty="0">
-                <a:solidFill>
-                  <a:srgbClr val="1B2333"/>
-                </a:solidFill>
-                <a:latin typeface="BIZ UDゴシック" pitchFamily="34" charset="0"/>
-                <a:ea typeface="BIZ UDゴシック" pitchFamily="49" charset="-128"/>
-                <a:cs typeface="BIZ UDゴシック" pitchFamily="34" charset="-120"/>
-              </a:rPr>
-              <a:t>→ 自然と間隔をあけて並ぶ</a:t>
-            </a:r>
-            <a:endParaRPr lang="en-US" sz="2000" dirty="0"/>
-          </a:p>
-        </p:txBody>
-      </p:sp>
-      <p:sp>
-        <p:nvSpPr>
-          <p:cNvPr id="18" name="Shape 13"/>
-          <p:cNvSpPr/>
-          <p:nvPr/>
-        </p:nvSpPr>
-        <p:spPr>
-          <a:xfrm>
-            <a:off x="6035040" y="3703320"/>
-            <a:ext cx="5608015" cy="1005840"/>
-          </a:xfrm>
-          <a:prstGeom prst="roundRect">
-            <a:avLst>
-              <a:gd name="adj" fmla="val 10909"/>
-            </a:avLst>
-          </a:prstGeom>
-          <a:solidFill>
-            <a:srgbClr val="EEF2F7"/>
-          </a:solidFill>
-          <a:ln w="12700">
-            <a:solidFill>
-              <a:srgbClr val="EEF2F7"/>
-            </a:solidFill>
-            <a:prstDash val="solid"/>
-          </a:ln>
-        </p:spPr>
-      </p:sp>
-      <p:sp>
-        <p:nvSpPr>
-          <p:cNvPr id="19" name="Shape 14"/>
-          <p:cNvSpPr/>
-          <p:nvPr/>
-        </p:nvSpPr>
-        <p:spPr>
-          <a:xfrm>
-            <a:off x="6217920" y="3858768"/>
-            <a:ext cx="694944" cy="694944"/>
-          </a:xfrm>
-          <a:prstGeom prst="ellipse">
-            <a:avLst/>
-          </a:prstGeom>
-          <a:solidFill>
-            <a:srgbClr val="2F6FA8"/>
-          </a:solidFill>
-          <a:ln w="12700">
-            <a:solidFill>
-              <a:srgbClr val="2F6FA8"/>
-            </a:solidFill>
-            <a:prstDash val="solid"/>
-          </a:ln>
-        </p:spPr>
-      </p:sp>
-      <p:pic>
-        <p:nvPicPr>
-          <p:cNvPr id="20" name="Image 2" descr="preencoded.png">    </p:cNvPr>
-          <p:cNvPicPr>
-            <a:picLocks noChangeAspect="1"/>
-          </p:cNvPicPr>
-          <p:nvPr/>
-        </p:nvPicPr>
-        <p:blipFill>
-          <a:blip r:embed="rId3"/>
-          <a:stretch>
-            <a:fillRect/>
-          </a:stretch>
-        </p:blipFill>
-        <p:spPr>
-          <a:xfrm>
-            <a:off x="6384707" y="4025555"/>
-            <a:ext cx="361371" cy="361371"/>
-          </a:xfrm>
-          <a:prstGeom prst="rect">
-            <a:avLst/>
-          </a:prstGeom>
-        </p:spPr>
-      </p:pic>
-      <p:sp>
-        <p:nvSpPr>
-          <p:cNvPr id="21" name="Text 15"/>
-          <p:cNvSpPr txBox="1"/>
-          <p:nvPr/>
-        </p:nvSpPr>
-        <p:spPr>
-          <a:xfrm>
-            <a:off x="7086600" y="3776472"/>
-            <a:ext cx="4465015" cy="859536"/>
-          </a:xfrm>
-          <a:prstGeom prst="rect">
-            <a:avLst/>
-          </a:prstGeom>
-          <a:noFill/>
-          <a:ln/>
-        </p:spPr>
-        <p:txBody>
-          <a:bodyPr wrap="square" lIns="0" tIns="0" rIns="0" bIns="0" rtlCol="0" anchor="ctr"/>
-          <a:lstStyle/>
-          <a:p>
-            <a:pPr indent="0" marL="0">
-              <a:buNone/>
-            </a:pPr>
-            <a:r>
-              <a:rPr lang="en-US" sz="2000" b="1" dirty="0">
-                <a:solidFill>
-                  <a:srgbClr val="131B35"/>
-                </a:solidFill>
-                <a:latin typeface="BIZ UDゴシック" pitchFamily="34" charset="0"/>
-                <a:ea typeface="BIZ UDゴシック" pitchFamily="49" charset="-128"/>
-                <a:cs typeface="BIZ UDゴシック" pitchFamily="34" charset="-120"/>
-              </a:rPr>
-              <a:t>「一番人気」の表示</a:t>
-            </a:r>
-            <a:endParaRPr lang="en-US" sz="2000" dirty="0"/>
-          </a:p>
-          <a:p>
-            <a:pPr indent="0" marL="0">
-              <a:buNone/>
-            </a:pPr>
-            <a:r>
-              <a:rPr lang="en-US" sz="2000" dirty="0">
-                <a:solidFill>
-                  <a:srgbClr val="1B2333"/>
-                </a:solidFill>
-                <a:latin typeface="BIZ UDゴシック" pitchFamily="34" charset="0"/>
-                <a:ea typeface="BIZ UDゴシック" pitchFamily="49" charset="-128"/>
-                <a:cs typeface="BIZ UDゴシック" pitchFamily="34" charset="-120"/>
-              </a:rPr>
-              <a:t>→ みんなと同じものを選ぶ</a:t>
-            </a:r>
-            <a:endParaRPr lang="en-US" sz="2000" dirty="0"/>
-          </a:p>
-        </p:txBody>
-      </p:sp>
-      <p:sp>
-        <p:nvSpPr>
-          <p:cNvPr id="22" name="Shape 16"/>
-          <p:cNvSpPr/>
-          <p:nvPr/>
-        </p:nvSpPr>
-        <p:spPr>
-          <a:xfrm>
-            <a:off x="6035040" y="4846320"/>
-            <a:ext cx="5608015" cy="1005840"/>
-          </a:xfrm>
-          <a:prstGeom prst="roundRect">
-            <a:avLst>
-              <a:gd name="adj" fmla="val 10909"/>
-            </a:avLst>
-          </a:prstGeom>
-          <a:solidFill>
-            <a:srgbClr val="EEF2F7"/>
-          </a:solidFill>
-          <a:ln w="12700">
-            <a:solidFill>
-              <a:srgbClr val="EEF2F7"/>
-            </a:solidFill>
-            <a:prstDash val="solid"/>
-          </a:ln>
-        </p:spPr>
-      </p:sp>
-      <p:sp>
-        <p:nvSpPr>
-          <p:cNvPr id="23" name="Shape 17"/>
-          <p:cNvSpPr/>
-          <p:nvPr/>
-        </p:nvSpPr>
-        <p:spPr>
-          <a:xfrm>
-            <a:off x="6217920" y="5001768"/>
-            <a:ext cx="694944" cy="694944"/>
-          </a:xfrm>
-          <a:prstGeom prst="ellipse">
-            <a:avLst/>
-          </a:prstGeom>
-          <a:solidFill>
-            <a:srgbClr val="2F6FA8"/>
-          </a:solidFill>
-          <a:ln w="12700">
-            <a:solidFill>
-              <a:srgbClr val="2F6FA8"/>
-            </a:solidFill>
-            <a:prstDash val="solid"/>
-          </a:ln>
-        </p:spPr>
-      </p:sp>
-      <p:pic>
-        <p:nvPicPr>
-          <p:cNvPr id="24" name="Image 3" descr="preencoded.png">    </p:cNvPr>
-          <p:cNvPicPr>
-            <a:picLocks noChangeAspect="1"/>
-          </p:cNvPicPr>
-          <p:nvPr/>
-        </p:nvPicPr>
-        <p:blipFill>
-          <a:blip r:embed="rId4"/>
-          <a:stretch>
-            <a:fillRect/>
-          </a:stretch>
-        </p:blipFill>
-        <p:spPr>
-          <a:xfrm>
-            <a:off x="6384707" y="5168555"/>
-            <a:ext cx="361371" cy="361371"/>
-          </a:xfrm>
-          <a:prstGeom prst="rect">
-            <a:avLst/>
-          </a:prstGeom>
-        </p:spPr>
-      </p:pic>
-      <p:sp>
-        <p:nvSpPr>
-          <p:cNvPr id="25" name="Text 18"/>
-          <p:cNvSpPr txBox="1"/>
-          <p:nvPr/>
-        </p:nvSpPr>
-        <p:spPr>
-          <a:xfrm>
-            <a:off x="7086600" y="4919472"/>
-            <a:ext cx="4465015" cy="859536"/>
-          </a:xfrm>
-          <a:prstGeom prst="rect">
-            <a:avLst/>
-          </a:prstGeom>
-          <a:noFill/>
-          <a:ln/>
-        </p:spPr>
-        <p:txBody>
-          <a:bodyPr wrap="square" lIns="0" tIns="0" rIns="0" bIns="0" rtlCol="0" anchor="ctr"/>
-          <a:lstStyle/>
-          <a:p>
-            <a:pPr indent="0" marL="0">
-              <a:buNone/>
-            </a:pPr>
-            <a:r>
-              <a:rPr lang="en-US" sz="2000" b="1" dirty="0">
-                <a:solidFill>
-                  <a:srgbClr val="131B35"/>
-                </a:solidFill>
-                <a:latin typeface="BIZ UDゴシック" pitchFamily="34" charset="0"/>
-                <a:ea typeface="BIZ UDゴシック" pitchFamily="49" charset="-128"/>
-                <a:cs typeface="BIZ UDゴシック" pitchFamily="34" charset="-120"/>
-              </a:rPr>
-              <a:t>最初からチェック済みの欄</a:t>
-            </a:r>
-            <a:endParaRPr lang="en-US" sz="2000" dirty="0"/>
-          </a:p>
-          <a:p>
-            <a:pPr indent="0" marL="0">
-              <a:buNone/>
-            </a:pPr>
-            <a:r>
-              <a:rPr lang="en-US" sz="2000" dirty="0">
-                <a:solidFill>
-                  <a:srgbClr val="1B2333"/>
-                </a:solidFill>
-                <a:latin typeface="BIZ UDゴシック" pitchFamily="34" charset="0"/>
-                <a:ea typeface="BIZ UDゴシック" pitchFamily="49" charset="-128"/>
-                <a:cs typeface="BIZ UDゴシック" pitchFamily="34" charset="-120"/>
-              </a:rPr>
-              <a:t>→ そのままにしがち</a:t>
-            </a:r>
-            <a:endParaRPr lang="en-US" sz="2000" dirty="0"/>
-          </a:p>
-        </p:txBody>
-      </p:sp>
-      <p:sp>
-        <p:nvSpPr>
-          <p:cNvPr id="25" name="Slide Number Placeholder 0"/>
-          <p:cNvSpPr>
-            <a:spLocks noGrp="1"/>
-          </p:cNvSpPr>
-          <p:nvPr>
-            <p:ph type="sldNum" sz="quarter" idx="4294967295"/>
-          </p:nvPr>
-        </p:nvSpPr>
-        <p:spPr>
-          <a:xfrm>
-            <a:off x="11000232" y="6217920"/>
-            <a:ext cx="640080" cy="384048"/>
-          </a:xfrm>
-          <a:prstGeom prst="rect">
-            <a:avLst/>
-          </a:prstGeom>
-          <a:extLst>
-            <a:ext uri="{C572A759-6A51-4108-AA02-DFA0A04FC94B}">
-              <ma14:wrappingTextBoxFlag xmlns:ma14="http://schemas.microsoft.com/office/mac/drawingml/2011/main" val="0"/>
-            </a:ext>
-          </a:extLst>
-        </p:spPr>
-        <p:txBody>
-          <a:bodyPr/>
-          <a:lstStyle>
-            <a:lvl1pPr>
-              <a:defRPr sz="2000">
-                <a:solidFill>
-                  <a:srgbClr val="8A96A8"/>
-                </a:solidFill>
-                <a:latin typeface="BIZ UDゴシック"/>
-                <a:ea typeface="BIZ UDゴシック"/>
-                <a:cs typeface="BIZ UDゴシック"/>
-              </a:defRPr>
-            </a:lvl1pPr>
-          </a:lstStyle>
-          <a:p>
-            <a:pPr algn="r"/>
-            <a:fld id="{F7021451-1387-4CA6-816F-3879F97B5CBC}" type="slidenum">
-              <a:rPr b="0" lang="en-US"/>
-              <a:t>1</a:t>
-            </a:fld>
-            <a:endParaRPr lang="en-US"/>
-          </a:p>
-        </p:txBody>
-      </p:sp>
-    </p:spTree>
-  </p:cSld>
-  <p:clrMapOvr>
-    <a:masterClrMapping/>
-  </p:clrMapOvr>
-</p:sld>
-</file>
-
 <file path=ppt/slides/slide46.xml><?xml version="1.0" encoding="utf-8"?>
 <p:sld xmlns:a="http://schemas.openxmlformats.org/drawingml/2006/main" xmlns:r="http://schemas.openxmlformats.org/officeDocument/2006/relationships" xmlns:p="http://schemas.openxmlformats.org/presentationml/2006/main">
   <p:cSld name="Slide 2">
@@ -35564,6 +32587,782 @@
             <a:fld id="{F7021451-1387-4CA6-816F-3879F97B5CBC}" type="slidenum">
               <a:rPr b="0" lang="en-US"/>
               <a:t>4</a:t>
+            </a:fld>
+            <a:endParaRPr lang="en-US"/>
+          </a:p>
+        </p:txBody>
+      </p:sp>
+    </p:spTree>
+  </p:cSld>
+  <p:clrMapOvr>
+    <a:masterClrMapping/>
+  </p:clrMapOvr>
+</p:sld>
+</file>
+
+<file path=ppt/slides/slide49.xml><?xml version="1.0" encoding="utf-8"?>
+<p:sld xmlns:a="http://schemas.openxmlformats.org/drawingml/2006/main" xmlns:r="http://schemas.openxmlformats.org/officeDocument/2006/relationships" xmlns:p="http://schemas.openxmlformats.org/presentationml/2006/main">
+  <p:cSld name="Slide 1">
+    <p:bg>
+      <p:bgPr>
+        <a:solidFill>
+          <a:srgbClr val="FFFFFF"/>
+        </a:solidFill>
+      </p:bgPr>
+    </p:bg>
+    <p:spTree>
+      <p:nvGrpSpPr>
+        <p:cNvPr id="1" name=""/>
+        <p:cNvGrpSpPr/>
+        <p:nvPr/>
+      </p:nvGrpSpPr>
+      <p:grpSpPr>
+        <a:xfrm>
+          <a:off x="0" y="0"/>
+          <a:ext cx="0" cy="0"/>
+          <a:chOff x="0" y="0"/>
+          <a:chExt cx="0" cy="0"/>
+        </a:xfrm>
+      </p:grpSpPr>
+      <p:sp>
+        <p:nvSpPr>
+          <p:cNvPr id="2" name="Shape 0"/>
+          <p:cNvSpPr/>
+          <p:nvPr/>
+        </p:nvSpPr>
+        <p:spPr>
+          <a:xfrm>
+            <a:off x="548640" y="347472"/>
+            <a:ext cx="1092200" cy="420624"/>
+          </a:xfrm>
+          <a:prstGeom prst="roundRect">
+            <a:avLst>
+              <a:gd name="adj" fmla="val 50000"/>
+            </a:avLst>
+          </a:prstGeom>
+          <a:solidFill>
+            <a:srgbClr val="131B35"/>
+          </a:solidFill>
+          <a:ln w="12700">
+            <a:solidFill>
+              <a:srgbClr val="131B35"/>
+            </a:solidFill>
+            <a:prstDash val="solid"/>
+          </a:ln>
+        </p:spPr>
+      </p:sp>
+      <p:sp>
+        <p:nvSpPr>
+          <p:cNvPr id="3" name="Text 1"/>
+          <p:cNvSpPr txBox="1"/>
+          <p:nvPr/>
+        </p:nvSpPr>
+        <p:spPr>
+          <a:xfrm>
+            <a:off x="548640" y="347472"/>
+            <a:ext cx="1092200" cy="420624"/>
+          </a:xfrm>
+          <a:prstGeom prst="rect">
+            <a:avLst/>
+          </a:prstGeom>
+          <a:noFill/>
+          <a:ln/>
+        </p:spPr>
+        <p:txBody>
+          <a:bodyPr wrap="square" lIns="0" tIns="0" rIns="0" bIns="0" rtlCol="0" anchor="ctr"/>
+          <a:lstStyle/>
+          <a:p>
+            <a:pPr algn="ctr" indent="0" marL="0">
+              <a:buNone/>
+            </a:pPr>
+            <a:r>
+              <a:rPr lang="en-US" sz="2000" b="1" dirty="0">
+                <a:solidFill>
+                  <a:srgbClr val="FFFFFF"/>
+                </a:solidFill>
+                <a:latin typeface="BIZ UDゴシック" pitchFamily="34" charset="0"/>
+                <a:ea typeface="BIZ UDゴシック" pitchFamily="49" charset="-128"/>
+                <a:cs typeface="BIZ UDゴシック" pitchFamily="34" charset="-120"/>
+              </a:rPr>
+              <a:t>第1部</a:t>
+            </a:r>
+            <a:endParaRPr lang="en-US" sz="2000" dirty="0"/>
+          </a:p>
+        </p:txBody>
+      </p:sp>
+      <p:sp>
+        <p:nvSpPr>
+          <p:cNvPr id="4" name="Text 2"/>
+          <p:cNvSpPr txBox="1"/>
+          <p:nvPr/>
+        </p:nvSpPr>
+        <p:spPr>
+          <a:xfrm>
+            <a:off x="548640" y="868680"/>
+            <a:ext cx="11094415" cy="777240"/>
+          </a:xfrm>
+          <a:prstGeom prst="rect">
+            <a:avLst/>
+          </a:prstGeom>
+          <a:noFill/>
+          <a:ln/>
+        </p:spPr>
+        <p:txBody>
+          <a:bodyPr wrap="square" lIns="0" tIns="0" rIns="0" bIns="0" rtlCol="0" anchor="ctr"/>
+          <a:lstStyle/>
+          <a:p>
+            <a:pPr indent="0" marL="0">
+              <a:buNone/>
+            </a:pPr>
+            <a:r>
+              <a:rPr lang="en-US" sz="3200" b="1" dirty="0">
+                <a:solidFill>
+                  <a:srgbClr val="131B35"/>
+                </a:solidFill>
+                <a:latin typeface="BIZ UDゴシック" pitchFamily="34" charset="0"/>
+                <a:ea typeface="BIZ UDゴシック" pitchFamily="49" charset="-128"/>
+                <a:cs typeface="BIZ UDゴシック" pitchFamily="34" charset="-120"/>
+              </a:rPr>
+              <a:t>頭の中には「速い思考」と「遅い思考」がある</a:t>
+            </a:r>
+            <a:endParaRPr lang="en-US" sz="3200" dirty="0"/>
+          </a:p>
+        </p:txBody>
+      </p:sp>
+      <p:sp>
+        <p:nvSpPr>
+          <p:cNvPr id="5" name="Text 3"/>
+          <p:cNvSpPr txBox="1"/>
+          <p:nvPr/>
+        </p:nvSpPr>
+        <p:spPr>
+          <a:xfrm>
+            <a:off x="548640" y="6217920"/>
+            <a:ext cx="10058400" cy="384048"/>
+          </a:xfrm>
+          <a:prstGeom prst="rect">
+            <a:avLst/>
+          </a:prstGeom>
+          <a:noFill/>
+          <a:ln/>
+        </p:spPr>
+        <p:txBody>
+          <a:bodyPr wrap="square" lIns="0" tIns="0" rIns="0" bIns="0" rtlCol="0" anchor="ctr"/>
+          <a:lstStyle/>
+          <a:p>
+            <a:pPr indent="0" marL="0">
+              <a:buNone/>
+            </a:pPr>
+            <a:r>
+              <a:rPr lang="en-US" sz="2000" dirty="0">
+                <a:solidFill>
+                  <a:srgbClr val="4F5B6B"/>
+                </a:solidFill>
+                <a:latin typeface="BIZ UDゴシック" pitchFamily="34" charset="0"/>
+                <a:ea typeface="BIZ UDゴシック" pitchFamily="49" charset="-128"/>
+                <a:cs typeface="BIZ UDゴシック" pitchFamily="34" charset="-120"/>
+              </a:rPr>
+              <a:t>出典：Kahneman D. Am Psychol 2003; Frederick S. J Econ Perspect 2005</a:t>
+            </a:r>
+            <a:endParaRPr lang="en-US" sz="2000" dirty="0"/>
+          </a:p>
+        </p:txBody>
+      </p:sp>
+      <p:sp>
+        <p:nvSpPr>
+          <p:cNvPr id="7" name="Shape 4"/>
+          <p:cNvSpPr/>
+          <p:nvPr/>
+        </p:nvSpPr>
+        <p:spPr>
+          <a:xfrm>
+            <a:off x="548640" y="1965960"/>
+            <a:ext cx="5029200" cy="4023360"/>
+          </a:xfrm>
+          <a:prstGeom prst="roundRect">
+            <a:avLst>
+              <a:gd name="adj" fmla="val 2727"/>
+            </a:avLst>
+          </a:prstGeom>
+          <a:solidFill>
+            <a:srgbClr val="EEF2F7"/>
+          </a:solidFill>
+          <a:ln w="12700">
+            <a:solidFill>
+              <a:srgbClr val="EEF2F7"/>
+            </a:solidFill>
+            <a:prstDash val="solid"/>
+          </a:ln>
+        </p:spPr>
+      </p:sp>
+      <p:sp>
+        <p:nvSpPr>
+          <p:cNvPr id="8" name="Text 5"/>
+          <p:cNvSpPr txBox="1"/>
+          <p:nvPr/>
+        </p:nvSpPr>
+        <p:spPr>
+          <a:xfrm>
+            <a:off x="822960" y="2148840"/>
+            <a:ext cx="4480560" cy="457200"/>
+          </a:xfrm>
+          <a:prstGeom prst="rect">
+            <a:avLst/>
+          </a:prstGeom>
+          <a:noFill/>
+          <a:ln/>
+        </p:spPr>
+        <p:txBody>
+          <a:bodyPr wrap="square" lIns="0" tIns="0" rIns="0" bIns="0" rtlCol="0" anchor="t"/>
+          <a:lstStyle/>
+          <a:p>
+            <a:pPr indent="0" marL="0">
+              <a:buNone/>
+            </a:pPr>
+            <a:r>
+              <a:rPr lang="en-US" sz="2400" b="1" dirty="0">
+                <a:solidFill>
+                  <a:srgbClr val="D1480E"/>
+                </a:solidFill>
+                <a:latin typeface="BIZ UDゴシック" pitchFamily="34" charset="0"/>
+                <a:ea typeface="BIZ UDゴシック" pitchFamily="49" charset="-128"/>
+                <a:cs typeface="BIZ UDゴシック" pitchFamily="34" charset="-120"/>
+              </a:rPr>
+              <a:t>クイズ</a:t>
+            </a:r>
+            <a:endParaRPr lang="en-US" sz="2400" dirty="0"/>
+          </a:p>
+        </p:txBody>
+      </p:sp>
+      <p:sp>
+        <p:nvSpPr>
+          <p:cNvPr id="9" name="Text 6"/>
+          <p:cNvSpPr txBox="1"/>
+          <p:nvPr/>
+        </p:nvSpPr>
+        <p:spPr>
+          <a:xfrm>
+            <a:off x="822960" y="2697480"/>
+            <a:ext cx="4480560" cy="1371600"/>
+          </a:xfrm>
+          <a:prstGeom prst="rect">
+            <a:avLst/>
+          </a:prstGeom>
+          <a:noFill/>
+          <a:ln/>
+        </p:spPr>
+        <p:txBody>
+          <a:bodyPr wrap="square" lIns="0" tIns="0" rIns="0" bIns="0" rtlCol="0" anchor="t"/>
+          <a:lstStyle/>
+          <a:p>
+            <a:pPr indent="0" marL="0">
+              <a:spcAft>
+                <a:spcPts val="400"/>
+              </a:spcAft>
+              <a:buNone/>
+            </a:pPr>
+            <a:r>
+              <a:rPr lang="en-US" sz="2200" dirty="0">
+                <a:solidFill>
+                  <a:srgbClr val="1B2333"/>
+                </a:solidFill>
+                <a:latin typeface="BIZ UDゴシック" pitchFamily="34" charset="0"/>
+                <a:ea typeface="BIZ UDゴシック" pitchFamily="49" charset="-128"/>
+                <a:cs typeface="BIZ UDゴシック" pitchFamily="34" charset="-120"/>
+              </a:rPr>
+              <a:t>バットとボールで合計1,100円</a:t>
+            </a:r>
+            <a:endParaRPr lang="en-US" sz="2200" dirty="0"/>
+          </a:p>
+          <a:p>
+            <a:pPr indent="0" marL="0">
+              <a:spcAft>
+                <a:spcPts val="400"/>
+              </a:spcAft>
+              <a:buNone/>
+            </a:pPr>
+            <a:r>
+              <a:rPr lang="en-US" sz="2200" dirty="0">
+                <a:solidFill>
+                  <a:srgbClr val="1B2333"/>
+                </a:solidFill>
+                <a:latin typeface="BIZ UDゴシック" pitchFamily="34" charset="0"/>
+                <a:ea typeface="BIZ UDゴシック" pitchFamily="49" charset="-128"/>
+                <a:cs typeface="BIZ UDゴシック" pitchFamily="34" charset="-120"/>
+              </a:rPr>
+              <a:t>バットはボールより1,000円高い</a:t>
+            </a:r>
+            <a:endParaRPr lang="en-US" sz="2200" dirty="0"/>
+          </a:p>
+          <a:p>
+            <a:pPr indent="0" marL="0">
+              <a:spcAft>
+                <a:spcPts val="400"/>
+              </a:spcAft>
+              <a:buNone/>
+            </a:pPr>
+            <a:r>
+              <a:rPr lang="en-US" sz="2200" b="1" dirty="0">
+                <a:solidFill>
+                  <a:srgbClr val="131B35"/>
+                </a:solidFill>
+                <a:latin typeface="BIZ UDゴシック" pitchFamily="34" charset="0"/>
+                <a:ea typeface="BIZ UDゴシック" pitchFamily="49" charset="-128"/>
+                <a:cs typeface="BIZ UDゴシック" pitchFamily="34" charset="-120"/>
+              </a:rPr>
+              <a:t>ボールはいくら？</a:t>
+            </a:r>
+            <a:endParaRPr lang="en-US" sz="2200" dirty="0"/>
+          </a:p>
+        </p:txBody>
+      </p:sp>
+      <p:sp>
+        <p:nvSpPr>
+          <p:cNvPr id="10" name="Text 7"/>
+          <p:cNvSpPr txBox="1"/>
+          <p:nvPr/>
+        </p:nvSpPr>
+        <p:spPr>
+          <a:xfrm>
+            <a:off x="822960" y="4434840"/>
+            <a:ext cx="4480560" cy="1188720"/>
+          </a:xfrm>
+          <a:prstGeom prst="rect">
+            <a:avLst/>
+          </a:prstGeom>
+          <a:noFill/>
+          <a:ln/>
+        </p:spPr>
+        <p:txBody>
+          <a:bodyPr wrap="square" lIns="0" tIns="0" rIns="0" bIns="0" rtlCol="0" anchor="ctr"/>
+          <a:lstStyle/>
+          <a:p>
+            <a:pPr indent="0" marL="0">
+              <a:spcAft>
+                <a:spcPts val="800"/>
+              </a:spcAft>
+              <a:buNone/>
+            </a:pPr>
+            <a:r>
+              <a:rPr lang="en-US" sz="2000" dirty="0">
+                <a:solidFill>
+                  <a:srgbClr val="1B2333"/>
+                </a:solidFill>
+                <a:latin typeface="BIZ UDゴシック" pitchFamily="34" charset="0"/>
+                <a:ea typeface="BIZ UDゴシック" pitchFamily="49" charset="-128"/>
+                <a:cs typeface="BIZ UDゴシック" pitchFamily="34" charset="-120"/>
+              </a:rPr>
+              <a:t>とっさに「100円」→ 速い思考</a:t>
+            </a:r>
+            <a:endParaRPr lang="en-US" sz="2000" dirty="0"/>
+          </a:p>
+          <a:p>
+            <a:pPr indent="0" marL="0">
+              <a:spcAft>
+                <a:spcPts val="800"/>
+              </a:spcAft>
+              <a:buNone/>
+            </a:pPr>
+            <a:r>
+              <a:rPr lang="en-US" sz="2000" b="1" dirty="0">
+                <a:solidFill>
+                  <a:srgbClr val="0B7A70"/>
+                </a:solidFill>
+                <a:latin typeface="BIZ UDゴシック" pitchFamily="34" charset="0"/>
+                <a:ea typeface="BIZ UDゴシック" pitchFamily="49" charset="-128"/>
+                <a:cs typeface="BIZ UDゴシック" pitchFamily="34" charset="-120"/>
+              </a:rPr>
+              <a:t>正解は「50円」→ 遅い思考</a:t>
+            </a:r>
+            <a:endParaRPr lang="en-US" sz="2000" dirty="0"/>
+          </a:p>
+        </p:txBody>
+      </p:sp>
+      <p:sp>
+        <p:nvSpPr>
+          <p:cNvPr id="11" name="Shape 8"/>
+          <p:cNvSpPr/>
+          <p:nvPr/>
+        </p:nvSpPr>
+        <p:spPr>
+          <a:xfrm>
+            <a:off x="5852160" y="1965960"/>
+            <a:ext cx="5790895" cy="1920240"/>
+          </a:xfrm>
+          <a:prstGeom prst="roundRect">
+            <a:avLst>
+              <a:gd name="adj" fmla="val 5714"/>
+            </a:avLst>
+          </a:prstGeom>
+          <a:solidFill>
+            <a:srgbClr val="FCEBE3"/>
+          </a:solidFill>
+          <a:ln w="12700">
+            <a:solidFill>
+              <a:srgbClr val="FCEBE3"/>
+            </a:solidFill>
+            <a:prstDash val="solid"/>
+          </a:ln>
+        </p:spPr>
+      </p:sp>
+      <p:sp>
+        <p:nvSpPr>
+          <p:cNvPr id="12" name="Shape 9"/>
+          <p:cNvSpPr/>
+          <p:nvPr/>
+        </p:nvSpPr>
+        <p:spPr>
+          <a:xfrm>
+            <a:off x="6080760" y="2194560"/>
+            <a:ext cx="777240" cy="777240"/>
+          </a:xfrm>
+          <a:prstGeom prst="ellipse">
+            <a:avLst/>
+          </a:prstGeom>
+          <a:solidFill>
+            <a:srgbClr val="D1480E"/>
+          </a:solidFill>
+          <a:ln w="12700">
+            <a:solidFill>
+              <a:srgbClr val="D1480E"/>
+            </a:solidFill>
+            <a:prstDash val="solid"/>
+          </a:ln>
+        </p:spPr>
+      </p:sp>
+      <p:pic>
+        <p:nvPicPr>
+          <p:cNvPr id="13" name="Image 0" descr="preencoded.png">    </p:cNvPr>
+          <p:cNvPicPr>
+            <a:picLocks noChangeAspect="1"/>
+          </p:cNvPicPr>
+          <p:nvPr/>
+        </p:nvPicPr>
+        <p:blipFill>
+          <a:blip r:embed="rId1"/>
+          <a:stretch>
+            <a:fillRect/>
+          </a:stretch>
+        </p:blipFill>
+        <p:spPr>
+          <a:xfrm>
+            <a:off x="6267298" y="2381098"/>
+            <a:ext cx="404165" cy="404165"/>
+          </a:xfrm>
+          <a:prstGeom prst="rect">
+            <a:avLst/>
+          </a:prstGeom>
+        </p:spPr>
+      </p:pic>
+      <p:sp>
+        <p:nvSpPr>
+          <p:cNvPr id="14" name="Text 10"/>
+          <p:cNvSpPr txBox="1"/>
+          <p:nvPr/>
+        </p:nvSpPr>
+        <p:spPr>
+          <a:xfrm>
+            <a:off x="7040880" y="2194560"/>
+            <a:ext cx="4465015" cy="777240"/>
+          </a:xfrm>
+          <a:prstGeom prst="rect">
+            <a:avLst/>
+          </a:prstGeom>
+          <a:noFill/>
+          <a:ln/>
+        </p:spPr>
+        <p:txBody>
+          <a:bodyPr wrap="square" lIns="0" tIns="0" rIns="0" bIns="0" rtlCol="0" anchor="ctr"/>
+          <a:lstStyle/>
+          <a:p>
+            <a:pPr indent="0" marL="0">
+              <a:buNone/>
+            </a:pPr>
+            <a:r>
+              <a:rPr lang="en-US" sz="2400" b="1" dirty="0">
+                <a:solidFill>
+                  <a:srgbClr val="D1480E"/>
+                </a:solidFill>
+                <a:latin typeface="BIZ UDゴシック" pitchFamily="34" charset="0"/>
+                <a:ea typeface="BIZ UDゴシック" pitchFamily="49" charset="-128"/>
+                <a:cs typeface="BIZ UDゴシック" pitchFamily="34" charset="-120"/>
+              </a:rPr>
+              <a:t>システム1：速い思考</a:t>
+            </a:r>
+            <a:endParaRPr lang="en-US" sz="2400" dirty="0"/>
+          </a:p>
+        </p:txBody>
+      </p:sp>
+      <p:sp>
+        <p:nvSpPr>
+          <p:cNvPr id="15" name="Text 11"/>
+          <p:cNvSpPr txBox="1"/>
+          <p:nvPr/>
+        </p:nvSpPr>
+        <p:spPr>
+          <a:xfrm>
+            <a:off x="6126480" y="3017520"/>
+            <a:ext cx="5333695" cy="777240"/>
+          </a:xfrm>
+          <a:prstGeom prst="rect">
+            <a:avLst/>
+          </a:prstGeom>
+          <a:noFill/>
+          <a:ln/>
+        </p:spPr>
+        <p:txBody>
+          <a:bodyPr wrap="square" lIns="0" tIns="0" rIns="0" bIns="0" rtlCol="0" anchor="ctr"/>
+          <a:lstStyle/>
+          <a:p>
+            <a:pPr indent="0" marL="0">
+              <a:buNone/>
+            </a:pPr>
+            <a:r>
+              <a:rPr lang="en-US" sz="2000" dirty="0">
+                <a:solidFill>
+                  <a:srgbClr val="1B2333"/>
+                </a:solidFill>
+                <a:latin typeface="BIZ UDゴシック" pitchFamily="34" charset="0"/>
+                <a:ea typeface="BIZ UDゴシック" pitchFamily="49" charset="-128"/>
+                <a:cs typeface="BIZ UDゴシック" pitchFamily="34" charset="-120"/>
+              </a:rPr>
+              <a:t>自動的・直感的・努力いらず</a:t>
+            </a:r>
+            <a:endParaRPr lang="en-US" sz="2000" dirty="0"/>
+          </a:p>
+          <a:p>
+            <a:pPr indent="0" marL="0">
+              <a:buNone/>
+            </a:pPr>
+            <a:r>
+              <a:rPr lang="en-US" sz="2000" dirty="0">
+                <a:solidFill>
+                  <a:srgbClr val="4F5B6B"/>
+                </a:solidFill>
+                <a:latin typeface="BIZ UDゴシック" pitchFamily="34" charset="0"/>
+                <a:ea typeface="BIZ UDゴシック" pitchFamily="49" charset="-128"/>
+                <a:cs typeface="BIZ UDゴシック" pitchFamily="34" charset="-120"/>
+              </a:rPr>
+              <a:t>例：慣れた手順、忙しい時の判断</a:t>
+            </a:r>
+            <a:endParaRPr lang="en-US" sz="2000" dirty="0"/>
+          </a:p>
+        </p:txBody>
+      </p:sp>
+      <p:sp>
+        <p:nvSpPr>
+          <p:cNvPr id="16" name="Shape 12"/>
+          <p:cNvSpPr/>
+          <p:nvPr/>
+        </p:nvSpPr>
+        <p:spPr>
+          <a:xfrm>
+            <a:off x="5852160" y="4023360"/>
+            <a:ext cx="5790895" cy="1920240"/>
+          </a:xfrm>
+          <a:prstGeom prst="roundRect">
+            <a:avLst>
+              <a:gd name="adj" fmla="val 5714"/>
+            </a:avLst>
+          </a:prstGeom>
+          <a:solidFill>
+            <a:srgbClr val="E3F7F2"/>
+          </a:solidFill>
+          <a:ln w="12700">
+            <a:solidFill>
+              <a:srgbClr val="E3F7F2"/>
+            </a:solidFill>
+            <a:prstDash val="solid"/>
+          </a:ln>
+        </p:spPr>
+      </p:sp>
+      <p:sp>
+        <p:nvSpPr>
+          <p:cNvPr id="17" name="Shape 13"/>
+          <p:cNvSpPr/>
+          <p:nvPr/>
+        </p:nvSpPr>
+        <p:spPr>
+          <a:xfrm>
+            <a:off x="6080760" y="4251960"/>
+            <a:ext cx="777240" cy="777240"/>
+          </a:xfrm>
+          <a:prstGeom prst="ellipse">
+            <a:avLst/>
+          </a:prstGeom>
+          <a:solidFill>
+            <a:srgbClr val="0B7A70"/>
+          </a:solidFill>
+          <a:ln w="12700">
+            <a:solidFill>
+              <a:srgbClr val="0B7A70"/>
+            </a:solidFill>
+            <a:prstDash val="solid"/>
+          </a:ln>
+        </p:spPr>
+      </p:sp>
+      <p:pic>
+        <p:nvPicPr>
+          <p:cNvPr id="18" name="Image 1" descr="preencoded.png">    </p:cNvPr>
+          <p:cNvPicPr>
+            <a:picLocks noChangeAspect="1"/>
+          </p:cNvPicPr>
+          <p:nvPr/>
+        </p:nvPicPr>
+        <p:blipFill>
+          <a:blip r:embed="rId2"/>
+          <a:stretch>
+            <a:fillRect/>
+          </a:stretch>
+        </p:blipFill>
+        <p:spPr>
+          <a:xfrm>
+            <a:off x="6267298" y="4438498"/>
+            <a:ext cx="404165" cy="404165"/>
+          </a:xfrm>
+          <a:prstGeom prst="rect">
+            <a:avLst/>
+          </a:prstGeom>
+        </p:spPr>
+      </p:pic>
+      <p:sp>
+        <p:nvSpPr>
+          <p:cNvPr id="19" name="Text 14"/>
+          <p:cNvSpPr txBox="1"/>
+          <p:nvPr/>
+        </p:nvSpPr>
+        <p:spPr>
+          <a:xfrm>
+            <a:off x="7040880" y="4251960"/>
+            <a:ext cx="4465015" cy="777240"/>
+          </a:xfrm>
+          <a:prstGeom prst="rect">
+            <a:avLst/>
+          </a:prstGeom>
+          <a:noFill/>
+          <a:ln/>
+        </p:spPr>
+        <p:txBody>
+          <a:bodyPr wrap="square" lIns="0" tIns="0" rIns="0" bIns="0" rtlCol="0" anchor="ctr"/>
+          <a:lstStyle/>
+          <a:p>
+            <a:pPr indent="0" marL="0">
+              <a:buNone/>
+            </a:pPr>
+            <a:r>
+              <a:rPr lang="en-US" sz="2400" b="1" dirty="0">
+                <a:solidFill>
+                  <a:srgbClr val="0B7A70"/>
+                </a:solidFill>
+                <a:latin typeface="BIZ UDゴシック" pitchFamily="34" charset="0"/>
+                <a:ea typeface="BIZ UDゴシック" pitchFamily="49" charset="-128"/>
+                <a:cs typeface="BIZ UDゴシック" pitchFamily="34" charset="-120"/>
+              </a:rPr>
+              <a:t>システム2：遅い思考</a:t>
+            </a:r>
+            <a:endParaRPr lang="en-US" sz="2400" dirty="0"/>
+          </a:p>
+        </p:txBody>
+      </p:sp>
+      <p:sp>
+        <p:nvSpPr>
+          <p:cNvPr id="20" name="Text 15"/>
+          <p:cNvSpPr txBox="1"/>
+          <p:nvPr/>
+        </p:nvSpPr>
+        <p:spPr>
+          <a:xfrm>
+            <a:off x="6126480" y="5074920"/>
+            <a:ext cx="5333695" cy="777240"/>
+          </a:xfrm>
+          <a:prstGeom prst="rect">
+            <a:avLst/>
+          </a:prstGeom>
+          <a:noFill/>
+          <a:ln/>
+        </p:spPr>
+        <p:txBody>
+          <a:bodyPr wrap="square" lIns="0" tIns="0" rIns="0" bIns="0" rtlCol="0" anchor="ctr"/>
+          <a:lstStyle/>
+          <a:p>
+            <a:pPr indent="0" marL="0">
+              <a:buNone/>
+            </a:pPr>
+            <a:r>
+              <a:rPr lang="en-US" sz="2000" dirty="0">
+                <a:solidFill>
+                  <a:srgbClr val="1B2333"/>
+                </a:solidFill>
+                <a:latin typeface="BIZ UDゴシック" pitchFamily="34" charset="0"/>
+                <a:ea typeface="BIZ UDゴシック" pitchFamily="49" charset="-128"/>
+                <a:cs typeface="BIZ UDゴシック" pitchFamily="34" charset="-120"/>
+              </a:rPr>
+              <a:t>意識的・論理的・疲れやすい</a:t>
+            </a:r>
+            <a:endParaRPr lang="en-US" sz="2000" dirty="0"/>
+          </a:p>
+          <a:p>
+            <a:pPr indent="0" marL="0">
+              <a:buNone/>
+            </a:pPr>
+            <a:r>
+              <a:rPr lang="en-US" sz="2000" dirty="0">
+                <a:solidFill>
+                  <a:srgbClr val="4F5B6B"/>
+                </a:solidFill>
+                <a:latin typeface="BIZ UDゴシック" pitchFamily="34" charset="0"/>
+                <a:ea typeface="BIZ UDゴシック" pitchFamily="49" charset="-128"/>
+                <a:cs typeface="BIZ UDゴシック" pitchFamily="34" charset="-120"/>
+              </a:rPr>
+              <a:t>例：研修で学ぶ、ルールを考える</a:t>
+            </a:r>
+            <a:endParaRPr lang="en-US" sz="2000" dirty="0"/>
+          </a:p>
+        </p:txBody>
+      </p:sp>
+      <p:sp>
+        <p:nvSpPr>
+          <p:cNvPr id="25" name="Slide Number Placeholder 0"/>
+          <p:cNvSpPr>
+            <a:spLocks noGrp="1"/>
+          </p:cNvSpPr>
+          <p:nvPr>
+            <p:ph type="sldNum" sz="quarter" idx="4294967295"/>
+          </p:nvPr>
+        </p:nvSpPr>
+        <p:spPr>
+          <a:xfrm>
+            <a:off x="11000232" y="6217920"/>
+            <a:ext cx="640080" cy="384048"/>
+          </a:xfrm>
+          <a:prstGeom prst="rect">
+            <a:avLst/>
+          </a:prstGeom>
+          <a:extLst>
+            <a:ext uri="{C572A759-6A51-4108-AA02-DFA0A04FC94B}">
+              <ma14:wrappingTextBoxFlag xmlns:ma14="http://schemas.microsoft.com/office/mac/drawingml/2011/main" val="0"/>
+            </a:ext>
+          </a:extLst>
+        </p:spPr>
+        <p:txBody>
+          <a:bodyPr/>
+          <a:lstStyle>
+            <a:lvl1pPr>
+              <a:defRPr sz="2000">
+                <a:solidFill>
+                  <a:srgbClr val="8A96A8"/>
+                </a:solidFill>
+                <a:latin typeface="BIZ UDゴシック"/>
+                <a:ea typeface="BIZ UDゴシック"/>
+                <a:cs typeface="BIZ UDゴシック"/>
+              </a:defRPr>
+            </a:lvl1pPr>
+          </a:lstStyle>
+          <a:p>
+            <a:pPr algn="r"/>
+            <a:fld id="{F7021451-1387-4CA6-816F-3879F97B5CBC}" type="slidenum">
+              <a:rPr b="0" lang="en-US"/>
+              <a:t>1</a:t>
             </a:fld>
             <a:endParaRPr lang="en-US"/>
           </a:p>
@@ -36228,6 +34027,3211 @@
             <a:pPr algn="r"/>
             <a:fld id="{F7021451-1387-4CA6-816F-3879F97B5CBC}" type="slidenum">
               <a:rPr lang="en-US" b="0"/>
+              <a:t>5</a:t>
+            </a:fld>
+            <a:endParaRPr lang="en-US"/>
+          </a:p>
+        </p:txBody>
+      </p:sp>
+    </p:spTree>
+  </p:cSld>
+  <p:clrMapOvr>
+    <a:masterClrMapping/>
+  </p:clrMapOvr>
+</p:sld>
+</file>
+
+<file path=ppt/slides/slide50.xml><?xml version="1.0" encoding="utf-8"?>
+<p:sld xmlns:a="http://schemas.openxmlformats.org/drawingml/2006/main" xmlns:r="http://schemas.openxmlformats.org/officeDocument/2006/relationships" xmlns:p="http://schemas.openxmlformats.org/presentationml/2006/main">
+  <p:cSld name="Slide 2">
+    <p:bg>
+      <p:bgPr>
+        <a:solidFill>
+          <a:srgbClr val="FFFFFF"/>
+        </a:solidFill>
+      </p:bgPr>
+    </p:bg>
+    <p:spTree>
+      <p:nvGrpSpPr>
+        <p:cNvPr id="1" name=""/>
+        <p:cNvGrpSpPr/>
+        <p:nvPr/>
+      </p:nvGrpSpPr>
+      <p:grpSpPr>
+        <a:xfrm>
+          <a:off x="0" y="0"/>
+          <a:ext cx="0" cy="0"/>
+          <a:chOff x="0" y="0"/>
+          <a:chExt cx="0" cy="0"/>
+        </a:xfrm>
+      </p:grpSpPr>
+      <p:sp>
+        <p:nvSpPr>
+          <p:cNvPr id="2" name="Shape 0"/>
+          <p:cNvSpPr/>
+          <p:nvPr/>
+        </p:nvSpPr>
+        <p:spPr>
+          <a:xfrm>
+            <a:off x="548640" y="347472"/>
+            <a:ext cx="1092200" cy="420624"/>
+          </a:xfrm>
+          <a:prstGeom prst="roundRect">
+            <a:avLst>
+              <a:gd name="adj" fmla="val 50000"/>
+            </a:avLst>
+          </a:prstGeom>
+          <a:solidFill>
+            <a:srgbClr val="131B35"/>
+          </a:solidFill>
+          <a:ln w="12700">
+            <a:solidFill>
+              <a:srgbClr val="131B35"/>
+            </a:solidFill>
+            <a:prstDash val="solid"/>
+          </a:ln>
+        </p:spPr>
+      </p:sp>
+      <p:sp>
+        <p:nvSpPr>
+          <p:cNvPr id="3" name="Text 1"/>
+          <p:cNvSpPr txBox="1"/>
+          <p:nvPr/>
+        </p:nvSpPr>
+        <p:spPr>
+          <a:xfrm>
+            <a:off x="548640" y="347472"/>
+            <a:ext cx="1092200" cy="420624"/>
+          </a:xfrm>
+          <a:prstGeom prst="rect">
+            <a:avLst/>
+          </a:prstGeom>
+          <a:noFill/>
+          <a:ln/>
+        </p:spPr>
+        <p:txBody>
+          <a:bodyPr wrap="square" lIns="0" tIns="0" rIns="0" bIns="0" rtlCol="0" anchor="ctr"/>
+          <a:lstStyle/>
+          <a:p>
+            <a:pPr algn="ctr" indent="0" marL="0">
+              <a:buNone/>
+            </a:pPr>
+            <a:r>
+              <a:rPr lang="en-US" sz="2000" b="1" dirty="0">
+                <a:solidFill>
+                  <a:srgbClr val="FFFFFF"/>
+                </a:solidFill>
+                <a:latin typeface="BIZ UDゴシック" pitchFamily="34" charset="0"/>
+                <a:ea typeface="BIZ UDゴシック" pitchFamily="49" charset="-128"/>
+                <a:cs typeface="BIZ UDゴシック" pitchFamily="34" charset="-120"/>
+              </a:rPr>
+              <a:t>第1部</a:t>
+            </a:r>
+            <a:endParaRPr lang="en-US" sz="2000" dirty="0"/>
+          </a:p>
+        </p:txBody>
+      </p:sp>
+      <p:sp>
+        <p:nvSpPr>
+          <p:cNvPr id="4" name="Text 2"/>
+          <p:cNvSpPr txBox="1"/>
+          <p:nvPr/>
+        </p:nvSpPr>
+        <p:spPr>
+          <a:xfrm>
+            <a:off x="548640" y="868680"/>
+            <a:ext cx="11094415" cy="777240"/>
+          </a:xfrm>
+          <a:prstGeom prst="rect">
+            <a:avLst/>
+          </a:prstGeom>
+          <a:noFill/>
+          <a:ln/>
+        </p:spPr>
+        <p:txBody>
+          <a:bodyPr wrap="square" lIns="0" tIns="0" rIns="0" bIns="0" rtlCol="0" anchor="ctr"/>
+          <a:lstStyle/>
+          <a:p>
+            <a:pPr indent="0" marL="0">
+              <a:buNone/>
+            </a:pPr>
+            <a:r>
+              <a:rPr lang="en-US" sz="3200" b="1" dirty="0">
+                <a:solidFill>
+                  <a:srgbClr val="131B35"/>
+                </a:solidFill>
+                <a:latin typeface="BIZ UDゴシック" pitchFamily="34" charset="0"/>
+                <a:ea typeface="BIZ UDゴシック" pitchFamily="49" charset="-128"/>
+                <a:cs typeface="BIZ UDゴシック" pitchFamily="34" charset="-120"/>
+              </a:rPr>
+              <a:t>研修は「遅い思考」に届くが、現場は「速い思考」で動く</a:t>
+            </a:r>
+            <a:endParaRPr lang="en-US" sz="3200" dirty="0"/>
+          </a:p>
+        </p:txBody>
+      </p:sp>
+      <p:sp>
+        <p:nvSpPr>
+          <p:cNvPr id="5" name="Text 3"/>
+          <p:cNvSpPr txBox="1"/>
+          <p:nvPr/>
+        </p:nvSpPr>
+        <p:spPr>
+          <a:xfrm>
+            <a:off x="548640" y="6217920"/>
+            <a:ext cx="10058400" cy="384048"/>
+          </a:xfrm>
+          <a:prstGeom prst="rect">
+            <a:avLst/>
+          </a:prstGeom>
+          <a:noFill/>
+          <a:ln/>
+        </p:spPr>
+        <p:txBody>
+          <a:bodyPr wrap="square" lIns="0" tIns="0" rIns="0" bIns="0" rtlCol="0" anchor="ctr"/>
+          <a:lstStyle/>
+          <a:p>
+            <a:pPr indent="0" marL="0">
+              <a:buNone/>
+            </a:pPr>
+            <a:r>
+              <a:rPr lang="en-US" sz="2000" dirty="0">
+                <a:solidFill>
+                  <a:srgbClr val="4F5B6B"/>
+                </a:solidFill>
+                <a:latin typeface="BIZ UDゴシック" pitchFamily="34" charset="0"/>
+                <a:ea typeface="BIZ UDゴシック" pitchFamily="49" charset="-128"/>
+                <a:cs typeface="BIZ UDゴシック" pitchFamily="34" charset="-120"/>
+              </a:rPr>
+              <a:t>出典：Whitby M, et al. ICHE 2006; Erasmus V, et al. ICHE 2010</a:t>
+            </a:r>
+            <a:endParaRPr lang="en-US" sz="2000" dirty="0"/>
+          </a:p>
+        </p:txBody>
+      </p:sp>
+      <p:sp>
+        <p:nvSpPr>
+          <p:cNvPr id="7" name="Text 4"/>
+          <p:cNvSpPr txBox="1"/>
+          <p:nvPr/>
+        </p:nvSpPr>
+        <p:spPr>
+          <a:xfrm>
+            <a:off x="548640" y="1783080"/>
+            <a:ext cx="5852160" cy="365760"/>
+          </a:xfrm>
+          <a:prstGeom prst="rect">
+            <a:avLst/>
+          </a:prstGeom>
+          <a:noFill/>
+          <a:ln/>
+        </p:spPr>
+        <p:txBody>
+          <a:bodyPr wrap="square" lIns="0" tIns="0" rIns="0" bIns="0" rtlCol="0" anchor="t"/>
+          <a:lstStyle/>
+          <a:p>
+            <a:pPr indent="0" marL="0">
+              <a:buNone/>
+            </a:pPr>
+            <a:r>
+              <a:rPr lang="en-US" sz="2000" dirty="0">
+                <a:solidFill>
+                  <a:srgbClr val="4F5B6B"/>
+                </a:solidFill>
+                <a:latin typeface="BIZ UDゴシック" pitchFamily="34" charset="0"/>
+                <a:ea typeface="BIZ UDゴシック" pitchFamily="49" charset="-128"/>
+                <a:cs typeface="BIZ UDゴシック" pitchFamily="34" charset="-120"/>
+              </a:rPr>
+              <a:t>手指衛生の遵守率（中央値）</a:t>
+            </a:r>
+            <a:endParaRPr lang="en-US" sz="2000" dirty="0"/>
+          </a:p>
+        </p:txBody>
+      </p:sp>
+      <p:graphicFrame>
+        <p:nvGraphicFramePr>
+          <p:cNvPr id="8" name="Chart 0" descr=""/>
+          <p:cNvGraphicFramePr/>
+          <p:nvPr/>
+        </p:nvGraphicFramePr>
+        <p:xfrm>
+          <a:off x="548640" y="2148840"/>
+          <a:ext cx="5577840" cy="3886200"/>
+        </p:xfrm>
+        <a:graphic xmlns:a="http://schemas.openxmlformats.org/drawingml/2006/main">
+          <a:graphicData uri="http://schemas.openxmlformats.org/drawingml/2006/chart">
+            <c:chart xmlns:c="http://schemas.openxmlformats.org/drawingml/2006/chart" r:id="rId1"/>
+          </a:graphicData>
+        </a:graphic>
+      </p:graphicFrame>
+      <p:sp>
+        <p:nvSpPr>
+          <p:cNvPr id="9" name="Shape 5"/>
+          <p:cNvSpPr/>
+          <p:nvPr/>
+        </p:nvSpPr>
+        <p:spPr>
+          <a:xfrm>
+            <a:off x="6492240" y="2011680"/>
+            <a:ext cx="5150815" cy="3931920"/>
+          </a:xfrm>
+          <a:prstGeom prst="roundRect">
+            <a:avLst>
+              <a:gd name="adj" fmla="val 2791"/>
+            </a:avLst>
+          </a:prstGeom>
+          <a:solidFill>
+            <a:srgbClr val="EEF2F7"/>
+          </a:solidFill>
+          <a:ln w="12700">
+            <a:solidFill>
+              <a:srgbClr val="EEF2F7"/>
+            </a:solidFill>
+            <a:prstDash val="solid"/>
+          </a:ln>
+        </p:spPr>
+      </p:sp>
+      <p:sp>
+        <p:nvSpPr>
+          <p:cNvPr id="10" name="Text 6"/>
+          <p:cNvSpPr txBox="1"/>
+          <p:nvPr/>
+        </p:nvSpPr>
+        <p:spPr>
+          <a:xfrm>
+            <a:off x="6748272" y="2240280"/>
+            <a:ext cx="4638751" cy="3474720"/>
+          </a:xfrm>
+          <a:prstGeom prst="rect">
+            <a:avLst/>
+          </a:prstGeom>
+          <a:noFill/>
+          <a:ln/>
+        </p:spPr>
+        <p:txBody>
+          <a:bodyPr wrap="square" lIns="0" tIns="0" rIns="0" bIns="0" rtlCol="0" anchor="ctr"/>
+          <a:lstStyle/>
+          <a:p>
+            <a:pPr indent="0" marL="0">
+              <a:buNone/>
+            </a:pPr>
+            <a:r>
+              <a:rPr lang="en-US" sz="2000" b="1" dirty="0">
+                <a:solidFill>
+                  <a:srgbClr val="D1480E"/>
+                </a:solidFill>
+                <a:latin typeface="BIZ UDゴシック" pitchFamily="34" charset="0"/>
+                <a:ea typeface="BIZ UDゴシック" pitchFamily="49" charset="-128"/>
+                <a:cs typeface="BIZ UDゴシック" pitchFamily="34" charset="-120"/>
+              </a:rPr>
+              <a:t>「汚れた」と感じると</a:t>
+            </a:r>
+            <a:endParaRPr lang="en-US" sz="2000" dirty="0"/>
+          </a:p>
+          <a:p>
+            <a:pPr indent="0" marL="0">
+              <a:spcAft>
+                <a:spcPts val="1400"/>
+              </a:spcAft>
+              <a:buNone/>
+            </a:pPr>
+            <a:r>
+              <a:rPr lang="en-US" sz="2000" b="1" dirty="0">
+                <a:solidFill>
+                  <a:srgbClr val="D1480E"/>
+                </a:solidFill>
+                <a:latin typeface="BIZ UDゴシック" pitchFamily="34" charset="0"/>
+                <a:ea typeface="BIZ UDゴシック" pitchFamily="49" charset="-128"/>
+                <a:cs typeface="BIZ UDゴシック" pitchFamily="34" charset="-120"/>
+              </a:rPr>
+              <a:t>速い思考で手が動く</a:t>
+            </a:r>
+            <a:endParaRPr lang="en-US" sz="2000" dirty="0"/>
+          </a:p>
+          <a:p>
+            <a:pPr indent="0" marL="0">
+              <a:buNone/>
+            </a:pPr>
+            <a:r>
+              <a:rPr lang="en-US" sz="2000" b="1" dirty="0">
+                <a:solidFill>
+                  <a:srgbClr val="0B7A70"/>
+                </a:solidFill>
+                <a:latin typeface="BIZ UDゴシック" pitchFamily="34" charset="0"/>
+                <a:ea typeface="BIZ UDゴシック" pitchFamily="49" charset="-128"/>
+                <a:cs typeface="BIZ UDゴシック" pitchFamily="34" charset="-120"/>
+              </a:rPr>
+              <a:t>「触れる前」は</a:t>
+            </a:r>
+            <a:endParaRPr lang="en-US" sz="2000" dirty="0"/>
+          </a:p>
+          <a:p>
+            <a:pPr indent="0" marL="0">
+              <a:buNone/>
+            </a:pPr>
+            <a:r>
+              <a:rPr lang="en-US" sz="2000" b="1" dirty="0">
+                <a:solidFill>
+                  <a:srgbClr val="0B7A70"/>
+                </a:solidFill>
+                <a:latin typeface="BIZ UDゴシック" pitchFamily="34" charset="0"/>
+                <a:ea typeface="BIZ UDゴシック" pitchFamily="49" charset="-128"/>
+                <a:cs typeface="BIZ UDゴシック" pitchFamily="34" charset="-120"/>
+              </a:rPr>
+              <a:t>遅い思考で意識しないと</a:t>
+            </a:r>
+            <a:endParaRPr lang="en-US" sz="2000" dirty="0"/>
+          </a:p>
+          <a:p>
+            <a:pPr indent="0" marL="0">
+              <a:spcAft>
+                <a:spcPts val="1400"/>
+              </a:spcAft>
+              <a:buNone/>
+            </a:pPr>
+            <a:r>
+              <a:rPr lang="en-US" sz="2000" b="1" dirty="0">
+                <a:solidFill>
+                  <a:srgbClr val="0B7A70"/>
+                </a:solidFill>
+                <a:latin typeface="BIZ UDゴシック" pitchFamily="34" charset="0"/>
+                <a:ea typeface="BIZ UDゴシック" pitchFamily="49" charset="-128"/>
+                <a:cs typeface="BIZ UDゴシック" pitchFamily="34" charset="-120"/>
+              </a:rPr>
+              <a:t>できない</a:t>
+            </a:r>
+            <a:endParaRPr lang="en-US" sz="2000" dirty="0"/>
+          </a:p>
+          <a:p>
+            <a:pPr indent="0" marL="0">
+              <a:buNone/>
+            </a:pPr>
+            <a:r>
+              <a:rPr lang="en-US" sz="2000" b="1" dirty="0">
+                <a:solidFill>
+                  <a:srgbClr val="131B35"/>
+                </a:solidFill>
+                <a:latin typeface="BIZ UDゴシック" pitchFamily="34" charset="0"/>
+                <a:ea typeface="BIZ UDゴシック" pitchFamily="49" charset="-128"/>
+                <a:cs typeface="BIZ UDゴシック" pitchFamily="34" charset="-120"/>
+              </a:rPr>
+              <a:t>→ 研修（知る）に加えて</a:t>
+            </a:r>
+            <a:endParaRPr lang="en-US" sz="2000" dirty="0"/>
+          </a:p>
+          <a:p>
+            <a:pPr indent="0" marL="0">
+              <a:buNone/>
+            </a:pPr>
+            <a:r>
+              <a:rPr lang="en-US" sz="2000" b="1" dirty="0">
+                <a:solidFill>
+                  <a:srgbClr val="131B35"/>
+                </a:solidFill>
+                <a:latin typeface="BIZ UDゴシック" pitchFamily="34" charset="0"/>
+                <a:ea typeface="BIZ UDゴシック" pitchFamily="49" charset="-128"/>
+                <a:cs typeface="BIZ UDゴシック" pitchFamily="34" charset="-120"/>
+              </a:rPr>
+              <a:t>速い思考に働きかける</a:t>
+            </a:r>
+            <a:endParaRPr lang="en-US" sz="2000" dirty="0"/>
+          </a:p>
+          <a:p>
+            <a:pPr indent="0" marL="0">
+              <a:spcAft>
+                <a:spcPts val="1400"/>
+              </a:spcAft>
+              <a:buNone/>
+            </a:pPr>
+            <a:r>
+              <a:rPr lang="en-US" sz="2000" b="1" dirty="0">
+                <a:solidFill>
+                  <a:srgbClr val="131B35"/>
+                </a:solidFill>
+                <a:latin typeface="BIZ UDゴシック" pitchFamily="34" charset="0"/>
+                <a:ea typeface="BIZ UDゴシック" pitchFamily="49" charset="-128"/>
+                <a:cs typeface="BIZ UDゴシック" pitchFamily="34" charset="-120"/>
+              </a:rPr>
+              <a:t>環境づくり（ナッジ）を</a:t>
+            </a:r>
+            <a:endParaRPr lang="en-US" sz="2000" dirty="0"/>
+          </a:p>
+        </p:txBody>
+      </p:sp>
+      <p:sp>
+        <p:nvSpPr>
+          <p:cNvPr id="25" name="Slide Number Placeholder 0"/>
+          <p:cNvSpPr>
+            <a:spLocks noGrp="1"/>
+          </p:cNvSpPr>
+          <p:nvPr>
+            <p:ph type="sldNum" sz="quarter" idx="4294967295"/>
+          </p:nvPr>
+        </p:nvSpPr>
+        <p:spPr>
+          <a:xfrm>
+            <a:off x="11000232" y="6217920"/>
+            <a:ext cx="640080" cy="384048"/>
+          </a:xfrm>
+          <a:prstGeom prst="rect">
+            <a:avLst/>
+          </a:prstGeom>
+          <a:extLst>
+            <a:ext uri="{C572A759-6A51-4108-AA02-DFA0A04FC94B}">
+              <ma14:wrappingTextBoxFlag xmlns:ma14="http://schemas.microsoft.com/office/mac/drawingml/2011/main" val="0"/>
+            </a:ext>
+          </a:extLst>
+        </p:spPr>
+        <p:txBody>
+          <a:bodyPr/>
+          <a:lstStyle>
+            <a:lvl1pPr>
+              <a:defRPr sz="2000">
+                <a:solidFill>
+                  <a:srgbClr val="8A96A8"/>
+                </a:solidFill>
+                <a:latin typeface="BIZ UDゴシック"/>
+                <a:ea typeface="BIZ UDゴシック"/>
+                <a:cs typeface="BIZ UDゴシック"/>
+              </a:defRPr>
+            </a:lvl1pPr>
+          </a:lstStyle>
+          <a:p>
+            <a:pPr algn="r"/>
+            <a:fld id="{F7021451-1387-4CA6-816F-3879F97B5CBC}" type="slidenum">
+              <a:rPr b="0" lang="en-US"/>
+              <a:t>2</a:t>
+            </a:fld>
+            <a:endParaRPr lang="en-US"/>
+          </a:p>
+        </p:txBody>
+      </p:sp>
+    </p:spTree>
+  </p:cSld>
+  <p:clrMapOvr>
+    <a:masterClrMapping/>
+  </p:clrMapOvr>
+</p:sld>
+</file>
+
+<file path=ppt/slides/slide51.xml><?xml version="1.0" encoding="utf-8"?>
+<p:sld xmlns:a="http://schemas.openxmlformats.org/drawingml/2006/main" xmlns:r="http://schemas.openxmlformats.org/officeDocument/2006/relationships" xmlns:p="http://schemas.openxmlformats.org/presentationml/2006/main">
+  <p:cSld name="Slide 3">
+    <p:bg>
+      <p:bgPr>
+        <a:solidFill>
+          <a:srgbClr val="FFFFFF"/>
+        </a:solidFill>
+      </p:bgPr>
+    </p:bg>
+    <p:spTree>
+      <p:nvGrpSpPr>
+        <p:cNvPr id="1" name=""/>
+        <p:cNvGrpSpPr/>
+        <p:nvPr/>
+      </p:nvGrpSpPr>
+      <p:grpSpPr>
+        <a:xfrm>
+          <a:off x="0" y="0"/>
+          <a:ext cx="0" cy="0"/>
+          <a:chOff x="0" y="0"/>
+          <a:chExt cx="0" cy="0"/>
+        </a:xfrm>
+      </p:grpSpPr>
+      <p:sp>
+        <p:nvSpPr>
+          <p:cNvPr id="2" name="Shape 0"/>
+          <p:cNvSpPr/>
+          <p:nvPr/>
+        </p:nvSpPr>
+        <p:spPr>
+          <a:xfrm>
+            <a:off x="548640" y="347472"/>
+            <a:ext cx="2235200" cy="420624"/>
+          </a:xfrm>
+          <a:prstGeom prst="roundRect">
+            <a:avLst>
+              <a:gd name="adj" fmla="val 50000"/>
+            </a:avLst>
+          </a:prstGeom>
+          <a:solidFill>
+            <a:srgbClr val="2F6FA8"/>
+          </a:solidFill>
+          <a:ln w="12700">
+            <a:solidFill>
+              <a:srgbClr val="2F6FA8"/>
+            </a:solidFill>
+            <a:prstDash val="solid"/>
+          </a:ln>
+        </p:spPr>
+      </p:sp>
+      <p:sp>
+        <p:nvSpPr>
+          <p:cNvPr id="3" name="Text 1"/>
+          <p:cNvSpPr txBox="1"/>
+          <p:nvPr/>
+        </p:nvSpPr>
+        <p:spPr>
+          <a:xfrm>
+            <a:off x="548640" y="347472"/>
+            <a:ext cx="2235200" cy="420624"/>
+          </a:xfrm>
+          <a:prstGeom prst="rect">
+            <a:avLst/>
+          </a:prstGeom>
+          <a:noFill/>
+          <a:ln/>
+        </p:spPr>
+        <p:txBody>
+          <a:bodyPr wrap="square" lIns="0" tIns="0" rIns="0" bIns="0" rtlCol="0" anchor="ctr"/>
+          <a:lstStyle/>
+          <a:p>
+            <a:pPr algn="ctr" indent="0" marL="0">
+              <a:buNone/>
+            </a:pPr>
+            <a:r>
+              <a:rPr lang="en-US" sz="2000" b="1" dirty="0">
+                <a:solidFill>
+                  <a:srgbClr val="FFFFFF"/>
+                </a:solidFill>
+                <a:latin typeface="BIZ UDゴシック" pitchFamily="34" charset="0"/>
+                <a:ea typeface="BIZ UDゴシック" pitchFamily="49" charset="-128"/>
+                <a:cs typeface="BIZ UDゴシック" pitchFamily="34" charset="-120"/>
+              </a:rPr>
+              <a:t>ナッジって何？</a:t>
+            </a:r>
+            <a:endParaRPr lang="en-US" sz="2000" dirty="0"/>
+          </a:p>
+        </p:txBody>
+      </p:sp>
+      <p:sp>
+        <p:nvSpPr>
+          <p:cNvPr id="4" name="Text 2"/>
+          <p:cNvSpPr txBox="1"/>
+          <p:nvPr/>
+        </p:nvSpPr>
+        <p:spPr>
+          <a:xfrm>
+            <a:off x="548640" y="868680"/>
+            <a:ext cx="11094415" cy="777240"/>
+          </a:xfrm>
+          <a:prstGeom prst="rect">
+            <a:avLst/>
+          </a:prstGeom>
+          <a:noFill/>
+          <a:ln/>
+        </p:spPr>
+        <p:txBody>
+          <a:bodyPr wrap="square" lIns="0" tIns="0" rIns="0" bIns="0" rtlCol="0" anchor="ctr"/>
+          <a:lstStyle/>
+          <a:p>
+            <a:pPr indent="0" marL="0">
+              <a:buNone/>
+            </a:pPr>
+            <a:r>
+              <a:rPr lang="en-US" sz="3200" b="1" dirty="0">
+                <a:solidFill>
+                  <a:srgbClr val="131B35"/>
+                </a:solidFill>
+                <a:latin typeface="BIZ UDゴシック" pitchFamily="34" charset="0"/>
+                <a:ea typeface="BIZ UDゴシック" pitchFamily="49" charset="-128"/>
+                <a:cs typeface="BIZ UDゴシック" pitchFamily="34" charset="-120"/>
+              </a:rPr>
+              <a:t>ナッジ＝ひじで「そっと押す」。禁止も強制もしない</a:t>
+            </a:r>
+            <a:endParaRPr lang="en-US" sz="3200" dirty="0"/>
+          </a:p>
+        </p:txBody>
+      </p:sp>
+      <p:sp>
+        <p:nvSpPr>
+          <p:cNvPr id="5" name="Text 3"/>
+          <p:cNvSpPr txBox="1"/>
+          <p:nvPr/>
+        </p:nvSpPr>
+        <p:spPr>
+          <a:xfrm>
+            <a:off x="548640" y="6217920"/>
+            <a:ext cx="10058400" cy="384048"/>
+          </a:xfrm>
+          <a:prstGeom prst="rect">
+            <a:avLst/>
+          </a:prstGeom>
+          <a:noFill/>
+          <a:ln/>
+        </p:spPr>
+        <p:txBody>
+          <a:bodyPr wrap="square" lIns="0" tIns="0" rIns="0" bIns="0" rtlCol="0" anchor="ctr"/>
+          <a:lstStyle/>
+          <a:p>
+            <a:pPr indent="0" marL="0">
+              <a:buNone/>
+            </a:pPr>
+            <a:r>
+              <a:rPr lang="en-US" sz="2000" dirty="0">
+                <a:solidFill>
+                  <a:srgbClr val="4F5B6B"/>
+                </a:solidFill>
+                <a:latin typeface="BIZ UDゴシック" pitchFamily="34" charset="0"/>
+                <a:ea typeface="BIZ UDゴシック" pitchFamily="49" charset="-128"/>
+                <a:cs typeface="BIZ UDゴシック" pitchFamily="34" charset="-120"/>
+              </a:rPr>
+              <a:t>出典：Thaler RH, Sunstein CR. Nudge. Yale Univ Press 2008</a:t>
+            </a:r>
+            <a:endParaRPr lang="en-US" sz="2000" dirty="0"/>
+          </a:p>
+        </p:txBody>
+      </p:sp>
+      <p:sp>
+        <p:nvSpPr>
+          <p:cNvPr id="7" name="Shape 4"/>
+          <p:cNvSpPr/>
+          <p:nvPr/>
+        </p:nvSpPr>
+        <p:spPr>
+          <a:xfrm>
+            <a:off x="548640" y="1965960"/>
+            <a:ext cx="5120640" cy="3977640"/>
+          </a:xfrm>
+          <a:prstGeom prst="roundRect">
+            <a:avLst>
+              <a:gd name="adj" fmla="val 2759"/>
+            </a:avLst>
+          </a:prstGeom>
+          <a:solidFill>
+            <a:srgbClr val="131B35"/>
+          </a:solidFill>
+          <a:ln w="12700">
+            <a:solidFill>
+              <a:srgbClr val="131B35"/>
+            </a:solidFill>
+            <a:prstDash val="solid"/>
+          </a:ln>
+        </p:spPr>
+      </p:sp>
+      <p:sp>
+        <p:nvSpPr>
+          <p:cNvPr id="8" name="Shape 5"/>
+          <p:cNvSpPr/>
+          <p:nvPr/>
+        </p:nvSpPr>
+        <p:spPr>
+          <a:xfrm>
+            <a:off x="868680" y="2240280"/>
+            <a:ext cx="914400" cy="914400"/>
+          </a:xfrm>
+          <a:prstGeom prst="ellipse">
+            <a:avLst/>
+          </a:prstGeom>
+          <a:solidFill>
+            <a:srgbClr val="1E2A4F"/>
+          </a:solidFill>
+          <a:ln w="12700">
+            <a:solidFill>
+              <a:srgbClr val="1E2A4F"/>
+            </a:solidFill>
+            <a:prstDash val="solid"/>
+          </a:ln>
+        </p:spPr>
+      </p:sp>
+      <p:pic>
+        <p:nvPicPr>
+          <p:cNvPr id="9" name="Image 0" descr="preencoded.png">    </p:cNvPr>
+          <p:cNvPicPr>
+            <a:picLocks noChangeAspect="1"/>
+          </p:cNvPicPr>
+          <p:nvPr/>
+        </p:nvPicPr>
+        <p:blipFill>
+          <a:blip r:embed="rId1"/>
+          <a:stretch>
+            <a:fillRect/>
+          </a:stretch>
+        </p:blipFill>
+        <p:spPr>
+          <a:xfrm>
+            <a:off x="1088136" y="2459736"/>
+            <a:ext cx="475488" cy="475488"/>
+          </a:xfrm>
+          <a:prstGeom prst="rect">
+            <a:avLst/>
+          </a:prstGeom>
+        </p:spPr>
+      </p:pic>
+      <p:sp>
+        <p:nvSpPr>
+          <p:cNvPr id="10" name="Text 6"/>
+          <p:cNvSpPr txBox="1"/>
+          <p:nvPr/>
+        </p:nvSpPr>
+        <p:spPr>
+          <a:xfrm>
+            <a:off x="2011680" y="2240280"/>
+            <a:ext cx="3566160" cy="914400"/>
+          </a:xfrm>
+          <a:prstGeom prst="rect">
+            <a:avLst/>
+          </a:prstGeom>
+          <a:noFill/>
+          <a:ln/>
+        </p:spPr>
+        <p:txBody>
+          <a:bodyPr wrap="square" lIns="0" tIns="0" rIns="0" bIns="0" rtlCol="0" anchor="ctr"/>
+          <a:lstStyle/>
+          <a:p>
+            <a:pPr indent="0" marL="0">
+              <a:buNone/>
+            </a:pPr>
+            <a:r>
+              <a:rPr lang="en-US" sz="2200" b="1" dirty="0">
+                <a:solidFill>
+                  <a:srgbClr val="3FE8C2"/>
+                </a:solidFill>
+                <a:latin typeface="BIZ UDゴシック" pitchFamily="34" charset="0"/>
+                <a:ea typeface="BIZ UDゴシック" pitchFamily="49" charset="-128"/>
+                <a:cs typeface="BIZ UDゴシック" pitchFamily="34" charset="-120"/>
+              </a:rPr>
+              <a:t>nudge（ナッジ）</a:t>
+            </a:r>
+            <a:endParaRPr lang="en-US" sz="2200" dirty="0"/>
+          </a:p>
+          <a:p>
+            <a:pPr indent="0" marL="0">
+              <a:buNone/>
+            </a:pPr>
+            <a:r>
+              <a:rPr lang="en-US" sz="2200" b="1" dirty="0">
+                <a:solidFill>
+                  <a:srgbClr val="3FE8C2"/>
+                </a:solidFill>
+                <a:latin typeface="BIZ UDゴシック" pitchFamily="34" charset="0"/>
+                <a:ea typeface="BIZ UDゴシック" pitchFamily="49" charset="-128"/>
+                <a:cs typeface="BIZ UDゴシック" pitchFamily="34" charset="-120"/>
+              </a:rPr>
+              <a:t>＝ひじで軽くつつく</a:t>
+            </a:r>
+            <a:endParaRPr lang="en-US" sz="2200" dirty="0"/>
+          </a:p>
+        </p:txBody>
+      </p:sp>
+      <p:sp>
+        <p:nvSpPr>
+          <p:cNvPr id="11" name="Text 7"/>
+          <p:cNvSpPr txBox="1"/>
+          <p:nvPr/>
+        </p:nvSpPr>
+        <p:spPr>
+          <a:xfrm>
+            <a:off x="868680" y="3291840"/>
+            <a:ext cx="4572000" cy="1371600"/>
+          </a:xfrm>
+          <a:prstGeom prst="rect">
+            <a:avLst/>
+          </a:prstGeom>
+          <a:noFill/>
+          <a:ln/>
+        </p:spPr>
+        <p:txBody>
+          <a:bodyPr wrap="square" lIns="0" tIns="0" rIns="0" bIns="0" rtlCol="0" anchor="t"/>
+          <a:lstStyle/>
+          <a:p>
+            <a:pPr indent="0" marL="0">
+              <a:spcAft>
+                <a:spcPts val="400"/>
+              </a:spcAft>
+              <a:buNone/>
+            </a:pPr>
+            <a:r>
+              <a:rPr lang="en-US" sz="2600" dirty="0">
+                <a:solidFill>
+                  <a:srgbClr val="FFFFFF"/>
+                </a:solidFill>
+                <a:latin typeface="BIZ UDゴシック" pitchFamily="34" charset="0"/>
+                <a:ea typeface="BIZ UDゴシック" pitchFamily="49" charset="-128"/>
+                <a:cs typeface="BIZ UDゴシック" pitchFamily="34" charset="-120"/>
+              </a:rPr>
+              <a:t>選ぶ自由は残したまま、</a:t>
+            </a:r>
+            <a:endParaRPr lang="en-US" sz="2600" dirty="0"/>
+          </a:p>
+          <a:p>
+            <a:pPr indent="0" marL="0">
+              <a:spcAft>
+                <a:spcPts val="400"/>
+              </a:spcAft>
+              <a:buNone/>
+            </a:pPr>
+            <a:r>
+              <a:rPr lang="en-US" sz="2600" dirty="0">
+                <a:solidFill>
+                  <a:srgbClr val="FFFFFF"/>
+                </a:solidFill>
+                <a:latin typeface="BIZ UDゴシック" pitchFamily="34" charset="0"/>
+                <a:ea typeface="BIZ UDゴシック" pitchFamily="49" charset="-128"/>
+                <a:cs typeface="BIZ UDゴシック" pitchFamily="34" charset="-120"/>
+              </a:rPr>
+              <a:t>望ましい行動を</a:t>
+            </a:r>
+            <a:endParaRPr lang="en-US" sz="2600" dirty="0"/>
+          </a:p>
+          <a:p>
+            <a:pPr indent="0" marL="0">
+              <a:spcAft>
+                <a:spcPts val="400"/>
+              </a:spcAft>
+              <a:buNone/>
+            </a:pPr>
+            <a:r>
+              <a:rPr lang="en-US" sz="2600" b="1" dirty="0">
+                <a:solidFill>
+                  <a:srgbClr val="3FE8C2"/>
+                </a:solidFill>
+                <a:latin typeface="BIZ UDゴシック" pitchFamily="34" charset="0"/>
+                <a:ea typeface="BIZ UDゴシック" pitchFamily="49" charset="-128"/>
+                <a:cs typeface="BIZ UDゴシック" pitchFamily="34" charset="-120"/>
+              </a:rPr>
+              <a:t>「選びやすく」する工夫</a:t>
+            </a:r>
+            <a:endParaRPr lang="en-US" sz="2600" dirty="0"/>
+          </a:p>
+        </p:txBody>
+      </p:sp>
+      <p:sp>
+        <p:nvSpPr>
+          <p:cNvPr id="12" name="Text 8"/>
+          <p:cNvSpPr txBox="1"/>
+          <p:nvPr/>
+        </p:nvSpPr>
+        <p:spPr>
+          <a:xfrm>
+            <a:off x="868680" y="4754880"/>
+            <a:ext cx="4572000" cy="457200"/>
+          </a:xfrm>
+          <a:prstGeom prst="rect">
+            <a:avLst/>
+          </a:prstGeom>
+          <a:noFill/>
+          <a:ln/>
+        </p:spPr>
+        <p:txBody>
+          <a:bodyPr wrap="square" lIns="0" tIns="0" rIns="0" bIns="0" rtlCol="0" anchor="ctr"/>
+          <a:lstStyle/>
+          <a:p>
+            <a:pPr indent="0" marL="0">
+              <a:buNone/>
+            </a:pPr>
+            <a:r>
+              <a:rPr lang="en-US" sz="2000" dirty="0">
+                <a:solidFill>
+                  <a:srgbClr val="C9D4E8"/>
+                </a:solidFill>
+                <a:latin typeface="BIZ UDゴシック" pitchFamily="34" charset="0"/>
+                <a:ea typeface="BIZ UDゴシック" pitchFamily="49" charset="-128"/>
+                <a:cs typeface="BIZ UDゴシック" pitchFamily="34" charset="-120"/>
+              </a:rPr>
+              <a:t>× 禁止・強制　× ごほうび・罰金</a:t>
+            </a:r>
+            <a:endParaRPr lang="en-US" sz="2000" dirty="0"/>
+          </a:p>
+        </p:txBody>
+      </p:sp>
+      <p:sp>
+        <p:nvSpPr>
+          <p:cNvPr id="13" name="Text 9"/>
+          <p:cNvSpPr txBox="1"/>
+          <p:nvPr/>
+        </p:nvSpPr>
+        <p:spPr>
+          <a:xfrm>
+            <a:off x="868680" y="5257800"/>
+            <a:ext cx="4572000" cy="457200"/>
+          </a:xfrm>
+          <a:prstGeom prst="rect">
+            <a:avLst/>
+          </a:prstGeom>
+          <a:noFill/>
+          <a:ln/>
+        </p:spPr>
+        <p:txBody>
+          <a:bodyPr wrap="square" lIns="0" tIns="0" rIns="0" bIns="0" rtlCol="0" anchor="ctr"/>
+          <a:lstStyle/>
+          <a:p>
+            <a:pPr indent="0" marL="0">
+              <a:buNone/>
+            </a:pPr>
+            <a:r>
+              <a:rPr lang="en-US" sz="2000" b="1" dirty="0">
+                <a:solidFill>
+                  <a:srgbClr val="3FE8C2"/>
+                </a:solidFill>
+                <a:latin typeface="BIZ UDゴシック" pitchFamily="34" charset="0"/>
+                <a:ea typeface="BIZ UDゴシック" pitchFamily="49" charset="-128"/>
+                <a:cs typeface="BIZ UDゴシック" pitchFamily="34" charset="-120"/>
+              </a:rPr>
+              <a:t>→ 主に「速い思考」に働きかける</a:t>
+            </a:r>
+            <a:endParaRPr lang="en-US" sz="2000" dirty="0"/>
+          </a:p>
+        </p:txBody>
+      </p:sp>
+      <p:sp>
+        <p:nvSpPr>
+          <p:cNvPr id="14" name="Text 10"/>
+          <p:cNvSpPr txBox="1"/>
+          <p:nvPr/>
+        </p:nvSpPr>
+        <p:spPr>
+          <a:xfrm>
+            <a:off x="6035040" y="1965960"/>
+            <a:ext cx="5608015" cy="457200"/>
+          </a:xfrm>
+          <a:prstGeom prst="rect">
+            <a:avLst/>
+          </a:prstGeom>
+          <a:noFill/>
+          <a:ln/>
+        </p:spPr>
+        <p:txBody>
+          <a:bodyPr wrap="square" lIns="0" tIns="0" rIns="0" bIns="0" rtlCol="0" anchor="t"/>
+          <a:lstStyle/>
+          <a:p>
+            <a:pPr indent="0" marL="0">
+              <a:buNone/>
+            </a:pPr>
+            <a:r>
+              <a:rPr lang="en-US" sz="2400" b="1" dirty="0">
+                <a:solidFill>
+                  <a:srgbClr val="131B35"/>
+                </a:solidFill>
+                <a:latin typeface="BIZ UDゴシック" pitchFamily="34" charset="0"/>
+                <a:ea typeface="BIZ UDゴシック" pitchFamily="49" charset="-128"/>
+                <a:cs typeface="BIZ UDゴシック" pitchFamily="34" charset="-120"/>
+              </a:rPr>
+              <a:t>身近なナッジ</a:t>
+            </a:r>
+            <a:endParaRPr lang="en-US" sz="2400" dirty="0"/>
+          </a:p>
+        </p:txBody>
+      </p:sp>
+      <p:sp>
+        <p:nvSpPr>
+          <p:cNvPr id="15" name="Shape 11"/>
+          <p:cNvSpPr/>
+          <p:nvPr/>
+        </p:nvSpPr>
+        <p:spPr>
+          <a:xfrm>
+            <a:off x="6035040" y="2560320"/>
+            <a:ext cx="5608015" cy="1005840"/>
+          </a:xfrm>
+          <a:prstGeom prst="roundRect">
+            <a:avLst>
+              <a:gd name="adj" fmla="val 10909"/>
+            </a:avLst>
+          </a:prstGeom>
+          <a:solidFill>
+            <a:srgbClr val="EEF2F7"/>
+          </a:solidFill>
+          <a:ln w="12700">
+            <a:solidFill>
+              <a:srgbClr val="EEF2F7"/>
+            </a:solidFill>
+            <a:prstDash val="solid"/>
+          </a:ln>
+        </p:spPr>
+      </p:sp>
+      <p:sp>
+        <p:nvSpPr>
+          <p:cNvPr id="16" name="Shape 12"/>
+          <p:cNvSpPr/>
+          <p:nvPr/>
+        </p:nvSpPr>
+        <p:spPr>
+          <a:xfrm>
+            <a:off x="6217920" y="2715768"/>
+            <a:ext cx="694944" cy="694944"/>
+          </a:xfrm>
+          <a:prstGeom prst="ellipse">
+            <a:avLst/>
+          </a:prstGeom>
+          <a:solidFill>
+            <a:srgbClr val="2F6FA8"/>
+          </a:solidFill>
+          <a:ln w="12700">
+            <a:solidFill>
+              <a:srgbClr val="2F6FA8"/>
+            </a:solidFill>
+            <a:prstDash val="solid"/>
+          </a:ln>
+        </p:spPr>
+      </p:sp>
+      <p:pic>
+        <p:nvPicPr>
+          <p:cNvPr id="17" name="Image 1" descr="preencoded.png">    </p:cNvPr>
+          <p:cNvPicPr>
+            <a:picLocks noChangeAspect="1"/>
+          </p:cNvPicPr>
+          <p:nvPr/>
+        </p:nvPicPr>
+        <p:blipFill>
+          <a:blip r:embed="rId2"/>
+          <a:stretch>
+            <a:fillRect/>
+          </a:stretch>
+        </p:blipFill>
+        <p:spPr>
+          <a:xfrm>
+            <a:off x="6384707" y="2882555"/>
+            <a:ext cx="361371" cy="361371"/>
+          </a:xfrm>
+          <a:prstGeom prst="rect">
+            <a:avLst/>
+          </a:prstGeom>
+        </p:spPr>
+      </p:pic>
+      <p:sp>
+        <p:nvSpPr>
+          <p:cNvPr id="18" name="Text 13"/>
+          <p:cNvSpPr txBox="1"/>
+          <p:nvPr/>
+        </p:nvSpPr>
+        <p:spPr>
+          <a:xfrm>
+            <a:off x="7086600" y="2633472"/>
+            <a:ext cx="4465015" cy="859536"/>
+          </a:xfrm>
+          <a:prstGeom prst="rect">
+            <a:avLst/>
+          </a:prstGeom>
+          <a:noFill/>
+          <a:ln/>
+        </p:spPr>
+        <p:txBody>
+          <a:bodyPr wrap="square" lIns="0" tIns="0" rIns="0" bIns="0" rtlCol="0" anchor="ctr"/>
+          <a:lstStyle/>
+          <a:p>
+            <a:pPr indent="0" marL="0">
+              <a:buNone/>
+            </a:pPr>
+            <a:r>
+              <a:rPr lang="en-US" sz="2000" b="1" dirty="0">
+                <a:solidFill>
+                  <a:srgbClr val="131B35"/>
+                </a:solidFill>
+                <a:latin typeface="BIZ UDゴシック" pitchFamily="34" charset="0"/>
+                <a:ea typeface="BIZ UDゴシック" pitchFamily="49" charset="-128"/>
+                <a:cs typeface="BIZ UDゴシック" pitchFamily="34" charset="-120"/>
+              </a:rPr>
+              <a:t>レジ前の足あとマーク</a:t>
+            </a:r>
+            <a:endParaRPr lang="en-US" sz="2000" dirty="0"/>
+          </a:p>
+          <a:p>
+            <a:pPr indent="0" marL="0">
+              <a:buNone/>
+            </a:pPr>
+            <a:r>
+              <a:rPr lang="en-US" sz="2000" dirty="0">
+                <a:solidFill>
+                  <a:srgbClr val="1B2333"/>
+                </a:solidFill>
+                <a:latin typeface="BIZ UDゴシック" pitchFamily="34" charset="0"/>
+                <a:ea typeface="BIZ UDゴシック" pitchFamily="49" charset="-128"/>
+                <a:cs typeface="BIZ UDゴシック" pitchFamily="34" charset="-120"/>
+              </a:rPr>
+              <a:t>→ 自然と間隔をあけて並ぶ</a:t>
+            </a:r>
+            <a:endParaRPr lang="en-US" sz="2000" dirty="0"/>
+          </a:p>
+        </p:txBody>
+      </p:sp>
+      <p:sp>
+        <p:nvSpPr>
+          <p:cNvPr id="19" name="Shape 14"/>
+          <p:cNvSpPr/>
+          <p:nvPr/>
+        </p:nvSpPr>
+        <p:spPr>
+          <a:xfrm>
+            <a:off x="6035040" y="3703320"/>
+            <a:ext cx="5608015" cy="1005840"/>
+          </a:xfrm>
+          <a:prstGeom prst="roundRect">
+            <a:avLst>
+              <a:gd name="adj" fmla="val 10909"/>
+            </a:avLst>
+          </a:prstGeom>
+          <a:solidFill>
+            <a:srgbClr val="EEF2F7"/>
+          </a:solidFill>
+          <a:ln w="12700">
+            <a:solidFill>
+              <a:srgbClr val="EEF2F7"/>
+            </a:solidFill>
+            <a:prstDash val="solid"/>
+          </a:ln>
+        </p:spPr>
+      </p:sp>
+      <p:sp>
+        <p:nvSpPr>
+          <p:cNvPr id="20" name="Shape 15"/>
+          <p:cNvSpPr/>
+          <p:nvPr/>
+        </p:nvSpPr>
+        <p:spPr>
+          <a:xfrm>
+            <a:off x="6217920" y="3858768"/>
+            <a:ext cx="694944" cy="694944"/>
+          </a:xfrm>
+          <a:prstGeom prst="ellipse">
+            <a:avLst/>
+          </a:prstGeom>
+          <a:solidFill>
+            <a:srgbClr val="2F6FA8"/>
+          </a:solidFill>
+          <a:ln w="12700">
+            <a:solidFill>
+              <a:srgbClr val="2F6FA8"/>
+            </a:solidFill>
+            <a:prstDash val="solid"/>
+          </a:ln>
+        </p:spPr>
+      </p:sp>
+      <p:pic>
+        <p:nvPicPr>
+          <p:cNvPr id="21" name="Image 2" descr="preencoded.png">    </p:cNvPr>
+          <p:cNvPicPr>
+            <a:picLocks noChangeAspect="1"/>
+          </p:cNvPicPr>
+          <p:nvPr/>
+        </p:nvPicPr>
+        <p:blipFill>
+          <a:blip r:embed="rId3"/>
+          <a:stretch>
+            <a:fillRect/>
+          </a:stretch>
+        </p:blipFill>
+        <p:spPr>
+          <a:xfrm>
+            <a:off x="6384707" y="4025555"/>
+            <a:ext cx="361371" cy="361371"/>
+          </a:xfrm>
+          <a:prstGeom prst="rect">
+            <a:avLst/>
+          </a:prstGeom>
+        </p:spPr>
+      </p:pic>
+      <p:sp>
+        <p:nvSpPr>
+          <p:cNvPr id="22" name="Text 16"/>
+          <p:cNvSpPr txBox="1"/>
+          <p:nvPr/>
+        </p:nvSpPr>
+        <p:spPr>
+          <a:xfrm>
+            <a:off x="7086600" y="3776472"/>
+            <a:ext cx="4465015" cy="859536"/>
+          </a:xfrm>
+          <a:prstGeom prst="rect">
+            <a:avLst/>
+          </a:prstGeom>
+          <a:noFill/>
+          <a:ln/>
+        </p:spPr>
+        <p:txBody>
+          <a:bodyPr wrap="square" lIns="0" tIns="0" rIns="0" bIns="0" rtlCol="0" anchor="ctr"/>
+          <a:lstStyle/>
+          <a:p>
+            <a:pPr indent="0" marL="0">
+              <a:buNone/>
+            </a:pPr>
+            <a:r>
+              <a:rPr lang="en-US" sz="2000" b="1" dirty="0">
+                <a:solidFill>
+                  <a:srgbClr val="131B35"/>
+                </a:solidFill>
+                <a:latin typeface="BIZ UDゴシック" pitchFamily="34" charset="0"/>
+                <a:ea typeface="BIZ UDゴシック" pitchFamily="49" charset="-128"/>
+                <a:cs typeface="BIZ UDゴシック" pitchFamily="34" charset="-120"/>
+              </a:rPr>
+              <a:t>「一番人気」の表示</a:t>
+            </a:r>
+            <a:endParaRPr lang="en-US" sz="2000" dirty="0"/>
+          </a:p>
+          <a:p>
+            <a:pPr indent="0" marL="0">
+              <a:buNone/>
+            </a:pPr>
+            <a:r>
+              <a:rPr lang="en-US" sz="2000" dirty="0">
+                <a:solidFill>
+                  <a:srgbClr val="1B2333"/>
+                </a:solidFill>
+                <a:latin typeface="BIZ UDゴシック" pitchFamily="34" charset="0"/>
+                <a:ea typeface="BIZ UDゴシック" pitchFamily="49" charset="-128"/>
+                <a:cs typeface="BIZ UDゴシック" pitchFamily="34" charset="-120"/>
+              </a:rPr>
+              <a:t>→ みんなと同じものを選ぶ</a:t>
+            </a:r>
+            <a:endParaRPr lang="en-US" sz="2000" dirty="0"/>
+          </a:p>
+        </p:txBody>
+      </p:sp>
+      <p:sp>
+        <p:nvSpPr>
+          <p:cNvPr id="23" name="Shape 17"/>
+          <p:cNvSpPr/>
+          <p:nvPr/>
+        </p:nvSpPr>
+        <p:spPr>
+          <a:xfrm>
+            <a:off x="6035040" y="4846320"/>
+            <a:ext cx="5608015" cy="1005840"/>
+          </a:xfrm>
+          <a:prstGeom prst="roundRect">
+            <a:avLst>
+              <a:gd name="adj" fmla="val 10909"/>
+            </a:avLst>
+          </a:prstGeom>
+          <a:solidFill>
+            <a:srgbClr val="EEF2F7"/>
+          </a:solidFill>
+          <a:ln w="12700">
+            <a:solidFill>
+              <a:srgbClr val="EEF2F7"/>
+            </a:solidFill>
+            <a:prstDash val="solid"/>
+          </a:ln>
+        </p:spPr>
+      </p:sp>
+      <p:sp>
+        <p:nvSpPr>
+          <p:cNvPr id="24" name="Shape 18"/>
+          <p:cNvSpPr/>
+          <p:nvPr/>
+        </p:nvSpPr>
+        <p:spPr>
+          <a:xfrm>
+            <a:off x="6217920" y="5001768"/>
+            <a:ext cx="694944" cy="694944"/>
+          </a:xfrm>
+          <a:prstGeom prst="ellipse">
+            <a:avLst/>
+          </a:prstGeom>
+          <a:solidFill>
+            <a:srgbClr val="2F6FA8"/>
+          </a:solidFill>
+          <a:ln w="12700">
+            <a:solidFill>
+              <a:srgbClr val="2F6FA8"/>
+            </a:solidFill>
+            <a:prstDash val="solid"/>
+          </a:ln>
+        </p:spPr>
+      </p:sp>
+      <p:pic>
+        <p:nvPicPr>
+          <p:cNvPr id="25" name="Image 3" descr="preencoded.png">    </p:cNvPr>
+          <p:cNvPicPr>
+            <a:picLocks noChangeAspect="1"/>
+          </p:cNvPicPr>
+          <p:nvPr/>
+        </p:nvPicPr>
+        <p:blipFill>
+          <a:blip r:embed="rId4"/>
+          <a:stretch>
+            <a:fillRect/>
+          </a:stretch>
+        </p:blipFill>
+        <p:spPr>
+          <a:xfrm>
+            <a:off x="6384707" y="5168555"/>
+            <a:ext cx="361371" cy="361371"/>
+          </a:xfrm>
+          <a:prstGeom prst="rect">
+            <a:avLst/>
+          </a:prstGeom>
+        </p:spPr>
+      </p:pic>
+      <p:sp>
+        <p:nvSpPr>
+          <p:cNvPr id="26" name="Text 19"/>
+          <p:cNvSpPr txBox="1"/>
+          <p:nvPr/>
+        </p:nvSpPr>
+        <p:spPr>
+          <a:xfrm>
+            <a:off x="7086600" y="4919472"/>
+            <a:ext cx="4465015" cy="859536"/>
+          </a:xfrm>
+          <a:prstGeom prst="rect">
+            <a:avLst/>
+          </a:prstGeom>
+          <a:noFill/>
+          <a:ln/>
+        </p:spPr>
+        <p:txBody>
+          <a:bodyPr wrap="square" lIns="0" tIns="0" rIns="0" bIns="0" rtlCol="0" anchor="ctr"/>
+          <a:lstStyle/>
+          <a:p>
+            <a:pPr indent="0" marL="0">
+              <a:buNone/>
+            </a:pPr>
+            <a:r>
+              <a:rPr lang="en-US" sz="2000" b="1" dirty="0">
+                <a:solidFill>
+                  <a:srgbClr val="131B35"/>
+                </a:solidFill>
+                <a:latin typeface="BIZ UDゴシック" pitchFamily="34" charset="0"/>
+                <a:ea typeface="BIZ UDゴシック" pitchFamily="49" charset="-128"/>
+                <a:cs typeface="BIZ UDゴシック" pitchFamily="34" charset="-120"/>
+              </a:rPr>
+              <a:t>最初からチェック済みの欄</a:t>
+            </a:r>
+            <a:endParaRPr lang="en-US" sz="2000" dirty="0"/>
+          </a:p>
+          <a:p>
+            <a:pPr indent="0" marL="0">
+              <a:buNone/>
+            </a:pPr>
+            <a:r>
+              <a:rPr lang="en-US" sz="2000" dirty="0">
+                <a:solidFill>
+                  <a:srgbClr val="1B2333"/>
+                </a:solidFill>
+                <a:latin typeface="BIZ UDゴシック" pitchFamily="34" charset="0"/>
+                <a:ea typeface="BIZ UDゴシック" pitchFamily="49" charset="-128"/>
+                <a:cs typeface="BIZ UDゴシック" pitchFamily="34" charset="-120"/>
+              </a:rPr>
+              <a:t>→ そのままにしがち</a:t>
+            </a:r>
+            <a:endParaRPr lang="en-US" sz="2000" dirty="0"/>
+          </a:p>
+        </p:txBody>
+      </p:sp>
+      <p:sp>
+        <p:nvSpPr>
+          <p:cNvPr id="25" name="Slide Number Placeholder 0"/>
+          <p:cNvSpPr>
+            <a:spLocks noGrp="1"/>
+          </p:cNvSpPr>
+          <p:nvPr>
+            <p:ph type="sldNum" sz="quarter" idx="4294967295"/>
+          </p:nvPr>
+        </p:nvSpPr>
+        <p:spPr>
+          <a:xfrm>
+            <a:off x="11000232" y="6217920"/>
+            <a:ext cx="640080" cy="384048"/>
+          </a:xfrm>
+          <a:prstGeom prst="rect">
+            <a:avLst/>
+          </a:prstGeom>
+          <a:extLst>
+            <a:ext uri="{C572A759-6A51-4108-AA02-DFA0A04FC94B}">
+              <ma14:wrappingTextBoxFlag xmlns:ma14="http://schemas.microsoft.com/office/mac/drawingml/2011/main" val="0"/>
+            </a:ext>
+          </a:extLst>
+        </p:spPr>
+        <p:txBody>
+          <a:bodyPr/>
+          <a:lstStyle>
+            <a:lvl1pPr>
+              <a:defRPr sz="2000">
+                <a:solidFill>
+                  <a:srgbClr val="8A96A8"/>
+                </a:solidFill>
+                <a:latin typeface="BIZ UDゴシック"/>
+                <a:ea typeface="BIZ UDゴシック"/>
+                <a:cs typeface="BIZ UDゴシック"/>
+              </a:defRPr>
+            </a:lvl1pPr>
+          </a:lstStyle>
+          <a:p>
+            <a:pPr algn="r"/>
+            <a:fld id="{F7021451-1387-4CA6-816F-3879F97B5CBC}" type="slidenum">
+              <a:rPr b="0" lang="en-US"/>
+              <a:t>3</a:t>
+            </a:fld>
+            <a:endParaRPr lang="en-US"/>
+          </a:p>
+        </p:txBody>
+      </p:sp>
+    </p:spTree>
+  </p:cSld>
+  <p:clrMapOvr>
+    <a:masterClrMapping/>
+  </p:clrMapOvr>
+</p:sld>
+</file>
+
+<file path=ppt/slides/slide52.xml><?xml version="1.0" encoding="utf-8"?>
+<p:sld xmlns:a="http://schemas.openxmlformats.org/drawingml/2006/main" xmlns:r="http://schemas.openxmlformats.org/officeDocument/2006/relationships" xmlns:p="http://schemas.openxmlformats.org/presentationml/2006/main">
+  <p:cSld name="Slide 4">
+    <p:bg>
+      <p:bgPr>
+        <a:solidFill>
+          <a:srgbClr val="FFFFFF"/>
+        </a:solidFill>
+      </p:bgPr>
+    </p:bg>
+    <p:spTree>
+      <p:nvGrpSpPr>
+        <p:cNvPr id="1" name=""/>
+        <p:cNvGrpSpPr/>
+        <p:nvPr/>
+      </p:nvGrpSpPr>
+      <p:grpSpPr>
+        <a:xfrm>
+          <a:off x="0" y="0"/>
+          <a:ext cx="0" cy="0"/>
+          <a:chOff x="0" y="0"/>
+          <a:chExt cx="0" cy="0"/>
+        </a:xfrm>
+      </p:grpSpPr>
+      <p:sp>
+        <p:nvSpPr>
+          <p:cNvPr id="2" name="Shape 0"/>
+          <p:cNvSpPr/>
+          <p:nvPr/>
+        </p:nvSpPr>
+        <p:spPr>
+          <a:xfrm>
+            <a:off x="548640" y="347472"/>
+            <a:ext cx="3124200" cy="420624"/>
+          </a:xfrm>
+          <a:prstGeom prst="roundRect">
+            <a:avLst>
+              <a:gd name="adj" fmla="val 50000"/>
+            </a:avLst>
+          </a:prstGeom>
+          <a:solidFill>
+            <a:srgbClr val="0B7A70"/>
+          </a:solidFill>
+          <a:ln w="12700">
+            <a:solidFill>
+              <a:srgbClr val="0B7A70"/>
+            </a:solidFill>
+            <a:prstDash val="solid"/>
+          </a:ln>
+        </p:spPr>
+      </p:sp>
+      <p:sp>
+        <p:nvSpPr>
+          <p:cNvPr id="3" name="Text 1"/>
+          <p:cNvSpPr txBox="1"/>
+          <p:nvPr/>
+        </p:nvSpPr>
+        <p:spPr>
+          <a:xfrm>
+            <a:off x="548640" y="347472"/>
+            <a:ext cx="3124200" cy="420624"/>
+          </a:xfrm>
+          <a:prstGeom prst="rect">
+            <a:avLst/>
+          </a:prstGeom>
+          <a:noFill/>
+          <a:ln/>
+        </p:spPr>
+        <p:txBody>
+          <a:bodyPr wrap="square" lIns="0" tIns="0" rIns="0" bIns="0" rtlCol="0" anchor="ctr"/>
+          <a:lstStyle/>
+          <a:p>
+            <a:pPr algn="ctr" indent="0" marL="0">
+              <a:buNone/>
+            </a:pPr>
+            <a:r>
+              <a:rPr lang="en-US" sz="2000" b="1" dirty="0">
+                <a:solidFill>
+                  <a:srgbClr val="FFFFFF"/>
+                </a:solidFill>
+                <a:latin typeface="BIZ UDゴシック" pitchFamily="34" charset="0"/>
+                <a:ea typeface="BIZ UDゴシック" pitchFamily="49" charset="-128"/>
+                <a:cs typeface="BIZ UDゴシック" pitchFamily="34" charset="-120"/>
+              </a:rPr>
+              <a:t>見える化③ 当院の実践</a:t>
+            </a:r>
+            <a:endParaRPr lang="en-US" sz="2000" dirty="0"/>
+          </a:p>
+        </p:txBody>
+      </p:sp>
+      <p:sp>
+        <p:nvSpPr>
+          <p:cNvPr id="4" name="Text 2"/>
+          <p:cNvSpPr txBox="1"/>
+          <p:nvPr/>
+        </p:nvSpPr>
+        <p:spPr>
+          <a:xfrm>
+            <a:off x="548640" y="868680"/>
+            <a:ext cx="11094415" cy="777240"/>
+          </a:xfrm>
+          <a:prstGeom prst="rect">
+            <a:avLst/>
+          </a:prstGeom>
+          <a:noFill/>
+          <a:ln/>
+        </p:spPr>
+        <p:txBody>
+          <a:bodyPr wrap="square" lIns="0" tIns="0" rIns="0" bIns="0" rtlCol="0" anchor="ctr"/>
+          <a:lstStyle/>
+          <a:p>
+            <a:pPr indent="0" marL="0">
+              <a:buNone/>
+            </a:pPr>
+            <a:r>
+              <a:rPr lang="en-US" sz="3200" b="1" dirty="0">
+                <a:solidFill>
+                  <a:srgbClr val="131B35"/>
+                </a:solidFill>
+                <a:latin typeface="BIZ UDゴシック" pitchFamily="34" charset="0"/>
+                <a:ea typeface="BIZ UDゴシック" pitchFamily="49" charset="-128"/>
+                <a:cs typeface="BIZ UDゴシック" pitchFamily="34" charset="-120"/>
+              </a:rPr>
+              <a:t>当院の実践：3つのナッジで「思わず」消毒する場をつくる</a:t>
+            </a:r>
+            <a:endParaRPr lang="en-US" sz="3200" dirty="0"/>
+          </a:p>
+        </p:txBody>
+      </p:sp>
+      <p:sp>
+        <p:nvSpPr>
+          <p:cNvPr id="5" name="Text 3"/>
+          <p:cNvSpPr txBox="1"/>
+          <p:nvPr/>
+        </p:nvSpPr>
+        <p:spPr>
+          <a:xfrm>
+            <a:off x="548640" y="6217920"/>
+            <a:ext cx="10058400" cy="384048"/>
+          </a:xfrm>
+          <a:prstGeom prst="rect">
+            <a:avLst/>
+          </a:prstGeom>
+          <a:noFill/>
+          <a:ln/>
+        </p:spPr>
+        <p:txBody>
+          <a:bodyPr wrap="square" lIns="0" tIns="0" rIns="0" bIns="0" rtlCol="0" anchor="ctr"/>
+          <a:lstStyle/>
+          <a:p>
+            <a:pPr indent="0" marL="0">
+              <a:buNone/>
+            </a:pPr>
+            <a:r>
+              <a:rPr lang="en-US" sz="2000" dirty="0">
+                <a:solidFill>
+                  <a:srgbClr val="4F5B6B"/>
+                </a:solidFill>
+                <a:latin typeface="BIZ UDゴシック" pitchFamily="34" charset="0"/>
+                <a:ea typeface="BIZ UDゴシック" pitchFamily="49" charset="-128"/>
+                <a:cs typeface="BIZ UDゴシック" pitchFamily="34" charset="-120"/>
+              </a:rPr>
+              <a:t>出典：鈴木徳洋, 他. 日本外科感染症学会（ポスター発表）</a:t>
+            </a:r>
+            <a:endParaRPr lang="en-US" sz="2000" dirty="0"/>
+          </a:p>
+        </p:txBody>
+      </p:sp>
+      <p:sp>
+        <p:nvSpPr>
+          <p:cNvPr id="7" name="Shape 4"/>
+          <p:cNvSpPr/>
+          <p:nvPr/>
+        </p:nvSpPr>
+        <p:spPr>
+          <a:xfrm>
+            <a:off x="548640" y="1783080"/>
+            <a:ext cx="548640" cy="548640"/>
+          </a:xfrm>
+          <a:prstGeom prst="ellipse">
+            <a:avLst/>
+          </a:prstGeom>
+          <a:solidFill>
+            <a:srgbClr val="0B7A70"/>
+          </a:solidFill>
+          <a:ln w="12700">
+            <a:solidFill>
+              <a:srgbClr val="0B7A70"/>
+            </a:solidFill>
+            <a:prstDash val="solid"/>
+          </a:ln>
+        </p:spPr>
+      </p:sp>
+      <p:sp>
+        <p:nvSpPr>
+          <p:cNvPr id="8" name="Text 5"/>
+          <p:cNvSpPr txBox="1"/>
+          <p:nvPr/>
+        </p:nvSpPr>
+        <p:spPr>
+          <a:xfrm>
+            <a:off x="548640" y="1783080"/>
+            <a:ext cx="548640" cy="548640"/>
+          </a:xfrm>
+          <a:prstGeom prst="rect">
+            <a:avLst/>
+          </a:prstGeom>
+          <a:noFill/>
+          <a:ln/>
+        </p:spPr>
+        <p:txBody>
+          <a:bodyPr wrap="square" lIns="0" tIns="0" rIns="0" bIns="0" rtlCol="0" anchor="ctr"/>
+          <a:lstStyle/>
+          <a:p>
+            <a:pPr algn="ctr" indent="0" marL="0">
+              <a:buNone/>
+            </a:pPr>
+            <a:r>
+              <a:rPr lang="en-US" sz="2400" b="1" dirty="0">
+                <a:solidFill>
+                  <a:srgbClr val="FFFFFF"/>
+                </a:solidFill>
+                <a:latin typeface="BIZ UDゴシック" pitchFamily="34" charset="0"/>
+                <a:ea typeface="BIZ UDゴシック" pitchFamily="49" charset="-128"/>
+                <a:cs typeface="BIZ UDゴシック" pitchFamily="34" charset="-120"/>
+              </a:rPr>
+              <a:t>1</a:t>
+            </a:r>
+            <a:endParaRPr lang="en-US" sz="2400" dirty="0"/>
+          </a:p>
+        </p:txBody>
+      </p:sp>
+      <p:pic>
+        <p:nvPicPr>
+          <p:cNvPr id="9" name="Image 0" descr="photos/p1.jpg">    </p:cNvPr>
+          <p:cNvPicPr>
+            <a:picLocks noChangeAspect="1"/>
+          </p:cNvPicPr>
+          <p:nvPr/>
+        </p:nvPicPr>
+        <p:blipFill>
+          <a:blip r:embed="rId1"/>
+          <a:stretch>
+            <a:fillRect/>
+          </a:stretch>
+        </p:blipFill>
+        <p:spPr>
+          <a:xfrm>
+            <a:off x="1165860" y="1783080"/>
+            <a:ext cx="2743200" cy="3017520"/>
+          </a:xfrm>
+          <a:prstGeom prst="rect">
+            <a:avLst/>
+          </a:prstGeom>
+        </p:spPr>
+      </p:pic>
+      <p:sp>
+        <p:nvSpPr>
+          <p:cNvPr id="10" name="Text 6"/>
+          <p:cNvSpPr txBox="1"/>
+          <p:nvPr/>
+        </p:nvSpPr>
+        <p:spPr>
+          <a:xfrm>
+            <a:off x="548640" y="4846320"/>
+            <a:ext cx="3611880" cy="384048"/>
+          </a:xfrm>
+          <a:prstGeom prst="rect">
+            <a:avLst/>
+          </a:prstGeom>
+          <a:noFill/>
+          <a:ln/>
+        </p:spPr>
+        <p:txBody>
+          <a:bodyPr wrap="square" lIns="0" tIns="0" rIns="0" bIns="0" rtlCol="0" anchor="ctr"/>
+          <a:lstStyle/>
+          <a:p>
+            <a:pPr algn="ctr" indent="0" marL="0">
+              <a:buNone/>
+            </a:pPr>
+            <a:r>
+              <a:rPr lang="en-US" sz="2200" b="1" dirty="0">
+                <a:solidFill>
+                  <a:srgbClr val="131B35"/>
+                </a:solidFill>
+                <a:latin typeface="BIZ UDゴシック" pitchFamily="34" charset="0"/>
+                <a:ea typeface="BIZ UDゴシック" pitchFamily="49" charset="-128"/>
+                <a:cs typeface="BIZ UDゴシック" pitchFamily="34" charset="-120"/>
+              </a:rPr>
+              <a:t>入口へ誘導する</a:t>
+            </a:r>
+            <a:endParaRPr lang="en-US" sz="2200" dirty="0"/>
+          </a:p>
+        </p:txBody>
+      </p:sp>
+      <p:sp>
+        <p:nvSpPr>
+          <p:cNvPr id="11" name="Text 7"/>
+          <p:cNvSpPr txBox="1"/>
+          <p:nvPr/>
+        </p:nvSpPr>
+        <p:spPr>
+          <a:xfrm>
+            <a:off x="548640" y="5230368"/>
+            <a:ext cx="3611880" cy="365760"/>
+          </a:xfrm>
+          <a:prstGeom prst="rect">
+            <a:avLst/>
+          </a:prstGeom>
+          <a:noFill/>
+          <a:ln/>
+        </p:spPr>
+        <p:txBody>
+          <a:bodyPr wrap="square" lIns="0" tIns="0" rIns="0" bIns="0" rtlCol="0" anchor="ctr"/>
+          <a:lstStyle/>
+          <a:p>
+            <a:pPr algn="ctr" indent="0" marL="0">
+              <a:buNone/>
+            </a:pPr>
+            <a:r>
+              <a:rPr lang="en-US" sz="2000" dirty="0">
+                <a:solidFill>
+                  <a:srgbClr val="1B2333"/>
+                </a:solidFill>
+                <a:latin typeface="BIZ UDゴシック" pitchFamily="34" charset="0"/>
+                <a:ea typeface="BIZ UDゴシック" pitchFamily="49" charset="-128"/>
+                <a:cs typeface="BIZ UDゴシック" pitchFamily="34" charset="-120"/>
+              </a:rPr>
+              <a:t>足あとで消毒剤へ（救急外来）</a:t>
+            </a:r>
+            <a:endParaRPr lang="en-US" sz="2000" dirty="0"/>
+          </a:p>
+        </p:txBody>
+      </p:sp>
+      <p:sp>
+        <p:nvSpPr>
+          <p:cNvPr id="12" name="Shape 8"/>
+          <p:cNvSpPr/>
+          <p:nvPr/>
+        </p:nvSpPr>
+        <p:spPr>
+          <a:xfrm>
+            <a:off x="4289908" y="1783080"/>
+            <a:ext cx="548640" cy="548640"/>
+          </a:xfrm>
+          <a:prstGeom prst="ellipse">
+            <a:avLst/>
+          </a:prstGeom>
+          <a:solidFill>
+            <a:srgbClr val="0B7A70"/>
+          </a:solidFill>
+          <a:ln w="12700">
+            <a:solidFill>
+              <a:srgbClr val="0B7A70"/>
+            </a:solidFill>
+            <a:prstDash val="solid"/>
+          </a:ln>
+        </p:spPr>
+      </p:sp>
+      <p:sp>
+        <p:nvSpPr>
+          <p:cNvPr id="13" name="Text 9"/>
+          <p:cNvSpPr txBox="1"/>
+          <p:nvPr/>
+        </p:nvSpPr>
+        <p:spPr>
+          <a:xfrm>
+            <a:off x="4289908" y="1783080"/>
+            <a:ext cx="548640" cy="548640"/>
+          </a:xfrm>
+          <a:prstGeom prst="rect">
+            <a:avLst/>
+          </a:prstGeom>
+          <a:noFill/>
+          <a:ln/>
+        </p:spPr>
+        <p:txBody>
+          <a:bodyPr wrap="square" lIns="0" tIns="0" rIns="0" bIns="0" rtlCol="0" anchor="ctr"/>
+          <a:lstStyle/>
+          <a:p>
+            <a:pPr algn="ctr" indent="0" marL="0">
+              <a:buNone/>
+            </a:pPr>
+            <a:r>
+              <a:rPr lang="en-US" sz="2400" b="1" dirty="0">
+                <a:solidFill>
+                  <a:srgbClr val="FFFFFF"/>
+                </a:solidFill>
+                <a:latin typeface="BIZ UDゴシック" pitchFamily="34" charset="0"/>
+                <a:ea typeface="BIZ UDゴシック" pitchFamily="49" charset="-128"/>
+                <a:cs typeface="BIZ UDゴシック" pitchFamily="34" charset="-120"/>
+              </a:rPr>
+              <a:t>2</a:t>
+            </a:r>
+            <a:endParaRPr lang="en-US" sz="2400" dirty="0"/>
+          </a:p>
+        </p:txBody>
+      </p:sp>
+      <p:pic>
+        <p:nvPicPr>
+          <p:cNvPr id="14" name="Image 1" descr="photos/p2.jpg">    </p:cNvPr>
+          <p:cNvPicPr>
+            <a:picLocks noChangeAspect="1"/>
+          </p:cNvPicPr>
+          <p:nvPr/>
+        </p:nvPicPr>
+        <p:blipFill>
+          <a:blip r:embed="rId2"/>
+          <a:stretch>
+            <a:fillRect/>
+          </a:stretch>
+        </p:blipFill>
+        <p:spPr>
+          <a:xfrm>
+            <a:off x="4907128" y="1783080"/>
+            <a:ext cx="2743200" cy="3017520"/>
+          </a:xfrm>
+          <a:prstGeom prst="rect">
+            <a:avLst/>
+          </a:prstGeom>
+        </p:spPr>
+      </p:pic>
+      <p:sp>
+        <p:nvSpPr>
+          <p:cNvPr id="15" name="Text 10"/>
+          <p:cNvSpPr txBox="1"/>
+          <p:nvPr/>
+        </p:nvSpPr>
+        <p:spPr>
+          <a:xfrm>
+            <a:off x="4289908" y="4846320"/>
+            <a:ext cx="3611880" cy="384048"/>
+          </a:xfrm>
+          <a:prstGeom prst="rect">
+            <a:avLst/>
+          </a:prstGeom>
+          <a:noFill/>
+          <a:ln/>
+        </p:spPr>
+        <p:txBody>
+          <a:bodyPr wrap="square" lIns="0" tIns="0" rIns="0" bIns="0" rtlCol="0" anchor="ctr"/>
+          <a:lstStyle/>
+          <a:p>
+            <a:pPr algn="ctr" indent="0" marL="0">
+              <a:buNone/>
+            </a:pPr>
+            <a:r>
+              <a:rPr lang="en-US" sz="2200" b="1" dirty="0">
+                <a:solidFill>
+                  <a:srgbClr val="131B35"/>
+                </a:solidFill>
+                <a:latin typeface="BIZ UDゴシック" pitchFamily="34" charset="0"/>
+                <a:ea typeface="BIZ UDゴシック" pitchFamily="49" charset="-128"/>
+                <a:cs typeface="BIZ UDゴシック" pitchFamily="34" charset="-120"/>
+              </a:rPr>
+              <a:t>確認を合図にする</a:t>
+            </a:r>
+            <a:endParaRPr lang="en-US" sz="2200" dirty="0"/>
+          </a:p>
+        </p:txBody>
+      </p:sp>
+      <p:sp>
+        <p:nvSpPr>
+          <p:cNvPr id="16" name="Text 11"/>
+          <p:cNvSpPr txBox="1"/>
+          <p:nvPr/>
+        </p:nvSpPr>
+        <p:spPr>
+          <a:xfrm>
+            <a:off x="4289908" y="5230368"/>
+            <a:ext cx="3611880" cy="365760"/>
+          </a:xfrm>
+          <a:prstGeom prst="rect">
+            <a:avLst/>
+          </a:prstGeom>
+          <a:noFill/>
+          <a:ln/>
+        </p:spPr>
+        <p:txBody>
+          <a:bodyPr wrap="square" lIns="0" tIns="0" rIns="0" bIns="0" rtlCol="0" anchor="ctr"/>
+          <a:lstStyle/>
+          <a:p>
+            <a:pPr algn="ctr" indent="0" marL="0">
+              <a:buNone/>
+            </a:pPr>
+            <a:r>
+              <a:rPr lang="en-US" sz="2000" dirty="0">
+                <a:solidFill>
+                  <a:srgbClr val="1B2333"/>
+                </a:solidFill>
+                <a:latin typeface="BIZ UDゴシック" pitchFamily="34" charset="0"/>
+                <a:ea typeface="BIZ UDゴシック" pitchFamily="49" charset="-128"/>
+                <a:cs typeface="BIZ UDゴシック" pitchFamily="34" charset="-120"/>
+              </a:rPr>
+              <a:t>氏名確認→消毒2プッシュ</a:t>
+            </a:r>
+            <a:endParaRPr lang="en-US" sz="2000" dirty="0"/>
+          </a:p>
+        </p:txBody>
+      </p:sp>
+      <p:sp>
+        <p:nvSpPr>
+          <p:cNvPr id="17" name="Shape 12"/>
+          <p:cNvSpPr/>
+          <p:nvPr/>
+        </p:nvSpPr>
+        <p:spPr>
+          <a:xfrm>
+            <a:off x="8031175" y="1783080"/>
+            <a:ext cx="548640" cy="548640"/>
+          </a:xfrm>
+          <a:prstGeom prst="ellipse">
+            <a:avLst/>
+          </a:prstGeom>
+          <a:solidFill>
+            <a:srgbClr val="0B7A70"/>
+          </a:solidFill>
+          <a:ln w="12700">
+            <a:solidFill>
+              <a:srgbClr val="0B7A70"/>
+            </a:solidFill>
+            <a:prstDash val="solid"/>
+          </a:ln>
+        </p:spPr>
+      </p:sp>
+      <p:sp>
+        <p:nvSpPr>
+          <p:cNvPr id="18" name="Text 13"/>
+          <p:cNvSpPr txBox="1"/>
+          <p:nvPr/>
+        </p:nvSpPr>
+        <p:spPr>
+          <a:xfrm>
+            <a:off x="8031175" y="1783080"/>
+            <a:ext cx="548640" cy="548640"/>
+          </a:xfrm>
+          <a:prstGeom prst="rect">
+            <a:avLst/>
+          </a:prstGeom>
+          <a:noFill/>
+          <a:ln/>
+        </p:spPr>
+        <p:txBody>
+          <a:bodyPr wrap="square" lIns="0" tIns="0" rIns="0" bIns="0" rtlCol="0" anchor="ctr"/>
+          <a:lstStyle/>
+          <a:p>
+            <a:pPr algn="ctr" indent="0" marL="0">
+              <a:buNone/>
+            </a:pPr>
+            <a:r>
+              <a:rPr lang="en-US" sz="2400" b="1" dirty="0">
+                <a:solidFill>
+                  <a:srgbClr val="FFFFFF"/>
+                </a:solidFill>
+                <a:latin typeface="BIZ UDゴシック" pitchFamily="34" charset="0"/>
+                <a:ea typeface="BIZ UDゴシック" pitchFamily="49" charset="-128"/>
+                <a:cs typeface="BIZ UDゴシック" pitchFamily="34" charset="-120"/>
+              </a:rPr>
+              <a:t>3</a:t>
+            </a:r>
+            <a:endParaRPr lang="en-US" sz="2400" dirty="0"/>
+          </a:p>
+        </p:txBody>
+      </p:sp>
+      <p:pic>
+        <p:nvPicPr>
+          <p:cNvPr id="19" name="Image 2" descr="photos/p3.jpg">    </p:cNvPr>
+          <p:cNvPicPr>
+            <a:picLocks noChangeAspect="1"/>
+          </p:cNvPicPr>
+          <p:nvPr/>
+        </p:nvPicPr>
+        <p:blipFill>
+          <a:blip r:embed="rId3"/>
+          <a:stretch>
+            <a:fillRect/>
+          </a:stretch>
+        </p:blipFill>
+        <p:spPr>
+          <a:xfrm>
+            <a:off x="8648395" y="1783080"/>
+            <a:ext cx="2743200" cy="3017520"/>
+          </a:xfrm>
+          <a:prstGeom prst="rect">
+            <a:avLst/>
+          </a:prstGeom>
+        </p:spPr>
+      </p:pic>
+      <p:sp>
+        <p:nvSpPr>
+          <p:cNvPr id="20" name="Text 14"/>
+          <p:cNvSpPr txBox="1"/>
+          <p:nvPr/>
+        </p:nvSpPr>
+        <p:spPr>
+          <a:xfrm>
+            <a:off x="8031175" y="4846320"/>
+            <a:ext cx="3611880" cy="384048"/>
+          </a:xfrm>
+          <a:prstGeom prst="rect">
+            <a:avLst/>
+          </a:prstGeom>
+          <a:noFill/>
+          <a:ln/>
+        </p:spPr>
+        <p:txBody>
+          <a:bodyPr wrap="square" lIns="0" tIns="0" rIns="0" bIns="0" rtlCol="0" anchor="ctr"/>
+          <a:lstStyle/>
+          <a:p>
+            <a:pPr algn="ctr" indent="0" marL="0">
+              <a:buNone/>
+            </a:pPr>
+            <a:r>
+              <a:rPr lang="en-US" sz="2200" b="1" dirty="0">
+                <a:solidFill>
+                  <a:srgbClr val="131B35"/>
+                </a:solidFill>
+                <a:latin typeface="BIZ UDゴシック" pitchFamily="34" charset="0"/>
+                <a:ea typeface="BIZ UDゴシック" pitchFamily="49" charset="-128"/>
+                <a:cs typeface="BIZ UDゴシック" pitchFamily="34" charset="-120"/>
+              </a:rPr>
+              <a:t>宣言して約束する</a:t>
+            </a:r>
+            <a:endParaRPr lang="en-US" sz="2200" dirty="0"/>
+          </a:p>
+        </p:txBody>
+      </p:sp>
+      <p:sp>
+        <p:nvSpPr>
+          <p:cNvPr id="21" name="Text 15"/>
+          <p:cNvSpPr txBox="1"/>
+          <p:nvPr/>
+        </p:nvSpPr>
+        <p:spPr>
+          <a:xfrm>
+            <a:off x="8031175" y="5230368"/>
+            <a:ext cx="3611880" cy="365760"/>
+          </a:xfrm>
+          <a:prstGeom prst="rect">
+            <a:avLst/>
+          </a:prstGeom>
+          <a:noFill/>
+          <a:ln/>
+        </p:spPr>
+        <p:txBody>
+          <a:bodyPr wrap="square" lIns="0" tIns="0" rIns="0" bIns="0" rtlCol="0" anchor="ctr"/>
+          <a:lstStyle/>
+          <a:p>
+            <a:pPr algn="ctr" indent="0" marL="0">
+              <a:buNone/>
+            </a:pPr>
+            <a:r>
+              <a:rPr lang="en-US" sz="2000" dirty="0">
+                <a:solidFill>
+                  <a:srgbClr val="1B2333"/>
+                </a:solidFill>
+                <a:latin typeface="BIZ UDゴシック" pitchFamily="34" charset="0"/>
+                <a:ea typeface="BIZ UDゴシック" pitchFamily="49" charset="-128"/>
+                <a:cs typeface="BIZ UDゴシック" pitchFamily="34" charset="-120"/>
+              </a:rPr>
+              <a:t>スタッフが患者さんに宣言</a:t>
+            </a:r>
+            <a:endParaRPr lang="en-US" sz="2000" dirty="0"/>
+          </a:p>
+        </p:txBody>
+      </p:sp>
+      <p:sp>
+        <p:nvSpPr>
+          <p:cNvPr id="22" name="Shape 16"/>
+          <p:cNvSpPr/>
+          <p:nvPr/>
+        </p:nvSpPr>
+        <p:spPr>
+          <a:xfrm>
+            <a:off x="548640" y="5669280"/>
+            <a:ext cx="11094415" cy="475488"/>
+          </a:xfrm>
+          <a:prstGeom prst="roundRect">
+            <a:avLst>
+              <a:gd name="adj" fmla="val 15385"/>
+            </a:avLst>
+          </a:prstGeom>
+          <a:solidFill>
+            <a:srgbClr val="E3F7F2"/>
+          </a:solidFill>
+          <a:ln w="12700">
+            <a:solidFill>
+              <a:srgbClr val="E3F7F2"/>
+            </a:solidFill>
+            <a:prstDash val="solid"/>
+          </a:ln>
+        </p:spPr>
+      </p:sp>
+      <p:sp>
+        <p:nvSpPr>
+          <p:cNvPr id="23" name="Text 17"/>
+          <p:cNvSpPr txBox="1"/>
+          <p:nvPr/>
+        </p:nvSpPr>
+        <p:spPr>
+          <a:xfrm>
+            <a:off x="548640" y="5669280"/>
+            <a:ext cx="11094415" cy="475488"/>
+          </a:xfrm>
+          <a:prstGeom prst="rect">
+            <a:avLst/>
+          </a:prstGeom>
+          <a:noFill/>
+          <a:ln/>
+        </p:spPr>
+        <p:txBody>
+          <a:bodyPr wrap="square" lIns="0" tIns="0" rIns="0" bIns="0" rtlCol="0" anchor="ctr"/>
+          <a:lstStyle/>
+          <a:p>
+            <a:pPr algn="ctr" indent="0" marL="0">
+              <a:buNone/>
+            </a:pPr>
+            <a:r>
+              <a:rPr lang="en-US" sz="2000" b="1" dirty="0">
+                <a:solidFill>
+                  <a:srgbClr val="0B7A70"/>
+                </a:solidFill>
+                <a:latin typeface="BIZ UDゴシック" pitchFamily="34" charset="0"/>
+                <a:ea typeface="BIZ UDゴシック" pitchFamily="49" charset="-128"/>
+                <a:cs typeface="BIZ UDゴシック" pitchFamily="34" charset="-120"/>
+              </a:rPr>
+              <a:t>このほか：防護具の手順の番号化／使用量シール → 全部署へ共有</a:t>
+            </a:r>
+            <a:endParaRPr lang="en-US" sz="2000" dirty="0"/>
+          </a:p>
+        </p:txBody>
+      </p:sp>
+      <p:sp>
+        <p:nvSpPr>
+          <p:cNvPr id="25" name="Slide Number Placeholder 0"/>
+          <p:cNvSpPr>
+            <a:spLocks noGrp="1"/>
+          </p:cNvSpPr>
+          <p:nvPr>
+            <p:ph type="sldNum" sz="quarter" idx="4294967295"/>
+          </p:nvPr>
+        </p:nvSpPr>
+        <p:spPr>
+          <a:xfrm>
+            <a:off x="11000232" y="6217920"/>
+            <a:ext cx="640080" cy="384048"/>
+          </a:xfrm>
+          <a:prstGeom prst="rect">
+            <a:avLst/>
+          </a:prstGeom>
+          <a:extLst>
+            <a:ext uri="{C572A759-6A51-4108-AA02-DFA0A04FC94B}">
+              <ma14:wrappingTextBoxFlag xmlns:ma14="http://schemas.microsoft.com/office/mac/drawingml/2011/main" val="0"/>
+            </a:ext>
+          </a:extLst>
+        </p:spPr>
+        <p:txBody>
+          <a:bodyPr/>
+          <a:lstStyle>
+            <a:lvl1pPr>
+              <a:defRPr sz="2000">
+                <a:solidFill>
+                  <a:srgbClr val="8A96A8"/>
+                </a:solidFill>
+                <a:latin typeface="BIZ UDゴシック"/>
+                <a:ea typeface="BIZ UDゴシック"/>
+                <a:cs typeface="BIZ UDゴシック"/>
+              </a:defRPr>
+            </a:lvl1pPr>
+          </a:lstStyle>
+          <a:p>
+            <a:pPr algn="r"/>
+            <a:fld id="{F7021451-1387-4CA6-816F-3879F97B5CBC}" type="slidenum">
+              <a:rPr b="0" lang="en-US"/>
+              <a:t>4</a:t>
+            </a:fld>
+            <a:endParaRPr lang="en-US"/>
+          </a:p>
+        </p:txBody>
+      </p:sp>
+    </p:spTree>
+  </p:cSld>
+  <p:clrMapOvr>
+    <a:masterClrMapping/>
+  </p:clrMapOvr>
+</p:sld>
+</file>
+
+<file path=ppt/slides/slide53.xml><?xml version="1.0" encoding="utf-8"?>
+<p:sld xmlns:a="http://schemas.openxmlformats.org/drawingml/2006/main" xmlns:r="http://schemas.openxmlformats.org/officeDocument/2006/relationships" xmlns:p="http://schemas.openxmlformats.org/presentationml/2006/main">
+  <p:cSld name="Slide 5">
+    <p:bg>
+      <p:bgPr>
+        <a:solidFill>
+          <a:srgbClr val="FFFFFF"/>
+        </a:solidFill>
+      </p:bgPr>
+    </p:bg>
+    <p:spTree>
+      <p:nvGrpSpPr>
+        <p:cNvPr id="1" name=""/>
+        <p:cNvGrpSpPr/>
+        <p:nvPr/>
+      </p:nvGrpSpPr>
+      <p:grpSpPr>
+        <a:xfrm>
+          <a:off x="0" y="0"/>
+          <a:ext cx="0" cy="0"/>
+          <a:chOff x="0" y="0"/>
+          <a:chExt cx="0" cy="0"/>
+        </a:xfrm>
+      </p:grpSpPr>
+      <p:sp>
+        <p:nvSpPr>
+          <p:cNvPr id="2" name="Shape 0"/>
+          <p:cNvSpPr/>
+          <p:nvPr/>
+        </p:nvSpPr>
+        <p:spPr>
+          <a:xfrm>
+            <a:off x="548640" y="347472"/>
+            <a:ext cx="2235200" cy="420624"/>
+          </a:xfrm>
+          <a:prstGeom prst="roundRect">
+            <a:avLst>
+              <a:gd name="adj" fmla="val 50000"/>
+            </a:avLst>
+          </a:prstGeom>
+          <a:solidFill>
+            <a:srgbClr val="131B35"/>
+          </a:solidFill>
+          <a:ln w="12700">
+            <a:solidFill>
+              <a:srgbClr val="131B35"/>
+            </a:solidFill>
+            <a:prstDash val="solid"/>
+          </a:ln>
+        </p:spPr>
+      </p:sp>
+      <p:sp>
+        <p:nvSpPr>
+          <p:cNvPr id="3" name="Text 1"/>
+          <p:cNvSpPr txBox="1"/>
+          <p:nvPr/>
+        </p:nvSpPr>
+        <p:spPr>
+          <a:xfrm>
+            <a:off x="548640" y="347472"/>
+            <a:ext cx="2235200" cy="420624"/>
+          </a:xfrm>
+          <a:prstGeom prst="rect">
+            <a:avLst/>
+          </a:prstGeom>
+          <a:noFill/>
+          <a:ln/>
+        </p:spPr>
+        <p:txBody>
+          <a:bodyPr wrap="square" lIns="0" tIns="0" rIns="0" bIns="0" rtlCol="0" anchor="ctr"/>
+          <a:lstStyle/>
+          <a:p>
+            <a:pPr algn="ctr" indent="0" marL="0">
+              <a:buNone/>
+            </a:pPr>
+            <a:r>
+              <a:rPr lang="en-US" sz="2000" b="1" dirty="0">
+                <a:solidFill>
+                  <a:srgbClr val="FFFFFF"/>
+                </a:solidFill>
+                <a:latin typeface="BIZ UDゴシック" pitchFamily="34" charset="0"/>
+                <a:ea typeface="BIZ UDゴシック" pitchFamily="49" charset="-128"/>
+                <a:cs typeface="BIZ UDゴシック" pitchFamily="34" charset="-120"/>
+              </a:rPr>
+              <a:t>第4部 仕掛ける</a:t>
+            </a:r>
+            <a:endParaRPr lang="en-US" sz="2000" dirty="0"/>
+          </a:p>
+        </p:txBody>
+      </p:sp>
+      <p:sp>
+        <p:nvSpPr>
+          <p:cNvPr id="4" name="Text 2"/>
+          <p:cNvSpPr txBox="1"/>
+          <p:nvPr/>
+        </p:nvSpPr>
+        <p:spPr>
+          <a:xfrm>
+            <a:off x="548640" y="868680"/>
+            <a:ext cx="11094415" cy="777240"/>
+          </a:xfrm>
+          <a:prstGeom prst="rect">
+            <a:avLst/>
+          </a:prstGeom>
+          <a:noFill/>
+          <a:ln/>
+        </p:spPr>
+        <p:txBody>
+          <a:bodyPr wrap="square" lIns="0" tIns="0" rIns="0" bIns="0" rtlCol="0" anchor="ctr"/>
+          <a:lstStyle/>
+          <a:p>
+            <a:pPr indent="0" marL="0">
+              <a:buNone/>
+            </a:pPr>
+            <a:r>
+              <a:rPr lang="en-US" sz="3200" b="1" dirty="0">
+                <a:solidFill>
+                  <a:srgbClr val="131B35"/>
+                </a:solidFill>
+                <a:latin typeface="BIZ UDゴシック" pitchFamily="34" charset="0"/>
+                <a:ea typeface="BIZ UDゴシック" pitchFamily="49" charset="-128"/>
+                <a:cs typeface="BIZ UDゴシック" pitchFamily="34" charset="-120"/>
+              </a:rPr>
+              <a:t>成功の鍵は、チェックリストの裏の「見えない社会の力」</a:t>
+            </a:r>
+            <a:endParaRPr lang="en-US" sz="3200" dirty="0"/>
+          </a:p>
+        </p:txBody>
+      </p:sp>
+      <p:sp>
+        <p:nvSpPr>
+          <p:cNvPr id="5" name="Text 3"/>
+          <p:cNvSpPr txBox="1"/>
+          <p:nvPr/>
+        </p:nvSpPr>
+        <p:spPr>
+          <a:xfrm>
+            <a:off x="548640" y="6217920"/>
+            <a:ext cx="10058400" cy="384048"/>
+          </a:xfrm>
+          <a:prstGeom prst="rect">
+            <a:avLst/>
+          </a:prstGeom>
+          <a:noFill/>
+          <a:ln/>
+        </p:spPr>
+        <p:txBody>
+          <a:bodyPr wrap="square" lIns="0" tIns="0" rIns="0" bIns="0" rtlCol="0" anchor="ctr"/>
+          <a:lstStyle/>
+          <a:p>
+            <a:pPr indent="0" marL="0">
+              <a:buNone/>
+            </a:pPr>
+            <a:r>
+              <a:rPr lang="en-US" sz="2000" dirty="0">
+                <a:solidFill>
+                  <a:srgbClr val="4F5B6B"/>
+                </a:solidFill>
+                <a:latin typeface="BIZ UDゴシック" pitchFamily="34" charset="0"/>
+                <a:ea typeface="BIZ UDゴシック" pitchFamily="49" charset="-128"/>
+                <a:cs typeface="BIZ UDゴシック" pitchFamily="34" charset="-120"/>
+              </a:rPr>
+              <a:t>出典：Pronovost P, et al. NEJM 2006; Dixon-Woods M, et al. Milbank Q 2011</a:t>
+            </a:r>
+            <a:endParaRPr lang="en-US" sz="2000" dirty="0"/>
+          </a:p>
+        </p:txBody>
+      </p:sp>
+      <p:sp>
+        <p:nvSpPr>
+          <p:cNvPr id="7" name="Shape 4"/>
+          <p:cNvSpPr/>
+          <p:nvPr/>
+        </p:nvSpPr>
+        <p:spPr>
+          <a:xfrm>
+            <a:off x="548640" y="1920240"/>
+            <a:ext cx="5212080" cy="4114800"/>
+          </a:xfrm>
+          <a:prstGeom prst="roundRect">
+            <a:avLst>
+              <a:gd name="adj" fmla="val 2667"/>
+            </a:avLst>
+          </a:prstGeom>
+          <a:solidFill>
+            <a:srgbClr val="EEF2F7"/>
+          </a:solidFill>
+          <a:ln w="12700">
+            <a:solidFill>
+              <a:srgbClr val="EEF2F7"/>
+            </a:solidFill>
+            <a:prstDash val="solid"/>
+          </a:ln>
+        </p:spPr>
+      </p:sp>
+      <p:sp>
+        <p:nvSpPr>
+          <p:cNvPr id="8" name="Text 5"/>
+          <p:cNvSpPr txBox="1"/>
+          <p:nvPr/>
+        </p:nvSpPr>
+        <p:spPr>
+          <a:xfrm>
+            <a:off x="822960" y="2057400"/>
+            <a:ext cx="4754880" cy="457200"/>
+          </a:xfrm>
+          <a:prstGeom prst="rect">
+            <a:avLst/>
+          </a:prstGeom>
+          <a:noFill/>
+          <a:ln/>
+        </p:spPr>
+        <p:txBody>
+          <a:bodyPr wrap="square" lIns="0" tIns="0" rIns="0" bIns="0" rtlCol="0" anchor="t"/>
+          <a:lstStyle/>
+          <a:p>
+            <a:pPr indent="0" marL="0">
+              <a:buNone/>
+            </a:pPr>
+            <a:r>
+              <a:rPr lang="en-US" sz="2200" b="1" dirty="0">
+                <a:solidFill>
+                  <a:srgbClr val="131B35"/>
+                </a:solidFill>
+                <a:latin typeface="BIZ UDゴシック" pitchFamily="34" charset="0"/>
+                <a:ea typeface="BIZ UDゴシック" pitchFamily="49" charset="-128"/>
+                <a:cs typeface="BIZ UDゴシック" pitchFamily="34" charset="-120"/>
+              </a:rPr>
+              <a:t>やったこと：5つの基本対策</a:t>
+            </a:r>
+            <a:endParaRPr lang="en-US" sz="2200" dirty="0"/>
+          </a:p>
+        </p:txBody>
+      </p:sp>
+      <p:sp>
+        <p:nvSpPr>
+          <p:cNvPr id="9" name="Text 6"/>
+          <p:cNvSpPr txBox="1"/>
+          <p:nvPr/>
+        </p:nvSpPr>
+        <p:spPr>
+          <a:xfrm>
+            <a:off x="822960" y="2560320"/>
+            <a:ext cx="4754880" cy="1874520"/>
+          </a:xfrm>
+          <a:prstGeom prst="rect">
+            <a:avLst/>
+          </a:prstGeom>
+          <a:noFill/>
+          <a:ln/>
+        </p:spPr>
+        <p:txBody>
+          <a:bodyPr wrap="square" lIns="0" tIns="0" rIns="0" bIns="0" rtlCol="0" anchor="t"/>
+          <a:lstStyle/>
+          <a:p>
+            <a:pPr indent="0" marL="0">
+              <a:spcAft>
+                <a:spcPts val="200"/>
+              </a:spcAft>
+              <a:buNone/>
+            </a:pPr>
+            <a:r>
+              <a:rPr lang="en-US" sz="2000" dirty="0">
+                <a:solidFill>
+                  <a:srgbClr val="1B2333"/>
+                </a:solidFill>
+                <a:latin typeface="BIZ UDゴシック" pitchFamily="34" charset="0"/>
+                <a:ea typeface="BIZ UDゴシック" pitchFamily="49" charset="-128"/>
+                <a:cs typeface="BIZ UDゴシック" pitchFamily="34" charset="-120"/>
+              </a:rPr>
+              <a:t>① 手指衛生</a:t>
+            </a:r>
+            <a:endParaRPr lang="en-US" sz="2000" dirty="0"/>
+          </a:p>
+          <a:p>
+            <a:pPr indent="0" marL="0">
+              <a:spcAft>
+                <a:spcPts val="200"/>
+              </a:spcAft>
+              <a:buNone/>
+            </a:pPr>
+            <a:r>
+              <a:rPr lang="en-US" sz="2000" dirty="0">
+                <a:solidFill>
+                  <a:srgbClr val="1B2333"/>
+                </a:solidFill>
+                <a:latin typeface="BIZ UDゴシック" pitchFamily="34" charset="0"/>
+                <a:ea typeface="BIZ UDゴシック" pitchFamily="49" charset="-128"/>
+                <a:cs typeface="BIZ UDゴシック" pitchFamily="34" charset="-120"/>
+              </a:rPr>
+              <a:t>② 挿入時のマキシマル・バリア</a:t>
+            </a:r>
+            <a:endParaRPr lang="en-US" sz="2000" dirty="0"/>
+          </a:p>
+          <a:p>
+            <a:pPr indent="0" marL="0">
+              <a:spcAft>
+                <a:spcPts val="200"/>
+              </a:spcAft>
+              <a:buNone/>
+            </a:pPr>
+            <a:r>
+              <a:rPr lang="en-US" sz="2000" dirty="0">
+                <a:solidFill>
+                  <a:srgbClr val="1B2333"/>
+                </a:solidFill>
+                <a:latin typeface="BIZ UDゴシック" pitchFamily="34" charset="0"/>
+                <a:ea typeface="BIZ UDゴシック" pitchFamily="49" charset="-128"/>
+                <a:cs typeface="BIZ UDゴシック" pitchFamily="34" charset="-120"/>
+              </a:rPr>
+              <a:t>③ クロルヘキシジンで皮膚消毒</a:t>
+            </a:r>
+            <a:endParaRPr lang="en-US" sz="2000" dirty="0"/>
+          </a:p>
+          <a:p>
+            <a:pPr indent="0" marL="0">
+              <a:spcAft>
+                <a:spcPts val="200"/>
+              </a:spcAft>
+              <a:buNone/>
+            </a:pPr>
+            <a:r>
+              <a:rPr lang="en-US" sz="2000" dirty="0">
+                <a:solidFill>
+                  <a:srgbClr val="1B2333"/>
+                </a:solidFill>
+                <a:latin typeface="BIZ UDゴシック" pitchFamily="34" charset="0"/>
+                <a:ea typeface="BIZ UDゴシック" pitchFamily="49" charset="-128"/>
+                <a:cs typeface="BIZ UDゴシック" pitchFamily="34" charset="-120"/>
+              </a:rPr>
+              <a:t>④ できるだけ大腿部を避ける</a:t>
+            </a:r>
+            <a:endParaRPr lang="en-US" sz="2000" dirty="0"/>
+          </a:p>
+          <a:p>
+            <a:pPr indent="0" marL="0">
+              <a:spcAft>
+                <a:spcPts val="200"/>
+              </a:spcAft>
+              <a:buNone/>
+            </a:pPr>
+            <a:r>
+              <a:rPr lang="en-US" sz="2000" dirty="0">
+                <a:solidFill>
+                  <a:srgbClr val="1B2333"/>
+                </a:solidFill>
+                <a:latin typeface="BIZ UDゴシック" pitchFamily="34" charset="0"/>
+                <a:ea typeface="BIZ UDゴシック" pitchFamily="49" charset="-128"/>
+                <a:cs typeface="BIZ UDゴシック" pitchFamily="34" charset="-120"/>
+              </a:rPr>
+              <a:t>⑤ 不要なカテーテルを抜く</a:t>
+            </a:r>
+            <a:endParaRPr lang="en-US" sz="2000" dirty="0"/>
+          </a:p>
+        </p:txBody>
+      </p:sp>
+      <p:sp>
+        <p:nvSpPr>
+          <p:cNvPr id="10" name="Text 7"/>
+          <p:cNvSpPr txBox="1"/>
+          <p:nvPr/>
+        </p:nvSpPr>
+        <p:spPr>
+          <a:xfrm>
+            <a:off x="822960" y="4434840"/>
+            <a:ext cx="4754880" cy="365760"/>
+          </a:xfrm>
+          <a:prstGeom prst="rect">
+            <a:avLst/>
+          </a:prstGeom>
+          <a:noFill/>
+          <a:ln/>
+        </p:spPr>
+        <p:txBody>
+          <a:bodyPr wrap="square" lIns="0" tIns="0" rIns="0" bIns="0" rtlCol="0" anchor="t"/>
+          <a:lstStyle/>
+          <a:p>
+            <a:pPr indent="0" marL="0">
+              <a:buNone/>
+            </a:pPr>
+            <a:r>
+              <a:rPr lang="en-US" sz="2000" dirty="0">
+                <a:solidFill>
+                  <a:srgbClr val="4F5B6B"/>
+                </a:solidFill>
+                <a:latin typeface="BIZ UDゴシック" pitchFamily="34" charset="0"/>
+                <a:ea typeface="BIZ UDゴシック" pitchFamily="49" charset="-128"/>
+                <a:cs typeface="BIZ UDゴシック" pitchFamily="34" charset="-120"/>
+              </a:rPr>
+              <a:t>＋物品カート・チェックリスト</a:t>
+            </a:r>
+            <a:endParaRPr lang="en-US" sz="2000" dirty="0"/>
+          </a:p>
+        </p:txBody>
+      </p:sp>
+      <p:sp>
+        <p:nvSpPr>
+          <p:cNvPr id="11" name="Shape 8"/>
+          <p:cNvSpPr/>
+          <p:nvPr/>
+        </p:nvSpPr>
+        <p:spPr>
+          <a:xfrm>
+            <a:off x="777240" y="4892040"/>
+            <a:ext cx="4754880" cy="1005840"/>
+          </a:xfrm>
+          <a:prstGeom prst="roundRect">
+            <a:avLst>
+              <a:gd name="adj" fmla="val 10909"/>
+            </a:avLst>
+          </a:prstGeom>
+          <a:solidFill>
+            <a:srgbClr val="FFFFFF"/>
+          </a:solidFill>
+          <a:ln w="12700">
+            <a:solidFill>
+              <a:srgbClr val="FFFFFF"/>
+            </a:solidFill>
+            <a:prstDash val="solid"/>
+          </a:ln>
+        </p:spPr>
+      </p:sp>
+      <p:sp>
+        <p:nvSpPr>
+          <p:cNvPr id="12" name="Text 9"/>
+          <p:cNvSpPr txBox="1"/>
+          <p:nvPr/>
+        </p:nvSpPr>
+        <p:spPr>
+          <a:xfrm>
+            <a:off x="868680" y="4937760"/>
+            <a:ext cx="4572000" cy="914400"/>
+          </a:xfrm>
+          <a:prstGeom prst="rect">
+            <a:avLst/>
+          </a:prstGeom>
+          <a:noFill/>
+          <a:ln/>
+        </p:spPr>
+        <p:txBody>
+          <a:bodyPr wrap="square" lIns="0" tIns="0" rIns="0" bIns="0" rtlCol="0" anchor="ctr"/>
+          <a:lstStyle/>
+          <a:p>
+            <a:pPr indent="0" marL="0">
+              <a:buNone/>
+            </a:pPr>
+            <a:r>
+              <a:rPr lang="en-US" sz="2000" b="1" dirty="0">
+                <a:solidFill>
+                  <a:srgbClr val="0B7A70"/>
+                </a:solidFill>
+                <a:latin typeface="BIZ UDゴシック" pitchFamily="34" charset="0"/>
+                <a:ea typeface="BIZ UDゴシック" pitchFamily="49" charset="-128"/>
+                <a:cs typeface="BIZ UDゴシック" pitchFamily="34" charset="-120"/>
+              </a:rPr>
+              <a:t>血流感染 最大66%減（103 ICU）</a:t>
+            </a:r>
+            <a:endParaRPr lang="en-US" sz="2000" dirty="0"/>
+          </a:p>
+          <a:p>
+            <a:pPr indent="0" marL="0">
+              <a:buNone/>
+            </a:pPr>
+            <a:r>
+              <a:rPr lang="en-US" sz="2000" dirty="0">
+                <a:solidFill>
+                  <a:srgbClr val="1B2333"/>
+                </a:solidFill>
+                <a:latin typeface="BIZ UDゴシック" pitchFamily="34" charset="0"/>
+                <a:ea typeface="BIZ UDゴシック" pitchFamily="49" charset="-128"/>
+                <a:cs typeface="BIZ UDゴシック" pitchFamily="34" charset="-120"/>
+              </a:rPr>
+              <a:t>平均7.7→1.4／1000カテーテル日</a:t>
+            </a:r>
+            <a:endParaRPr lang="en-US" sz="2000" dirty="0"/>
+          </a:p>
+        </p:txBody>
+      </p:sp>
+      <p:sp>
+        <p:nvSpPr>
+          <p:cNvPr id="13" name="Text 10"/>
+          <p:cNvSpPr txBox="1"/>
+          <p:nvPr/>
+        </p:nvSpPr>
+        <p:spPr>
+          <a:xfrm>
+            <a:off x="6080760" y="1920240"/>
+            <a:ext cx="5562295" cy="457200"/>
+          </a:xfrm>
+          <a:prstGeom prst="rect">
+            <a:avLst/>
+          </a:prstGeom>
+          <a:noFill/>
+          <a:ln/>
+        </p:spPr>
+        <p:txBody>
+          <a:bodyPr wrap="square" lIns="0" tIns="0" rIns="0" bIns="0" rtlCol="0" anchor="t"/>
+          <a:lstStyle/>
+          <a:p>
+            <a:pPr indent="0" marL="0">
+              <a:buNone/>
+            </a:pPr>
+            <a:r>
+              <a:rPr lang="en-US" sz="2200" b="1" dirty="0">
+                <a:solidFill>
+                  <a:srgbClr val="D1480E"/>
+                </a:solidFill>
+                <a:latin typeface="BIZ UDゴシック" pitchFamily="34" charset="0"/>
+                <a:ea typeface="BIZ UDゴシック" pitchFamily="49" charset="-128"/>
+                <a:cs typeface="BIZ UDゴシック" pitchFamily="34" charset="-120"/>
+              </a:rPr>
+              <a:t>なぜ成功したか（事後の社会学的分析）</a:t>
+            </a:r>
+            <a:endParaRPr lang="en-US" sz="2200" dirty="0"/>
+          </a:p>
+        </p:txBody>
+      </p:sp>
+      <p:sp>
+        <p:nvSpPr>
+          <p:cNvPr id="14" name="Shape 11"/>
+          <p:cNvSpPr/>
+          <p:nvPr/>
+        </p:nvSpPr>
+        <p:spPr>
+          <a:xfrm>
+            <a:off x="6080760" y="2514600"/>
+            <a:ext cx="658368" cy="658368"/>
+          </a:xfrm>
+          <a:prstGeom prst="ellipse">
+            <a:avLst/>
+          </a:prstGeom>
+          <a:solidFill>
+            <a:srgbClr val="D1480E"/>
+          </a:solidFill>
+          <a:ln w="12700">
+            <a:solidFill>
+              <a:srgbClr val="D1480E"/>
+            </a:solidFill>
+            <a:prstDash val="solid"/>
+          </a:ln>
+        </p:spPr>
+      </p:sp>
+      <p:pic>
+        <p:nvPicPr>
+          <p:cNvPr id="15" name="Image 0" descr="preencoded.png">    </p:cNvPr>
+          <p:cNvPicPr>
+            <a:picLocks noChangeAspect="1"/>
+          </p:cNvPicPr>
+          <p:nvPr/>
+        </p:nvPicPr>
+        <p:blipFill>
+          <a:blip r:embed="rId1"/>
+          <a:stretch>
+            <a:fillRect/>
+          </a:stretch>
+        </p:blipFill>
+        <p:spPr>
+          <a:xfrm>
+            <a:off x="6238768" y="2672608"/>
+            <a:ext cx="342351" cy="342351"/>
+          </a:xfrm>
+          <a:prstGeom prst="rect">
+            <a:avLst/>
+          </a:prstGeom>
+        </p:spPr>
+      </p:pic>
+      <p:sp>
+        <p:nvSpPr>
+          <p:cNvPr id="16" name="Text 12"/>
+          <p:cNvSpPr txBox="1"/>
+          <p:nvPr/>
+        </p:nvSpPr>
+        <p:spPr>
+          <a:xfrm>
+            <a:off x="6903720" y="2468880"/>
+            <a:ext cx="4739335" cy="777240"/>
+          </a:xfrm>
+          <a:prstGeom prst="rect">
+            <a:avLst/>
+          </a:prstGeom>
+          <a:noFill/>
+          <a:ln/>
+        </p:spPr>
+        <p:txBody>
+          <a:bodyPr wrap="square" lIns="0" tIns="0" rIns="0" bIns="0" rtlCol="0" anchor="ctr"/>
+          <a:lstStyle/>
+          <a:p>
+            <a:pPr indent="0" marL="0">
+              <a:buNone/>
+            </a:pPr>
+            <a:r>
+              <a:rPr lang="en-US" sz="2000" b="1" dirty="0">
+                <a:solidFill>
+                  <a:srgbClr val="131B35"/>
+                </a:solidFill>
+                <a:latin typeface="BIZ UDゴシック" pitchFamily="34" charset="0"/>
+                <a:ea typeface="BIZ UDゴシック" pitchFamily="49" charset="-128"/>
+                <a:cs typeface="BIZ UDゴシック" pitchFamily="34" charset="-120"/>
+              </a:rPr>
+              <a:t>仲間のネットワーク</a:t>
+            </a:r>
+            <a:endParaRPr lang="en-US" sz="2000" dirty="0"/>
+          </a:p>
+          <a:p>
+            <a:pPr indent="0" marL="0">
+              <a:buNone/>
+            </a:pPr>
+            <a:r>
+              <a:rPr lang="en-US" sz="2000" dirty="0">
+                <a:solidFill>
+                  <a:srgbClr val="1B2333"/>
+                </a:solidFill>
+                <a:latin typeface="BIZ UDゴシック" pitchFamily="34" charset="0"/>
+                <a:ea typeface="BIZ UDゴシック" pitchFamily="49" charset="-128"/>
+                <a:cs typeface="BIZ UDゴシック" pitchFamily="34" charset="-120"/>
+              </a:rPr>
+              <a:t>ICU同士がつながり、規範に</a:t>
+            </a:r>
+            <a:endParaRPr lang="en-US" sz="2000" dirty="0"/>
+          </a:p>
+        </p:txBody>
+      </p:sp>
+      <p:sp>
+        <p:nvSpPr>
+          <p:cNvPr id="17" name="Shape 13"/>
+          <p:cNvSpPr/>
+          <p:nvPr/>
+        </p:nvSpPr>
+        <p:spPr>
+          <a:xfrm>
+            <a:off x="6080760" y="3410712"/>
+            <a:ext cx="658368" cy="658368"/>
+          </a:xfrm>
+          <a:prstGeom prst="ellipse">
+            <a:avLst/>
+          </a:prstGeom>
+          <a:solidFill>
+            <a:srgbClr val="D1480E"/>
+          </a:solidFill>
+          <a:ln w="12700">
+            <a:solidFill>
+              <a:srgbClr val="D1480E"/>
+            </a:solidFill>
+            <a:prstDash val="solid"/>
+          </a:ln>
+        </p:spPr>
+      </p:sp>
+      <p:pic>
+        <p:nvPicPr>
+          <p:cNvPr id="18" name="Image 1" descr="preencoded.png">    </p:cNvPr>
+          <p:cNvPicPr>
+            <a:picLocks noChangeAspect="1"/>
+          </p:cNvPicPr>
+          <p:nvPr/>
+        </p:nvPicPr>
+        <p:blipFill>
+          <a:blip r:embed="rId2"/>
+          <a:stretch>
+            <a:fillRect/>
+          </a:stretch>
+        </p:blipFill>
+        <p:spPr>
+          <a:xfrm>
+            <a:off x="6238768" y="3568720"/>
+            <a:ext cx="342351" cy="342351"/>
+          </a:xfrm>
+          <a:prstGeom prst="rect">
+            <a:avLst/>
+          </a:prstGeom>
+        </p:spPr>
+      </p:pic>
+      <p:sp>
+        <p:nvSpPr>
+          <p:cNvPr id="19" name="Text 14"/>
+          <p:cNvSpPr txBox="1"/>
+          <p:nvPr/>
+        </p:nvSpPr>
+        <p:spPr>
+          <a:xfrm>
+            <a:off x="6903720" y="3364992"/>
+            <a:ext cx="4739335" cy="777240"/>
+          </a:xfrm>
+          <a:prstGeom prst="rect">
+            <a:avLst/>
+          </a:prstGeom>
+          <a:noFill/>
+          <a:ln/>
+        </p:spPr>
+        <p:txBody>
+          <a:bodyPr wrap="square" lIns="0" tIns="0" rIns="0" bIns="0" rtlCol="0" anchor="ctr"/>
+          <a:lstStyle/>
+          <a:p>
+            <a:pPr indent="0" marL="0">
+              <a:buNone/>
+            </a:pPr>
+            <a:r>
+              <a:rPr lang="en-US" sz="2000" b="1" dirty="0">
+                <a:solidFill>
+                  <a:srgbClr val="131B35"/>
+                </a:solidFill>
+                <a:latin typeface="BIZ UDゴシック" pitchFamily="34" charset="0"/>
+                <a:ea typeface="BIZ UDゴシック" pitchFamily="49" charset="-128"/>
+                <a:cs typeface="BIZ UDゴシック" pitchFamily="34" charset="-120"/>
+              </a:rPr>
+              <a:t>問題の捉え直し</a:t>
+            </a:r>
+            <a:endParaRPr lang="en-US" sz="2000" dirty="0"/>
+          </a:p>
+          <a:p>
+            <a:pPr indent="0" marL="0">
+              <a:buNone/>
+            </a:pPr>
+            <a:r>
+              <a:rPr lang="en-US" sz="2000" dirty="0">
+                <a:solidFill>
+                  <a:srgbClr val="1B2333"/>
+                </a:solidFill>
+                <a:latin typeface="BIZ UDゴシック" pitchFamily="34" charset="0"/>
+                <a:ea typeface="BIZ UDゴシック" pitchFamily="49" charset="-128"/>
+                <a:cs typeface="BIZ UDゴシック" pitchFamily="34" charset="-120"/>
+              </a:rPr>
+              <a:t>「仕方ない」から「防げる」へ</a:t>
+            </a:r>
+            <a:endParaRPr lang="en-US" sz="2000" dirty="0"/>
+          </a:p>
+        </p:txBody>
+      </p:sp>
+      <p:sp>
+        <p:nvSpPr>
+          <p:cNvPr id="20" name="Shape 15"/>
+          <p:cNvSpPr/>
+          <p:nvPr/>
+        </p:nvSpPr>
+        <p:spPr>
+          <a:xfrm>
+            <a:off x="6080760" y="4306824"/>
+            <a:ext cx="658368" cy="658368"/>
+          </a:xfrm>
+          <a:prstGeom prst="ellipse">
+            <a:avLst/>
+          </a:prstGeom>
+          <a:solidFill>
+            <a:srgbClr val="D1480E"/>
+          </a:solidFill>
+          <a:ln w="12700">
+            <a:solidFill>
+              <a:srgbClr val="D1480E"/>
+            </a:solidFill>
+            <a:prstDash val="solid"/>
+          </a:ln>
+        </p:spPr>
+      </p:sp>
+      <p:pic>
+        <p:nvPicPr>
+          <p:cNvPr id="21" name="Image 2" descr="preencoded.png">    </p:cNvPr>
+          <p:cNvPicPr>
+            <a:picLocks noChangeAspect="1"/>
+          </p:cNvPicPr>
+          <p:nvPr/>
+        </p:nvPicPr>
+        <p:blipFill>
+          <a:blip r:embed="rId3"/>
+          <a:stretch>
+            <a:fillRect/>
+          </a:stretch>
+        </p:blipFill>
+        <p:spPr>
+          <a:xfrm>
+            <a:off x="6238768" y="4464832"/>
+            <a:ext cx="342351" cy="342351"/>
+          </a:xfrm>
+          <a:prstGeom prst="rect">
+            <a:avLst/>
+          </a:prstGeom>
+        </p:spPr>
+      </p:pic>
+      <p:sp>
+        <p:nvSpPr>
+          <p:cNvPr id="22" name="Text 16"/>
+          <p:cNvSpPr txBox="1"/>
+          <p:nvPr/>
+        </p:nvSpPr>
+        <p:spPr>
+          <a:xfrm>
+            <a:off x="6903720" y="4261104"/>
+            <a:ext cx="4739335" cy="777240"/>
+          </a:xfrm>
+          <a:prstGeom prst="rect">
+            <a:avLst/>
+          </a:prstGeom>
+          <a:noFill/>
+          <a:ln/>
+        </p:spPr>
+        <p:txBody>
+          <a:bodyPr wrap="square" lIns="0" tIns="0" rIns="0" bIns="0" rtlCol="0" anchor="ctr"/>
+          <a:lstStyle/>
+          <a:p>
+            <a:pPr indent="0" marL="0">
+              <a:buNone/>
+            </a:pPr>
+            <a:r>
+              <a:rPr lang="en-US" sz="2000" b="1" dirty="0">
+                <a:solidFill>
+                  <a:srgbClr val="131B35"/>
+                </a:solidFill>
+                <a:latin typeface="BIZ UDゴシック" pitchFamily="34" charset="0"/>
+                <a:ea typeface="BIZ UDゴシック" pitchFamily="49" charset="-128"/>
+                <a:cs typeface="BIZ UDゴシック" pitchFamily="34" charset="-120"/>
+              </a:rPr>
+              <a:t>データの共有</a:t>
+            </a:r>
+            <a:endParaRPr lang="en-US" sz="2000" dirty="0"/>
+          </a:p>
+          <a:p>
+            <a:pPr indent="0" marL="0">
+              <a:buNone/>
+            </a:pPr>
+            <a:r>
+              <a:rPr lang="en-US" sz="2000" dirty="0">
+                <a:solidFill>
+                  <a:srgbClr val="1B2333"/>
+                </a:solidFill>
+                <a:latin typeface="BIZ UDゴシック" pitchFamily="34" charset="0"/>
+                <a:ea typeface="BIZ UDゴシック" pitchFamily="49" charset="-128"/>
+                <a:cs typeface="BIZ UDゴシック" pitchFamily="34" charset="-120"/>
+              </a:rPr>
+              <a:t>感染率を測って返し、比べる</a:t>
+            </a:r>
+            <a:endParaRPr lang="en-US" sz="2000" dirty="0"/>
+          </a:p>
+        </p:txBody>
+      </p:sp>
+      <p:sp>
+        <p:nvSpPr>
+          <p:cNvPr id="23" name="Shape 17"/>
+          <p:cNvSpPr/>
+          <p:nvPr/>
+        </p:nvSpPr>
+        <p:spPr>
+          <a:xfrm>
+            <a:off x="6080760" y="5202936"/>
+            <a:ext cx="658368" cy="658368"/>
+          </a:xfrm>
+          <a:prstGeom prst="ellipse">
+            <a:avLst/>
+          </a:prstGeom>
+          <a:solidFill>
+            <a:srgbClr val="D1480E"/>
+          </a:solidFill>
+          <a:ln w="12700">
+            <a:solidFill>
+              <a:srgbClr val="D1480E"/>
+            </a:solidFill>
+            <a:prstDash val="solid"/>
+          </a:ln>
+        </p:spPr>
+      </p:sp>
+      <p:pic>
+        <p:nvPicPr>
+          <p:cNvPr id="24" name="Image 3" descr="preencoded.png">    </p:cNvPr>
+          <p:cNvPicPr>
+            <a:picLocks noChangeAspect="1"/>
+          </p:cNvPicPr>
+          <p:nvPr/>
+        </p:nvPicPr>
+        <p:blipFill>
+          <a:blip r:embed="rId4"/>
+          <a:stretch>
+            <a:fillRect/>
+          </a:stretch>
+        </p:blipFill>
+        <p:spPr>
+          <a:xfrm>
+            <a:off x="6238768" y="5360944"/>
+            <a:ext cx="342351" cy="342351"/>
+          </a:xfrm>
+          <a:prstGeom prst="rect">
+            <a:avLst/>
+          </a:prstGeom>
+        </p:spPr>
+      </p:pic>
+      <p:sp>
+        <p:nvSpPr>
+          <p:cNvPr id="25" name="Text 18"/>
+          <p:cNvSpPr txBox="1"/>
+          <p:nvPr/>
+        </p:nvSpPr>
+        <p:spPr>
+          <a:xfrm>
+            <a:off x="6903720" y="5157216"/>
+            <a:ext cx="4739335" cy="777240"/>
+          </a:xfrm>
+          <a:prstGeom prst="rect">
+            <a:avLst/>
+          </a:prstGeom>
+          <a:noFill/>
+          <a:ln/>
+        </p:spPr>
+        <p:txBody>
+          <a:bodyPr wrap="square" lIns="0" tIns="0" rIns="0" bIns="0" rtlCol="0" anchor="ctr"/>
+          <a:lstStyle/>
+          <a:p>
+            <a:pPr indent="0" marL="0">
+              <a:buNone/>
+            </a:pPr>
+            <a:r>
+              <a:rPr lang="en-US" sz="2000" b="1" dirty="0">
+                <a:solidFill>
+                  <a:srgbClr val="131B35"/>
+                </a:solidFill>
+                <a:latin typeface="BIZ UDゴシック" pitchFamily="34" charset="0"/>
+                <a:ea typeface="BIZ UDゴシック" pitchFamily="49" charset="-128"/>
+                <a:cs typeface="BIZ UDゴシック" pitchFamily="34" charset="-120"/>
+              </a:rPr>
+              <a:t>ゆずれない仕組み</a:t>
+            </a:r>
+            <a:endParaRPr lang="en-US" sz="2000" dirty="0"/>
+          </a:p>
+          <a:p>
+            <a:pPr indent="0" marL="0">
+              <a:buNone/>
+            </a:pPr>
+            <a:r>
+              <a:rPr lang="en-US" sz="2000" dirty="0">
+                <a:solidFill>
+                  <a:srgbClr val="1B2333"/>
+                </a:solidFill>
+                <a:latin typeface="BIZ UDゴシック" pitchFamily="34" charset="0"/>
+                <a:ea typeface="BIZ UDゴシック" pitchFamily="49" charset="-128"/>
+                <a:cs typeface="BIZ UDゴシック" pitchFamily="34" charset="-120"/>
+              </a:rPr>
+              <a:t>手順を守らなければ止める</a:t>
+            </a:r>
+            <a:endParaRPr lang="en-US" sz="2000" dirty="0"/>
+          </a:p>
+        </p:txBody>
+      </p:sp>
+      <p:sp>
+        <p:nvSpPr>
+          <p:cNvPr id="25" name="Slide Number Placeholder 0"/>
+          <p:cNvSpPr>
+            <a:spLocks noGrp="1"/>
+          </p:cNvSpPr>
+          <p:nvPr>
+            <p:ph type="sldNum" sz="quarter" idx="4294967295"/>
+          </p:nvPr>
+        </p:nvSpPr>
+        <p:spPr>
+          <a:xfrm>
+            <a:off x="11000232" y="6217920"/>
+            <a:ext cx="640080" cy="384048"/>
+          </a:xfrm>
+          <a:prstGeom prst="rect">
+            <a:avLst/>
+          </a:prstGeom>
+          <a:extLst>
+            <a:ext uri="{C572A759-6A51-4108-AA02-DFA0A04FC94B}">
+              <ma14:wrappingTextBoxFlag xmlns:ma14="http://schemas.microsoft.com/office/mac/drawingml/2011/main" val="0"/>
+            </a:ext>
+          </a:extLst>
+        </p:spPr>
+        <p:txBody>
+          <a:bodyPr/>
+          <a:lstStyle>
+            <a:lvl1pPr>
+              <a:defRPr sz="2000">
+                <a:solidFill>
+                  <a:srgbClr val="8A96A8"/>
+                </a:solidFill>
+                <a:latin typeface="BIZ UDゴシック"/>
+                <a:ea typeface="BIZ UDゴシック"/>
+                <a:cs typeface="BIZ UDゴシック"/>
+              </a:defRPr>
+            </a:lvl1pPr>
+          </a:lstStyle>
+          <a:p>
+            <a:pPr algn="r"/>
+            <a:fld id="{F7021451-1387-4CA6-816F-3879F97B5CBC}" type="slidenum">
+              <a:rPr b="0" lang="en-US"/>
               <a:t>5</a:t>
             </a:fld>
             <a:endParaRPr lang="en-US"/>

--- a/lectures/behavioral-science-invisible-enemy/行動科学は感染対策の見えない敵を可視化する.pptx
+++ b/lectures/behavioral-science-invisible-enemy/行動科学は感染対策の見えない敵を可視化する.pptx
@@ -37,7 +37,6 @@
     <p:sldId id="281" r:id="rId27"/>
     <p:sldId id="282" r:id="rId28"/>
     <p:sldId id="283" r:id="rId29"/>
-    <p:sldId id="284" r:id="rId30"/>
     <p:sldId id="306" r:id="rId57"/>
     <p:sldId id="301" r:id="rId52"/>
     <p:sldId id="302" r:id="rId53"/>
@@ -3808,7 +3807,7 @@
             <a:r>
               <a:rPr lang="en-US" dirty="0"/>
               <a:t>【目安20秒／30:15–30:35】
-第3部では、これらの見えない敵を「見える化」する方法を、診断する・見せる・返す、の3つの視点でご紹介します。</a:t>
+第3部では、これらの見えない敵を「見える化」する方法を、診断する・見せる・後押しする、の3つの視点でご紹介します。</a:t>
             </a:r>
           </a:p>
         </p:txBody>
@@ -4304,98 +4303,6 @@
 </p:notes>
 </file>
 
-<file path=ppt/notesSlides/notesSlide29.xml><?xml version="1.0" encoding="utf-8"?>
-<p:notes xmlns:a="http://schemas.openxmlformats.org/drawingml/2006/main" xmlns:r="http://schemas.openxmlformats.org/officeDocument/2006/relationships" xmlns:p="http://schemas.openxmlformats.org/presentationml/2006/main">
-  <p:cSld>
-    <p:spTree>
-      <p:nvGrpSpPr>
-        <p:cNvPr id="1" name=""/>
-        <p:cNvGrpSpPr/>
-        <p:nvPr/>
-      </p:nvGrpSpPr>
-      <p:grpSpPr>
-        <a:xfrm>
-          <a:off x="0" y="0"/>
-          <a:ext cx="0" cy="0"/>
-          <a:chOff x="0" y="0"/>
-          <a:chExt cx="0" cy="0"/>
-        </a:xfrm>
-      </p:grpSpPr>
-      <p:sp>
-        <p:nvSpPr>
-          <p:cNvPr id="2" name="Slide Image Placeholder 1"/>
-          <p:cNvSpPr>
-            <a:spLocks noGrp="1" noRot="1" noChangeAspect="1"/>
-          </p:cNvSpPr>
-          <p:nvPr>
-            <p:ph type="sldImg"/>
-          </p:nvPr>
-        </p:nvSpPr>
-        <p:spPr/>
-      </p:sp>
-      <p:sp>
-        <p:nvSpPr>
-          <p:cNvPr id="3" name="Notes Placeholder 2"/>
-          <p:cNvSpPr>
-            <a:spLocks noGrp="1"/>
-          </p:cNvSpPr>
-          <p:nvPr>
-            <p:ph type="body" idx="1"/>
-          </p:nvPr>
-        </p:nvSpPr>
-        <p:spPr/>
-        <p:txBody>
-          <a:bodyPr/>
-          <a:lstStyle/>
-          <a:p>
-            <a:r>
-              <a:rPr lang="en-US" dirty="0"/>
-              <a:t>【目安1分30秒／38:15–39:45】
-次は「数字で返す」です。英国で1,581の診療所を対象に行われたランダム化比較試験です。
-抗菌薬処方が地域の上位20%に入る診療所の医師に、イングランドの主席医務官から「あなたの診療所の処方は、地域の80%の診療所より多い」という手紙を1通送りました。
-その結果、6か月間の処方は3.3%減り、推計で約7万3千件の処方が減りました。低コストで全国規模の効果です。
-自分の位置が「見える」と、人は行動を修正します。
-（出典：Hallsworth M, et al. Lancet 2016;387:1743-52）</a:t>
-            </a:r>
-          </a:p>
-        </p:txBody>
-      </p:sp>
-      <p:sp>
-        <p:nvSpPr>
-          <p:cNvPr id="4" name="Slide Number Placeholder 3"/>
-          <p:cNvSpPr>
-            <a:spLocks noGrp="1"/>
-          </p:cNvSpPr>
-          <p:nvPr>
-            <p:ph type="sldNum" sz="quarter" idx="10"/>
-          </p:nvPr>
-        </p:nvSpPr>
-        <p:spPr/>
-        <p:txBody>
-          <a:bodyPr/>
-          <a:lstStyle/>
-          <a:p>
-            <a:fld id="{F7021451-1387-4CA6-816F-3879F97B5CBC}" type="slidenum">
-              <a:rPr lang="en-US"/>
-              <a:t>29</a:t>
-            </a:fld>
-            <a:endParaRPr lang="en-US"/>
-          </a:p>
-        </p:txBody>
-      </p:sp>
-    </p:spTree>
-    <p:extLst>
-      <p:ext uri="{BB962C8B-B14F-4D97-AF65-F5344CB8AC3E}">
-        <p14:creationId xmlns:p14="http://schemas.microsoft.com/office/powerpoint/2010/main" val="1024086991"/>
-      </p:ext>
-    </p:extLst>
-  </p:cSld>
-  <p:clrMapOvr>
-    <a:masterClrMapping/>
-  </p:clrMapOvr>
-</p:notes>
-</file>
-
 <file path=ppt/notesSlides/notesSlide3.xml><?xml version="1.0" encoding="utf-8"?>
 <p:notes xmlns:a="http://schemas.openxmlformats.org/drawingml/2006/main" xmlns:r="http://schemas.openxmlformats.org/officeDocument/2006/relationships" xmlns:p="http://schemas.openxmlformats.org/presentationml/2006/main">
   <p:cSld>
@@ -4531,7 +4438,7 @@
           <a:p>
             <a:r>
               <a:rPr lang="en-US" dirty="0"/>
-              <a:t>【目安1分30秒／45:15–46:45】
+              <a:t>【目安1分30秒／43:45–45:15】
 結果です。病院全体の手指消毒剤の使用量は、2018年度の1000患者日あたり12.6Lから、2024年度は26.3Lへ、約2.1倍に増えました。全13部署で統計学的に有意な増加でした。なお、コロナ禍の影響が大きい2020〜2023年度は比較から除いています。
 一方で、直接観察による遵守率には大きな伸びは見られていません。ただ、コロナ禍を経ても低下せずに維持できています。
 単年度の前後比較であり、使用量イコール遵守率ではない、という限界もあります。だからこそ、先ほどお話しした「複数の物差し」で見ていくことが大切だと考えています。看護師以外の職種へのアプローチが今後の課題です。</a:t>
@@ -4621,7 +4528,7 @@
           <a:p>
             <a:r>
               <a:rPr lang="en-US" dirty="0"/>
-              <a:t>【目安20秒／46:45–47:05】
+              <a:t>【目安20秒／45:15–45:35】
 第4部では、明日から「仕掛ける」ための具体的な手順をお伝えします。</a:t>
             </a:r>
           </a:p>
@@ -4709,7 +4616,7 @@
           <a:p>
             <a:r>
               <a:rPr lang="en-US" dirty="0"/>
-              <a:t>【目安1分20秒／47:05–48:25】
+              <a:t>【目安1分20秒／45:35–46:55】
 見える化は4つのステップで進めます。
 ①絞る：「手指衛生を頑張る」ではなく、「誰が、いつ、どこで、何をするか」を1つに絞ります。②診断する：COM-Bで、能力・機会・動機のどこに原因があるかを探します。③仕掛ける：次にご紹介するEASTの視点で、環境や伝え方を変えます。④返す：測った結果を、現場に見える形で返します。
 大きな計画より、小さく始めて回すことが成功のコツです。</a:t>
@@ -4799,7 +4706,7 @@
           <a:p>
             <a:r>
               <a:rPr lang="en-US" dirty="0"/>
-              <a:t>【目安1分30秒／48:25–49:55】
+              <a:t>【目安1分30秒／46:55–48:25】
 仕掛けを考えるときのチェックリストが、英国の行動インサイトチームが提唱するEASTです。
 Easy、簡単に：消毒剤を動線上や手の届くところに置く、手順を番号にする。Attractive、魅力的に：「患者さんを守る」を主語にする、目を引く表示にする。Social、社会的に：部署の実施状況を共有する、リーダーが率先する。Timely、タイミングよく：入室の直前や、手袋を外した直後に合図を出す。
 今日ご紹介した研究の多くは、この4つのどれかに当てはまります。
@@ -4977,9 +4884,9 @@
           <a:p>
             <a:r>
               <a:rPr lang="en-US" dirty="0"/>
-              <a:t>【目安1分50秒／50:55–52:45】
+              <a:t>【目安1分50秒／49:25–51:15】
 「見えない敵」は職種によって姿を変えます。
-医師は自分の処方の多さが見えにくいため、先ほどの手紙のような同僚比較のフィードバックが有効です。看護師は繁忙時の「触れる前」のスキップに、動線上の消毒剤と合図を。薬剤師は処方の偏りを、抗菌薬の使用データとして部署に返すことができます。臨床検査技師は、耐性菌の検出状況を部署別に見える化できます。リハビリや放射線は、機器や環境に触れた後の手指衛生。清掃や看護補助は、蛍光マーカーによるフィードバック。事務・管理者は、物品の配置や使用量を定期的に共有する。
+医師は回診などで「触れる前」が抜けやすいため、先頭に立つ人が最初に手指衛生をすることが、研修医への手本にもなります。看護師は繁忙時の「触れる前」のスキップに、動線上の消毒剤と合図を。薬剤師は処方の偏りを、抗菌薬の使用データとして部署に返すことができます。臨床検査技師は、耐性菌の検出状況を部署別に見える化できます。リハビリや放射線は、機器や環境に触れた後の手指衛生。清掃や看護補助は、蛍光マーカーによるフィードバック。事務・管理者は、物品の配置や使用量を定期的に共有する。
 どの職種にも、見える化の担い手としての役割があります。
 ※表の例は、本日ご紹介した研究をもとにした応用例です。</a:t>
             </a:r>
@@ -5159,7 +5066,7 @@
           <a:p>
             <a:r>
               <a:rPr lang="en-US" dirty="0"/>
-              <a:t>【目安1分／54:15–55:15】
+              <a:t>【目安1分／52:45–53:45】
 最後に、科学的に誠実であるために。手指衛生の介入を検証したコクランレビューでは、消毒剤を使用場所の近くに置くことは中等度の確実性で改善が期待できる一方、フィードバック、教育、掲示や香りなどのきっかけ、多角的な介入の多くは、効果が示唆されるものの確実性は低い、とされています。
 WHOの多角的戦略も、システムの変更、教育、モニタリングとフィードバック、職場でのリマインダー、安全文化を組み合わせることを求めています。
 ナッジは万能薬ではありません。組み合わせて、測って、直す。この繰り返しが大切です。
@@ -5250,7 +5157,7 @@
           <a:p>
             <a:r>
               <a:rPr lang="en-US" dirty="0"/>
-              <a:t>【目安2分／55:15–57:15】
+              <a:t>【目安2分／53:45–55:45】
 では1分間、考えてみてください。お手元の紙にメモしていただいても構いません。
 ①あなたの職場で変えたい行動を1つ、誰が・いつ・どこで・何をするかまで絞ってください。②その行動を邪魔している見えない敵は、5つのうちどれでしょうか。③明日できる一手は何でしょうか。見せる、返す、仕掛ける、のどれでも構いません。
 （1分後）
@@ -5341,7 +5248,7 @@
           <a:p>
             <a:r>
               <a:rPr lang="en-US" dirty="0"/>
-              <a:t>【目安1分／57:15–58:15】
+              <a:t>【目安1分／55:45–56:45】
 まとめです。
 一つ、行動の原因は目に見えません。人を責める前に、仕組みを疑いましょう。
 二つ、行動科学、特にCOM-Bを使えば、見えない敵を診断できます。
@@ -5432,7 +5339,7 @@
           <a:p>
             <a:r>
               <a:rPr lang="en-US" dirty="0"/>
-              <a:t>【目安30秒／58:15–58:45】
+              <a:t>【目安30秒／56:45–57:15】
 見えない敵は、「人の中」ではなく「仕組みの中」にいます。
 明日、ひとつだけ、仕掛けてみませんか。</a:t>
             </a:r>
@@ -5521,7 +5428,7 @@
           <a:p>
             <a:r>
               <a:rPr lang="en-US" dirty="0"/>
-              <a:t>【目安1分／40:45–41:45】
+              <a:t>【目安1分／39:15–40:15】
 人の行動を変える道具を、大きく4つに分けてみます。
 1つ目はルール。「必ずこうする」という義務や禁止です。2つ目はお金。ごほうびや罰金です。3つ目は教育。知識を伝える研修やマニュアルです。そして4つ目がナッジ。選択肢や環境の「見せ方・置き方」を設計して、自然に選びやすくします。
 例えば手指衛生なら、手順を決めるのがルール、研修をするのが教育、入口の動線上に消毒剤を置いたり、足あとで誘導したりするのがナッジです。
@@ -5614,7 +5521,7 @@
           <a:p>
             <a:r>
               <a:rPr lang="en-US" dirty="0"/>
-              <a:t>【目安1分／41:45–42:45】
+              <a:t>【目安1分／40:15–41:15】
 ナッジの中でも特に強力なのが「初期設定（デフォルト）」です。
 臓器提供の意思をたずねるオンライン実験で、「提供したい人がチェックを入れる」聞き方では、同意した人は約42%でした。ところが「提供したくない人がチェックを外す」、つまり最初から同意が選ばれている聞き方では、約82%に上がりました。選ぶ自由はどちらも同じです。変えたのは「最初の設定」だけです。
 国別に見ても、同意が初期設定になっている国では、実際の同意率が90%を超える国が多く見られました。
@@ -5707,7 +5614,7 @@
           <a:p>
             <a:r>
               <a:rPr lang="en-US" dirty="0"/>
-              <a:t>【目安1分／42:45–43:45】
+              <a:t>【目安1分／41:15–42:15】
 このデフォルトは、感染対策でも使えます。
 米国の大学職員478名を対象にしたランダム化比較試験で、インフルエンザワクチンの案内を2通り送りました。「接種したい人は自分で予約してください」という案内では接種率33%。一方、「あなたの接種日時はすでに予約されています。都合が悪ければ変更・取消できます」という案内では45%でした。予約を取り消したのは8%だけでした。
 新型コロナワクチンでも、9万人以上を対象にした試験で、「あなたのためのワクチンが用意されています」と伝えるショートメッセージが、接種率を3.57ポイント押し上げました。
@@ -6076,11 +5983,10 @@
           <a:p>
             <a:r>
               <a:rPr lang="en-US" dirty="0"/>
-              <a:t>【目安1分／39:45–40:45】
+              <a:t>【目安1分／38:15–39:15】
 ここで、今日のキーワード「ナッジ」を確認しておきます。
 ナッジは英語で「ひじで軽くつつく」という意味です。行動経済学者のセイラーとサンスティーンが広めた考え方で、禁止や強制をしたり、お金で釣ったりせずに、選ぶ自由は残したまま、望ましい行動を「選びやすく」する工夫のことです。
 実は皆さんの身の回りにもあります。レジ前の足あとマークがあると、言われなくても間隔をあけて並びます。「一番人気」と書いてあると、ついそれを選びます。最初からチェックが入っている欄は、そのままにしがちです。
-先ほどの「1通の手紙」も、周りと比べた自分の位置を見せるナッジでした。
 第1部でお話しした「速い思考（システム1）」は、理屈より目の前の環境に反応します。ナッジは、その速い思考に働きかけて、考えなくても望ましい行動を選べるようにする方法です。
 （出典：Thaler RH, Sunstein CR. Nudge: Improving Decisions about Health, Wealth, and Happiness. Yale University Press; 2008）</a:t>
             </a:r>
@@ -6170,7 +6076,7 @@
           <a:p>
             <a:r>
               <a:rPr lang="en-US" dirty="0"/>
-              <a:t>【目安1分30秒／43:45–45:15】
+              <a:t>【目安1分30秒／42:15–43:45】
 ここで当院の実践をご紹介します。写真の3つは、いずれも「考えなくても手が動く」ことをねらったナッジです。
 一つ目は救急外来の入口です。床の足あとで手指消毒剤のスタンドへ誘導し、目立たせました。患者さんのご家族が入室時に手指消毒をする頻度が増えました。
 二つ目は病室の名札の下の表示です。「①氏名を確認したら、②手指消毒を2プッシュ」と、毎回必ず行う氏名確認を合図にして、次の行動を具体的に示しています。
@@ -6264,7 +6170,7 @@
           <a:p>
             <a:r>
               <a:rPr lang="en-US" dirty="0"/>
-              <a:t>【目安1分30秒／52:45–54:15】
+              <a:t>【目安1分30秒／51:15–52:45】
 組織として仕掛けた有名な例が、米国ミシガン州のICUプロジェクトです。
 やったことは、中心静脈カテーテルの感染を防ぐ、エビデンスのある5つの対策です。手指衛生、挿入時のマキシマル・バリアプリコーション、クロルヘキシジンによる皮膚消毒、できるだけ大腿部を避けること、不要なカテーテルを抜くこと。これを物品カートとチェックリストで支え、守られていなければ緊急時を除いて手技を止めることにしました。
 その結果、103のICUで、カテーテル関連血流感染は1000カテーテル日あたり平均7.7件から1.4件へ、最大66%減りました。
@@ -15965,7 +15871,7 @@
                 <a:ea typeface="BIZ UDゴシック" pitchFamily="49" charset="-128"/>
                 <a:cs typeface="BIZ UDゴシック" pitchFamily="34" charset="-120"/>
               </a:rPr>
-              <a:t>返す：数字で自分の位置を示す</a:t>
+              <a:t>後押しする：ナッジと当院の実践</a:t>
             </a:r>
             <a:endParaRPr lang="en-US" sz="2400" dirty="0"/>
           </a:p>
@@ -19843,653 +19749,6 @@
 </p:sld>
 </file>
 
-<file path=ppt/slides/slide29.xml><?xml version="1.0" encoding="utf-8"?>
-<p:sld xmlns:a="http://schemas.openxmlformats.org/drawingml/2006/main" xmlns:r="http://schemas.openxmlformats.org/officeDocument/2006/relationships" xmlns:p="http://schemas.openxmlformats.org/presentationml/2006/main">
-  <p:cSld name="Slide 29">
-    <p:bg>
-      <p:bgPr>
-        <a:solidFill>
-          <a:schemeClr val="bg1"/>
-        </a:solidFill>
-        <a:effectLst/>
-      </p:bgPr>
-    </p:bg>
-    <p:spTree>
-      <p:nvGrpSpPr>
-        <p:cNvPr id="1" name=""/>
-        <p:cNvGrpSpPr/>
-        <p:nvPr/>
-      </p:nvGrpSpPr>
-      <p:grpSpPr>
-        <a:xfrm>
-          <a:off x="0" y="0"/>
-          <a:ext cx="0" cy="0"/>
-          <a:chOff x="0" y="0"/>
-          <a:chExt cx="0" cy="0"/>
-        </a:xfrm>
-      </p:grpSpPr>
-      <p:sp>
-        <p:nvSpPr>
-          <p:cNvPr id="2" name="Shape 0"/>
-          <p:cNvSpPr/>
-          <p:nvPr/>
-        </p:nvSpPr>
-        <p:spPr>
-          <a:xfrm>
-            <a:off x="548640" y="347472"/>
-            <a:ext cx="3124200" cy="420624"/>
-          </a:xfrm>
-          <a:prstGeom prst="roundRect">
-            <a:avLst>
-              <a:gd name="adj" fmla="val 50000"/>
-            </a:avLst>
-          </a:prstGeom>
-          <a:solidFill>
-            <a:srgbClr val="0B7A70"/>
-          </a:solidFill>
-          <a:ln w="12700">
-            <a:solidFill>
-              <a:srgbClr val="0B7A70"/>
-            </a:solidFill>
-            <a:prstDash val="solid"/>
-          </a:ln>
-        </p:spPr>
-      </p:sp>
-      <p:sp>
-        <p:nvSpPr>
-          <p:cNvPr id="3" name="Text 1"/>
-          <p:cNvSpPr txBox="1"/>
-          <p:nvPr/>
-        </p:nvSpPr>
-        <p:spPr>
-          <a:xfrm>
-            <a:off x="548640" y="347472"/>
-            <a:ext cx="3124200" cy="420624"/>
-          </a:xfrm>
-          <a:prstGeom prst="rect">
-            <a:avLst/>
-          </a:prstGeom>
-          <a:noFill/>
-          <a:ln/>
-        </p:spPr>
-        <p:txBody>
-          <a:bodyPr wrap="square" lIns="0" tIns="0" rIns="0" bIns="0" rtlCol="0" anchor="ctr"/>
-          <a:lstStyle/>
-          <a:p>
-            <a:pPr marL="0" indent="0" algn="ctr">
-              <a:buNone/>
-            </a:pPr>
-            <a:r>
-              <a:rPr lang="en-US" sz="2000" b="1" dirty="0">
-                <a:solidFill>
-                  <a:srgbClr val="FFFFFF"/>
-                </a:solidFill>
-                <a:latin typeface="BIZ UDゴシック" pitchFamily="34" charset="0"/>
-                <a:ea typeface="BIZ UDゴシック" pitchFamily="49" charset="-128"/>
-                <a:cs typeface="BIZ UDゴシック" pitchFamily="34" charset="-120"/>
-              </a:rPr>
-              <a:t>見える化② 数字で返す</a:t>
-            </a:r>
-            <a:endParaRPr lang="en-US" sz="2000" dirty="0"/>
-          </a:p>
-        </p:txBody>
-      </p:sp>
-      <p:sp>
-        <p:nvSpPr>
-          <p:cNvPr id="4" name="Text 2"/>
-          <p:cNvSpPr txBox="1"/>
-          <p:nvPr/>
-        </p:nvSpPr>
-        <p:spPr>
-          <a:xfrm>
-            <a:off x="548640" y="868680"/>
-            <a:ext cx="11094415" cy="777240"/>
-          </a:xfrm>
-          <a:prstGeom prst="rect">
-            <a:avLst/>
-          </a:prstGeom>
-          <a:noFill/>
-          <a:ln/>
-        </p:spPr>
-        <p:txBody>
-          <a:bodyPr wrap="square" lIns="0" tIns="0" rIns="0" bIns="0" rtlCol="0" anchor="ctr"/>
-          <a:lstStyle/>
-          <a:p>
-            <a:pPr marL="0" indent="0">
-              <a:buNone/>
-            </a:pPr>
-            <a:r>
-              <a:rPr lang="en-US" sz="3200" b="1" dirty="0">
-                <a:solidFill>
-                  <a:srgbClr val="131B35"/>
-                </a:solidFill>
-                <a:latin typeface="BIZ UDゴシック" pitchFamily="34" charset="0"/>
-                <a:ea typeface="BIZ UDゴシック" pitchFamily="49" charset="-128"/>
-                <a:cs typeface="BIZ UDゴシック" pitchFamily="34" charset="-120"/>
-              </a:rPr>
-              <a:t>「あなたは上位20%」という1通の手紙が、処方を減らした</a:t>
-            </a:r>
-            <a:endParaRPr lang="en-US" sz="3200" dirty="0"/>
-          </a:p>
-        </p:txBody>
-      </p:sp>
-      <p:sp>
-        <p:nvSpPr>
-          <p:cNvPr id="5" name="Text 3"/>
-          <p:cNvSpPr txBox="1"/>
-          <p:nvPr/>
-        </p:nvSpPr>
-        <p:spPr>
-          <a:xfrm>
-            <a:off x="548640" y="6217920"/>
-            <a:ext cx="10058400" cy="384048"/>
-          </a:xfrm>
-          <a:prstGeom prst="rect">
-            <a:avLst/>
-          </a:prstGeom>
-          <a:noFill/>
-          <a:ln/>
-        </p:spPr>
-        <p:txBody>
-          <a:bodyPr wrap="square" lIns="0" tIns="0" rIns="0" bIns="0" rtlCol="0" anchor="ctr"/>
-          <a:lstStyle/>
-          <a:p>
-            <a:pPr marL="0" indent="0">
-              <a:buNone/>
-            </a:pPr>
-            <a:r>
-              <a:rPr lang="en-US" sz="2000" dirty="0">
-                <a:solidFill>
-                  <a:srgbClr val="4F5B6B"/>
-                </a:solidFill>
-                <a:latin typeface="BIZ UDゴシック" pitchFamily="34" charset="0"/>
-                <a:ea typeface="BIZ UDゴシック" pitchFamily="49" charset="-128"/>
-                <a:cs typeface="BIZ UDゴシック" pitchFamily="34" charset="-120"/>
-              </a:rPr>
-              <a:t>出典：Hallsworth M, et al. Lancet 2016</a:t>
-            </a:r>
-            <a:endParaRPr lang="en-US" sz="2000" dirty="0"/>
-          </a:p>
-        </p:txBody>
-      </p:sp>
-      <p:sp>
-        <p:nvSpPr>
-          <p:cNvPr id="7" name="Shape 4"/>
-          <p:cNvSpPr/>
-          <p:nvPr/>
-        </p:nvSpPr>
-        <p:spPr>
-          <a:xfrm>
-            <a:off x="548640" y="2011680"/>
-            <a:ext cx="5669280" cy="3931920"/>
-          </a:xfrm>
-          <a:prstGeom prst="roundRect">
-            <a:avLst>
-              <a:gd name="adj" fmla="val 2791"/>
-            </a:avLst>
-          </a:prstGeom>
-          <a:solidFill>
-            <a:srgbClr val="FFFFFF"/>
-          </a:solidFill>
-          <a:ln w="25400">
-            <a:solidFill>
-              <a:srgbClr val="8A96A8"/>
-            </a:solidFill>
-            <a:prstDash val="solid"/>
-          </a:ln>
-        </p:spPr>
-      </p:sp>
-      <p:sp>
-        <p:nvSpPr>
-          <p:cNvPr id="8" name="Shape 5"/>
-          <p:cNvSpPr/>
-          <p:nvPr/>
-        </p:nvSpPr>
-        <p:spPr>
-          <a:xfrm>
-            <a:off x="822960" y="2240280"/>
-            <a:ext cx="731520" cy="731520"/>
-          </a:xfrm>
-          <a:prstGeom prst="ellipse">
-            <a:avLst/>
-          </a:prstGeom>
-          <a:solidFill>
-            <a:srgbClr val="0B7A70"/>
-          </a:solidFill>
-          <a:ln w="12700">
-            <a:solidFill>
-              <a:srgbClr val="0B7A70"/>
-            </a:solidFill>
-            <a:prstDash val="solid"/>
-          </a:ln>
-        </p:spPr>
-      </p:sp>
-      <p:pic>
-        <p:nvPicPr>
-          <p:cNvPr id="9" name="Image 0" descr="preencoded.png"/>
-          <p:cNvPicPr>
-            <a:picLocks noChangeAspect="1"/>
-          </p:cNvPicPr>
-          <p:nvPr/>
-        </p:nvPicPr>
-        <p:blipFill>
-          <a:blip r:embed="rId3"/>
-          <a:stretch>
-            <a:fillRect/>
-          </a:stretch>
-        </p:blipFill>
-        <p:spPr>
-          <a:xfrm>
-            <a:off x="998525" y="2415845"/>
-            <a:ext cx="380390" cy="380390"/>
-          </a:xfrm>
-          <a:prstGeom prst="rect">
-            <a:avLst/>
-          </a:prstGeom>
-        </p:spPr>
-      </p:pic>
-      <p:sp>
-        <p:nvSpPr>
-          <p:cNvPr id="10" name="Text 6"/>
-          <p:cNvSpPr txBox="1"/>
-          <p:nvPr/>
-        </p:nvSpPr>
-        <p:spPr>
-          <a:xfrm>
-            <a:off x="1691640" y="2240280"/>
-            <a:ext cx="4389120" cy="731520"/>
-          </a:xfrm>
-          <a:prstGeom prst="rect">
-            <a:avLst/>
-          </a:prstGeom>
-          <a:noFill/>
-          <a:ln/>
-        </p:spPr>
-        <p:txBody>
-          <a:bodyPr wrap="square" lIns="0" tIns="0" rIns="0" bIns="0" rtlCol="0" anchor="ctr"/>
-          <a:lstStyle/>
-          <a:p>
-            <a:pPr marL="0" indent="0">
-              <a:buNone/>
-            </a:pPr>
-            <a:r>
-              <a:rPr lang="en-US" sz="2000" dirty="0">
-                <a:solidFill>
-                  <a:srgbClr val="4F5B6B"/>
-                </a:solidFill>
-                <a:latin typeface="BIZ UDゴシック" pitchFamily="34" charset="0"/>
-                <a:ea typeface="BIZ UDゴシック" pitchFamily="49" charset="-128"/>
-                <a:cs typeface="BIZ UDゴシック" pitchFamily="34" charset="-120"/>
-              </a:rPr>
-              <a:t>主席医務官からの手紙（要旨）</a:t>
-            </a:r>
-            <a:endParaRPr lang="en-US" sz="2000" dirty="0"/>
-          </a:p>
-        </p:txBody>
-      </p:sp>
-      <p:sp>
-        <p:nvSpPr>
-          <p:cNvPr id="11" name="Text 7"/>
-          <p:cNvSpPr txBox="1"/>
-          <p:nvPr/>
-        </p:nvSpPr>
-        <p:spPr>
-          <a:xfrm>
-            <a:off x="868680" y="3154680"/>
-            <a:ext cx="5029200" cy="1737360"/>
-          </a:xfrm>
-          <a:prstGeom prst="rect">
-            <a:avLst/>
-          </a:prstGeom>
-          <a:noFill/>
-          <a:ln/>
-        </p:spPr>
-        <p:txBody>
-          <a:bodyPr wrap="square" lIns="0" tIns="0" rIns="0" bIns="0" rtlCol="0" anchor="ctr"/>
-          <a:lstStyle/>
-          <a:p>
-            <a:pPr marL="0" indent="0">
-              <a:buNone/>
-            </a:pPr>
-            <a:r>
-              <a:rPr lang="en-US" sz="2400" b="1" dirty="0">
-                <a:solidFill>
-                  <a:srgbClr val="131B35"/>
-                </a:solidFill>
-                <a:latin typeface="BIZ UDゴシック" pitchFamily="34" charset="0"/>
-                <a:ea typeface="BIZ UDゴシック" pitchFamily="49" charset="-128"/>
-                <a:cs typeface="BIZ UDゴシック" pitchFamily="34" charset="-120"/>
-              </a:rPr>
-              <a:t>「あなたの診療所の</a:t>
-            </a:r>
-            <a:endParaRPr lang="en-US" sz="2400" dirty="0"/>
-          </a:p>
-          <a:p>
-            <a:pPr marL="0" indent="0">
-              <a:buNone/>
-            </a:pPr>
-            <a:r>
-              <a:rPr lang="en-US" sz="2400" b="1" dirty="0">
-                <a:solidFill>
-                  <a:srgbClr val="131B35"/>
-                </a:solidFill>
-                <a:latin typeface="BIZ UDゴシック" pitchFamily="34" charset="0"/>
-                <a:ea typeface="BIZ UDゴシック" pitchFamily="49" charset="-128"/>
-                <a:cs typeface="BIZ UDゴシック" pitchFamily="34" charset="-120"/>
-              </a:rPr>
-              <a:t>抗菌薬処方は、地域の80%の</a:t>
-            </a:r>
-            <a:endParaRPr lang="en-US" sz="2400" dirty="0"/>
-          </a:p>
-          <a:p>
-            <a:pPr marL="0" indent="0">
-              <a:buNone/>
-            </a:pPr>
-            <a:r>
-              <a:rPr lang="en-US" sz="2400" b="1" dirty="0">
-                <a:solidFill>
-                  <a:srgbClr val="131B35"/>
-                </a:solidFill>
-                <a:latin typeface="BIZ UDゴシック" pitchFamily="34" charset="0"/>
-                <a:ea typeface="BIZ UDゴシック" pitchFamily="49" charset="-128"/>
-                <a:cs typeface="BIZ UDゴシック" pitchFamily="34" charset="-120"/>
-              </a:rPr>
-              <a:t>診療所より多い状況です」</a:t>
-            </a:r>
-            <a:endParaRPr lang="en-US" sz="2400" dirty="0"/>
-          </a:p>
-        </p:txBody>
-      </p:sp>
-      <p:sp>
-        <p:nvSpPr>
-          <p:cNvPr id="12" name="Text 8"/>
-          <p:cNvSpPr txBox="1"/>
-          <p:nvPr/>
-        </p:nvSpPr>
-        <p:spPr>
-          <a:xfrm>
-            <a:off x="868680" y="5120640"/>
-            <a:ext cx="5029200" cy="457200"/>
-          </a:xfrm>
-          <a:prstGeom prst="rect">
-            <a:avLst/>
-          </a:prstGeom>
-          <a:noFill/>
-          <a:ln/>
-        </p:spPr>
-        <p:txBody>
-          <a:bodyPr wrap="square" lIns="0" tIns="0" rIns="0" bIns="0" rtlCol="0" anchor="t"/>
-          <a:lstStyle/>
-          <a:p>
-            <a:pPr marL="0" indent="0">
-              <a:buNone/>
-            </a:pPr>
-            <a:r>
-              <a:rPr lang="en-US" sz="2000" dirty="0">
-                <a:solidFill>
-                  <a:srgbClr val="4F5B6B"/>
-                </a:solidFill>
-                <a:latin typeface="BIZ UDゴシック" pitchFamily="34" charset="0"/>
-                <a:ea typeface="BIZ UDゴシック" pitchFamily="49" charset="-128"/>
-                <a:cs typeface="BIZ UDゴシック" pitchFamily="34" charset="-120"/>
-              </a:rPr>
-              <a:t>＋ 患者さん向けのリーフレット</a:t>
-            </a:r>
-            <a:endParaRPr lang="en-US" sz="2000" dirty="0"/>
-          </a:p>
-        </p:txBody>
-      </p:sp>
-      <p:sp>
-        <p:nvSpPr>
-          <p:cNvPr id="13" name="Text 9"/>
-          <p:cNvSpPr txBox="1"/>
-          <p:nvPr/>
-        </p:nvSpPr>
-        <p:spPr>
-          <a:xfrm>
-            <a:off x="6583680" y="1965960"/>
-            <a:ext cx="5059375" cy="960120"/>
-          </a:xfrm>
-          <a:prstGeom prst="rect">
-            <a:avLst/>
-          </a:prstGeom>
-          <a:noFill/>
-          <a:ln/>
-        </p:spPr>
-        <p:txBody>
-          <a:bodyPr wrap="square" lIns="0" tIns="0" rIns="0" bIns="0" rtlCol="0" anchor="ctr"/>
-          <a:lstStyle/>
-          <a:p>
-            <a:pPr marL="0" indent="0" algn="ctr">
-              <a:buNone/>
-            </a:pPr>
-            <a:r>
-              <a:rPr lang="en-US" sz="6000" b="1" dirty="0">
-                <a:solidFill>
-                  <a:srgbClr val="0B7A70"/>
-                </a:solidFill>
-                <a:latin typeface="BIZ UDゴシック" pitchFamily="34" charset="0"/>
-                <a:ea typeface="BIZ UDゴシック" pitchFamily="49" charset="-128"/>
-                <a:cs typeface="BIZ UDゴシック" pitchFamily="34" charset="-120"/>
-              </a:rPr>
-              <a:t>−3.3%</a:t>
-            </a:r>
-            <a:endParaRPr lang="en-US" sz="6000" dirty="0"/>
-          </a:p>
-        </p:txBody>
-      </p:sp>
-      <p:sp>
-        <p:nvSpPr>
-          <p:cNvPr id="14" name="Text 10"/>
-          <p:cNvSpPr txBox="1"/>
-          <p:nvPr/>
-        </p:nvSpPr>
-        <p:spPr>
-          <a:xfrm>
-            <a:off x="6583680" y="2926080"/>
-            <a:ext cx="5059375" cy="457200"/>
-          </a:xfrm>
-          <a:prstGeom prst="rect">
-            <a:avLst/>
-          </a:prstGeom>
-          <a:noFill/>
-          <a:ln/>
-        </p:spPr>
-        <p:txBody>
-          <a:bodyPr wrap="square" lIns="0" tIns="0" rIns="0" bIns="0" rtlCol="0" anchor="t"/>
-          <a:lstStyle/>
-          <a:p>
-            <a:pPr marL="0" indent="0" algn="ctr">
-              <a:buNone/>
-            </a:pPr>
-            <a:r>
-              <a:rPr lang="en-US" sz="2200" dirty="0">
-                <a:solidFill>
-                  <a:srgbClr val="1B2333"/>
-                </a:solidFill>
-                <a:latin typeface="BIZ UDゴシック" pitchFamily="34" charset="0"/>
-                <a:ea typeface="BIZ UDゴシック" pitchFamily="49" charset="-128"/>
-                <a:cs typeface="BIZ UDゴシック" pitchFamily="34" charset="-120"/>
-              </a:rPr>
-              <a:t>抗菌薬の処方（6か月間）</a:t>
-            </a:r>
-            <a:endParaRPr lang="en-US" sz="2200" dirty="0"/>
-          </a:p>
-        </p:txBody>
-      </p:sp>
-      <p:sp>
-        <p:nvSpPr>
-          <p:cNvPr id="15" name="Text 11"/>
-          <p:cNvSpPr txBox="1"/>
-          <p:nvPr/>
-        </p:nvSpPr>
-        <p:spPr>
-          <a:xfrm>
-            <a:off x="6583680" y="3566160"/>
-            <a:ext cx="5059375" cy="822960"/>
-          </a:xfrm>
-          <a:prstGeom prst="rect">
-            <a:avLst/>
-          </a:prstGeom>
-          <a:noFill/>
-          <a:ln/>
-        </p:spPr>
-        <p:txBody>
-          <a:bodyPr wrap="square" lIns="0" tIns="0" rIns="0" bIns="0" rtlCol="0" anchor="ctr"/>
-          <a:lstStyle/>
-          <a:p>
-            <a:pPr marL="0" indent="0" algn="ctr">
-              <a:buNone/>
-            </a:pPr>
-            <a:r>
-              <a:rPr lang="en-US" sz="4400" b="1" dirty="0">
-                <a:solidFill>
-                  <a:srgbClr val="0B7A70"/>
-                </a:solidFill>
-                <a:latin typeface="BIZ UDゴシック" pitchFamily="34" charset="0"/>
-                <a:ea typeface="BIZ UDゴシック" pitchFamily="49" charset="-128"/>
-                <a:cs typeface="BIZ UDゴシック" pitchFamily="34" charset="-120"/>
-              </a:rPr>
-              <a:t>約7.3万件</a:t>
-            </a:r>
-            <a:endParaRPr lang="en-US" sz="4400" dirty="0"/>
-          </a:p>
-        </p:txBody>
-      </p:sp>
-      <p:sp>
-        <p:nvSpPr>
-          <p:cNvPr id="16" name="Text 12"/>
-          <p:cNvSpPr txBox="1"/>
-          <p:nvPr/>
-        </p:nvSpPr>
-        <p:spPr>
-          <a:xfrm>
-            <a:off x="6583680" y="4389120"/>
-            <a:ext cx="5059375" cy="457200"/>
-          </a:xfrm>
-          <a:prstGeom prst="rect">
-            <a:avLst/>
-          </a:prstGeom>
-          <a:noFill/>
-          <a:ln/>
-        </p:spPr>
-        <p:txBody>
-          <a:bodyPr wrap="square" lIns="0" tIns="0" rIns="0" bIns="0" rtlCol="0" anchor="t"/>
-          <a:lstStyle/>
-          <a:p>
-            <a:pPr marL="0" indent="0" algn="ctr">
-              <a:buNone/>
-            </a:pPr>
-            <a:r>
-              <a:rPr lang="en-US" sz="2200" dirty="0">
-                <a:solidFill>
-                  <a:srgbClr val="1B2333"/>
-                </a:solidFill>
-                <a:latin typeface="BIZ UDゴシック" pitchFamily="34" charset="0"/>
-                <a:ea typeface="BIZ UDゴシック" pitchFamily="49" charset="-128"/>
-                <a:cs typeface="BIZ UDゴシック" pitchFamily="34" charset="-120"/>
-              </a:rPr>
-              <a:t>推計の処方減少</a:t>
-            </a:r>
-            <a:endParaRPr lang="en-US" sz="2200" dirty="0"/>
-          </a:p>
-        </p:txBody>
-      </p:sp>
-      <p:sp>
-        <p:nvSpPr>
-          <p:cNvPr id="17" name="Text 13"/>
-          <p:cNvSpPr txBox="1"/>
-          <p:nvPr/>
-        </p:nvSpPr>
-        <p:spPr>
-          <a:xfrm>
-            <a:off x="6583680" y="5166360"/>
-            <a:ext cx="5059375" cy="457200"/>
-          </a:xfrm>
-          <a:prstGeom prst="rect">
-            <a:avLst/>
-          </a:prstGeom>
-          <a:noFill/>
-          <a:ln/>
-        </p:spPr>
-        <p:txBody>
-          <a:bodyPr wrap="square" lIns="0" tIns="0" rIns="0" bIns="0" rtlCol="0" anchor="t"/>
-          <a:lstStyle/>
-          <a:p>
-            <a:pPr marL="0" indent="0" algn="ctr">
-              <a:buNone/>
-            </a:pPr>
-            <a:r>
-              <a:rPr lang="en-US" sz="2000" dirty="0">
-                <a:solidFill>
-                  <a:srgbClr val="4F5B6B"/>
-                </a:solidFill>
-                <a:latin typeface="BIZ UDゴシック" pitchFamily="34" charset="0"/>
-                <a:ea typeface="BIZ UDゴシック" pitchFamily="49" charset="-128"/>
-                <a:cs typeface="BIZ UDゴシック" pitchFamily="34" charset="-120"/>
-              </a:rPr>
-              <a:t>1,581診療所のランダム化比較試験</a:t>
-            </a:r>
-            <a:endParaRPr lang="en-US" sz="2000" dirty="0"/>
-          </a:p>
-        </p:txBody>
-      </p:sp>
-      <p:sp>
-        <p:nvSpPr>
-          <p:cNvPr id="25" name="Slide Number Placeholder 0"/>
-          <p:cNvSpPr>
-            <a:spLocks noGrp="1"/>
-          </p:cNvSpPr>
-          <p:nvPr>
-            <p:ph type="sldNum" sz="quarter" idx="4294967295"/>
-          </p:nvPr>
-        </p:nvSpPr>
-        <p:spPr>
-          <a:xfrm>
-            <a:off x="11000232" y="6217920"/>
-            <a:ext cx="640080" cy="384048"/>
-          </a:xfrm>
-          <a:prstGeom prst="rect">
-            <a:avLst/>
-          </a:prstGeom>
-          <a:extLst>
-            <a:ext uri="{C572A759-6A51-4108-AA02-DFA0A04FC94B}">
-              <ma14:wrappingTextBoxFlag xmlns="" xmlns:ma14="http://schemas.microsoft.com/office/mac/drawingml/2011/main" val="0"/>
-            </a:ext>
-          </a:extLst>
-        </p:spPr>
-        <p:txBody>
-          <a:bodyPr/>
-          <a:lstStyle>
-            <a:lvl1pPr>
-              <a:defRPr sz="2000">
-                <a:solidFill>
-                  <a:srgbClr val="8A96A8"/>
-                </a:solidFill>
-                <a:latin typeface="BIZ UDゴシック"/>
-                <a:ea typeface="BIZ UDゴシック"/>
-                <a:cs typeface="BIZ UDゴシック"/>
-              </a:defRPr>
-            </a:lvl1pPr>
-          </a:lstStyle>
-          <a:p>
-            <a:pPr algn="r"/>
-            <a:fld id="{F7021451-1387-4CA6-816F-3879F97B5CBC}" type="slidenum">
-              <a:rPr lang="en-US" b="0"/>
-              <a:t>29</a:t>
-            </a:fld>
-            <a:endParaRPr lang="en-US"/>
-          </a:p>
-        </p:txBody>
-      </p:sp>
-    </p:spTree>
-  </p:cSld>
-  <p:clrMapOvr>
-    <a:masterClrMapping/>
-  </p:clrMapOvr>
-</p:sld>
-</file>
-
 <file path=ppt/slides/slide3.xml><?xml version="1.0" encoding="utf-8"?>
 <p:sld xmlns:a="http://schemas.openxmlformats.org/drawingml/2006/main" xmlns:r="http://schemas.openxmlformats.org/officeDocument/2006/relationships" xmlns:p="http://schemas.openxmlformats.org/presentationml/2006/main">
   <p:cSld name="Slide 3">
@@ -21416,7 +20675,7 @@
                 <a:ea typeface="BIZ UDゴシック" pitchFamily="49" charset="-128"/>
                 <a:cs typeface="BIZ UDゴシック" pitchFamily="34" charset="-120"/>
               </a:rPr>
-              <a:t>見える化③ 当院の実践</a:t>
+              <a:t>見える化② 当院の実践</a:t>
             </a:r>
             <a:endParaRPr lang="en-US" sz="2000" dirty="0"/>
           </a:p>
@@ -24979,7 +24238,7 @@
                           <a:ea typeface="BIZ UDゴシック" pitchFamily="49" charset="-128"/>
                           <a:cs typeface="BIZ UDゴシック" pitchFamily="34" charset="-120"/>
                         </a:rPr>
-                        <a:t>自分の処方の多さが見えない</a:t>
+                        <a:t>回診で「触れる前」が抜ける</a:t>
                       </a:r>
                       <a:endParaRPr lang="en-US" sz="2000" dirty="0">
                         <a:latin typeface="BIZ UDゴシック" charset="0"/>
@@ -25047,7 +24306,7 @@
                           <a:ea typeface="BIZ UDゴシック" pitchFamily="49" charset="-128"/>
                           <a:cs typeface="BIZ UDゴシック" pitchFamily="34" charset="-120"/>
                         </a:rPr>
-                        <a:t>処方データの同僚比較</a:t>
+                        <a:t>先頭の人が最初に手指衛生</a:t>
                       </a:r>
                       <a:endParaRPr lang="en-US" sz="2000" dirty="0">
                         <a:latin typeface="BIZ UDゴシック" charset="0"/>
@@ -35549,7 +34808,7 @@
                 <a:ea typeface="BIZ UDゴシック" pitchFamily="49" charset="-128"/>
                 <a:cs typeface="BIZ UDゴシック" pitchFamily="34" charset="-120"/>
               </a:rPr>
-              <a:t>見える化③ 当院の実践</a:t>
+              <a:t>見える化② 当院の実践</a:t>
             </a:r>
             <a:endParaRPr lang="en-US" sz="2000" dirty="0"/>
           </a:p>
